--- a/decks/zalin-labs-platform.pptx
+++ b/decks/zalin-labs-platform.pptx
@@ -13,9 +13,14 @@
     <p:sldId id="261" r:id="rId7"/>
     <p:sldId id="262" r:id="rId8"/>
     <p:sldId id="263" r:id="rId9"/>
+    <p:sldId id="264" r:id="rId10"/>
+    <p:sldId id="265" r:id="rId11"/>
+    <p:sldId id="266" r:id="rId12"/>
+    <p:sldId id="267" r:id="rId13"/>
+    <p:sldId id="268" r:id="rId14"/>
   </p:sldIdLst>
   <p:notesMasterIdLst>
-    <p:notesMasterId r:id="rId10"/>
+    <p:notesMasterId r:id="rId15"/>
   </p:notesMasterIdLst>
   <p:sldSz cx="12191695" cy="6858000"/>
   <p:notesSz cx="6858000" cy="12191695"/>
@@ -112,6 +117,941 @@
     </a:lvl9pPr>
   </p:defaultTextStyle>
 </p:presentation>
+</file>
+
+<file path=ppt/charts/chart4.xml><?xml version="1.0" encoding="utf-8"?>
+<c:chartSpace xmlns:c="http://schemas.openxmlformats.org/drawingml/2006/chart" xmlns:a="http://schemas.openxmlformats.org/drawingml/2006/main" xmlns:r="http://schemas.openxmlformats.org/officeDocument/2006/relationships">
+  <c:date1904 val="0"/>
+  <c:roundedCorners val="1"/>
+  <c:chart>
+    <c:autoTitleDeleted val="1"/>
+    <c:plotArea>
+      <c:layout/>
+      <c:barChart>
+        <c:barDir val="col"/>
+        <c:grouping val="clustered"/>
+        <c:varyColors val="0"/>
+        <c:ser>
+          <c:idx val="0"/>
+          <c:order val="0"/>
+          <c:tx>
+            <c:strRef>
+              <c:f>Sheet1!$B$1</c:f>
+              <c:strCache>
+                <c:ptCount val="1"/>
+                <c:pt idx="0">
+                  <c:v>Apps in production</c:v>
+                </c:pt>
+              </c:strCache>
+            </c:strRef>
+          </c:tx>
+          <c:spPr>
+            <a:solidFill>
+              <a:srgbClr val="3B82F6"/>
+            </a:solidFill>
+            <a:effectLst/>
+          </c:spPr>
+          <c:invertIfNegative val="0"/>
+          <c:dLbls>
+            <c:numFmt formatCode="#,##0" sourceLinked="0"/>
+            <c:txPr>
+              <a:bodyPr/>
+              <a:lstStyle/>
+              <a:p>
+                <a:pPr>
+                  <a:defRPr b="0" i="0" strike="noStrike" sz="1000" u="none">
+                    <a:solidFill>
+                      <a:srgbClr val="E2E8F0"/>
+                    </a:solidFill>
+                    <a:latin typeface="Segoe UI"/>
+                  </a:defRPr>
+                </a:pPr>
+              </a:p>
+            </c:txPr>
+            <c:showLegendKey val="0"/>
+            <c:showVal val="1"/>
+            <c:showCatName val="0"/>
+            <c:showSerName val="0"/>
+            <c:showPercent val="0"/>
+            <c:showBubbleSize val="0"/>
+            <c:showLeaderLines val="0"/>
+          </c:dLbls>
+          <c:dPt>
+            <c:idx val="0"/>
+            <c:invertIfNegative val="0"/>
+            <c:bubble3D val="0"/>
+            <c:spPr>
+              <a:solidFill>
+                <a:srgbClr val="3B82F6"/>
+              </a:solidFill>
+              <a:effectLst/>
+            </c:spPr>
+          </c:dPt>
+          <c:dPt>
+            <c:idx val="1"/>
+            <c:invertIfNegative val="0"/>
+            <c:bubble3D val="0"/>
+            <c:spPr>
+              <a:solidFill>
+                <a:srgbClr val="06B6D4"/>
+              </a:solidFill>
+              <a:effectLst/>
+            </c:spPr>
+          </c:dPt>
+          <c:dPt>
+            <c:idx val="2"/>
+            <c:invertIfNegative val="0"/>
+            <c:bubble3D val="0"/>
+            <c:spPr>
+              <a:solidFill>
+                <a:srgbClr val="22D3A0"/>
+              </a:solidFill>
+              <a:effectLst/>
+            </c:spPr>
+          </c:dPt>
+          <c:dPt>
+            <c:idx val="3"/>
+            <c:invertIfNegative val="0"/>
+            <c:bubble3D val="0"/>
+            <c:spPr>
+              <a:solidFill>
+                <a:srgbClr val="F59E0B"/>
+              </a:solidFill>
+              <a:effectLst/>
+            </c:spPr>
+          </c:dPt>
+          <c:dPt>
+            <c:idx val="4"/>
+            <c:invertIfNegative val="0"/>
+            <c:bubble3D val="0"/>
+            <c:spPr>
+              <a:solidFill>
+                <a:srgbClr val="3B82F6"/>
+              </a:solidFill>
+              <a:effectLst/>
+            </c:spPr>
+          </c:dPt>
+          <c:cat>
+            <c:multiLvlStrRef>
+              <c:f>Sheet1!$A$2:$A$6</c:f>
+              <c:multiLvlStrCache>
+                <c:ptCount val="5"/>
+                <c:lvl>
+                  <c:pt idx="0">
+                    <c:v>Productivity</c:v>
+                  </c:pt>
+                  <c:pt idx="1">
+                    <c:v>Data &amp; files</c:v>
+                  </c:pt>
+                  <c:pt idx="2">
+                    <c:v>Utilities</c:v>
+                  </c:pt>
+                  <c:pt idx="3">
+                    <c:v>Media &amp; tools</c:v>
+                  </c:pt>
+                  <c:pt idx="4">
+                    <c:v>Reference</c:v>
+                  </c:pt>
+                </c:lvl>
+              </c:multiLvlStrCache>
+            </c:multiLvlStrRef>
+          </c:cat>
+          <c:val>
+            <c:numRef>
+              <c:f>Sheet1!$B$2:$B$6</c:f>
+              <c:numCache>
+                <c:formatCode>General</c:formatCode>
+                <c:ptCount val="5"/>
+                <c:pt idx="0">
+                  <c:v>9</c:v>
+                </c:pt>
+                <c:pt idx="1">
+                  <c:v>7</c:v>
+                </c:pt>
+                <c:pt idx="2">
+                  <c:v>6</c:v>
+                </c:pt>
+                <c:pt idx="3">
+                  <c:v>5</c:v>
+                </c:pt>
+                <c:pt idx="4">
+                  <c:v>4</c:v>
+                </c:pt>
+              </c:numCache>
+            </c:numRef>
+          </c:val>
+        </c:ser>
+        <c:dLbls>
+          <c:numFmt formatCode="#,##0" sourceLinked="0"/>
+          <c:txPr>
+            <a:bodyPr/>
+            <a:lstStyle/>
+            <a:p>
+              <a:pPr>
+                <a:defRPr b="0" i="0" strike="noStrike" sz="1000" u="none">
+                  <a:solidFill>
+                    <a:srgbClr val="E2E8F0"/>
+                  </a:solidFill>
+                  <a:latin typeface="Segoe UI"/>
+                </a:defRPr>
+              </a:pPr>
+            </a:p>
+          </c:txPr>
+          <c:showLegendKey val="0"/>
+          <c:showVal val="1"/>
+          <c:showCatName val="0"/>
+          <c:showSerName val="0"/>
+          <c:showPercent val="0"/>
+          <c:showBubbleSize val="0"/>
+          <c:showLeaderLines val="0"/>
+        </c:dLbls>
+        <c:gapWidth val="55"/>
+        <c:overlap val="0"/>
+        <c:axId val="2094734554"/>
+        <c:axId val="2094734552"/>
+        <c:axId val="2094734556"/>
+      </c:barChart>
+      <c:catAx>
+        <c:axId val="2094734554"/>
+        <c:scaling>
+          <c:orientation val="minMax"/>
+        </c:scaling>
+        <c:delete val="0"/>
+        <c:axPos val="b"/>
+        <c:numFmt formatCode="General" sourceLinked="1"/>
+        <c:majorTickMark val="out"/>
+        <c:minorTickMark val="none"/>
+        <c:tickLblPos val="low"/>
+        <c:spPr>
+          <a:ln w="12700" cap="flat">
+            <a:solidFill>
+              <a:srgbClr val="24365A"/>
+            </a:solidFill>
+            <a:prstDash val="solid"/>
+            <a:round/>
+          </a:ln>
+        </c:spPr>
+        <c:txPr>
+          <a:bodyPr/>
+          <a:lstStyle/>
+          <a:p>
+            <a:pPr>
+              <a:defRPr sz="1100" b="0" i="0" u="none" strike="noStrike">
+                <a:solidFill>
+                  <a:srgbClr val="94A3B8"/>
+                </a:solidFill>
+                <a:latin typeface="Segoe UI"/>
+              </a:defRPr>
+            </a:pPr>
+            <a:endParaRPr lang="en-US"/>
+          </a:p>
+        </c:txPr>
+        <c:crossAx val="2094734552"/>
+        <c:crosses val="autoZero"/>
+        <c:auto val="1"/>
+        <c:lblAlgn val="ctr"/>
+        <c:noMultiLvlLbl val="1"/>
+      </c:catAx>
+      <c:valAx>
+        <c:axId val="2094734552"/>
+        <c:scaling>
+          <c:orientation val="minMax"/>
+        </c:scaling>
+        <c:delete val="0"/>
+        <c:axPos val="l"/>
+        <c:majorGridlines>
+          <c:spPr>
+            <a:ln w="12700" cap="flat">
+              <a:solidFill>
+                <a:srgbClr val="18243D"/>
+              </a:solidFill>
+              <a:prstDash val="solid"/>
+              <a:round/>
+            </a:ln>
+          </c:spPr>
+        </c:majorGridlines>
+        <c:numFmt formatCode="General" sourceLinked="0"/>
+        <c:majorTickMark val="out"/>
+        <c:minorTickMark val="none"/>
+        <c:tickLblPos val="nextTo"/>
+        <c:spPr>
+          <a:ln w="12700" cap="flat">
+            <a:solidFill>
+              <a:srgbClr val="24365A"/>
+            </a:solidFill>
+            <a:prstDash val="solid"/>
+            <a:round/>
+          </a:ln>
+        </c:spPr>
+        <c:txPr>
+          <a:bodyPr/>
+          <a:lstStyle/>
+          <a:p>
+            <a:pPr>
+              <a:defRPr sz="1000" b="0" i="0" u="none" strike="noStrike">
+                <a:solidFill>
+                  <a:srgbClr val="94A3B8"/>
+                </a:solidFill>
+                <a:latin typeface="Segoe UI"/>
+              </a:defRPr>
+            </a:pPr>
+            <a:endParaRPr lang="en-US"/>
+          </a:p>
+        </c:txPr>
+        <c:crossAx val="2094734554"/>
+        <c:crosses val="autoZero"/>
+        <c:crossBetween val="between"/>
+      </c:valAx>
+      <c:spPr>
+        <a:solidFill>
+          <a:srgbClr val="0D1420"/>
+        </a:solidFill>
+        <a:ln>
+          <a:noFill/>
+        </a:ln>
+        <a:effectLst/>
+      </c:spPr>
+    </c:plotArea>
+    <c:plotVisOnly val="1"/>
+    <c:dispBlanksAs val="span"/>
+  </c:chart>
+  <c:spPr>
+    <a:solidFill>
+      <a:srgbClr val="0D1420"/>
+    </a:solidFill>
+    <a:ln w="12700" cap="flat">
+      <a:solidFill>
+        <a:srgbClr val="24365A"/>
+      </a:solidFill>
+    </a:ln>
+    <a:effectLst/>
+  </c:spPr>
+  <c:externalData r:id="rId1">
+    <c:autoUpdate val="0"/>
+  </c:externalData>
+</c:chartSpace>
+</file>
+
+<file path=ppt/charts/chart5.xml><?xml version="1.0" encoding="utf-8"?>
+<c:chartSpace xmlns:c="http://schemas.openxmlformats.org/drawingml/2006/chart" xmlns:a="http://schemas.openxmlformats.org/drawingml/2006/main" xmlns:r="http://schemas.openxmlformats.org/officeDocument/2006/relationships">
+  <c:date1904 val="0"/>
+  <c:roundedCorners val="1"/>
+  <c:chart>
+    <c:autoTitleDeleted val="1"/>
+    <c:plotArea>
+      <c:layout/>
+      <c:lineChart>
+        <c:varyColors val="0"/>
+        <c:ser>
+          <c:idx val="0"/>
+          <c:order val="0"/>
+          <c:tx>
+            <c:strRef>
+              <c:f>Sheet1!$B$1</c:f>
+              <c:strCache>
+                <c:ptCount val="1"/>
+                <c:pt idx="0">
+                  <c:v>Cumulative production apps</c:v>
+                </c:pt>
+              </c:strCache>
+            </c:strRef>
+          </c:tx>
+          <c:spPr>
+            <a:solidFill>
+              <a:srgbClr val="3B82F6"/>
+            </a:solidFill>
+            <a:ln w="31750" cap="flat">
+              <a:solidFill>
+                <a:srgbClr val="3B82F6"/>
+              </a:solidFill>
+              <a:prstDash val="solid"/>
+              <a:round/>
+            </a:ln>
+            <a:effectLst/>
+          </c:spPr>
+          <c:invertIfNegative val="0"/>
+          <c:dLbls>
+            <c:numFmt formatCode="#,##0" sourceLinked="0"/>
+            <c:txPr>
+              <a:bodyPr/>
+              <a:lstStyle/>
+              <a:p>
+                <a:pPr>
+                  <a:defRPr b="0" i="0" strike="noStrike" sz="1200" u="none">
+                    <a:solidFill>
+                      <a:srgbClr val="000000"/>
+                    </a:solidFill>
+                    <a:latin typeface="Arial"/>
+                  </a:defRPr>
+                </a:pPr>
+              </a:p>
+            </c:txPr>
+            <c:showLegendKey val="0"/>
+            <c:showVal val="0"/>
+            <c:showCatName val="0"/>
+            <c:showSerName val="0"/>
+            <c:showPercent val="0"/>
+            <c:showBubbleSize val="0"/>
+            <c:showLeaderLines val="0"/>
+          </c:dLbls>
+          <c:marker>
+            <c:symbol val="circle"/>
+            <c:size val="6"/>
+            <c:spPr>
+              <a:solidFill>
+                <a:srgbClr val="3B82F6"/>
+              </a:solidFill>
+              <a:ln w="9525" cap="flat">
+                <a:solidFill>
+                  <a:srgbClr val="3B82F6"/>
+                </a:solidFill>
+                <a:prstDash val="solid"/>
+                <a:round/>
+              </a:ln>
+              <a:effectLst/>
+            </c:spPr>
+          </c:marker>
+          <c:cat>
+            <c:multiLvlStrRef>
+              <c:f>Sheet1!$A$2:$A$7</c:f>
+              <c:multiLvlStrCache>
+                <c:ptCount val="6"/>
+                <c:lvl>
+                  <c:pt idx="0">
+                    <c:v>Q2 2024</c:v>
+                  </c:pt>
+                  <c:pt idx="1">
+                    <c:v>Q4 2024</c:v>
+                  </c:pt>
+                  <c:pt idx="2">
+                    <c:v>Q2 2025</c:v>
+                  </c:pt>
+                  <c:pt idx="3">
+                    <c:v>Q4 2025</c:v>
+                  </c:pt>
+                  <c:pt idx="4">
+                    <c:v>Q2 2026</c:v>
+                  </c:pt>
+                  <c:pt idx="5">
+                    <c:v>Q3 2026</c:v>
+                  </c:pt>
+                </c:lvl>
+              </c:multiLvlStrCache>
+            </c:multiLvlStrRef>
+          </c:cat>
+          <c:val>
+            <c:numRef>
+              <c:f>Sheet1!$B$2:$B$7</c:f>
+              <c:numCache>
+                <c:formatCode>General</c:formatCode>
+                <c:ptCount val="6"/>
+                <c:pt idx="0">
+                  <c:v>3</c:v>
+                </c:pt>
+                <c:pt idx="1">
+                  <c:v>9</c:v>
+                </c:pt>
+                <c:pt idx="2">
+                  <c:v>16</c:v>
+                </c:pt>
+                <c:pt idx="3">
+                  <c:v>22</c:v>
+                </c:pt>
+                <c:pt idx="4">
+                  <c:v>27</c:v>
+                </c:pt>
+                <c:pt idx="5">
+                  <c:v>31</c:v>
+                </c:pt>
+              </c:numCache>
+            </c:numRef>
+          </c:val>
+          <c:smooth val="0"/>
+        </c:ser>
+        <c:dLbls>
+          <c:numFmt formatCode="#,##0" sourceLinked="0"/>
+          <c:txPr>
+            <a:bodyPr/>
+            <a:lstStyle/>
+            <a:p>
+              <a:pPr>
+                <a:defRPr b="0" i="0" strike="noStrike" sz="1200" u="none">
+                  <a:solidFill>
+                    <a:srgbClr val="000000"/>
+                  </a:solidFill>
+                  <a:latin typeface="Arial"/>
+                </a:defRPr>
+              </a:pPr>
+            </a:p>
+          </c:txPr>
+          <c:showLegendKey val="0"/>
+          <c:showVal val="0"/>
+          <c:showCatName val="0"/>
+          <c:showSerName val="0"/>
+          <c:showPercent val="0"/>
+          <c:showBubbleSize val="0"/>
+          <c:showLeaderLines val="0"/>
+        </c:dLbls>
+        <c:marker val="1"/>
+        <c:axId val="2094734554"/>
+        <c:axId val="2094734552"/>
+        <c:axId val="2094734556"/>
+      </c:lineChart>
+      <c:catAx>
+        <c:axId val="2094734554"/>
+        <c:scaling>
+          <c:orientation val="minMax"/>
+        </c:scaling>
+        <c:delete val="0"/>
+        <c:axPos val="b"/>
+        <c:numFmt formatCode="General" sourceLinked="1"/>
+        <c:majorTickMark val="out"/>
+        <c:minorTickMark val="none"/>
+        <c:tickLblPos val="low"/>
+        <c:spPr>
+          <a:ln w="12700" cap="flat">
+            <a:solidFill>
+              <a:srgbClr val="24365A"/>
+            </a:solidFill>
+            <a:prstDash val="solid"/>
+            <a:round/>
+          </a:ln>
+        </c:spPr>
+        <c:txPr>
+          <a:bodyPr/>
+          <a:lstStyle/>
+          <a:p>
+            <a:pPr>
+              <a:defRPr sz="1100" b="0" i="0" u="none" strike="noStrike">
+                <a:solidFill>
+                  <a:srgbClr val="94A3B8"/>
+                </a:solidFill>
+                <a:latin typeface="Segoe UI"/>
+              </a:defRPr>
+            </a:pPr>
+            <a:endParaRPr lang="en-US"/>
+          </a:p>
+        </c:txPr>
+        <c:crossAx val="2094734552"/>
+        <c:crosses val="autoZero"/>
+        <c:auto val="1"/>
+        <c:lblAlgn val="ctr"/>
+        <c:noMultiLvlLbl val="1"/>
+      </c:catAx>
+      <c:valAx>
+        <c:axId val="2094734552"/>
+        <c:scaling>
+          <c:orientation val="minMax"/>
+        </c:scaling>
+        <c:delete val="0"/>
+        <c:axPos val="l"/>
+        <c:majorGridlines>
+          <c:spPr>
+            <a:ln w="12700" cap="flat">
+              <a:solidFill>
+                <a:srgbClr val="18243D"/>
+              </a:solidFill>
+              <a:prstDash val="solid"/>
+              <a:round/>
+            </a:ln>
+          </c:spPr>
+        </c:majorGridlines>
+        <c:numFmt formatCode="General" sourceLinked="0"/>
+        <c:majorTickMark val="out"/>
+        <c:minorTickMark val="none"/>
+        <c:tickLblPos val="nextTo"/>
+        <c:spPr>
+          <a:ln w="12700" cap="flat">
+            <a:solidFill>
+              <a:srgbClr val="24365A"/>
+            </a:solidFill>
+            <a:prstDash val="solid"/>
+            <a:round/>
+          </a:ln>
+        </c:spPr>
+        <c:txPr>
+          <a:bodyPr/>
+          <a:lstStyle/>
+          <a:p>
+            <a:pPr>
+              <a:defRPr sz="1000" b="0" i="0" u="none" strike="noStrike">
+                <a:solidFill>
+                  <a:srgbClr val="94A3B8"/>
+                </a:solidFill>
+                <a:latin typeface="Segoe UI"/>
+              </a:defRPr>
+            </a:pPr>
+            <a:endParaRPr lang="en-US"/>
+          </a:p>
+        </c:txPr>
+        <c:crossAx val="2094734554"/>
+        <c:crosses val="autoZero"/>
+        <c:crossBetween val="between"/>
+      </c:valAx>
+      <c:spPr>
+        <a:solidFill>
+          <a:srgbClr val="0D1420"/>
+        </a:solidFill>
+        <a:ln>
+          <a:noFill/>
+        </a:ln>
+        <a:effectLst/>
+      </c:spPr>
+    </c:plotArea>
+    <c:plotVisOnly val="1"/>
+    <c:dispBlanksAs val="span"/>
+  </c:chart>
+  <c:spPr>
+    <a:solidFill>
+      <a:srgbClr val="0D1420"/>
+    </a:solidFill>
+    <a:ln w="12700" cap="flat">
+      <a:solidFill>
+        <a:srgbClr val="24365A"/>
+      </a:solidFill>
+    </a:ln>
+    <a:effectLst/>
+  </c:spPr>
+  <c:externalData r:id="rId1">
+    <c:autoUpdate val="0"/>
+  </c:externalData>
+</c:chartSpace>
+</file>
+
+<file path=ppt/charts/chart6.xml><?xml version="1.0" encoding="utf-8"?>
+<c:chartSpace xmlns:c="http://schemas.openxmlformats.org/drawingml/2006/chart" xmlns:a="http://schemas.openxmlformats.org/drawingml/2006/main" xmlns:r="http://schemas.openxmlformats.org/officeDocument/2006/relationships">
+  <c:date1904 val="0"/>
+  <c:roundedCorners val="1"/>
+  <c:chart>
+    <c:autoTitleDeleted val="1"/>
+    <c:plotArea>
+      <c:layout/>
+      <c:doughnutChart>
+        <c:varyColors val="1"/>
+        <c:ser>
+          <c:idx val="0"/>
+          <c:order val="0"/>
+          <c:tx>
+            <c:strRef>
+              <c:f>Sheet1!$B$1</c:f>
+              <c:strCache>
+                <c:ptCount val="1"/>
+                <c:pt idx="0">
+                  <c:v>Breakdown</c:v>
+                </c:pt>
+              </c:strCache>
+            </c:strRef>
+          </c:tx>
+          <c:spPr>
+            <a:solidFill>
+              <a:schemeClr val="accent1"/>
+            </a:solidFill>
+            <a:ln w="9525" cap="flat">
+              <a:solidFill>
+                <a:srgbClr val="F9F9F9"/>
+              </a:solidFill>
+              <a:prstDash val="solid"/>
+              <a:round/>
+            </a:ln>
+            <a:effectLst/>
+          </c:spPr>
+          <c:dPt>
+            <c:idx val="0"/>
+            <c:bubble3D val="0"/>
+            <c:spPr>
+              <a:solidFill>
+                <a:srgbClr val="3B82F6"/>
+              </a:solidFill>
+              <a:effectLst/>
+            </c:spPr>
+          </c:dPt>
+          <c:dPt>
+            <c:idx val="1"/>
+            <c:bubble3D val="0"/>
+            <c:spPr>
+              <a:solidFill>
+                <a:srgbClr val="06B6D4"/>
+              </a:solidFill>
+              <a:effectLst/>
+            </c:spPr>
+          </c:dPt>
+          <c:dPt>
+            <c:idx val="2"/>
+            <c:bubble3D val="0"/>
+            <c:spPr>
+              <a:solidFill>
+                <a:srgbClr val="22D3A0"/>
+              </a:solidFill>
+              <a:effectLst/>
+            </c:spPr>
+          </c:dPt>
+          <c:dPt>
+            <c:idx val="3"/>
+            <c:bubble3D val="0"/>
+            <c:spPr>
+              <a:solidFill>
+                <a:srgbClr val="F59E0B"/>
+              </a:solidFill>
+              <a:effectLst/>
+            </c:spPr>
+          </c:dPt>
+          <c:dPt>
+            <c:idx val="4"/>
+            <c:bubble3D val="0"/>
+            <c:spPr>
+              <a:solidFill>
+                <a:srgbClr val="3B82F6"/>
+              </a:solidFill>
+              <a:effectLst/>
+            </c:spPr>
+          </c:dPt>
+          <c:dLbls>
+            <c:dLbl>
+              <c:idx val="0"/>
+              <c:numFmt formatCode="0%" sourceLinked="0"/>
+              <c:spPr/>
+              <c:txPr>
+                <a:bodyPr/>
+                <a:lstStyle/>
+                <a:p>
+                  <a:pPr>
+                    <a:defRPr sz="1000" b="0" i="0" u="none" strike="noStrike">
+                      <a:solidFill>
+                        <a:srgbClr val="E2E8F0"/>
+                      </a:solidFill>
+                      <a:latin typeface="Segoe UI"/>
+                    </a:defRPr>
+                  </a:pPr>
+                </a:p>
+              </c:txPr>
+              <c:showLegendKey val="0"/>
+              <c:showVal val="0"/>
+              <c:showCatName val="0"/>
+              <c:showSerName val="0"/>
+              <c:showPercent val="1"/>
+              <c:showBubbleSize val="0"/>
+            </c:dLbl>
+            <c:dLbl>
+              <c:idx val="1"/>
+              <c:numFmt formatCode="0%" sourceLinked="0"/>
+              <c:spPr/>
+              <c:txPr>
+                <a:bodyPr/>
+                <a:lstStyle/>
+                <a:p>
+                  <a:pPr>
+                    <a:defRPr sz="1000" b="0" i="0" u="none" strike="noStrike">
+                      <a:solidFill>
+                        <a:srgbClr val="E2E8F0"/>
+                      </a:solidFill>
+                      <a:latin typeface="Segoe UI"/>
+                    </a:defRPr>
+                  </a:pPr>
+                </a:p>
+              </c:txPr>
+              <c:showLegendKey val="0"/>
+              <c:showVal val="0"/>
+              <c:showCatName val="0"/>
+              <c:showSerName val="0"/>
+              <c:showPercent val="1"/>
+              <c:showBubbleSize val="0"/>
+            </c:dLbl>
+            <c:dLbl>
+              <c:idx val="2"/>
+              <c:numFmt formatCode="0%" sourceLinked="0"/>
+              <c:spPr/>
+              <c:txPr>
+                <a:bodyPr/>
+                <a:lstStyle/>
+                <a:p>
+                  <a:pPr>
+                    <a:defRPr sz="1000" b="0" i="0" u="none" strike="noStrike">
+                      <a:solidFill>
+                        <a:srgbClr val="E2E8F0"/>
+                      </a:solidFill>
+                      <a:latin typeface="Segoe UI"/>
+                    </a:defRPr>
+                  </a:pPr>
+                </a:p>
+              </c:txPr>
+              <c:showLegendKey val="0"/>
+              <c:showVal val="0"/>
+              <c:showCatName val="0"/>
+              <c:showSerName val="0"/>
+              <c:showPercent val="1"/>
+              <c:showBubbleSize val="0"/>
+            </c:dLbl>
+            <c:dLbl>
+              <c:idx val="3"/>
+              <c:numFmt formatCode="0%" sourceLinked="0"/>
+              <c:spPr/>
+              <c:txPr>
+                <a:bodyPr/>
+                <a:lstStyle/>
+                <a:p>
+                  <a:pPr>
+                    <a:defRPr sz="1000" b="0" i="0" u="none" strike="noStrike">
+                      <a:solidFill>
+                        <a:srgbClr val="E2E8F0"/>
+                      </a:solidFill>
+                      <a:latin typeface="Segoe UI"/>
+                    </a:defRPr>
+                  </a:pPr>
+                </a:p>
+              </c:txPr>
+              <c:showLegendKey val="0"/>
+              <c:showVal val="0"/>
+              <c:showCatName val="0"/>
+              <c:showSerName val="0"/>
+              <c:showPercent val="1"/>
+              <c:showBubbleSize val="0"/>
+            </c:dLbl>
+            <c:dLbl>
+              <c:idx val="4"/>
+              <c:numFmt formatCode="0%" sourceLinked="0"/>
+              <c:spPr/>
+              <c:txPr>
+                <a:bodyPr/>
+                <a:lstStyle/>
+                <a:p>
+                  <a:pPr>
+                    <a:defRPr sz="1000" b="0" i="0" u="none" strike="noStrike">
+                      <a:solidFill>
+                        <a:srgbClr val="E2E8F0"/>
+                      </a:solidFill>
+                      <a:latin typeface="Segoe UI"/>
+                    </a:defRPr>
+                  </a:pPr>
+                </a:p>
+              </c:txPr>
+              <c:showLegendKey val="0"/>
+              <c:showVal val="0"/>
+              <c:showCatName val="0"/>
+              <c:showSerName val="0"/>
+              <c:showPercent val="1"/>
+              <c:showBubbleSize val="0"/>
+            </c:dLbl>
+            <c:numFmt formatCode="0%" sourceLinked="0"/>
+            <c:txPr>
+              <a:bodyPr/>
+              <a:lstStyle/>
+              <a:p>
+                <a:pPr>
+                  <a:defRPr sz="1800" b="0" i="0" u="none" strike="noStrike">
+                    <a:solidFill>
+                      <a:srgbClr val="000000"/>
+                    </a:solidFill>
+                    <a:latin typeface="Arial"/>
+                  </a:defRPr>
+                </a:pPr>
+              </a:p>
+            </c:txPr>
+            <c:showLegendKey val="0"/>
+            <c:showVal val="0"/>
+            <c:showCatName val="1"/>
+            <c:showSerName val="0"/>
+            <c:showPercent val="1"/>
+            <c:showBubbleSize val="0"/>
+            <c:showLeaderLines val="0"/>
+          </c:dLbls>
+          <c:cat>
+            <c:strRef>
+              <c:f>Sheet1!$A$2:$A$6</c:f>
+              <c:strCache>
+                <c:ptCount val="5"/>
+                <c:pt idx="0">
+                  <c:v>Build</c:v>
+                </c:pt>
+                <c:pt idx="1">
+                  <c:v>QA &amp; gates</c:v>
+                </c:pt>
+                <c:pt idx="2">
+                  <c:v>Coordination</c:v>
+                </c:pt>
+                <c:pt idx="3">
+                  <c:v>Docs &amp; status</c:v>
+                </c:pt>
+                <c:pt idx="4">
+                  <c:v>Version &amp; backup</c:v>
+                </c:pt>
+              </c:strCache>
+            </c:strRef>
+          </c:cat>
+          <c:val>
+            <c:numRef>
+              <c:f>Sheet1!$B$2:$B$6</c:f>
+              <c:numCache>
+                <c:ptCount val="5"/>
+                <c:pt idx="0">
+                  <c:v>30</c:v>
+                </c:pt>
+                <c:pt idx="1">
+                  <c:v>25</c:v>
+                </c:pt>
+                <c:pt idx="2">
+                  <c:v>20</c:v>
+                </c:pt>
+                <c:pt idx="3">
+                  <c:v>15</c:v>
+                </c:pt>
+                <c:pt idx="4">
+                  <c:v>10</c:v>
+                </c:pt>
+              </c:numCache>
+            </c:numRef>
+          </c:val>
+        </c:ser>
+        <c:firstSliceAng val="0"/>
+        <c:holeSize val="62"/>
+      </c:doughnutChart>
+      <c:spPr>
+        <a:solidFill>
+          <a:srgbClr val="0D1420"/>
+        </a:solidFill>
+        <a:ln>
+          <a:noFill/>
+        </a:ln>
+        <a:effectLst/>
+      </c:spPr>
+    </c:plotArea>
+    <c:legend>
+      <c:legendPos val="r"/>
+      <c:overlay val="0"/>
+      <c:txPr>
+        <a:bodyPr/>
+        <a:lstStyle/>
+        <a:p>
+          <a:pPr>
+            <a:defRPr sz="1100">
+              <a:solidFill>
+                <a:srgbClr val="CBD5E1"/>
+              </a:solidFill>
+              <a:latin typeface="Segoe UI"/>
+              <a:cs typeface="Segoe UI"/>
+            </a:defRPr>
+          </a:pPr>
+          <a:endParaRPr lang="en-US"/>
+        </a:p>
+      </c:txPr>
+    </c:legend>
+    <c:plotVisOnly val="1"/>
+    <c:dispBlanksAs val="span"/>
+  </c:chart>
+  <c:spPr>
+    <a:solidFill>
+      <a:srgbClr val="0D1420"/>
+    </a:solidFill>
+    <a:ln w="12700" cap="flat">
+      <a:solidFill>
+        <a:srgbClr val="24365A"/>
+      </a:solidFill>
+    </a:ln>
+    <a:effectLst/>
+  </c:spPr>
+  <c:externalData r:id="rId1">
+    <c:autoUpdate val="0"/>
+  </c:externalData>
+</c:chartSpace>
 </file>
 
 <file path=ppt/notesMasters/notesMaster1.xml><?xml version="1.0" encoding="utf-8"?>
@@ -551,6 +1491,358 @@
 </p:notes>
 </file>
 
+<file path=ppt/notesSlides/notesSlide10.xml><?xml version="1.0" encoding="utf-8"?>
+<p:notes xmlns:a="http://schemas.openxmlformats.org/drawingml/2006/main" xmlns:r="http://schemas.openxmlformats.org/officeDocument/2006/relationships" xmlns:p="http://schemas.openxmlformats.org/presentationml/2006/main">
+  <p:cSld>
+    <p:spTree>
+      <p:nvGrpSpPr>
+        <p:cNvPr id="1" name=""/>
+        <p:cNvGrpSpPr/>
+        <p:nvPr/>
+      </p:nvGrpSpPr>
+      <p:grpSpPr>
+        <a:xfrm>
+          <a:off x="0" y="0"/>
+          <a:ext cx="0" cy="0"/>
+          <a:chOff x="0" y="0"/>
+          <a:chExt cx="0" cy="0"/>
+        </a:xfrm>
+      </p:grpSpPr>
+      <p:sp>
+        <p:nvSpPr>
+          <p:cNvPr id="2" name="Slide Image Placeholder 1"/>
+          <p:cNvSpPr>
+            <a:spLocks noGrp="1" noRot="1" noChangeAspect="1"/>
+          </p:cNvSpPr>
+          <p:nvPr>
+            <p:ph type="sldImg"/>
+          </p:nvPr>
+        </p:nvSpPr>
+        <p:spPr/>
+      </p:sp>
+      <p:sp>
+        <p:nvSpPr>
+          <p:cNvPr id="3" name="Notes Placeholder 2"/>
+          <p:cNvSpPr>
+            <a:spLocks noGrp="1"/>
+          </p:cNvSpPr>
+          <p:nvPr>
+            <p:ph type="body" idx="1"/>
+          </p:nvPr>
+        </p:nvSpPr>
+        <p:spPr/>
+        <p:txBody>
+          <a:bodyPr/>
+          <a:lstStyle/>
+          <a:p>
+            <a:r>
+              <a:rPr lang="en-US" dirty="0"/>
+              <a:t/>
+            </a:r>
+            <a:endParaRPr lang="en-US" dirty="0"/>
+          </a:p>
+        </p:txBody>
+      </p:sp>
+      <p:sp>
+        <p:nvSpPr>
+          <p:cNvPr id="4" name="Slide Number Placeholder 3"/>
+          <p:cNvSpPr>
+            <a:spLocks noGrp="1"/>
+          </p:cNvSpPr>
+          <p:nvPr>
+            <p:ph type="sldNum" sz="quarter" idx="10"/>
+          </p:nvPr>
+        </p:nvSpPr>
+        <p:spPr/>
+        <p:txBody>
+          <a:bodyPr/>
+          <a:lstStyle/>
+          <a:p>
+            <a:fld id="{F7021451-1387-4CA6-816F-3879F97B5CBC}" type="slidenum">
+              <a:rPr lang="en-US"/>
+              <a:t>10</a:t>
+            </a:fld>
+            <a:endParaRPr lang="en-US"/>
+          </a:p>
+        </p:txBody>
+      </p:sp>
+    </p:spTree>
+    <p:extLst>
+      <p:ext uri="{BB962C8B-B14F-4D97-AF65-F5344CB8AC3E}">
+        <p14:creationId xmlns:p14="http://schemas.microsoft.com/office/powerpoint/2010/main" val="1024086991"/>
+      </p:ext>
+    </p:extLst>
+  </p:cSld>
+  <p:clrMapOvr>
+    <a:masterClrMapping/>
+  </p:clrMapOvr>
+</p:notes>
+</file>
+
+<file path=ppt/notesSlides/notesSlide11.xml><?xml version="1.0" encoding="utf-8"?>
+<p:notes xmlns:a="http://schemas.openxmlformats.org/drawingml/2006/main" xmlns:r="http://schemas.openxmlformats.org/officeDocument/2006/relationships" xmlns:p="http://schemas.openxmlformats.org/presentationml/2006/main">
+  <p:cSld>
+    <p:spTree>
+      <p:nvGrpSpPr>
+        <p:cNvPr id="1" name=""/>
+        <p:cNvGrpSpPr/>
+        <p:nvPr/>
+      </p:nvGrpSpPr>
+      <p:grpSpPr>
+        <a:xfrm>
+          <a:off x="0" y="0"/>
+          <a:ext cx="0" cy="0"/>
+          <a:chOff x="0" y="0"/>
+          <a:chExt cx="0" cy="0"/>
+        </a:xfrm>
+      </p:grpSpPr>
+      <p:sp>
+        <p:nvSpPr>
+          <p:cNvPr id="2" name="Slide Image Placeholder 1"/>
+          <p:cNvSpPr>
+            <a:spLocks noGrp="1" noRot="1" noChangeAspect="1"/>
+          </p:cNvSpPr>
+          <p:nvPr>
+            <p:ph type="sldImg"/>
+          </p:nvPr>
+        </p:nvSpPr>
+        <p:spPr/>
+      </p:sp>
+      <p:sp>
+        <p:nvSpPr>
+          <p:cNvPr id="3" name="Notes Placeholder 2"/>
+          <p:cNvSpPr>
+            <a:spLocks noGrp="1"/>
+          </p:cNvSpPr>
+          <p:nvPr>
+            <p:ph type="body" idx="1"/>
+          </p:nvPr>
+        </p:nvSpPr>
+        <p:spPr/>
+        <p:txBody>
+          <a:bodyPr/>
+          <a:lstStyle/>
+          <a:p>
+            <a:r>
+              <a:rPr lang="en-US" dirty="0"/>
+              <a:t/>
+            </a:r>
+            <a:endParaRPr lang="en-US" dirty="0"/>
+          </a:p>
+        </p:txBody>
+      </p:sp>
+      <p:sp>
+        <p:nvSpPr>
+          <p:cNvPr id="4" name="Slide Number Placeholder 3"/>
+          <p:cNvSpPr>
+            <a:spLocks noGrp="1"/>
+          </p:cNvSpPr>
+          <p:nvPr>
+            <p:ph type="sldNum" sz="quarter" idx="10"/>
+          </p:nvPr>
+        </p:nvSpPr>
+        <p:spPr/>
+        <p:txBody>
+          <a:bodyPr/>
+          <a:lstStyle/>
+          <a:p>
+            <a:fld id="{F7021451-1387-4CA6-816F-3879F97B5CBC}" type="slidenum">
+              <a:rPr lang="en-US"/>
+              <a:t>11</a:t>
+            </a:fld>
+            <a:endParaRPr lang="en-US"/>
+          </a:p>
+        </p:txBody>
+      </p:sp>
+    </p:spTree>
+    <p:extLst>
+      <p:ext uri="{BB962C8B-B14F-4D97-AF65-F5344CB8AC3E}">
+        <p14:creationId xmlns:p14="http://schemas.microsoft.com/office/powerpoint/2010/main" val="1024086991"/>
+      </p:ext>
+    </p:extLst>
+  </p:cSld>
+  <p:clrMapOvr>
+    <a:masterClrMapping/>
+  </p:clrMapOvr>
+</p:notes>
+</file>
+
+<file path=ppt/notesSlides/notesSlide12.xml><?xml version="1.0" encoding="utf-8"?>
+<p:notes xmlns:a="http://schemas.openxmlformats.org/drawingml/2006/main" xmlns:r="http://schemas.openxmlformats.org/officeDocument/2006/relationships" xmlns:p="http://schemas.openxmlformats.org/presentationml/2006/main">
+  <p:cSld>
+    <p:spTree>
+      <p:nvGrpSpPr>
+        <p:cNvPr id="1" name=""/>
+        <p:cNvGrpSpPr/>
+        <p:nvPr/>
+      </p:nvGrpSpPr>
+      <p:grpSpPr>
+        <a:xfrm>
+          <a:off x="0" y="0"/>
+          <a:ext cx="0" cy="0"/>
+          <a:chOff x="0" y="0"/>
+          <a:chExt cx="0" cy="0"/>
+        </a:xfrm>
+      </p:grpSpPr>
+      <p:sp>
+        <p:nvSpPr>
+          <p:cNvPr id="2" name="Slide Image Placeholder 1"/>
+          <p:cNvSpPr>
+            <a:spLocks noGrp="1" noRot="1" noChangeAspect="1"/>
+          </p:cNvSpPr>
+          <p:nvPr>
+            <p:ph type="sldImg"/>
+          </p:nvPr>
+        </p:nvSpPr>
+        <p:spPr/>
+      </p:sp>
+      <p:sp>
+        <p:nvSpPr>
+          <p:cNvPr id="3" name="Notes Placeholder 2"/>
+          <p:cNvSpPr>
+            <a:spLocks noGrp="1"/>
+          </p:cNvSpPr>
+          <p:nvPr>
+            <p:ph type="body" idx="1"/>
+          </p:nvPr>
+        </p:nvSpPr>
+        <p:spPr/>
+        <p:txBody>
+          <a:bodyPr/>
+          <a:lstStyle/>
+          <a:p>
+            <a:r>
+              <a:rPr lang="en-US" dirty="0"/>
+              <a:t/>
+            </a:r>
+            <a:endParaRPr lang="en-US" dirty="0"/>
+          </a:p>
+        </p:txBody>
+      </p:sp>
+      <p:sp>
+        <p:nvSpPr>
+          <p:cNvPr id="4" name="Slide Number Placeholder 3"/>
+          <p:cNvSpPr>
+            <a:spLocks noGrp="1"/>
+          </p:cNvSpPr>
+          <p:nvPr>
+            <p:ph type="sldNum" sz="quarter" idx="10"/>
+          </p:nvPr>
+        </p:nvSpPr>
+        <p:spPr/>
+        <p:txBody>
+          <a:bodyPr/>
+          <a:lstStyle/>
+          <a:p>
+            <a:fld id="{F7021451-1387-4CA6-816F-3879F97B5CBC}" type="slidenum">
+              <a:rPr lang="en-US"/>
+              <a:t>12</a:t>
+            </a:fld>
+            <a:endParaRPr lang="en-US"/>
+          </a:p>
+        </p:txBody>
+      </p:sp>
+    </p:spTree>
+    <p:extLst>
+      <p:ext uri="{BB962C8B-B14F-4D97-AF65-F5344CB8AC3E}">
+        <p14:creationId xmlns:p14="http://schemas.microsoft.com/office/powerpoint/2010/main" val="1024086991"/>
+      </p:ext>
+    </p:extLst>
+  </p:cSld>
+  <p:clrMapOvr>
+    <a:masterClrMapping/>
+  </p:clrMapOvr>
+</p:notes>
+</file>
+
+<file path=ppt/notesSlides/notesSlide13.xml><?xml version="1.0" encoding="utf-8"?>
+<p:notes xmlns:a="http://schemas.openxmlformats.org/drawingml/2006/main" xmlns:r="http://schemas.openxmlformats.org/officeDocument/2006/relationships" xmlns:p="http://schemas.openxmlformats.org/presentationml/2006/main">
+  <p:cSld>
+    <p:spTree>
+      <p:nvGrpSpPr>
+        <p:cNvPr id="1" name=""/>
+        <p:cNvGrpSpPr/>
+        <p:nvPr/>
+      </p:nvGrpSpPr>
+      <p:grpSpPr>
+        <a:xfrm>
+          <a:off x="0" y="0"/>
+          <a:ext cx="0" cy="0"/>
+          <a:chOff x="0" y="0"/>
+          <a:chExt cx="0" cy="0"/>
+        </a:xfrm>
+      </p:grpSpPr>
+      <p:sp>
+        <p:nvSpPr>
+          <p:cNvPr id="2" name="Slide Image Placeholder 1"/>
+          <p:cNvSpPr>
+            <a:spLocks noGrp="1" noRot="1" noChangeAspect="1"/>
+          </p:cNvSpPr>
+          <p:nvPr>
+            <p:ph type="sldImg"/>
+          </p:nvPr>
+        </p:nvSpPr>
+        <p:spPr/>
+      </p:sp>
+      <p:sp>
+        <p:nvSpPr>
+          <p:cNvPr id="3" name="Notes Placeholder 2"/>
+          <p:cNvSpPr>
+            <a:spLocks noGrp="1"/>
+          </p:cNvSpPr>
+          <p:nvPr>
+            <p:ph type="body" idx="1"/>
+          </p:nvPr>
+        </p:nvSpPr>
+        <p:spPr/>
+        <p:txBody>
+          <a:bodyPr/>
+          <a:lstStyle/>
+          <a:p>
+            <a:r>
+              <a:rPr lang="en-US" dirty="0"/>
+              <a:t/>
+            </a:r>
+            <a:endParaRPr lang="en-US" dirty="0"/>
+          </a:p>
+        </p:txBody>
+      </p:sp>
+      <p:sp>
+        <p:nvSpPr>
+          <p:cNvPr id="4" name="Slide Number Placeholder 3"/>
+          <p:cNvSpPr>
+            <a:spLocks noGrp="1"/>
+          </p:cNvSpPr>
+          <p:nvPr>
+            <p:ph type="sldNum" sz="quarter" idx="10"/>
+          </p:nvPr>
+        </p:nvSpPr>
+        <p:spPr/>
+        <p:txBody>
+          <a:bodyPr/>
+          <a:lstStyle/>
+          <a:p>
+            <a:fld id="{F7021451-1387-4CA6-816F-3879F97B5CBC}" type="slidenum">
+              <a:rPr lang="en-US"/>
+              <a:t>13</a:t>
+            </a:fld>
+            <a:endParaRPr lang="en-US"/>
+          </a:p>
+        </p:txBody>
+      </p:sp>
+    </p:spTree>
+    <p:extLst>
+      <p:ext uri="{BB962C8B-B14F-4D97-AF65-F5344CB8AC3E}">
+        <p14:creationId xmlns:p14="http://schemas.microsoft.com/office/powerpoint/2010/main" val="1024086991"/>
+      </p:ext>
+    </p:extLst>
+  </p:cSld>
+  <p:clrMapOvr>
+    <a:masterClrMapping/>
+  </p:clrMapOvr>
+</p:notes>
+</file>
+
 <file path=ppt/notesSlides/notesSlide2.xml><?xml version="1.0" encoding="utf-8"?>
 <p:notes xmlns:a="http://schemas.openxmlformats.org/drawingml/2006/main" xmlns:r="http://schemas.openxmlformats.org/officeDocument/2006/relationships" xmlns:p="http://schemas.openxmlformats.org/presentationml/2006/main">
   <p:cSld>
@@ -1149,6 +2441,94 @@
             <a:fld id="{F7021451-1387-4CA6-816F-3879F97B5CBC}" type="slidenum">
               <a:rPr lang="en-US"/>
               <a:t>8</a:t>
+            </a:fld>
+            <a:endParaRPr lang="en-US"/>
+          </a:p>
+        </p:txBody>
+      </p:sp>
+    </p:spTree>
+    <p:extLst>
+      <p:ext uri="{BB962C8B-B14F-4D97-AF65-F5344CB8AC3E}">
+        <p14:creationId xmlns:p14="http://schemas.microsoft.com/office/powerpoint/2010/main" val="1024086991"/>
+      </p:ext>
+    </p:extLst>
+  </p:cSld>
+  <p:clrMapOvr>
+    <a:masterClrMapping/>
+  </p:clrMapOvr>
+</p:notes>
+</file>
+
+<file path=ppt/notesSlides/notesSlide9.xml><?xml version="1.0" encoding="utf-8"?>
+<p:notes xmlns:a="http://schemas.openxmlformats.org/drawingml/2006/main" xmlns:r="http://schemas.openxmlformats.org/officeDocument/2006/relationships" xmlns:p="http://schemas.openxmlformats.org/presentationml/2006/main">
+  <p:cSld>
+    <p:spTree>
+      <p:nvGrpSpPr>
+        <p:cNvPr id="1" name=""/>
+        <p:cNvGrpSpPr/>
+        <p:nvPr/>
+      </p:nvGrpSpPr>
+      <p:grpSpPr>
+        <a:xfrm>
+          <a:off x="0" y="0"/>
+          <a:ext cx="0" cy="0"/>
+          <a:chOff x="0" y="0"/>
+          <a:chExt cx="0" cy="0"/>
+        </a:xfrm>
+      </p:grpSpPr>
+      <p:sp>
+        <p:nvSpPr>
+          <p:cNvPr id="2" name="Slide Image Placeholder 1"/>
+          <p:cNvSpPr>
+            <a:spLocks noGrp="1" noRot="1" noChangeAspect="1"/>
+          </p:cNvSpPr>
+          <p:nvPr>
+            <p:ph type="sldImg"/>
+          </p:nvPr>
+        </p:nvSpPr>
+        <p:spPr/>
+      </p:sp>
+      <p:sp>
+        <p:nvSpPr>
+          <p:cNvPr id="3" name="Notes Placeholder 2"/>
+          <p:cNvSpPr>
+            <a:spLocks noGrp="1"/>
+          </p:cNvSpPr>
+          <p:nvPr>
+            <p:ph type="body" idx="1"/>
+          </p:nvPr>
+        </p:nvSpPr>
+        <p:spPr/>
+        <p:txBody>
+          <a:bodyPr/>
+          <a:lstStyle/>
+          <a:p>
+            <a:r>
+              <a:rPr lang="en-US" dirty="0"/>
+              <a:t/>
+            </a:r>
+            <a:endParaRPr lang="en-US" dirty="0"/>
+          </a:p>
+        </p:txBody>
+      </p:sp>
+      <p:sp>
+        <p:nvSpPr>
+          <p:cNvPr id="4" name="Slide Number Placeholder 3"/>
+          <p:cNvSpPr>
+            <a:spLocks noGrp="1"/>
+          </p:cNvSpPr>
+          <p:nvPr>
+            <p:ph type="sldNum" sz="quarter" idx="10"/>
+          </p:nvPr>
+        </p:nvSpPr>
+        <p:spPr/>
+        <p:txBody>
+          <a:bodyPr/>
+          <a:lstStyle/>
+          <a:p>
+            <a:fld id="{F7021451-1387-4CA6-816F-3879F97B5CBC}" type="slidenum">
+              <a:rPr lang="en-US"/>
+              <a:t>9</a:t>
             </a:fld>
             <a:endParaRPr lang="en-US"/>
           </a:p>
@@ -1546,7 +2926,7 @@
         </p:nvSpPr>
         <p:spPr>
           <a:xfrm>
-            <a:off x="822960" y="1554480"/>
+            <a:off x="822960" y="1783080"/>
             <a:ext cx="10515600" cy="457200"/>
           </a:xfrm>
           <a:prstGeom prst="rect">
@@ -1571,7 +2951,7 @@
                 <a:ea typeface="Consolas" pitchFamily="34" charset="-122"/>
                 <a:cs typeface="Consolas" pitchFamily="34" charset="-120"/>
               </a:rPr>
-              <a:t>ZALIN LABS</a:t>
+              <a:t>ZALIN LABS · COMPANY</a:t>
             </a:r>
             <a:endParaRPr lang="en-US" sz="1400" dirty="0"/>
           </a:p>
@@ -1586,7 +2966,7 @@
         <p:spPr>
           <a:xfrm>
             <a:off x="822960" y="2286000"/>
-            <a:ext cx="10515600" cy="1737360"/>
+            <a:ext cx="10607040" cy="1691640"/>
           </a:xfrm>
           <a:prstGeom prst="rect">
             <a:avLst/>
@@ -1602,7 +2982,7 @@
               <a:buNone/>
             </a:pPr>
             <a:r>
-              <a:rPr lang="en-US" sz="4400" b="1" dirty="0">
+              <a:rPr lang="en-US" sz="4100" b="1" dirty="0">
                 <a:solidFill>
                   <a:srgbClr val="FFFFFF"/>
                 </a:solidFill>
@@ -1610,9 +2990,9 @@
                 <a:ea typeface="Segoe UI" pitchFamily="34" charset="-122"/>
                 <a:cs typeface="Segoe UI" pitchFamily="34" charset="-120"/>
               </a:rPr>
-              <a:t>One founder. Nine agents. Thirty-plus apps.</a:t>
-            </a:r>
-            <a:endParaRPr lang="en-US" sz="4400" dirty="0"/>
+              <a:t>Zalin Labs: One Founder, Nine AI Agents, 30+ Apps</a:t>
+            </a:r>
+            <a:endParaRPr lang="en-US" sz="4100" dirty="0"/>
           </a:p>
         </p:txBody>
       </p:sp>
@@ -1624,8 +3004,8 @@
         </p:nvSpPr>
         <p:spPr>
           <a:xfrm>
-            <a:off x="822960" y="4206240"/>
-            <a:ext cx="10515600" cy="914400"/>
+            <a:off x="822960" y="4023360"/>
+            <a:ext cx="10058400" cy="777240"/>
           </a:xfrm>
           <a:prstGeom prst="rect">
             <a:avLst/>
@@ -1641,7 +3021,7 @@
               <a:buNone/>
             </a:pPr>
             <a:r>
-              <a:rPr lang="en-US" sz="1600" dirty="0">
+              <a:rPr lang="en-US" sz="1700" dirty="0">
                 <a:solidFill>
                   <a:srgbClr val="94A3B8"/>
                 </a:solidFill>
@@ -1649,21 +3029,83 @@
                 <a:ea typeface="Segoe UI" pitchFamily="34" charset="-122"/>
                 <a:cs typeface="Segoe UI" pitchFamily="34" charset="-120"/>
               </a:rPr>
-              <a:t>A portfolio of production Android apps plus a full company platform · Rezalian Vatiady</a:t>
-            </a:r>
-            <a:endParaRPr lang="en-US" sz="1600" dirty="0"/>
-          </a:p>
-        </p:txBody>
-      </p:sp>
-      <p:sp>
-        <p:nvSpPr>
-          <p:cNvPr id="7" name="Text 5"/>
-          <p:cNvSpPr/>
-          <p:nvPr/>
-        </p:nvSpPr>
-        <p:spPr>
-          <a:xfrm>
-            <a:off x="10698480" y="6355080"/>
+              <a:t>A portfolio of production Android apps plus the full company platform behind them</a:t>
+            </a:r>
+            <a:endParaRPr lang="en-US" sz="1700" dirty="0"/>
+          </a:p>
+        </p:txBody>
+      </p:sp>
+      <p:sp>
+        <p:nvSpPr>
+          <p:cNvPr id="7" name="Shape 5"/>
+          <p:cNvSpPr/>
+          <p:nvPr/>
+        </p:nvSpPr>
+        <p:spPr>
+          <a:xfrm>
+            <a:off x="822960" y="5440680"/>
+            <a:ext cx="4114800" cy="0"/>
+          </a:xfrm>
+          <a:prstGeom prst="line">
+            <a:avLst/>
+          </a:prstGeom>
+          <a:noFill/>
+          <a:ln w="31750">
+            <a:solidFill>
+              <a:srgbClr val="3B82F6"/>
+            </a:solidFill>
+            <a:prstDash val="solid"/>
+          </a:ln>
+        </p:spPr>
+      </p:sp>
+      <p:sp>
+        <p:nvSpPr>
+          <p:cNvPr id="8" name="Text 6"/>
+          <p:cNvSpPr/>
+          <p:nvPr/>
+        </p:nvSpPr>
+        <p:spPr>
+          <a:xfrm>
+            <a:off x="822960" y="5596128"/>
+            <a:ext cx="10058400" cy="457200"/>
+          </a:xfrm>
+          <a:prstGeom prst="rect">
+            <a:avLst/>
+          </a:prstGeom>
+          <a:noFill/>
+          <a:ln/>
+        </p:spPr>
+        <p:txBody>
+          <a:bodyPr wrap="square" rtlCol="0" anchor="ctr"/>
+          <a:lstStyle/>
+          <a:p>
+            <a:pPr indent="0" marL="0">
+              <a:buNone/>
+            </a:pPr>
+            <a:r>
+              <a:rPr lang="en-US" sz="1250" dirty="0">
+                <a:solidFill>
+                  <a:srgbClr val="64748B"/>
+                </a:solidFill>
+                <a:latin typeface="Segoe UI" pitchFamily="34" charset="0"/>
+                <a:ea typeface="Segoe UI" pitchFamily="34" charset="-122"/>
+                <a:cs typeface="Segoe UI" pitchFamily="34" charset="-120"/>
+              </a:rPr>
+              <a:t>Rezalian Vatiady · Zalin Labs · 2026</a:t>
+            </a:r>
+            <a:endParaRPr lang="en-US" sz="1250" dirty="0"/>
+          </a:p>
+        </p:txBody>
+      </p:sp>
+      <p:sp>
+        <p:nvSpPr>
+          <p:cNvPr id="9" name="Text 7"/>
+          <p:cNvSpPr/>
+          <p:nvPr/>
+        </p:nvSpPr>
+        <p:spPr>
+          <a:xfrm>
+            <a:off x="10698480" y="6382512"/>
             <a:ext cx="1188720" cy="365760"/>
           </a:xfrm>
           <a:prstGeom prst="rect">
@@ -1688,7 +3130,1626 @@
                 <a:ea typeface="Consolas" pitchFamily="34" charset="-122"/>
                 <a:cs typeface="Consolas" pitchFamily="34" charset="-120"/>
               </a:rPr>
-              <a:t>1 / 8</a:t>
+              <a:t>1 / 13</a:t>
+            </a:r>
+            <a:endParaRPr lang="en-US" sz="1000" dirty="0"/>
+          </a:p>
+        </p:txBody>
+      </p:sp>
+    </p:spTree>
+  </p:cSld>
+  <p:clrMapOvr>
+    <a:masterClrMapping/>
+  </p:clrMapOvr>
+</p:sld>
+</file>
+
+<file path=ppt/slides/slide10.xml><?xml version="1.0" encoding="utf-8"?>
+<p:sld xmlns:a="http://schemas.openxmlformats.org/drawingml/2006/main" xmlns:r="http://schemas.openxmlformats.org/officeDocument/2006/relationships" xmlns:p="http://schemas.openxmlformats.org/presentationml/2006/main">
+  <p:cSld name="Slide 10">
+    <p:bg>
+      <p:bgPr>
+        <a:solidFill>
+          <a:srgbClr val="0A0C12"/>
+        </a:solidFill>
+      </p:bgPr>
+    </p:bg>
+    <p:spTree>
+      <p:nvGrpSpPr>
+        <p:cNvPr id="1" name=""/>
+        <p:cNvGrpSpPr/>
+        <p:nvPr/>
+      </p:nvGrpSpPr>
+      <p:grpSpPr>
+        <a:xfrm>
+          <a:off x="0" y="0"/>
+          <a:ext cx="0" cy="0"/>
+          <a:chOff x="0" y="0"/>
+          <a:chExt cx="0" cy="0"/>
+        </a:xfrm>
+      </p:grpSpPr>
+      <p:sp>
+        <p:nvSpPr>
+          <p:cNvPr id="2" name="Shape 0"/>
+          <p:cNvSpPr/>
+          <p:nvPr/>
+        </p:nvSpPr>
+        <p:spPr>
+          <a:xfrm>
+            <a:off x="0" y="0"/>
+            <a:ext cx="7680960" cy="64008"/>
+          </a:xfrm>
+          <a:prstGeom prst="rect">
+            <a:avLst/>
+          </a:prstGeom>
+          <a:solidFill>
+            <a:srgbClr val="3B82F6"/>
+          </a:solidFill>
+          <a:ln/>
+        </p:spPr>
+      </p:sp>
+      <p:sp>
+        <p:nvSpPr>
+          <p:cNvPr id="3" name="Shape 1"/>
+          <p:cNvSpPr/>
+          <p:nvPr/>
+        </p:nvSpPr>
+        <p:spPr>
+          <a:xfrm>
+            <a:off x="7680960" y="0"/>
+            <a:ext cx="4510735" cy="64008"/>
+          </a:xfrm>
+          <a:prstGeom prst="rect">
+            <a:avLst/>
+          </a:prstGeom>
+          <a:solidFill>
+            <a:srgbClr val="06B6D4"/>
+          </a:solidFill>
+          <a:ln/>
+        </p:spPr>
+      </p:sp>
+      <p:sp>
+        <p:nvSpPr>
+          <p:cNvPr id="4" name="Text 2"/>
+          <p:cNvSpPr/>
+          <p:nvPr/>
+        </p:nvSpPr>
+        <p:spPr>
+          <a:xfrm>
+            <a:off x="822960" y="502920"/>
+            <a:ext cx="10515600" cy="365760"/>
+          </a:xfrm>
+          <a:prstGeom prst="rect">
+            <a:avLst/>
+          </a:prstGeom>
+          <a:noFill/>
+          <a:ln/>
+        </p:spPr>
+        <p:txBody>
+          <a:bodyPr wrap="square" rtlCol="0" anchor="ctr"/>
+          <a:lstStyle/>
+          <a:p>
+            <a:pPr indent="0" marL="0">
+              <a:buNone/>
+            </a:pPr>
+            <a:r>
+              <a:rPr lang="en-US" sz="1200" spc="300" kern="0" dirty="0">
+                <a:solidFill>
+                  <a:srgbClr val="06B6D4"/>
+                </a:solidFill>
+                <a:latin typeface="Consolas" pitchFamily="34" charset="0"/>
+                <a:ea typeface="Consolas" pitchFamily="34" charset="-122"/>
+                <a:cs typeface="Consolas" pitchFamily="34" charset="-120"/>
+              </a:rPr>
+              <a:t>OPERATING MODEL</a:t>
+            </a:r>
+            <a:endParaRPr lang="en-US" sz="1200" dirty="0"/>
+          </a:p>
+        </p:txBody>
+      </p:sp>
+      <p:sp>
+        <p:nvSpPr>
+          <p:cNvPr id="5" name="Text 3"/>
+          <p:cNvSpPr/>
+          <p:nvPr/>
+        </p:nvSpPr>
+        <p:spPr>
+          <a:xfrm>
+            <a:off x="822960" y="914400"/>
+            <a:ext cx="10561320" cy="868680"/>
+          </a:xfrm>
+          <a:prstGeom prst="rect">
+            <a:avLst/>
+          </a:prstGeom>
+          <a:noFill/>
+          <a:ln/>
+        </p:spPr>
+        <p:txBody>
+          <a:bodyPr wrap="square" rtlCol="0" anchor="ctr"/>
+          <a:lstStyle/>
+          <a:p>
+            <a:pPr indent="0" marL="0">
+              <a:buNone/>
+            </a:pPr>
+            <a:r>
+              <a:rPr lang="en-US" sz="2700" b="1" dirty="0">
+                <a:solidFill>
+                  <a:srgbClr val="FFFFFF"/>
+                </a:solidFill>
+                <a:latin typeface="Segoe UI" pitchFamily="34" charset="0"/>
+                <a:ea typeface="Segoe UI" pitchFamily="34" charset="-122"/>
+                <a:cs typeface="Segoe UI" pitchFamily="34" charset="-120"/>
+              </a:rPr>
+              <a:t>Hero mode vs protocol mode</a:t>
+            </a:r>
+            <a:endParaRPr lang="en-US" sz="2700" dirty="0"/>
+          </a:p>
+        </p:txBody>
+      </p:sp>
+      <p:sp>
+        <p:nvSpPr>
+          <p:cNvPr id="6" name="Shape 4"/>
+          <p:cNvSpPr/>
+          <p:nvPr/>
+        </p:nvSpPr>
+        <p:spPr>
+          <a:xfrm>
+            <a:off x="822960" y="2011680"/>
+            <a:ext cx="5074920" cy="3611880"/>
+          </a:xfrm>
+          <a:prstGeom prst="roundRect">
+            <a:avLst>
+              <a:gd name="adj" fmla="val 2025"/>
+            </a:avLst>
+          </a:prstGeom>
+          <a:solidFill>
+            <a:srgbClr val="111A2E"/>
+          </a:solidFill>
+          <a:ln w="12700">
+            <a:solidFill>
+              <a:srgbClr val="1E2D45"/>
+            </a:solidFill>
+            <a:prstDash val="solid"/>
+          </a:ln>
+        </p:spPr>
+      </p:sp>
+      <p:sp>
+        <p:nvSpPr>
+          <p:cNvPr id="7" name="Text 5"/>
+          <p:cNvSpPr/>
+          <p:nvPr/>
+        </p:nvSpPr>
+        <p:spPr>
+          <a:xfrm>
+            <a:off x="1097280" y="2240280"/>
+            <a:ext cx="4526280" cy="502920"/>
+          </a:xfrm>
+          <a:prstGeom prst="rect">
+            <a:avLst/>
+          </a:prstGeom>
+          <a:noFill/>
+          <a:ln/>
+        </p:spPr>
+        <p:txBody>
+          <a:bodyPr wrap="square" rtlCol="0" anchor="ctr"/>
+          <a:lstStyle/>
+          <a:p>
+            <a:pPr indent="0" marL="0">
+              <a:buNone/>
+            </a:pPr>
+            <a:r>
+              <a:rPr lang="en-US" sz="1650" b="1" dirty="0">
+                <a:solidFill>
+                  <a:srgbClr val="06B6D4"/>
+                </a:solidFill>
+                <a:latin typeface="Segoe UI" pitchFamily="34" charset="0"/>
+                <a:ea typeface="Segoe UI" pitchFamily="34" charset="-122"/>
+                <a:cs typeface="Segoe UI" pitchFamily="34" charset="-120"/>
+              </a:rPr>
+              <a:t>Hero mode (the old way)</a:t>
+            </a:r>
+            <a:endParaRPr lang="en-US" sz="1650" dirty="0"/>
+          </a:p>
+        </p:txBody>
+      </p:sp>
+      <p:sp>
+        <p:nvSpPr>
+          <p:cNvPr id="8" name="Text 6"/>
+          <p:cNvSpPr/>
+          <p:nvPr/>
+        </p:nvSpPr>
+        <p:spPr>
+          <a:xfrm>
+            <a:off x="1097280" y="2834640"/>
+            <a:ext cx="4553712" cy="2651760"/>
+          </a:xfrm>
+          <a:prstGeom prst="rect">
+            <a:avLst/>
+          </a:prstGeom>
+          <a:noFill/>
+          <a:ln/>
+        </p:spPr>
+        <p:txBody>
+          <a:bodyPr wrap="square" rtlCol="0" anchor="t"/>
+          <a:lstStyle/>
+          <a:p>
+            <a:pPr marL="342900" indent="-342900">
+              <a:lnSpc>
+                <a:spcPct val="112000"/>
+              </a:lnSpc>
+              <a:spcAft>
+                <a:spcPts val="900"/>
+              </a:spcAft>
+              <a:buSzPct val="100000"/>
+              <a:buChar char="▸"/>
+            </a:pPr>
+            <a:r>
+              <a:rPr lang="en-US" sz="1280" dirty="0">
+                <a:solidFill>
+                  <a:srgbClr val="CBD5E1"/>
+                </a:solidFill>
+                <a:latin typeface="Segoe UI" pitchFamily="34" charset="0"/>
+                <a:ea typeface="Segoe UI" pitchFamily="34" charset="-122"/>
+                <a:cs typeface="Segoe UI" pitchFamily="34" charset="-120"/>
+              </a:rPr>
+              <a:t>Execution depends on one person's energy and memory</a:t>
+            </a:r>
+            <a:endParaRPr lang="en-US" sz="1280" dirty="0"/>
+          </a:p>
+          <a:p>
+            <a:pPr marL="342900" indent="-342900">
+              <a:lnSpc>
+                <a:spcPct val="112000"/>
+              </a:lnSpc>
+              <a:spcAft>
+                <a:spcPts val="900"/>
+              </a:spcAft>
+              <a:buSzPct val="100000"/>
+              <a:buChar char="▸"/>
+            </a:pPr>
+            <a:r>
+              <a:rPr lang="en-US" sz="1280" dirty="0">
+                <a:solidFill>
+                  <a:srgbClr val="CBD5E1"/>
+                </a:solidFill>
+                <a:latin typeface="Segoe UI" pitchFamily="34" charset="0"/>
+                <a:ea typeface="Segoe UI" pitchFamily="34" charset="-122"/>
+                <a:cs typeface="Segoe UI" pitchFamily="34" charset="-120"/>
+              </a:rPr>
+              <a:t>Releases ship hopefully, with quiet failures found by users</a:t>
+            </a:r>
+            <a:endParaRPr lang="en-US" sz="1280" dirty="0"/>
+          </a:p>
+          <a:p>
+            <a:pPr marL="342900" indent="-342900">
+              <a:lnSpc>
+                <a:spcPct val="112000"/>
+              </a:lnSpc>
+              <a:spcAft>
+                <a:spcPts val="900"/>
+              </a:spcAft>
+              <a:buSzPct val="100000"/>
+              <a:buChar char="▸"/>
+            </a:pPr>
+            <a:r>
+              <a:rPr lang="en-US" sz="1280" dirty="0">
+                <a:solidFill>
+                  <a:srgbClr val="CBD5E1"/>
+                </a:solidFill>
+                <a:latin typeface="Segoe UI" pitchFamily="34" charset="0"/>
+                <a:ea typeface="Segoe UI" pitchFamily="34" charset="-122"/>
+                <a:cs typeface="Segoe UI" pitchFamily="34" charset="-120"/>
+              </a:rPr>
+              <a:t>Knowledge lives in chat scrolls and in someone's head</a:t>
+            </a:r>
+            <a:endParaRPr lang="en-US" sz="1280" dirty="0"/>
+          </a:p>
+        </p:txBody>
+      </p:sp>
+      <p:sp>
+        <p:nvSpPr>
+          <p:cNvPr id="9" name="Shape 7"/>
+          <p:cNvSpPr/>
+          <p:nvPr/>
+        </p:nvSpPr>
+        <p:spPr>
+          <a:xfrm>
+            <a:off x="6291072" y="2011680"/>
+            <a:ext cx="5074920" cy="3611880"/>
+          </a:xfrm>
+          <a:prstGeom prst="roundRect">
+            <a:avLst>
+              <a:gd name="adj" fmla="val 2025"/>
+            </a:avLst>
+          </a:prstGeom>
+          <a:solidFill>
+            <a:srgbClr val="111A2E"/>
+          </a:solidFill>
+          <a:ln w="12700">
+            <a:solidFill>
+              <a:srgbClr val="1E2D45"/>
+            </a:solidFill>
+            <a:prstDash val="solid"/>
+          </a:ln>
+        </p:spPr>
+      </p:sp>
+      <p:sp>
+        <p:nvSpPr>
+          <p:cNvPr id="10" name="Text 8"/>
+          <p:cNvSpPr/>
+          <p:nvPr/>
+        </p:nvSpPr>
+        <p:spPr>
+          <a:xfrm>
+            <a:off x="6565392" y="2240280"/>
+            <a:ext cx="4526280" cy="502920"/>
+          </a:xfrm>
+          <a:prstGeom prst="rect">
+            <a:avLst/>
+          </a:prstGeom>
+          <a:noFill/>
+          <a:ln/>
+        </p:spPr>
+        <p:txBody>
+          <a:bodyPr wrap="square" rtlCol="0" anchor="ctr"/>
+          <a:lstStyle/>
+          <a:p>
+            <a:pPr indent="0" marL="0">
+              <a:buNone/>
+            </a:pPr>
+            <a:r>
+              <a:rPr lang="en-US" sz="1650" b="1" dirty="0">
+                <a:solidFill>
+                  <a:srgbClr val="93C5FD"/>
+                </a:solidFill>
+                <a:latin typeface="Segoe UI" pitchFamily="34" charset="0"/>
+                <a:ea typeface="Segoe UI" pitchFamily="34" charset="-122"/>
+                <a:cs typeface="Segoe UI" pitchFamily="34" charset="-120"/>
+              </a:rPr>
+              <a:t>Protocol mode (Zalin Labs)</a:t>
+            </a:r>
+            <a:endParaRPr lang="en-US" sz="1650" dirty="0"/>
+          </a:p>
+        </p:txBody>
+      </p:sp>
+      <p:sp>
+        <p:nvSpPr>
+          <p:cNvPr id="11" name="Text 9"/>
+          <p:cNvSpPr/>
+          <p:nvPr/>
+        </p:nvSpPr>
+        <p:spPr>
+          <a:xfrm>
+            <a:off x="6565392" y="2834640"/>
+            <a:ext cx="4553712" cy="2651760"/>
+          </a:xfrm>
+          <a:prstGeom prst="rect">
+            <a:avLst/>
+          </a:prstGeom>
+          <a:noFill/>
+          <a:ln/>
+        </p:spPr>
+        <p:txBody>
+          <a:bodyPr wrap="square" rtlCol="0" anchor="t"/>
+          <a:lstStyle/>
+          <a:p>
+            <a:pPr marL="342900" indent="-342900">
+              <a:lnSpc>
+                <a:spcPct val="112000"/>
+              </a:lnSpc>
+              <a:spcAft>
+                <a:spcPts val="900"/>
+              </a:spcAft>
+              <a:buSzPct val="100000"/>
+              <a:buChar char="▸"/>
+            </a:pPr>
+            <a:r>
+              <a:rPr lang="en-US" sz="1280" dirty="0">
+                <a:solidFill>
+                  <a:srgbClr val="CBD5E1"/>
+                </a:solidFill>
+                <a:latin typeface="Segoe UI" pitchFamily="34" charset="0"/>
+                <a:ea typeface="Segoe UI" pitchFamily="34" charset="-122"/>
+                <a:cs typeface="Segoe UI" pitchFamily="34" charset="-120"/>
+              </a:rPr>
+              <a:t>Agents execute in parallel; the founder owns judgment and trade-offs</a:t>
+            </a:r>
+            <a:endParaRPr lang="en-US" sz="1280" dirty="0"/>
+          </a:p>
+          <a:p>
+            <a:pPr marL="342900" indent="-342900">
+              <a:lnSpc>
+                <a:spcPct val="112000"/>
+              </a:lnSpc>
+              <a:spcAft>
+                <a:spcPts val="900"/>
+              </a:spcAft>
+              <a:buSzPct val="100000"/>
+              <a:buChar char="▸"/>
+            </a:pPr>
+            <a:r>
+              <a:rPr lang="en-US" sz="1280" dirty="0">
+                <a:solidFill>
+                  <a:srgbClr val="CBD5E1"/>
+                </a:solidFill>
+                <a:latin typeface="Segoe UI" pitchFamily="34" charset="0"/>
+                <a:ea typeface="Segoe UI" pitchFamily="34" charset="-122"/>
+                <a:cs typeface="Segoe UI" pitchFamily="34" charset="-120"/>
+              </a:rPr>
+              <a:t>Releases ship provably, with evidence a stranger could audit</a:t>
+            </a:r>
+            <a:endParaRPr lang="en-US" sz="1280" dirty="0"/>
+          </a:p>
+          <a:p>
+            <a:pPr marL="342900" indent="-342900">
+              <a:lnSpc>
+                <a:spcPct val="112000"/>
+              </a:lnSpc>
+              <a:spcAft>
+                <a:spcPts val="900"/>
+              </a:spcAft>
+              <a:buSzPct val="100000"/>
+              <a:buChar char="▸"/>
+            </a:pPr>
+            <a:r>
+              <a:rPr lang="en-US" sz="1280" dirty="0">
+                <a:solidFill>
+                  <a:srgbClr val="CBD5E1"/>
+                </a:solidFill>
+                <a:latin typeface="Segoe UI" pitchFamily="34" charset="0"/>
+                <a:ea typeface="Segoe UI" pitchFamily="34" charset="-122"/>
+                <a:cs typeface="Segoe UI" pitchFamily="34" charset="-120"/>
+              </a:rPr>
+              <a:t>Every surprise becomes a written lesson before the day ends</a:t>
+            </a:r>
+            <a:endParaRPr lang="en-US" sz="1280" dirty="0"/>
+          </a:p>
+        </p:txBody>
+      </p:sp>
+      <p:sp>
+        <p:nvSpPr>
+          <p:cNvPr id="12" name="Shape 10"/>
+          <p:cNvSpPr/>
+          <p:nvPr/>
+        </p:nvSpPr>
+        <p:spPr>
+          <a:xfrm>
+            <a:off x="822960" y="5961888"/>
+            <a:ext cx="10515600" cy="0"/>
+          </a:xfrm>
+          <a:prstGeom prst="line">
+            <a:avLst/>
+          </a:prstGeom>
+          <a:noFill/>
+          <a:ln w="12700">
+            <a:solidFill>
+              <a:srgbClr val="1E2D45"/>
+            </a:solidFill>
+            <a:prstDash val="solid"/>
+          </a:ln>
+        </p:spPr>
+      </p:sp>
+      <p:sp>
+        <p:nvSpPr>
+          <p:cNvPr id="13" name="Text 11"/>
+          <p:cNvSpPr/>
+          <p:nvPr/>
+        </p:nvSpPr>
+        <p:spPr>
+          <a:xfrm>
+            <a:off x="822960" y="6053328"/>
+            <a:ext cx="9692640" cy="457200"/>
+          </a:xfrm>
+          <a:prstGeom prst="rect">
+            <a:avLst/>
+          </a:prstGeom>
+          <a:noFill/>
+          <a:ln/>
+        </p:spPr>
+        <p:txBody>
+          <a:bodyPr wrap="square" rtlCol="0" anchor="ctr"/>
+          <a:lstStyle/>
+          <a:p>
+            <a:pPr indent="0" marL="0">
+              <a:buNone/>
+            </a:pPr>
+            <a:r>
+              <a:rPr lang="en-US" sz="1150" dirty="0">
+                <a:solidFill>
+                  <a:srgbClr val="64748B"/>
+                </a:solidFill>
+                <a:latin typeface="Segoe UI" pitchFamily="34" charset="0"/>
+                <a:ea typeface="Segoe UI" pitchFamily="34" charset="-122"/>
+                <a:cs typeface="Segoe UI" pitchFamily="34" charset="-120"/>
+              </a:rPr>
+              <a:t>The agents are the workforce; the protocols are the company.</a:t>
+            </a:r>
+            <a:endParaRPr lang="en-US" sz="1150" dirty="0"/>
+          </a:p>
+        </p:txBody>
+      </p:sp>
+      <p:sp>
+        <p:nvSpPr>
+          <p:cNvPr id="14" name="Text 12"/>
+          <p:cNvSpPr/>
+          <p:nvPr/>
+        </p:nvSpPr>
+        <p:spPr>
+          <a:xfrm>
+            <a:off x="10698480" y="6382512"/>
+            <a:ext cx="1188720" cy="365760"/>
+          </a:xfrm>
+          <a:prstGeom prst="rect">
+            <a:avLst/>
+          </a:prstGeom>
+          <a:noFill/>
+          <a:ln/>
+        </p:spPr>
+        <p:txBody>
+          <a:bodyPr wrap="square" rtlCol="0" anchor="ctr"/>
+          <a:lstStyle/>
+          <a:p>
+            <a:pPr algn="r" indent="0" marL="0">
+              <a:buNone/>
+            </a:pPr>
+            <a:r>
+              <a:rPr lang="en-US" sz="1000" dirty="0">
+                <a:solidFill>
+                  <a:srgbClr val="64748B"/>
+                </a:solidFill>
+                <a:latin typeface="Consolas" pitchFamily="34" charset="0"/>
+                <a:ea typeface="Consolas" pitchFamily="34" charset="-122"/>
+                <a:cs typeface="Consolas" pitchFamily="34" charset="-120"/>
+              </a:rPr>
+              <a:t>10 / 13</a:t>
+            </a:r>
+            <a:endParaRPr lang="en-US" sz="1000" dirty="0"/>
+          </a:p>
+        </p:txBody>
+      </p:sp>
+    </p:spTree>
+  </p:cSld>
+  <p:clrMapOvr>
+    <a:masterClrMapping/>
+  </p:clrMapOvr>
+</p:sld>
+</file>
+
+<file path=ppt/slides/slide11.xml><?xml version="1.0" encoding="utf-8"?>
+<p:sld xmlns:a="http://schemas.openxmlformats.org/drawingml/2006/main" xmlns:r="http://schemas.openxmlformats.org/officeDocument/2006/relationships" xmlns:p="http://schemas.openxmlformats.org/presentationml/2006/main">
+  <p:cSld name="Slide 11">
+    <p:bg>
+      <p:bgPr>
+        <a:solidFill>
+          <a:srgbClr val="0A0C12"/>
+        </a:solidFill>
+      </p:bgPr>
+    </p:bg>
+    <p:spTree>
+      <p:nvGrpSpPr>
+        <p:cNvPr id="1" name=""/>
+        <p:cNvGrpSpPr/>
+        <p:nvPr/>
+      </p:nvGrpSpPr>
+      <p:grpSpPr>
+        <a:xfrm>
+          <a:off x="0" y="0"/>
+          <a:ext cx="0" cy="0"/>
+          <a:chOff x="0" y="0"/>
+          <a:chExt cx="0" cy="0"/>
+        </a:xfrm>
+      </p:grpSpPr>
+      <p:sp>
+        <p:nvSpPr>
+          <p:cNvPr id="2" name="Shape 0"/>
+          <p:cNvSpPr/>
+          <p:nvPr/>
+        </p:nvSpPr>
+        <p:spPr>
+          <a:xfrm>
+            <a:off x="0" y="0"/>
+            <a:ext cx="7680960" cy="64008"/>
+          </a:xfrm>
+          <a:prstGeom prst="rect">
+            <a:avLst/>
+          </a:prstGeom>
+          <a:solidFill>
+            <a:srgbClr val="3B82F6"/>
+          </a:solidFill>
+          <a:ln/>
+        </p:spPr>
+      </p:sp>
+      <p:sp>
+        <p:nvSpPr>
+          <p:cNvPr id="3" name="Shape 1"/>
+          <p:cNvSpPr/>
+          <p:nvPr/>
+        </p:nvSpPr>
+        <p:spPr>
+          <a:xfrm>
+            <a:off x="7680960" y="0"/>
+            <a:ext cx="4510735" cy="64008"/>
+          </a:xfrm>
+          <a:prstGeom prst="rect">
+            <a:avLst/>
+          </a:prstGeom>
+          <a:solidFill>
+            <a:srgbClr val="06B6D4"/>
+          </a:solidFill>
+          <a:ln/>
+        </p:spPr>
+      </p:sp>
+      <p:sp>
+        <p:nvSpPr>
+          <p:cNvPr id="4" name="Text 2"/>
+          <p:cNvSpPr/>
+          <p:nvPr/>
+        </p:nvSpPr>
+        <p:spPr>
+          <a:xfrm>
+            <a:off x="822960" y="502920"/>
+            <a:ext cx="10515600" cy="365760"/>
+          </a:xfrm>
+          <a:prstGeom prst="rect">
+            <a:avLst/>
+          </a:prstGeom>
+          <a:noFill/>
+          <a:ln/>
+        </p:spPr>
+        <p:txBody>
+          <a:bodyPr wrap="square" rtlCol="0" anchor="ctr"/>
+          <a:lstStyle/>
+          <a:p>
+            <a:pPr indent="0" marL="0">
+              <a:buNone/>
+            </a:pPr>
+            <a:r>
+              <a:rPr lang="en-US" sz="1200" spc="300" kern="0" dirty="0">
+                <a:solidFill>
+                  <a:srgbClr val="06B6D4"/>
+                </a:solidFill>
+                <a:latin typeface="Consolas" pitchFamily="34" charset="0"/>
+                <a:ea typeface="Consolas" pitchFamily="34" charset="-122"/>
+                <a:cs typeface="Consolas" pitchFamily="34" charset="-120"/>
+              </a:rPr>
+              <a:t>OPERATIONS</a:t>
+            </a:r>
+            <a:endParaRPr lang="en-US" sz="1200" dirty="0"/>
+          </a:p>
+        </p:txBody>
+      </p:sp>
+      <p:sp>
+        <p:nvSpPr>
+          <p:cNvPr id="5" name="Text 3"/>
+          <p:cNvSpPr/>
+          <p:nvPr/>
+        </p:nvSpPr>
+        <p:spPr>
+          <a:xfrm>
+            <a:off x="822960" y="914400"/>
+            <a:ext cx="10561320" cy="868680"/>
+          </a:xfrm>
+          <a:prstGeom prst="rect">
+            <a:avLst/>
+          </a:prstGeom>
+          <a:noFill/>
+          <a:ln/>
+        </p:spPr>
+        <p:txBody>
+          <a:bodyPr wrap="square" rtlCol="0" anchor="ctr"/>
+          <a:lstStyle/>
+          <a:p>
+            <a:pPr indent="0" marL="0">
+              <a:buNone/>
+            </a:pPr>
+            <a:r>
+              <a:rPr lang="en-US" sz="2700" b="1" dirty="0">
+                <a:solidFill>
+                  <a:srgbClr val="FFFFFF"/>
+                </a:solidFill>
+                <a:latin typeface="Segoe UI" pitchFamily="34" charset="0"/>
+                <a:ea typeface="Segoe UI" pitchFamily="34" charset="-122"/>
+                <a:cs typeface="Segoe UI" pitchFamily="34" charset="-120"/>
+              </a:rPr>
+              <a:t>Protocol-driven, human-approved</a:t>
+            </a:r>
+            <a:endParaRPr lang="en-US" sz="2700" dirty="0"/>
+          </a:p>
+        </p:txBody>
+      </p:sp>
+      <p:sp>
+        <p:nvSpPr>
+          <p:cNvPr id="6" name="Text 4"/>
+          <p:cNvSpPr/>
+          <p:nvPr/>
+        </p:nvSpPr>
+        <p:spPr>
+          <a:xfrm>
+            <a:off x="868680" y="2011680"/>
+            <a:ext cx="10424160" cy="3566160"/>
+          </a:xfrm>
+          <a:prstGeom prst="rect">
+            <a:avLst/>
+          </a:prstGeom>
+          <a:noFill/>
+          <a:ln/>
+        </p:spPr>
+        <p:txBody>
+          <a:bodyPr wrap="square" rtlCol="0" anchor="t"/>
+          <a:lstStyle/>
+          <a:p>
+            <a:pPr marL="342900" indent="-342900">
+              <a:lnSpc>
+                <a:spcPct val="112000"/>
+              </a:lnSpc>
+              <a:spcAft>
+                <a:spcPts val="900"/>
+              </a:spcAft>
+              <a:buSzPct val="100000"/>
+              <a:buChar char="▸"/>
+            </a:pPr>
+            <a:r>
+              <a:rPr lang="en-US" sz="1600" dirty="0">
+                <a:solidFill>
+                  <a:srgbClr val="CBD5E1"/>
+                </a:solidFill>
+                <a:latin typeface="Segoe UI" pitchFamily="34" charset="0"/>
+                <a:ea typeface="Segoe UI" pitchFamily="34" charset="-122"/>
+                <a:cs typeface="Segoe UI" pitchFamily="34" charset="-120"/>
+              </a:rPr>
+              <a:t>Coordination happens in shared rooms, so decisions are visible and auditable instead of whispered.</a:t>
+            </a:r>
+            <a:endParaRPr lang="en-US" sz="1600" dirty="0"/>
+          </a:p>
+          <a:p>
+            <a:pPr marL="342900" indent="-342900">
+              <a:lnSpc>
+                <a:spcPct val="112000"/>
+              </a:lnSpc>
+              <a:spcAft>
+                <a:spcPts val="900"/>
+              </a:spcAft>
+              <a:buSzPct val="100000"/>
+              <a:buChar char="▸"/>
+            </a:pPr>
+            <a:r>
+              <a:rPr lang="en-US" sz="1600" dirty="0">
+                <a:solidFill>
+                  <a:srgbClr val="CBD5E1"/>
+                </a:solidFill>
+                <a:latin typeface="Segoe UI" pitchFamily="34" charset="0"/>
+                <a:ea typeface="Segoe UI" pitchFamily="34" charset="-122"/>
+                <a:cs typeface="Segoe UI" pitchFamily="34" charset="-120"/>
+              </a:rPr>
+              <a:t>Per-agent queues keep parallel work from colliding, with explicit pause, resume, and skip.</a:t>
+            </a:r>
+            <a:endParaRPr lang="en-US" sz="1600" dirty="0"/>
+          </a:p>
+          <a:p>
+            <a:pPr marL="342900" indent="-342900">
+              <a:lnSpc>
+                <a:spcPct val="112000"/>
+              </a:lnSpc>
+              <a:spcAft>
+                <a:spcPts val="900"/>
+              </a:spcAft>
+              <a:buSzPct val="100000"/>
+              <a:buChar char="▸"/>
+            </a:pPr>
+            <a:r>
+              <a:rPr lang="en-US" sz="1600" dirty="0">
+                <a:solidFill>
+                  <a:srgbClr val="CBD5E1"/>
+                </a:solidFill>
+                <a:latin typeface="Segoe UI" pitchFamily="34" charset="0"/>
+                <a:ea typeface="Segoe UI" pitchFamily="34" charset="-122"/>
+                <a:cs typeface="Segoe UI" pitchFamily="34" charset="-120"/>
+              </a:rPr>
+              <a:t>Agents never approve their own releases; decisions route through the founder via an approval queue.</a:t>
+            </a:r>
+            <a:endParaRPr lang="en-US" sz="1600" dirty="0"/>
+          </a:p>
+          <a:p>
+            <a:pPr marL="342900" indent="-342900">
+              <a:lnSpc>
+                <a:spcPct val="112000"/>
+              </a:lnSpc>
+              <a:spcAft>
+                <a:spcPts val="900"/>
+              </a:spcAft>
+              <a:buSzPct val="100000"/>
+              <a:buChar char="▸"/>
+            </a:pPr>
+            <a:r>
+              <a:rPr lang="en-US" sz="1600" dirty="0">
+                <a:solidFill>
+                  <a:srgbClr val="CBD5E1"/>
+                </a:solidFill>
+                <a:latin typeface="Segoe UI" pitchFamily="34" charset="0"/>
+                <a:ea typeface="Segoe UI" pitchFamily="34" charset="-122"/>
+                <a:cs typeface="Segoe UI" pitchFamily="34" charset="-120"/>
+              </a:rPr>
+              <a:t>A watchdog detects misbehaving machines and recovers them, because honest red beats fake green.</a:t>
+            </a:r>
+            <a:endParaRPr lang="en-US" sz="1600" dirty="0"/>
+          </a:p>
+        </p:txBody>
+      </p:sp>
+      <p:sp>
+        <p:nvSpPr>
+          <p:cNvPr id="7" name="Shape 5"/>
+          <p:cNvSpPr/>
+          <p:nvPr/>
+        </p:nvSpPr>
+        <p:spPr>
+          <a:xfrm>
+            <a:off x="822960" y="5961888"/>
+            <a:ext cx="10515600" cy="0"/>
+          </a:xfrm>
+          <a:prstGeom prst="line">
+            <a:avLst/>
+          </a:prstGeom>
+          <a:noFill/>
+          <a:ln w="12700">
+            <a:solidFill>
+              <a:srgbClr val="1E2D45"/>
+            </a:solidFill>
+            <a:prstDash val="solid"/>
+          </a:ln>
+        </p:spPr>
+      </p:sp>
+      <p:sp>
+        <p:nvSpPr>
+          <p:cNvPr id="8" name="Text 6"/>
+          <p:cNvSpPr/>
+          <p:nvPr/>
+        </p:nvSpPr>
+        <p:spPr>
+          <a:xfrm>
+            <a:off x="822960" y="6053328"/>
+            <a:ext cx="9692640" cy="457200"/>
+          </a:xfrm>
+          <a:prstGeom prst="rect">
+            <a:avLst/>
+          </a:prstGeom>
+          <a:noFill/>
+          <a:ln/>
+        </p:spPr>
+        <p:txBody>
+          <a:bodyPr wrap="square" rtlCol="0" anchor="ctr"/>
+          <a:lstStyle/>
+          <a:p>
+            <a:pPr indent="0" marL="0">
+              <a:buNone/>
+            </a:pPr>
+            <a:r>
+              <a:rPr lang="en-US" sz="1150" dirty="0">
+                <a:solidFill>
+                  <a:srgbClr val="64748B"/>
+                </a:solidFill>
+                <a:latin typeface="Segoe UI" pitchFamily="34" charset="0"/>
+                <a:ea typeface="Segoe UI" pitchFamily="34" charset="-122"/>
+                <a:cs typeface="Segoe UI" pitchFamily="34" charset="-120"/>
+              </a:rPr>
+              <a:t>Impersonation is structurally impossible when identity and verdicts are visible.</a:t>
+            </a:r>
+            <a:endParaRPr lang="en-US" sz="1150" dirty="0"/>
+          </a:p>
+        </p:txBody>
+      </p:sp>
+      <p:sp>
+        <p:nvSpPr>
+          <p:cNvPr id="9" name="Text 7"/>
+          <p:cNvSpPr/>
+          <p:nvPr/>
+        </p:nvSpPr>
+        <p:spPr>
+          <a:xfrm>
+            <a:off x="10698480" y="6382512"/>
+            <a:ext cx="1188720" cy="365760"/>
+          </a:xfrm>
+          <a:prstGeom prst="rect">
+            <a:avLst/>
+          </a:prstGeom>
+          <a:noFill/>
+          <a:ln/>
+        </p:spPr>
+        <p:txBody>
+          <a:bodyPr wrap="square" rtlCol="0" anchor="ctr"/>
+          <a:lstStyle/>
+          <a:p>
+            <a:pPr algn="r" indent="0" marL="0">
+              <a:buNone/>
+            </a:pPr>
+            <a:r>
+              <a:rPr lang="en-US" sz="1000" dirty="0">
+                <a:solidFill>
+                  <a:srgbClr val="64748B"/>
+                </a:solidFill>
+                <a:latin typeface="Consolas" pitchFamily="34" charset="0"/>
+                <a:ea typeface="Consolas" pitchFamily="34" charset="-122"/>
+                <a:cs typeface="Consolas" pitchFamily="34" charset="-120"/>
+              </a:rPr>
+              <a:t>11 / 13</a:t>
+            </a:r>
+            <a:endParaRPr lang="en-US" sz="1000" dirty="0"/>
+          </a:p>
+        </p:txBody>
+      </p:sp>
+    </p:spTree>
+  </p:cSld>
+  <p:clrMapOvr>
+    <a:masterClrMapping/>
+  </p:clrMapOvr>
+</p:sld>
+</file>
+
+<file path=ppt/slides/slide12.xml><?xml version="1.0" encoding="utf-8"?>
+<p:sld xmlns:a="http://schemas.openxmlformats.org/drawingml/2006/main" xmlns:r="http://schemas.openxmlformats.org/officeDocument/2006/relationships" xmlns:p="http://schemas.openxmlformats.org/presentationml/2006/main">
+  <p:cSld name="Slide 12">
+    <p:bg>
+      <p:bgPr>
+        <a:solidFill>
+          <a:srgbClr val="0A0C12"/>
+        </a:solidFill>
+      </p:bgPr>
+    </p:bg>
+    <p:spTree>
+      <p:nvGrpSpPr>
+        <p:cNvPr id="1" name=""/>
+        <p:cNvGrpSpPr/>
+        <p:nvPr/>
+      </p:nvGrpSpPr>
+      <p:grpSpPr>
+        <a:xfrm>
+          <a:off x="0" y="0"/>
+          <a:ext cx="0" cy="0"/>
+          <a:chOff x="0" y="0"/>
+          <a:chExt cx="0" cy="0"/>
+        </a:xfrm>
+      </p:grpSpPr>
+      <p:sp>
+        <p:nvSpPr>
+          <p:cNvPr id="2" name="Shape 0"/>
+          <p:cNvSpPr/>
+          <p:nvPr/>
+        </p:nvSpPr>
+        <p:spPr>
+          <a:xfrm>
+            <a:off x="0" y="0"/>
+            <a:ext cx="7680960" cy="64008"/>
+          </a:xfrm>
+          <a:prstGeom prst="rect">
+            <a:avLst/>
+          </a:prstGeom>
+          <a:solidFill>
+            <a:srgbClr val="3B82F6"/>
+          </a:solidFill>
+          <a:ln/>
+        </p:spPr>
+      </p:sp>
+      <p:sp>
+        <p:nvSpPr>
+          <p:cNvPr id="3" name="Shape 1"/>
+          <p:cNvSpPr/>
+          <p:nvPr/>
+        </p:nvSpPr>
+        <p:spPr>
+          <a:xfrm>
+            <a:off x="7680960" y="0"/>
+            <a:ext cx="4510735" cy="64008"/>
+          </a:xfrm>
+          <a:prstGeom prst="rect">
+            <a:avLst/>
+          </a:prstGeom>
+          <a:solidFill>
+            <a:srgbClr val="06B6D4"/>
+          </a:solidFill>
+          <a:ln/>
+        </p:spPr>
+      </p:sp>
+      <p:sp>
+        <p:nvSpPr>
+          <p:cNvPr id="4" name="Text 2"/>
+          <p:cNvSpPr/>
+          <p:nvPr/>
+        </p:nvSpPr>
+        <p:spPr>
+          <a:xfrm>
+            <a:off x="822960" y="502920"/>
+            <a:ext cx="10515600" cy="365760"/>
+          </a:xfrm>
+          <a:prstGeom prst="rect">
+            <a:avLst/>
+          </a:prstGeom>
+          <a:noFill/>
+          <a:ln/>
+        </p:spPr>
+        <p:txBody>
+          <a:bodyPr wrap="square" rtlCol="0" anchor="ctr"/>
+          <a:lstStyle/>
+          <a:p>
+            <a:pPr indent="0" marL="0">
+              <a:buNone/>
+            </a:pPr>
+            <a:r>
+              <a:rPr lang="en-US" sz="1200" spc="300" kern="0" dirty="0">
+                <a:solidFill>
+                  <a:srgbClr val="06B6D4"/>
+                </a:solidFill>
+                <a:latin typeface="Consolas" pitchFamily="34" charset="0"/>
+                <a:ea typeface="Consolas" pitchFamily="34" charset="-122"/>
+                <a:cs typeface="Consolas" pitchFamily="34" charset="-120"/>
+              </a:rPr>
+              <a:t>DAY TO DAY</a:t>
+            </a:r>
+            <a:endParaRPr lang="en-US" sz="1200" dirty="0"/>
+          </a:p>
+        </p:txBody>
+      </p:sp>
+      <p:sp>
+        <p:nvSpPr>
+          <p:cNvPr id="5" name="Text 3"/>
+          <p:cNvSpPr/>
+          <p:nvPr/>
+        </p:nvSpPr>
+        <p:spPr>
+          <a:xfrm>
+            <a:off x="822960" y="914400"/>
+            <a:ext cx="10561320" cy="868680"/>
+          </a:xfrm>
+          <a:prstGeom prst="rect">
+            <a:avLst/>
+          </a:prstGeom>
+          <a:noFill/>
+          <a:ln/>
+        </p:spPr>
+        <p:txBody>
+          <a:bodyPr wrap="square" rtlCol="0" anchor="ctr"/>
+          <a:lstStyle/>
+          <a:p>
+            <a:pPr indent="0" marL="0">
+              <a:buNone/>
+            </a:pPr>
+            <a:r>
+              <a:rPr lang="en-US" sz="2700" b="1" dirty="0">
+                <a:solidFill>
+                  <a:srgbClr val="FFFFFF"/>
+                </a:solidFill>
+                <a:latin typeface="Segoe UI" pitchFamily="34" charset="0"/>
+                <a:ea typeface="Segoe UI" pitchFamily="34" charset="-122"/>
+                <a:cs typeface="Segoe UI" pitchFamily="34" charset="-120"/>
+              </a:rPr>
+              <a:t>What it actually looks like to run this</a:t>
+            </a:r>
+            <a:endParaRPr lang="en-US" sz="2700" dirty="0"/>
+          </a:p>
+        </p:txBody>
+      </p:sp>
+      <p:sp>
+        <p:nvSpPr>
+          <p:cNvPr id="6" name="Text 4"/>
+          <p:cNvSpPr/>
+          <p:nvPr/>
+        </p:nvSpPr>
+        <p:spPr>
+          <a:xfrm>
+            <a:off x="868680" y="2011680"/>
+            <a:ext cx="10424160" cy="3566160"/>
+          </a:xfrm>
+          <a:prstGeom prst="rect">
+            <a:avLst/>
+          </a:prstGeom>
+          <a:noFill/>
+          <a:ln/>
+        </p:spPr>
+        <p:txBody>
+          <a:bodyPr wrap="square" rtlCol="0" anchor="t"/>
+          <a:lstStyle/>
+          <a:p>
+            <a:pPr marL="342900" indent="-342900">
+              <a:lnSpc>
+                <a:spcPct val="112000"/>
+              </a:lnSpc>
+              <a:spcAft>
+                <a:spcPts val="900"/>
+              </a:spcAft>
+              <a:buSzPct val="100000"/>
+              <a:buChar char="▸"/>
+            </a:pPr>
+            <a:r>
+              <a:rPr lang="en-US" sz="1600" dirty="0">
+                <a:solidFill>
+                  <a:srgbClr val="CBD5E1"/>
+                </a:solidFill>
+                <a:latin typeface="Segoe UI" pitchFamily="34" charset="0"/>
+                <a:ea typeface="Segoe UI" pitchFamily="34" charset="-122"/>
+                <a:cs typeface="Segoe UI" pitchFamily="34" charset="-120"/>
+              </a:rPr>
+              <a:t>Briefs go in and status comes out in the same format every time, across every app.</a:t>
+            </a:r>
+            <a:endParaRPr lang="en-US" sz="1600" dirty="0"/>
+          </a:p>
+          <a:p>
+            <a:pPr marL="342900" indent="-342900">
+              <a:lnSpc>
+                <a:spcPct val="112000"/>
+              </a:lnSpc>
+              <a:spcAft>
+                <a:spcPts val="900"/>
+              </a:spcAft>
+              <a:buSzPct val="100000"/>
+              <a:buChar char="▸"/>
+            </a:pPr>
+            <a:r>
+              <a:rPr lang="en-US" sz="1600" dirty="0">
+                <a:solidFill>
+                  <a:srgbClr val="CBD5E1"/>
+                </a:solidFill>
+                <a:latin typeface="Segoe UI" pitchFamily="34" charset="0"/>
+                <a:ea typeface="Segoe UI" pitchFamily="34" charset="-122"/>
+                <a:cs typeface="Segoe UI" pitchFamily="34" charset="-120"/>
+              </a:rPr>
+              <a:t>Multiple agents work in parallel across the suite without stepping on each other.</a:t>
+            </a:r>
+            <a:endParaRPr lang="en-US" sz="1600" dirty="0"/>
+          </a:p>
+          <a:p>
+            <a:pPr marL="342900" indent="-342900">
+              <a:lnSpc>
+                <a:spcPct val="112000"/>
+              </a:lnSpc>
+              <a:spcAft>
+                <a:spcPts val="900"/>
+              </a:spcAft>
+              <a:buSzPct val="100000"/>
+              <a:buChar char="▸"/>
+            </a:pPr>
+            <a:r>
+              <a:rPr lang="en-US" sz="1600" dirty="0">
+                <a:solidFill>
+                  <a:srgbClr val="CBD5E1"/>
+                </a:solidFill>
+                <a:latin typeface="Segoe UI" pitchFamily="34" charset="0"/>
+                <a:ea typeface="Segoe UI" pitchFamily="34" charset="-122"/>
+                <a:cs typeface="Segoe UI" pitchFamily="34" charset="-120"/>
+              </a:rPr>
+              <a:t>The promote folder always answers one question: what is the newest build of every app?</a:t>
+            </a:r>
+            <a:endParaRPr lang="en-US" sz="1600" dirty="0"/>
+          </a:p>
+          <a:p>
+            <a:pPr marL="342900" indent="-342900">
+              <a:lnSpc>
+                <a:spcPct val="112000"/>
+              </a:lnSpc>
+              <a:spcAft>
+                <a:spcPts val="900"/>
+              </a:spcAft>
+              <a:buSzPct val="100000"/>
+              <a:buChar char="▸"/>
+            </a:pPr>
+            <a:r>
+              <a:rPr lang="en-US" sz="1600" dirty="0">
+                <a:solidFill>
+                  <a:srgbClr val="CBD5E1"/>
+                </a:solidFill>
+                <a:latin typeface="Segoe UI" pitchFamily="34" charset="0"/>
+                <a:ea typeface="Segoe UI" pitchFamily="34" charset="-122"/>
+                <a:cs typeface="Segoe UI" pitchFamily="34" charset="-120"/>
+              </a:rPr>
+              <a:t>The founder is the bottleneck for judgment, not for execution - which is the right trade.</a:t>
+            </a:r>
+            <a:endParaRPr lang="en-US" sz="1600" dirty="0"/>
+          </a:p>
+        </p:txBody>
+      </p:sp>
+      <p:sp>
+        <p:nvSpPr>
+          <p:cNvPr id="7" name="Shape 5"/>
+          <p:cNvSpPr/>
+          <p:nvPr/>
+        </p:nvSpPr>
+        <p:spPr>
+          <a:xfrm>
+            <a:off x="822960" y="5961888"/>
+            <a:ext cx="10515600" cy="0"/>
+          </a:xfrm>
+          <a:prstGeom prst="line">
+            <a:avLst/>
+          </a:prstGeom>
+          <a:noFill/>
+          <a:ln w="12700">
+            <a:solidFill>
+              <a:srgbClr val="1E2D45"/>
+            </a:solidFill>
+            <a:prstDash val="solid"/>
+          </a:ln>
+        </p:spPr>
+      </p:sp>
+      <p:sp>
+        <p:nvSpPr>
+          <p:cNvPr id="8" name="Text 6"/>
+          <p:cNvSpPr/>
+          <p:nvPr/>
+        </p:nvSpPr>
+        <p:spPr>
+          <a:xfrm>
+            <a:off x="822960" y="6053328"/>
+            <a:ext cx="9692640" cy="457200"/>
+          </a:xfrm>
+          <a:prstGeom prst="rect">
+            <a:avLst/>
+          </a:prstGeom>
+          <a:noFill/>
+          <a:ln/>
+        </p:spPr>
+        <p:txBody>
+          <a:bodyPr wrap="square" rtlCol="0" anchor="ctr"/>
+          <a:lstStyle/>
+          <a:p>
+            <a:pPr indent="0" marL="0">
+              <a:buNone/>
+            </a:pPr>
+            <a:r>
+              <a:rPr lang="en-US" sz="1150" dirty="0">
+                <a:solidFill>
+                  <a:srgbClr val="64748B"/>
+                </a:solidFill>
+                <a:latin typeface="Segoe UI" pitchFamily="34" charset="0"/>
+                <a:ea typeface="Segoe UI" pitchFamily="34" charset="-122"/>
+                <a:cs typeface="Segoe UI" pitchFamily="34" charset="-120"/>
+              </a:rPr>
+              <a:t>Boring, repeatable, and measurable - which is exactly why it scales.</a:t>
+            </a:r>
+            <a:endParaRPr lang="en-US" sz="1150" dirty="0"/>
+          </a:p>
+        </p:txBody>
+      </p:sp>
+      <p:sp>
+        <p:nvSpPr>
+          <p:cNvPr id="9" name="Text 7"/>
+          <p:cNvSpPr/>
+          <p:nvPr/>
+        </p:nvSpPr>
+        <p:spPr>
+          <a:xfrm>
+            <a:off x="10698480" y="6382512"/>
+            <a:ext cx="1188720" cy="365760"/>
+          </a:xfrm>
+          <a:prstGeom prst="rect">
+            <a:avLst/>
+          </a:prstGeom>
+          <a:noFill/>
+          <a:ln/>
+        </p:spPr>
+        <p:txBody>
+          <a:bodyPr wrap="square" rtlCol="0" anchor="ctr"/>
+          <a:lstStyle/>
+          <a:p>
+            <a:pPr algn="r" indent="0" marL="0">
+              <a:buNone/>
+            </a:pPr>
+            <a:r>
+              <a:rPr lang="en-US" sz="1000" dirty="0">
+                <a:solidFill>
+                  <a:srgbClr val="64748B"/>
+                </a:solidFill>
+                <a:latin typeface="Consolas" pitchFamily="34" charset="0"/>
+                <a:ea typeface="Consolas" pitchFamily="34" charset="-122"/>
+                <a:cs typeface="Consolas" pitchFamily="34" charset="-120"/>
+              </a:rPr>
+              <a:t>12 / 13</a:t>
+            </a:r>
+            <a:endParaRPr lang="en-US" sz="1000" dirty="0"/>
+          </a:p>
+        </p:txBody>
+      </p:sp>
+    </p:spTree>
+  </p:cSld>
+  <p:clrMapOvr>
+    <a:masterClrMapping/>
+  </p:clrMapOvr>
+</p:sld>
+</file>
+
+<file path=ppt/slides/slide13.xml><?xml version="1.0" encoding="utf-8"?>
+<p:sld xmlns:a="http://schemas.openxmlformats.org/drawingml/2006/main" xmlns:r="http://schemas.openxmlformats.org/officeDocument/2006/relationships" xmlns:p="http://schemas.openxmlformats.org/presentationml/2006/main">
+  <p:cSld name="Slide 13">
+    <p:bg>
+      <p:bgPr>
+        <a:solidFill>
+          <a:srgbClr val="0A0C12"/>
+        </a:solidFill>
+      </p:bgPr>
+    </p:bg>
+    <p:spTree>
+      <p:nvGrpSpPr>
+        <p:cNvPr id="1" name=""/>
+        <p:cNvGrpSpPr/>
+        <p:nvPr/>
+      </p:nvGrpSpPr>
+      <p:grpSpPr>
+        <a:xfrm>
+          <a:off x="0" y="0"/>
+          <a:ext cx="0" cy="0"/>
+          <a:chOff x="0" y="0"/>
+          <a:chExt cx="0" cy="0"/>
+        </a:xfrm>
+      </p:grpSpPr>
+      <p:sp>
+        <p:nvSpPr>
+          <p:cNvPr id="2" name="Shape 0"/>
+          <p:cNvSpPr/>
+          <p:nvPr/>
+        </p:nvSpPr>
+        <p:spPr>
+          <a:xfrm>
+            <a:off x="0" y="0"/>
+            <a:ext cx="7680960" cy="64008"/>
+          </a:xfrm>
+          <a:prstGeom prst="rect">
+            <a:avLst/>
+          </a:prstGeom>
+          <a:solidFill>
+            <a:srgbClr val="3B82F6"/>
+          </a:solidFill>
+          <a:ln/>
+        </p:spPr>
+      </p:sp>
+      <p:sp>
+        <p:nvSpPr>
+          <p:cNvPr id="3" name="Shape 1"/>
+          <p:cNvSpPr/>
+          <p:nvPr/>
+        </p:nvSpPr>
+        <p:spPr>
+          <a:xfrm>
+            <a:off x="7680960" y="0"/>
+            <a:ext cx="4510735" cy="64008"/>
+          </a:xfrm>
+          <a:prstGeom prst="rect">
+            <a:avLst/>
+          </a:prstGeom>
+          <a:solidFill>
+            <a:srgbClr val="06B6D4"/>
+          </a:solidFill>
+          <a:ln/>
+        </p:spPr>
+      </p:sp>
+      <p:sp>
+        <p:nvSpPr>
+          <p:cNvPr id="4" name="Text 2"/>
+          <p:cNvSpPr/>
+          <p:nvPr/>
+        </p:nvSpPr>
+        <p:spPr>
+          <a:xfrm>
+            <a:off x="822960" y="1417320"/>
+            <a:ext cx="10515600" cy="411480"/>
+          </a:xfrm>
+          <a:prstGeom prst="rect">
+            <a:avLst/>
+          </a:prstGeom>
+          <a:noFill/>
+          <a:ln/>
+        </p:spPr>
+        <p:txBody>
+          <a:bodyPr wrap="square" rtlCol="0" anchor="ctr"/>
+          <a:lstStyle/>
+          <a:p>
+            <a:pPr algn="ctr" indent="0" marL="0">
+              <a:buNone/>
+            </a:pPr>
+            <a:r>
+              <a:rPr lang="en-US" sz="1300" spc="400" kern="0" dirty="0">
+                <a:solidFill>
+                  <a:srgbClr val="06B6D4"/>
+                </a:solidFill>
+                <a:latin typeface="Consolas" pitchFamily="34" charset="0"/>
+                <a:ea typeface="Consolas" pitchFamily="34" charset="-122"/>
+                <a:cs typeface="Consolas" pitchFamily="34" charset="-120"/>
+              </a:rPr>
+              <a:t>WORK WITH ME</a:t>
+            </a:r>
+            <a:endParaRPr lang="en-US" sz="1300" dirty="0"/>
+          </a:p>
+        </p:txBody>
+      </p:sp>
+      <p:sp>
+        <p:nvSpPr>
+          <p:cNvPr id="5" name="Text 3"/>
+          <p:cNvSpPr/>
+          <p:nvPr/>
+        </p:nvSpPr>
+        <p:spPr>
+          <a:xfrm>
+            <a:off x="822960" y="1920240"/>
+            <a:ext cx="10515600" cy="1371600"/>
+          </a:xfrm>
+          <a:prstGeom prst="rect">
+            <a:avLst/>
+          </a:prstGeom>
+          <a:noFill/>
+          <a:ln/>
+        </p:spPr>
+        <p:txBody>
+          <a:bodyPr wrap="square" rtlCol="0" anchor="ctr"/>
+          <a:lstStyle/>
+          <a:p>
+            <a:pPr algn="ctr" indent="0" marL="0">
+              <a:buNone/>
+            </a:pPr>
+            <a:r>
+              <a:rPr lang="en-US" sz="3200" b="1" dirty="0">
+                <a:solidFill>
+                  <a:srgbClr val="FFFFFF"/>
+                </a:solidFill>
+                <a:latin typeface="Segoe UI" pitchFamily="34" charset="0"/>
+                <a:ea typeface="Segoe UI" pitchFamily="34" charset="-122"/>
+                <a:cs typeface="Segoe UI" pitchFamily="34" charset="-120"/>
+              </a:rPr>
+              <a:t>Need a builder who ships like a team?</a:t>
+            </a:r>
+            <a:endParaRPr lang="en-US" sz="3200" dirty="0"/>
+          </a:p>
+        </p:txBody>
+      </p:sp>
+      <p:sp>
+        <p:nvSpPr>
+          <p:cNvPr id="6" name="Text 4"/>
+          <p:cNvSpPr/>
+          <p:nvPr/>
+        </p:nvSpPr>
+        <p:spPr>
+          <a:xfrm>
+            <a:off x="2011680" y="3429000"/>
+            <a:ext cx="8183880" cy="1554480"/>
+          </a:xfrm>
+          <a:prstGeom prst="rect">
+            <a:avLst/>
+          </a:prstGeom>
+          <a:noFill/>
+          <a:ln/>
+        </p:spPr>
+        <p:txBody>
+          <a:bodyPr wrap="square" rtlCol="0" anchor="t"/>
+          <a:lstStyle/>
+          <a:p>
+            <a:pPr algn="ctr" indent="0" marL="0">
+              <a:spcAft>
+                <a:spcPts val="800"/>
+              </a:spcAft>
+              <a:buNone/>
+            </a:pPr>
+            <a:r>
+              <a:rPr lang="en-US" sz="1500" dirty="0">
+                <a:solidFill>
+                  <a:srgbClr val="CBD5E1"/>
+                </a:solidFill>
+                <a:latin typeface="Segoe UI" pitchFamily="34" charset="0"/>
+                <a:ea typeface="Segoe UI" pitchFamily="34" charset="-122"/>
+                <a:cs typeface="Segoe UI" pitchFamily="34" charset="-120"/>
+              </a:rPr>
+              <a:t>I build AI-automated product pipelines and platforms that stay maintainable without headcount.</a:t>
+            </a:r>
+            <a:pPr algn="ctr" indent="0" marL="0">
+              <a:spcAft>
+                <a:spcPts val="800"/>
+              </a:spcAft>
+              <a:buNone/>
+            </a:pPr>
+            <a:r>
+              <a:rPr lang="en-US" sz="1500" dirty="0">
+                <a:solidFill>
+                  <a:srgbClr val="CBD5E1"/>
+                </a:solidFill>
+                <a:latin typeface="Segoe UI" pitchFamily="34" charset="0"/>
+                <a:ea typeface="Segoe UI" pitchFamily="34" charset="-122"/>
+                <a:cs typeface="Segoe UI" pitchFamily="34" charset="-120"/>
+              </a:rPr>
+              <a:t>Available for AI automation, data engineering, and scraping projects via Upwork, worldwide.</a:t>
+            </a:r>
+            <a:endParaRPr lang="en-US" sz="1500" dirty="0"/>
+          </a:p>
+        </p:txBody>
+      </p:sp>
+      <p:sp>
+        <p:nvSpPr>
+          <p:cNvPr id="7" name="Shape 5"/>
+          <p:cNvSpPr/>
+          <p:nvPr/>
+        </p:nvSpPr>
+        <p:spPr>
+          <a:xfrm>
+            <a:off x="3566160" y="5212080"/>
+            <a:ext cx="5074920" cy="0"/>
+          </a:xfrm>
+          <a:prstGeom prst="line">
+            <a:avLst/>
+          </a:prstGeom>
+          <a:noFill/>
+          <a:ln w="25400">
+            <a:solidFill>
+              <a:srgbClr val="3B82F6"/>
+            </a:solidFill>
+            <a:prstDash val="solid"/>
+          </a:ln>
+        </p:spPr>
+      </p:sp>
+      <p:sp>
+        <p:nvSpPr>
+          <p:cNvPr id="8" name="Text 6"/>
+          <p:cNvSpPr/>
+          <p:nvPr/>
+        </p:nvSpPr>
+        <p:spPr>
+          <a:xfrm>
+            <a:off x="822960" y="5376672"/>
+            <a:ext cx="10515600" cy="457200"/>
+          </a:xfrm>
+          <a:prstGeom prst="rect">
+            <a:avLst/>
+          </a:prstGeom>
+          <a:noFill/>
+          <a:ln/>
+        </p:spPr>
+        <p:txBody>
+          <a:bodyPr wrap="square" rtlCol="0" anchor="ctr"/>
+          <a:lstStyle/>
+          <a:p>
+            <a:pPr algn="ctr" indent="0" marL="0">
+              <a:buNone/>
+            </a:pPr>
+            <a:r>
+              <a:rPr lang="en-US" sz="1350" b="1" dirty="0">
+                <a:solidFill>
+                  <a:srgbClr val="06B6D4"/>
+                </a:solidFill>
+                <a:latin typeface="Consolas" pitchFamily="34" charset="0"/>
+                <a:ea typeface="Consolas" pitchFamily="34" charset="-122"/>
+                <a:cs typeface="Consolas" pitchFamily="34" charset="-120"/>
+              </a:rPr>
+              <a:t>rezalianvatiady.github.io · github.com/rezalianvatiady</a:t>
+            </a:r>
+            <a:endParaRPr lang="en-US" sz="1350" dirty="0"/>
+          </a:p>
+        </p:txBody>
+      </p:sp>
+      <p:sp>
+        <p:nvSpPr>
+          <p:cNvPr id="9" name="Text 7"/>
+          <p:cNvSpPr/>
+          <p:nvPr/>
+        </p:nvSpPr>
+        <p:spPr>
+          <a:xfrm>
+            <a:off x="10698480" y="6382512"/>
+            <a:ext cx="1188720" cy="365760"/>
+          </a:xfrm>
+          <a:prstGeom prst="rect">
+            <a:avLst/>
+          </a:prstGeom>
+          <a:noFill/>
+          <a:ln/>
+        </p:spPr>
+        <p:txBody>
+          <a:bodyPr wrap="square" rtlCol="0" anchor="ctr"/>
+          <a:lstStyle/>
+          <a:p>
+            <a:pPr algn="r" indent="0" marL="0">
+              <a:buNone/>
+            </a:pPr>
+            <a:r>
+              <a:rPr lang="en-US" sz="1000" dirty="0">
+                <a:solidFill>
+                  <a:srgbClr val="64748B"/>
+                </a:solidFill>
+                <a:latin typeface="Consolas" pitchFamily="34" charset="0"/>
+                <a:ea typeface="Consolas" pitchFamily="34" charset="-122"/>
+                <a:cs typeface="Consolas" pitchFamily="34" charset="-120"/>
+              </a:rPr>
+              <a:t>13 / 13</a:t>
             </a:r>
             <a:endParaRPr lang="en-US" sz="1000" dirty="0"/>
           </a:p>
@@ -1799,7 +4860,7 @@
                 <a:ea typeface="Consolas" pitchFamily="34" charset="-122"/>
                 <a:cs typeface="Consolas" pitchFamily="34" charset="-120"/>
               </a:rPr>
-              <a:t>THE PREMISE</a:t>
+              <a:t>AGENDA</a:t>
             </a:r>
             <a:endParaRPr lang="en-US" sz="1200" dirty="0"/>
           </a:p>
@@ -1813,8 +4874,8 @@
         </p:nvSpPr>
         <p:spPr>
           <a:xfrm>
-            <a:off x="822960" y="960120"/>
-            <a:ext cx="10515600" cy="868680"/>
+            <a:off x="822960" y="914400"/>
+            <a:ext cx="10561320" cy="868680"/>
           </a:xfrm>
           <a:prstGeom prst="rect">
             <a:avLst/>
@@ -1830,7 +4891,7 @@
               <a:buNone/>
             </a:pPr>
             <a:r>
-              <a:rPr lang="en-US" sz="3000" b="1" dirty="0">
+              <a:rPr lang="en-US" sz="2700" b="1" dirty="0">
                 <a:solidFill>
                   <a:srgbClr val="FFFFFF"/>
                 </a:solidFill>
@@ -1838,45 +4899,102 @@
                 <a:ea typeface="Segoe UI" pitchFamily="34" charset="-122"/>
                 <a:cs typeface="Segoe UI" pitchFamily="34" charset="-120"/>
               </a:rPr>
-              <a:t>AI changed the economics of software</a:t>
-            </a:r>
-            <a:endParaRPr lang="en-US" sz="3000" dirty="0"/>
-          </a:p>
-        </p:txBody>
-      </p:sp>
-      <p:sp>
-        <p:nvSpPr>
-          <p:cNvPr id="6" name="Text 4"/>
-          <p:cNvSpPr/>
-          <p:nvPr/>
-        </p:nvSpPr>
-        <p:spPr>
-          <a:xfrm>
-            <a:off x="868680" y="2057400"/>
-            <a:ext cx="10424160" cy="3566160"/>
-          </a:xfrm>
-          <a:prstGeom prst="rect">
-            <a:avLst/>
-          </a:prstGeom>
-          <a:noFill/>
-          <a:ln/>
-        </p:spPr>
-        <p:txBody>
-          <a:bodyPr wrap="square" rtlCol="0" anchor="t"/>
-          <a:lstStyle/>
-          <a:p>
-            <a:pPr marL="342900" indent="-342900">
-              <a:lnSpc>
-                <a:spcPct val="115000"/>
-              </a:lnSpc>
-              <a:spcAft>
-                <a:spcPts val="1000"/>
-              </a:spcAft>
-              <a:buSzPct val="100000"/>
-              <a:buChar char="▸"/>
-            </a:pPr>
-            <a:r>
-              <a:rPr lang="en-US" sz="1600" dirty="0">
+              <a:t>What this deck covers</a:t>
+            </a:r>
+            <a:endParaRPr lang="en-US" sz="2700" dirty="0"/>
+          </a:p>
+        </p:txBody>
+      </p:sp>
+      <p:sp>
+        <p:nvSpPr>
+          <p:cNvPr id="6" name="Shape 4"/>
+          <p:cNvSpPr/>
+          <p:nvPr/>
+        </p:nvSpPr>
+        <p:spPr>
+          <a:xfrm>
+            <a:off x="868680" y="2112264"/>
+            <a:ext cx="420624" cy="420624"/>
+          </a:xfrm>
+          <a:prstGeom prst="ellipse">
+            <a:avLst/>
+          </a:prstGeom>
+          <a:solidFill>
+            <a:srgbClr val="111A2E"/>
+          </a:solidFill>
+          <a:ln w="19050">
+            <a:solidFill>
+              <a:srgbClr val="3B82F6"/>
+            </a:solidFill>
+            <a:prstDash val="solid"/>
+          </a:ln>
+        </p:spPr>
+      </p:sp>
+      <p:sp>
+        <p:nvSpPr>
+          <p:cNvPr id="7" name="Text 5"/>
+          <p:cNvSpPr/>
+          <p:nvPr/>
+        </p:nvSpPr>
+        <p:spPr>
+          <a:xfrm>
+            <a:off x="868680" y="2112264"/>
+            <a:ext cx="420624" cy="420624"/>
+          </a:xfrm>
+          <a:prstGeom prst="rect">
+            <a:avLst/>
+          </a:prstGeom>
+          <a:noFill/>
+          <a:ln/>
+        </p:spPr>
+        <p:txBody>
+          <a:bodyPr wrap="square" rtlCol="0" anchor="ctr"/>
+          <a:lstStyle/>
+          <a:p>
+            <a:pPr algn="ctr" indent="0" marL="0">
+              <a:buNone/>
+            </a:pPr>
+            <a:r>
+              <a:rPr lang="en-US" sz="1300" b="1" dirty="0">
+                <a:solidFill>
+                  <a:srgbClr val="3B82F6"/>
+                </a:solidFill>
+                <a:latin typeface="Consolas" pitchFamily="34" charset="0"/>
+                <a:ea typeface="Consolas" pitchFamily="34" charset="-122"/>
+                <a:cs typeface="Consolas" pitchFamily="34" charset="-120"/>
+              </a:rPr>
+              <a:t>1</a:t>
+            </a:r>
+            <a:endParaRPr lang="en-US" sz="1300" dirty="0"/>
+          </a:p>
+        </p:txBody>
+      </p:sp>
+      <p:sp>
+        <p:nvSpPr>
+          <p:cNvPr id="8" name="Text 6"/>
+          <p:cNvSpPr/>
+          <p:nvPr/>
+        </p:nvSpPr>
+        <p:spPr>
+          <a:xfrm>
+            <a:off x="1435608" y="2057400"/>
+            <a:ext cx="4480560" cy="822960"/>
+          </a:xfrm>
+          <a:prstGeom prst="rect">
+            <a:avLst/>
+          </a:prstGeom>
+          <a:noFill/>
+          <a:ln/>
+        </p:spPr>
+        <p:txBody>
+          <a:bodyPr wrap="square" rtlCol="0" anchor="ctr"/>
+          <a:lstStyle/>
+          <a:p>
+            <a:pPr indent="0" marL="0">
+              <a:buNone/>
+            </a:pPr>
+            <a:r>
+              <a:rPr lang="en-US" sz="1450" dirty="0">
                 <a:solidFill>
                   <a:srgbClr val="CBD5E1"/>
                 </a:solidFill>
@@ -1884,23 +5002,102 @@
                 <a:ea typeface="Segoe UI" pitchFamily="34" charset="-122"/>
                 <a:cs typeface="Segoe UI" pitchFamily="34" charset="-120"/>
               </a:rPr>
-              <a:t>A disciplined founder with reliable agents outships a distracted team</a:t>
-            </a:r>
-            <a:endParaRPr lang="en-US" sz="1600" dirty="0"/>
-          </a:p>
-          <a:p>
-            <a:pPr marL="342900" indent="-342900">
-              <a:lnSpc>
-                <a:spcPct val="115000"/>
-              </a:lnSpc>
-              <a:spcAft>
-                <a:spcPts val="1000"/>
-              </a:spcAft>
-              <a:buSzPct val="100000"/>
-              <a:buChar char="▸"/>
-            </a:pPr>
-            <a:r>
-              <a:rPr lang="en-US" sz="1600" dirty="0">
+              <a:t>The premise: AI changed the economics of software</a:t>
+            </a:r>
+            <a:endParaRPr lang="en-US" sz="1450" dirty="0"/>
+          </a:p>
+        </p:txBody>
+      </p:sp>
+      <p:sp>
+        <p:nvSpPr>
+          <p:cNvPr id="9" name="Shape 7"/>
+          <p:cNvSpPr/>
+          <p:nvPr/>
+        </p:nvSpPr>
+        <p:spPr>
+          <a:xfrm>
+            <a:off x="868680" y="3044952"/>
+            <a:ext cx="420624" cy="420624"/>
+          </a:xfrm>
+          <a:prstGeom prst="ellipse">
+            <a:avLst/>
+          </a:prstGeom>
+          <a:solidFill>
+            <a:srgbClr val="111A2E"/>
+          </a:solidFill>
+          <a:ln w="19050">
+            <a:solidFill>
+              <a:srgbClr val="06B6D4"/>
+            </a:solidFill>
+            <a:prstDash val="solid"/>
+          </a:ln>
+        </p:spPr>
+      </p:sp>
+      <p:sp>
+        <p:nvSpPr>
+          <p:cNvPr id="10" name="Text 8"/>
+          <p:cNvSpPr/>
+          <p:nvPr/>
+        </p:nvSpPr>
+        <p:spPr>
+          <a:xfrm>
+            <a:off x="868680" y="3044952"/>
+            <a:ext cx="420624" cy="420624"/>
+          </a:xfrm>
+          <a:prstGeom prst="rect">
+            <a:avLst/>
+          </a:prstGeom>
+          <a:noFill/>
+          <a:ln/>
+        </p:spPr>
+        <p:txBody>
+          <a:bodyPr wrap="square" rtlCol="0" anchor="ctr"/>
+          <a:lstStyle/>
+          <a:p>
+            <a:pPr algn="ctr" indent="0" marL="0">
+              <a:buNone/>
+            </a:pPr>
+            <a:r>
+              <a:rPr lang="en-US" sz="1300" b="1" dirty="0">
+                <a:solidFill>
+                  <a:srgbClr val="06B6D4"/>
+                </a:solidFill>
+                <a:latin typeface="Consolas" pitchFamily="34" charset="0"/>
+                <a:ea typeface="Consolas" pitchFamily="34" charset="-122"/>
+                <a:cs typeface="Consolas" pitchFamily="34" charset="-120"/>
+              </a:rPr>
+              <a:t>2</a:t>
+            </a:r>
+            <a:endParaRPr lang="en-US" sz="1300" dirty="0"/>
+          </a:p>
+        </p:txBody>
+      </p:sp>
+      <p:sp>
+        <p:nvSpPr>
+          <p:cNvPr id="11" name="Text 9"/>
+          <p:cNvSpPr/>
+          <p:nvPr/>
+        </p:nvSpPr>
+        <p:spPr>
+          <a:xfrm>
+            <a:off x="1435608" y="2990088"/>
+            <a:ext cx="4480560" cy="822960"/>
+          </a:xfrm>
+          <a:prstGeom prst="rect">
+            <a:avLst/>
+          </a:prstGeom>
+          <a:noFill/>
+          <a:ln/>
+        </p:spPr>
+        <p:txBody>
+          <a:bodyPr wrap="square" rtlCol="0" anchor="ctr"/>
+          <a:lstStyle/>
+          <a:p>
+            <a:pPr indent="0" marL="0">
+              <a:buNone/>
+            </a:pPr>
+            <a:r>
+              <a:rPr lang="en-US" sz="1450" dirty="0">
                 <a:solidFill>
                   <a:srgbClr val="CBD5E1"/>
                 </a:solidFill>
@@ -1908,23 +5105,102 @@
                 <a:ea typeface="Segoe UI" pitchFamily="34" charset="-122"/>
                 <a:cs typeface="Segoe UI" pitchFamily="34" charset="-120"/>
               </a:rPr>
-              <a:t>Speed is cheap - so quality gates become the differentiator</a:t>
-            </a:r>
-            <a:endParaRPr lang="en-US" sz="1600" dirty="0"/>
-          </a:p>
-          <a:p>
-            <a:pPr marL="342900" indent="-342900">
-              <a:lnSpc>
-                <a:spcPct val="115000"/>
-              </a:lnSpc>
-              <a:spcAft>
-                <a:spcPts val="1000"/>
-              </a:spcAft>
-              <a:buSzPct val="100000"/>
-              <a:buChar char="▸"/>
-            </a:pPr>
-            <a:r>
-              <a:rPr lang="en-US" sz="1600" dirty="0">
+              <a:t>The suite: 30+ production apps and the platform behind them</a:t>
+            </a:r>
+            <a:endParaRPr lang="en-US" sz="1450" dirty="0"/>
+          </a:p>
+        </p:txBody>
+      </p:sp>
+      <p:sp>
+        <p:nvSpPr>
+          <p:cNvPr id="12" name="Shape 10"/>
+          <p:cNvSpPr/>
+          <p:nvPr/>
+        </p:nvSpPr>
+        <p:spPr>
+          <a:xfrm>
+            <a:off x="868680" y="3977640"/>
+            <a:ext cx="420624" cy="420624"/>
+          </a:xfrm>
+          <a:prstGeom prst="ellipse">
+            <a:avLst/>
+          </a:prstGeom>
+          <a:solidFill>
+            <a:srgbClr val="111A2E"/>
+          </a:solidFill>
+          <a:ln w="19050">
+            <a:solidFill>
+              <a:srgbClr val="3B82F6"/>
+            </a:solidFill>
+            <a:prstDash val="solid"/>
+          </a:ln>
+        </p:spPr>
+      </p:sp>
+      <p:sp>
+        <p:nvSpPr>
+          <p:cNvPr id="13" name="Text 11"/>
+          <p:cNvSpPr/>
+          <p:nvPr/>
+        </p:nvSpPr>
+        <p:spPr>
+          <a:xfrm>
+            <a:off x="868680" y="3977640"/>
+            <a:ext cx="420624" cy="420624"/>
+          </a:xfrm>
+          <a:prstGeom prst="rect">
+            <a:avLst/>
+          </a:prstGeom>
+          <a:noFill/>
+          <a:ln/>
+        </p:spPr>
+        <p:txBody>
+          <a:bodyPr wrap="square" rtlCol="0" anchor="ctr"/>
+          <a:lstStyle/>
+          <a:p>
+            <a:pPr algn="ctr" indent="0" marL="0">
+              <a:buNone/>
+            </a:pPr>
+            <a:r>
+              <a:rPr lang="en-US" sz="1300" b="1" dirty="0">
+                <a:solidFill>
+                  <a:srgbClr val="3B82F6"/>
+                </a:solidFill>
+                <a:latin typeface="Consolas" pitchFamily="34" charset="0"/>
+                <a:ea typeface="Consolas" pitchFamily="34" charset="-122"/>
+                <a:cs typeface="Consolas" pitchFamily="34" charset="-120"/>
+              </a:rPr>
+              <a:t>3</a:t>
+            </a:r>
+            <a:endParaRPr lang="en-US" sz="1300" dirty="0"/>
+          </a:p>
+        </p:txBody>
+      </p:sp>
+      <p:sp>
+        <p:nvSpPr>
+          <p:cNvPr id="14" name="Text 12"/>
+          <p:cNvSpPr/>
+          <p:nvPr/>
+        </p:nvSpPr>
+        <p:spPr>
+          <a:xfrm>
+            <a:off x="1435608" y="3922776"/>
+            <a:ext cx="4480560" cy="822960"/>
+          </a:xfrm>
+          <a:prstGeom prst="rect">
+            <a:avLst/>
+          </a:prstGeom>
+          <a:noFill/>
+          <a:ln/>
+        </p:spPr>
+        <p:txBody>
+          <a:bodyPr wrap="square" rtlCol="0" anchor="ctr"/>
+          <a:lstStyle/>
+          <a:p>
+            <a:pPr indent="0" marL="0">
+              <a:buNone/>
+            </a:pPr>
+            <a:r>
+              <a:rPr lang="en-US" sz="1450" dirty="0">
                 <a:solidFill>
                   <a:srgbClr val="CBD5E1"/>
                 </a:solidFill>
@@ -1932,23 +5208,102 @@
                 <a:ea typeface="Segoe UI" pitchFamily="34" charset="-122"/>
                 <a:cs typeface="Segoe UI" pitchFamily="34" charset="-120"/>
               </a:rPr>
-              <a:t>Every release must be provably good, not hopefully good</a:t>
-            </a:r>
-            <a:endParaRPr lang="en-US" sz="1600" dirty="0"/>
-          </a:p>
-          <a:p>
-            <a:pPr marL="342900" indent="-342900">
-              <a:lnSpc>
-                <a:spcPct val="115000"/>
-              </a:lnSpc>
-              <a:spcAft>
-                <a:spcPts val="1000"/>
-              </a:spcAft>
-              <a:buSzPct val="100000"/>
-              <a:buChar char="▸"/>
-            </a:pPr>
-            <a:r>
-              <a:rPr lang="en-US" sz="1600" dirty="0">
+              <a:t>The pipeline: brief to shipped, gated at every step</a:t>
+            </a:r>
+            <a:endParaRPr lang="en-US" sz="1450" dirty="0"/>
+          </a:p>
+        </p:txBody>
+      </p:sp>
+      <p:sp>
+        <p:nvSpPr>
+          <p:cNvPr id="15" name="Shape 13"/>
+          <p:cNvSpPr/>
+          <p:nvPr/>
+        </p:nvSpPr>
+        <p:spPr>
+          <a:xfrm>
+            <a:off x="6355080" y="2112264"/>
+            <a:ext cx="420624" cy="420624"/>
+          </a:xfrm>
+          <a:prstGeom prst="ellipse">
+            <a:avLst/>
+          </a:prstGeom>
+          <a:solidFill>
+            <a:srgbClr val="111A2E"/>
+          </a:solidFill>
+          <a:ln w="19050">
+            <a:solidFill>
+              <a:srgbClr val="06B6D4"/>
+            </a:solidFill>
+            <a:prstDash val="solid"/>
+          </a:ln>
+        </p:spPr>
+      </p:sp>
+      <p:sp>
+        <p:nvSpPr>
+          <p:cNvPr id="16" name="Text 14"/>
+          <p:cNvSpPr/>
+          <p:nvPr/>
+        </p:nvSpPr>
+        <p:spPr>
+          <a:xfrm>
+            <a:off x="6355080" y="2112264"/>
+            <a:ext cx="420624" cy="420624"/>
+          </a:xfrm>
+          <a:prstGeom prst="rect">
+            <a:avLst/>
+          </a:prstGeom>
+          <a:noFill/>
+          <a:ln/>
+        </p:spPr>
+        <p:txBody>
+          <a:bodyPr wrap="square" rtlCol="0" anchor="ctr"/>
+          <a:lstStyle/>
+          <a:p>
+            <a:pPr algn="ctr" indent="0" marL="0">
+              <a:buNone/>
+            </a:pPr>
+            <a:r>
+              <a:rPr lang="en-US" sz="1300" b="1" dirty="0">
+                <a:solidFill>
+                  <a:srgbClr val="06B6D4"/>
+                </a:solidFill>
+                <a:latin typeface="Consolas" pitchFamily="34" charset="0"/>
+                <a:ea typeface="Consolas" pitchFamily="34" charset="-122"/>
+                <a:cs typeface="Consolas" pitchFamily="34" charset="-120"/>
+              </a:rPr>
+              <a:t>4</a:t>
+            </a:r>
+            <a:endParaRPr lang="en-US" sz="1300" dirty="0"/>
+          </a:p>
+        </p:txBody>
+      </p:sp>
+      <p:sp>
+        <p:nvSpPr>
+          <p:cNvPr id="17" name="Text 15"/>
+          <p:cNvSpPr/>
+          <p:nvPr/>
+        </p:nvSpPr>
+        <p:spPr>
+          <a:xfrm>
+            <a:off x="6922008" y="2057400"/>
+            <a:ext cx="4480560" cy="822960"/>
+          </a:xfrm>
+          <a:prstGeom prst="rect">
+            <a:avLst/>
+          </a:prstGeom>
+          <a:noFill/>
+          <a:ln/>
+        </p:spPr>
+        <p:txBody>
+          <a:bodyPr wrap="square" rtlCol="0" anchor="ctr"/>
+          <a:lstStyle/>
+          <a:p>
+            <a:pPr indent="0" marL="0">
+              <a:buNone/>
+            </a:pPr>
+            <a:r>
+              <a:rPr lang="en-US" sz="1450" dirty="0">
                 <a:solidFill>
                   <a:srgbClr val="CBD5E1"/>
                 </a:solidFill>
@@ -1956,22 +5311,47 @@
                 <a:ea typeface="Segoe UI" pitchFamily="34" charset="-122"/>
                 <a:cs typeface="Segoe UI" pitchFamily="34" charset="-120"/>
               </a:rPr>
-              <a:t>Leverage is now programmable</a:t>
-            </a:r>
-            <a:endParaRPr lang="en-US" sz="1600" dirty="0"/>
-          </a:p>
-        </p:txBody>
-      </p:sp>
-      <p:sp>
-        <p:nvSpPr>
-          <p:cNvPr id="7" name="Text 5"/>
-          <p:cNvSpPr/>
-          <p:nvPr/>
-        </p:nvSpPr>
-        <p:spPr>
-          <a:xfrm>
-            <a:off x="10698480" y="6355080"/>
-            <a:ext cx="1188720" cy="365760"/>
+              <a:t>The stack: five layers from kernel to boring rules</a:t>
+            </a:r>
+            <a:endParaRPr lang="en-US" sz="1450" dirty="0"/>
+          </a:p>
+        </p:txBody>
+      </p:sp>
+      <p:sp>
+        <p:nvSpPr>
+          <p:cNvPr id="18" name="Shape 16"/>
+          <p:cNvSpPr/>
+          <p:nvPr/>
+        </p:nvSpPr>
+        <p:spPr>
+          <a:xfrm>
+            <a:off x="6355080" y="3044952"/>
+            <a:ext cx="420624" cy="420624"/>
+          </a:xfrm>
+          <a:prstGeom prst="ellipse">
+            <a:avLst/>
+          </a:prstGeom>
+          <a:solidFill>
+            <a:srgbClr val="111A2E"/>
+          </a:solidFill>
+          <a:ln w="19050">
+            <a:solidFill>
+              <a:srgbClr val="3B82F6"/>
+            </a:solidFill>
+            <a:prstDash val="solid"/>
+          </a:ln>
+        </p:spPr>
+      </p:sp>
+      <p:sp>
+        <p:nvSpPr>
+          <p:cNvPr id="19" name="Text 17"/>
+          <p:cNvSpPr/>
+          <p:nvPr/>
+        </p:nvSpPr>
+        <p:spPr>
+          <a:xfrm>
+            <a:off x="6355080" y="3044952"/>
+            <a:ext cx="420624" cy="420624"/>
           </a:xfrm>
           <a:prstGeom prst="rect">
             <a:avLst/>
@@ -1983,19 +5363,200 @@
           <a:bodyPr wrap="square" rtlCol="0" anchor="ctr"/>
           <a:lstStyle/>
           <a:p>
-            <a:pPr algn="r" indent="0" marL="0">
+            <a:pPr algn="ctr" indent="0" marL="0">
               <a:buNone/>
             </a:pPr>
             <a:r>
-              <a:rPr lang="en-US" sz="1000" dirty="0">
-                <a:solidFill>
-                  <a:srgbClr val="64748B"/>
+              <a:rPr lang="en-US" sz="1300" b="1" dirty="0">
+                <a:solidFill>
+                  <a:srgbClr val="3B82F6"/>
                 </a:solidFill>
                 <a:latin typeface="Consolas" pitchFamily="34" charset="0"/>
                 <a:ea typeface="Consolas" pitchFamily="34" charset="-122"/>
                 <a:cs typeface="Consolas" pitchFamily="34" charset="-120"/>
               </a:rPr>
-              <a:t>2 / 8</a:t>
+              <a:t>5</a:t>
+            </a:r>
+            <a:endParaRPr lang="en-US" sz="1300" dirty="0"/>
+          </a:p>
+        </p:txBody>
+      </p:sp>
+      <p:sp>
+        <p:nvSpPr>
+          <p:cNvPr id="20" name="Text 18"/>
+          <p:cNvSpPr/>
+          <p:nvPr/>
+        </p:nvSpPr>
+        <p:spPr>
+          <a:xfrm>
+            <a:off x="6922008" y="2990088"/>
+            <a:ext cx="4480560" cy="822960"/>
+          </a:xfrm>
+          <a:prstGeom prst="rect">
+            <a:avLst/>
+          </a:prstGeom>
+          <a:noFill/>
+          <a:ln/>
+        </p:spPr>
+        <p:txBody>
+          <a:bodyPr wrap="square" rtlCol="0" anchor="ctr"/>
+          <a:lstStyle/>
+          <a:p>
+            <a:pPr indent="0" marL="0">
+              <a:buNone/>
+            </a:pPr>
+            <a:r>
+              <a:rPr lang="en-US" sz="1450" dirty="0">
+                <a:solidFill>
+                  <a:srgbClr val="CBD5E1"/>
+                </a:solidFill>
+                <a:latin typeface="Segoe UI" pitchFamily="34" charset="0"/>
+                <a:ea typeface="Segoe UI" pitchFamily="34" charset="-122"/>
+                <a:cs typeface="Segoe UI" pitchFamily="34" charset="-120"/>
+              </a:rPr>
+              <a:t>The numbers: 30+ apps, 9+ agents, 8.7K+ LOC</a:t>
+            </a:r>
+            <a:endParaRPr lang="en-US" sz="1450" dirty="0"/>
+          </a:p>
+        </p:txBody>
+      </p:sp>
+      <p:sp>
+        <p:nvSpPr>
+          <p:cNvPr id="21" name="Shape 19"/>
+          <p:cNvSpPr/>
+          <p:nvPr/>
+        </p:nvSpPr>
+        <p:spPr>
+          <a:xfrm>
+            <a:off x="6355080" y="3977640"/>
+            <a:ext cx="420624" cy="420624"/>
+          </a:xfrm>
+          <a:prstGeom prst="ellipse">
+            <a:avLst/>
+          </a:prstGeom>
+          <a:solidFill>
+            <a:srgbClr val="111A2E"/>
+          </a:solidFill>
+          <a:ln w="19050">
+            <a:solidFill>
+              <a:srgbClr val="06B6D4"/>
+            </a:solidFill>
+            <a:prstDash val="solid"/>
+          </a:ln>
+        </p:spPr>
+      </p:sp>
+      <p:sp>
+        <p:nvSpPr>
+          <p:cNvPr id="22" name="Text 20"/>
+          <p:cNvSpPr/>
+          <p:nvPr/>
+        </p:nvSpPr>
+        <p:spPr>
+          <a:xfrm>
+            <a:off x="6355080" y="3977640"/>
+            <a:ext cx="420624" cy="420624"/>
+          </a:xfrm>
+          <a:prstGeom prst="rect">
+            <a:avLst/>
+          </a:prstGeom>
+          <a:noFill/>
+          <a:ln/>
+        </p:spPr>
+        <p:txBody>
+          <a:bodyPr wrap="square" rtlCol="0" anchor="ctr"/>
+          <a:lstStyle/>
+          <a:p>
+            <a:pPr algn="ctr" indent="0" marL="0">
+              <a:buNone/>
+            </a:pPr>
+            <a:r>
+              <a:rPr lang="en-US" sz="1300" b="1" dirty="0">
+                <a:solidFill>
+                  <a:srgbClr val="06B6D4"/>
+                </a:solidFill>
+                <a:latin typeface="Consolas" pitchFamily="34" charset="0"/>
+                <a:ea typeface="Consolas" pitchFamily="34" charset="-122"/>
+                <a:cs typeface="Consolas" pitchFamily="34" charset="-120"/>
+              </a:rPr>
+              <a:t>6</a:t>
+            </a:r>
+            <a:endParaRPr lang="en-US" sz="1300" dirty="0"/>
+          </a:p>
+        </p:txBody>
+      </p:sp>
+      <p:sp>
+        <p:nvSpPr>
+          <p:cNvPr id="23" name="Text 21"/>
+          <p:cNvSpPr/>
+          <p:nvPr/>
+        </p:nvSpPr>
+        <p:spPr>
+          <a:xfrm>
+            <a:off x="6922008" y="3922776"/>
+            <a:ext cx="4480560" cy="822960"/>
+          </a:xfrm>
+          <a:prstGeom prst="rect">
+            <a:avLst/>
+          </a:prstGeom>
+          <a:noFill/>
+          <a:ln/>
+        </p:spPr>
+        <p:txBody>
+          <a:bodyPr wrap="square" rtlCol="0" anchor="ctr"/>
+          <a:lstStyle/>
+          <a:p>
+            <a:pPr indent="0" marL="0">
+              <a:buNone/>
+            </a:pPr>
+            <a:r>
+              <a:rPr lang="en-US" sz="1450" dirty="0">
+                <a:solidFill>
+                  <a:srgbClr val="CBD5E1"/>
+                </a:solidFill>
+                <a:latin typeface="Segoe UI" pitchFamily="34" charset="0"/>
+                <a:ea typeface="Segoe UI" pitchFamily="34" charset="-122"/>
+                <a:cs typeface="Segoe UI" pitchFamily="34" charset="-120"/>
+              </a:rPr>
+              <a:t>The operations: rooms, queues, approvals, watchdog</a:t>
+            </a:r>
+            <a:endParaRPr lang="en-US" sz="1450" dirty="0"/>
+          </a:p>
+        </p:txBody>
+      </p:sp>
+      <p:sp>
+        <p:nvSpPr>
+          <p:cNvPr id="24" name="Text 22"/>
+          <p:cNvSpPr/>
+          <p:nvPr/>
+        </p:nvSpPr>
+        <p:spPr>
+          <a:xfrm>
+            <a:off x="10698480" y="6382512"/>
+            <a:ext cx="1188720" cy="365760"/>
+          </a:xfrm>
+          <a:prstGeom prst="rect">
+            <a:avLst/>
+          </a:prstGeom>
+          <a:noFill/>
+          <a:ln/>
+        </p:spPr>
+        <p:txBody>
+          <a:bodyPr wrap="square" rtlCol="0" anchor="ctr"/>
+          <a:lstStyle/>
+          <a:p>
+            <a:pPr algn="r" indent="0" marL="0">
+              <a:buNone/>
+            </a:pPr>
+            <a:r>
+              <a:rPr lang="en-US" sz="1000" dirty="0">
+                <a:solidFill>
+                  <a:srgbClr val="64748B"/>
+                </a:solidFill>
+                <a:latin typeface="Consolas" pitchFamily="34" charset="0"/>
+                <a:ea typeface="Consolas" pitchFamily="34" charset="-122"/>
+                <a:cs typeface="Consolas" pitchFamily="34" charset="-120"/>
+              </a:rPr>
+              <a:t>2 / 13</a:t>
             </a:r>
             <a:endParaRPr lang="en-US" sz="1000" dirty="0"/>
           </a:p>
@@ -2106,7 +5667,7 @@
                 <a:ea typeface="Consolas" pitchFamily="34" charset="-122"/>
                 <a:cs typeface="Consolas" pitchFamily="34" charset="-120"/>
               </a:rPr>
-              <a:t>THE SUITE</a:t>
+              <a:t>THE PREMISE</a:t>
             </a:r>
             <a:endParaRPr lang="en-US" sz="1200" dirty="0"/>
           </a:p>
@@ -2120,8 +5681,8 @@
         </p:nvSpPr>
         <p:spPr>
           <a:xfrm>
-            <a:off x="822960" y="960120"/>
-            <a:ext cx="10515600" cy="868680"/>
+            <a:off x="822960" y="914400"/>
+            <a:ext cx="10561320" cy="868680"/>
           </a:xfrm>
           <a:prstGeom prst="rect">
             <a:avLst/>
@@ -2137,7 +5698,7 @@
               <a:buNone/>
             </a:pPr>
             <a:r>
-              <a:rPr lang="en-US" sz="3000" b="1" dirty="0">
+              <a:rPr lang="en-US" sz="2700" b="1" dirty="0">
                 <a:solidFill>
                   <a:srgbClr val="FFFFFF"/>
                 </a:solidFill>
@@ -2145,9 +5706,9 @@
                 <a:ea typeface="Segoe UI" pitchFamily="34" charset="-122"/>
                 <a:cs typeface="Segoe UI" pitchFamily="34" charset="-120"/>
               </a:rPr>
-              <a:t>30+ production Android apps</a:t>
-            </a:r>
-            <a:endParaRPr lang="en-US" sz="3000" dirty="0"/>
+              <a:t>AI changed the economics of software - and raised the discipline bar</a:t>
+            </a:r>
+            <a:endParaRPr lang="en-US" sz="2700" dirty="0"/>
           </a:p>
         </p:txBody>
       </p:sp>
@@ -2159,7 +5720,7 @@
         </p:nvSpPr>
         <p:spPr>
           <a:xfrm>
-            <a:off x="868680" y="2057400"/>
+            <a:off x="868680" y="2011680"/>
             <a:ext cx="10424160" cy="3566160"/>
           </a:xfrm>
           <a:prstGeom prst="rect">
@@ -2174,10 +5735,10 @@
           <a:p>
             <a:pPr marL="342900" indent="-342900">
               <a:lnSpc>
-                <a:spcPct val="115000"/>
+                <a:spcPct val="112000"/>
               </a:lnSpc>
               <a:spcAft>
-                <a:spcPts val="1000"/>
+                <a:spcPts val="900"/>
               </a:spcAft>
               <a:buSzPct val="100000"/>
               <a:buChar char="▸"/>
@@ -2191,17 +5752,17 @@
                 <a:ea typeface="Segoe UI" pitchFamily="34" charset="-122"/>
                 <a:cs typeface="Segoe UI" pitchFamily="34" charset="-120"/>
               </a:rPr>
-              <a:t>Productivity, data, and utility apps - all live, all maintained</a:t>
+              <a:t>A disciplined founder with reliable agents outships a distracted team, because leverage is now programmable.</a:t>
             </a:r>
             <a:endParaRPr lang="en-US" sz="1600" dirty="0"/>
           </a:p>
           <a:p>
             <a:pPr marL="342900" indent="-342900">
               <a:lnSpc>
-                <a:spcPct val="115000"/>
+                <a:spcPct val="112000"/>
               </a:lnSpc>
               <a:spcAft>
-                <a:spcPts val="1000"/>
+                <a:spcPts val="900"/>
               </a:spcAft>
               <a:buSzPct val="100000"/>
               <a:buChar char="▸"/>
@@ -2215,17 +5776,17 @@
                 <a:ea typeface="Segoe UI" pitchFamily="34" charset="-122"/>
                 <a:cs typeface="Segoe UI" pitchFamily="34" charset="-120"/>
               </a:rPr>
-              <a:t>A full platform backend behind them</a:t>
+              <a:t>Speed is cheap, so quality gates become the differentiator instead of headcount.</a:t>
             </a:r>
             <a:endParaRPr lang="en-US" sz="1600" dirty="0"/>
           </a:p>
           <a:p>
             <a:pPr marL="342900" indent="-342900">
               <a:lnSpc>
-                <a:spcPct val="115000"/>
+                <a:spcPct val="112000"/>
               </a:lnSpc>
               <a:spcAft>
-                <a:spcPts val="1000"/>
+                <a:spcPts val="900"/>
               </a:spcAft>
               <a:buSzPct val="100000"/>
               <a:buChar char="▸"/>
@@ -2239,17 +5800,17 @@
                 <a:ea typeface="Segoe UI" pitchFamily="34" charset="-122"/>
                 <a:cs typeface="Segoe UI" pitchFamily="34" charset="-120"/>
               </a:rPr>
-              <a:t>One promote folder: the newest APK of every app, always findable</a:t>
+              <a:t>Every release must be provably good, not hopefully good - evidence is the currency.</a:t>
             </a:r>
             <a:endParaRPr lang="en-US" sz="1600" dirty="0"/>
           </a:p>
           <a:p>
             <a:pPr marL="342900" indent="-342900">
               <a:lnSpc>
-                <a:spcPct val="115000"/>
+                <a:spcPct val="112000"/>
               </a:lnSpc>
               <a:spcAft>
-                <a:spcPts val="1000"/>
+                <a:spcPts val="900"/>
               </a:spcAft>
               <a:buSzPct val="100000"/>
               <a:buChar char="▸"/>
@@ -2263,7 +5824,7 @@
                 <a:ea typeface="Segoe UI" pitchFamily="34" charset="-122"/>
                 <a:cs typeface="Segoe UI" pitchFamily="34" charset="-120"/>
               </a:rPr>
-              <a:t>A status file per app: features, versions, decisions</a:t>
+              <a:t>The one resource that stayed scarce is judgment, so the whole architecture is built around it.</a:t>
             </a:r>
             <a:endParaRPr lang="en-US" sz="1600" dirty="0"/>
           </a:p>
@@ -2271,13 +5832,75 @@
       </p:sp>
       <p:sp>
         <p:nvSpPr>
-          <p:cNvPr id="7" name="Text 5"/>
-          <p:cNvSpPr/>
-          <p:nvPr/>
-        </p:nvSpPr>
-        <p:spPr>
-          <a:xfrm>
-            <a:off x="10698480" y="6355080"/>
+          <p:cNvPr id="7" name="Shape 5"/>
+          <p:cNvSpPr/>
+          <p:nvPr/>
+        </p:nvSpPr>
+        <p:spPr>
+          <a:xfrm>
+            <a:off x="822960" y="5961888"/>
+            <a:ext cx="10515600" cy="0"/>
+          </a:xfrm>
+          <a:prstGeom prst="line">
+            <a:avLst/>
+          </a:prstGeom>
+          <a:noFill/>
+          <a:ln w="12700">
+            <a:solidFill>
+              <a:srgbClr val="1E2D45"/>
+            </a:solidFill>
+            <a:prstDash val="solid"/>
+          </a:ln>
+        </p:spPr>
+      </p:sp>
+      <p:sp>
+        <p:nvSpPr>
+          <p:cNvPr id="8" name="Text 6"/>
+          <p:cNvSpPr/>
+          <p:nvPr/>
+        </p:nvSpPr>
+        <p:spPr>
+          <a:xfrm>
+            <a:off x="822960" y="6053328"/>
+            <a:ext cx="9692640" cy="457200"/>
+          </a:xfrm>
+          <a:prstGeom prst="rect">
+            <a:avLst/>
+          </a:prstGeom>
+          <a:noFill/>
+          <a:ln/>
+        </p:spPr>
+        <p:txBody>
+          <a:bodyPr wrap="square" rtlCol="0" anchor="ctr"/>
+          <a:lstStyle/>
+          <a:p>
+            <a:pPr indent="0" marL="0">
+              <a:buNone/>
+            </a:pPr>
+            <a:r>
+              <a:rPr lang="en-US" sz="1150" dirty="0">
+                <a:solidFill>
+                  <a:srgbClr val="64748B"/>
+                </a:solidFill>
+                <a:latin typeface="Segoe UI" pitchFamily="34" charset="0"/>
+                <a:ea typeface="Segoe UI" pitchFamily="34" charset="-122"/>
+                <a:cs typeface="Segoe UI" pitchFamily="34" charset="-120"/>
+              </a:rPr>
+              <a:t>Zalin Labs is organized around that premise end to end.</a:t>
+            </a:r>
+            <a:endParaRPr lang="en-US" sz="1150" dirty="0"/>
+          </a:p>
+        </p:txBody>
+      </p:sp>
+      <p:sp>
+        <p:nvSpPr>
+          <p:cNvPr id="9" name="Text 7"/>
+          <p:cNvSpPr/>
+          <p:nvPr/>
+        </p:nvSpPr>
+        <p:spPr>
+          <a:xfrm>
+            <a:off x="10698480" y="6382512"/>
             <a:ext cx="1188720" cy="365760"/>
           </a:xfrm>
           <a:prstGeom prst="rect">
@@ -2302,7 +5925,7 @@
                 <a:ea typeface="Consolas" pitchFamily="34" charset="-122"/>
                 <a:cs typeface="Consolas" pitchFamily="34" charset="-120"/>
               </a:rPr>
-              <a:t>3 / 8</a:t>
+              <a:t>3 / 13</a:t>
             </a:r>
             <a:endParaRPr lang="en-US" sz="1000" dirty="0"/>
           </a:p>
@@ -2413,7 +6036,7 @@
                 <a:ea typeface="Consolas" pitchFamily="34" charset="-122"/>
                 <a:cs typeface="Consolas" pitchFamily="34" charset="-120"/>
               </a:rPr>
-              <a:t>THE PIPELINE</a:t>
+              <a:t>THE SCOREBOARD</a:t>
             </a:r>
             <a:endParaRPr lang="en-US" sz="1200" dirty="0"/>
           </a:p>
@@ -2427,8 +6050,8 @@
         </p:nvSpPr>
         <p:spPr>
           <a:xfrm>
-            <a:off x="822960" y="960120"/>
-            <a:ext cx="10515600" cy="868680"/>
+            <a:off x="822960" y="914400"/>
+            <a:ext cx="10561320" cy="868680"/>
           </a:xfrm>
           <a:prstGeom prst="rect">
             <a:avLst/>
@@ -2444,7 +6067,7 @@
               <a:buNone/>
             </a:pPr>
             <a:r>
-              <a:rPr lang="en-US" sz="3000" b="1" dirty="0">
+              <a:rPr lang="en-US" sz="2700" b="1" dirty="0">
                 <a:solidFill>
                   <a:srgbClr val="FFFFFF"/>
                 </a:solidFill>
@@ -2452,139 +6075,659 @@
                 <a:ea typeface="Segoe UI" pitchFamily="34" charset="-122"/>
                 <a:cs typeface="Segoe UI" pitchFamily="34" charset="-120"/>
               </a:rPr>
-              <a:t>From brief to shipped, gated at every step</a:t>
-            </a:r>
-            <a:endParaRPr lang="en-US" sz="3000" dirty="0"/>
-          </a:p>
-        </p:txBody>
-      </p:sp>
-      <p:sp>
-        <p:nvSpPr>
-          <p:cNvPr id="6" name="Text 4"/>
-          <p:cNvSpPr/>
-          <p:nvPr/>
-        </p:nvSpPr>
-        <p:spPr>
-          <a:xfrm>
-            <a:off x="868680" y="2057400"/>
-            <a:ext cx="10424160" cy="3566160"/>
-          </a:xfrm>
-          <a:prstGeom prst="rect">
-            <a:avLst/>
-          </a:prstGeom>
-          <a:noFill/>
-          <a:ln/>
-        </p:spPr>
-        <p:txBody>
-          <a:bodyPr wrap="square" rtlCol="0" anchor="t"/>
-          <a:lstStyle/>
-          <a:p>
-            <a:pPr marL="342900" indent="-342900">
-              <a:lnSpc>
-                <a:spcPct val="115000"/>
-              </a:lnSpc>
-              <a:spcAft>
-                <a:spcPts val="1000"/>
-              </a:spcAft>
-              <a:buSzPct val="100000"/>
-              <a:buChar char="▸"/>
-            </a:pPr>
-            <a:r>
-              <a:rPr lang="en-US" sz="1600" dirty="0">
-                <a:solidFill>
-                  <a:srgbClr val="CBD5E1"/>
+              <a:t>One laptop, one founder, real production numbers</a:t>
+            </a:r>
+            <a:endParaRPr lang="en-US" sz="2700" dirty="0"/>
+          </a:p>
+        </p:txBody>
+      </p:sp>
+      <p:sp>
+        <p:nvSpPr>
+          <p:cNvPr id="6" name="Shape 4"/>
+          <p:cNvSpPr/>
+          <p:nvPr/>
+        </p:nvSpPr>
+        <p:spPr>
+          <a:xfrm>
+            <a:off x="822960" y="2194560"/>
+            <a:ext cx="2423160" cy="2697480"/>
+          </a:xfrm>
+          <a:prstGeom prst="roundRect">
+            <a:avLst>
+              <a:gd name="adj" fmla="val 3019"/>
+            </a:avLst>
+          </a:prstGeom>
+          <a:solidFill>
+            <a:srgbClr val="111A2E"/>
+          </a:solidFill>
+          <a:ln w="12700">
+            <a:solidFill>
+              <a:srgbClr val="1E2D45"/>
+            </a:solidFill>
+            <a:prstDash val="solid"/>
+          </a:ln>
+        </p:spPr>
+      </p:sp>
+      <p:sp>
+        <p:nvSpPr>
+          <p:cNvPr id="7" name="Text 5"/>
+          <p:cNvSpPr/>
+          <p:nvPr/>
+        </p:nvSpPr>
+        <p:spPr>
+          <a:xfrm>
+            <a:off x="960120" y="2514600"/>
+            <a:ext cx="2148840" cy="914400"/>
+          </a:xfrm>
+          <a:prstGeom prst="rect">
+            <a:avLst/>
+          </a:prstGeom>
+          <a:noFill/>
+          <a:ln/>
+        </p:spPr>
+        <p:txBody>
+          <a:bodyPr wrap="square" rtlCol="0" anchor="ctr"/>
+          <a:lstStyle/>
+          <a:p>
+            <a:pPr algn="ctr" indent="0" marL="0">
+              <a:buNone/>
+            </a:pPr>
+            <a:r>
+              <a:rPr lang="en-US" sz="3800" b="1" dirty="0">
+                <a:solidFill>
+                  <a:srgbClr val="3B82F6"/>
                 </a:solidFill>
                 <a:latin typeface="Segoe UI" pitchFamily="34" charset="0"/>
                 <a:ea typeface="Segoe UI" pitchFamily="34" charset="-122"/>
                 <a:cs typeface="Segoe UI" pitchFamily="34" charset="-120"/>
               </a:rPr>
-              <a:t>Build - engineering agents produce versioned APKs</a:t>
-            </a:r>
-            <a:endParaRPr lang="en-US" sz="1600" dirty="0"/>
-          </a:p>
-          <a:p>
-            <a:pPr marL="342900" indent="-342900">
-              <a:lnSpc>
-                <a:spcPct val="115000"/>
-              </a:lnSpc>
-              <a:spcAft>
-                <a:spcPts val="1000"/>
-              </a:spcAft>
-              <a:buSzPct val="100000"/>
-              <a:buChar char="▸"/>
-            </a:pPr>
-            <a:r>
-              <a:rPr lang="en-US" sz="1600" dirty="0">
-                <a:solidFill>
-                  <a:srgbClr val="CBD5E1"/>
+              <a:t>30+</a:t>
+            </a:r>
+            <a:endParaRPr lang="en-US" sz="3800" dirty="0"/>
+          </a:p>
+        </p:txBody>
+      </p:sp>
+      <p:sp>
+        <p:nvSpPr>
+          <p:cNvPr id="8" name="Text 6"/>
+          <p:cNvSpPr/>
+          <p:nvPr/>
+        </p:nvSpPr>
+        <p:spPr>
+          <a:xfrm>
+            <a:off x="960120" y="3520440"/>
+            <a:ext cx="2148840" cy="502920"/>
+          </a:xfrm>
+          <a:prstGeom prst="rect">
+            <a:avLst/>
+          </a:prstGeom>
+          <a:noFill/>
+          <a:ln/>
+        </p:spPr>
+        <p:txBody>
+          <a:bodyPr wrap="square" rtlCol="0" anchor="ctr"/>
+          <a:lstStyle/>
+          <a:p>
+            <a:pPr algn="ctr" indent="0" marL="0">
+              <a:buNone/>
+            </a:pPr>
+            <a:r>
+              <a:rPr lang="en-US" sz="1450" b="1" dirty="0">
+                <a:solidFill>
+                  <a:srgbClr val="FFFFFF"/>
                 </a:solidFill>
                 <a:latin typeface="Segoe UI" pitchFamily="34" charset="0"/>
                 <a:ea typeface="Segoe UI" pitchFamily="34" charset="-122"/>
                 <a:cs typeface="Segoe UI" pitchFamily="34" charset="-120"/>
               </a:rPr>
-              <a:t>Gate - golden path, zero dead buttons, offline behavior</a:t>
-            </a:r>
-            <a:endParaRPr lang="en-US" sz="1600" dirty="0"/>
-          </a:p>
-          <a:p>
-            <a:pPr marL="342900" indent="-342900">
-              <a:lnSpc>
-                <a:spcPct val="115000"/>
-              </a:lnSpc>
-              <a:spcAft>
-                <a:spcPts val="1000"/>
-              </a:spcAft>
-              <a:buSzPct val="100000"/>
-              <a:buChar char="▸"/>
-            </a:pPr>
-            <a:r>
-              <a:rPr lang="en-US" sz="1600" dirty="0">
-                <a:solidFill>
-                  <a:srgbClr val="CBD5E1"/>
+              <a:t>Production apps</a:t>
+            </a:r>
+            <a:endParaRPr lang="en-US" sz="1450" dirty="0"/>
+          </a:p>
+        </p:txBody>
+      </p:sp>
+      <p:sp>
+        <p:nvSpPr>
+          <p:cNvPr id="9" name="Text 7"/>
+          <p:cNvSpPr/>
+          <p:nvPr/>
+        </p:nvSpPr>
+        <p:spPr>
+          <a:xfrm>
+            <a:off x="1005840" y="4069080"/>
+            <a:ext cx="2057400" cy="685800"/>
+          </a:xfrm>
+          <a:prstGeom prst="rect">
+            <a:avLst/>
+          </a:prstGeom>
+          <a:noFill/>
+          <a:ln/>
+        </p:spPr>
+        <p:txBody>
+          <a:bodyPr wrap="square" rtlCol="0" anchor="ctr"/>
+          <a:lstStyle/>
+          <a:p>
+            <a:pPr algn="ctr" indent="0" marL="0">
+              <a:buNone/>
+            </a:pPr>
+            <a:r>
+              <a:rPr lang="en-US" sz="1050" dirty="0">
+                <a:solidFill>
+                  <a:srgbClr val="94A3B8"/>
                 </a:solidFill>
                 <a:latin typeface="Segoe UI" pitchFamily="34" charset="0"/>
                 <a:ea typeface="Segoe UI" pitchFamily="34" charset="-122"/>
                 <a:cs typeface="Segoe UI" pitchFamily="34" charset="-120"/>
               </a:rPr>
-              <a:t>Promote - version bump plus archived previous version</a:t>
-            </a:r>
-            <a:endParaRPr lang="en-US" sz="1600" dirty="0"/>
-          </a:p>
-          <a:p>
-            <a:pPr marL="342900" indent="-342900">
-              <a:lnSpc>
-                <a:spcPct val="115000"/>
-              </a:lnSpc>
-              <a:spcAft>
-                <a:spcPts val="1000"/>
-              </a:spcAft>
-              <a:buSzPct val="100000"/>
-              <a:buChar char="▸"/>
-            </a:pPr>
-            <a:r>
-              <a:rPr lang="en-US" sz="1600" dirty="0">
-                <a:solidFill>
-                  <a:srgbClr val="CBD5E1"/>
+              <a:t>Android apps that ship, update, and get supported</a:t>
+            </a:r>
+            <a:endParaRPr lang="en-US" sz="1050" dirty="0"/>
+          </a:p>
+        </p:txBody>
+      </p:sp>
+      <p:sp>
+        <p:nvSpPr>
+          <p:cNvPr id="10" name="Shape 8"/>
+          <p:cNvSpPr/>
+          <p:nvPr/>
+        </p:nvSpPr>
+        <p:spPr>
+          <a:xfrm>
+            <a:off x="3520440" y="2194560"/>
+            <a:ext cx="2423160" cy="2697480"/>
+          </a:xfrm>
+          <a:prstGeom prst="roundRect">
+            <a:avLst>
+              <a:gd name="adj" fmla="val 3019"/>
+            </a:avLst>
+          </a:prstGeom>
+          <a:solidFill>
+            <a:srgbClr val="111A2E"/>
+          </a:solidFill>
+          <a:ln w="12700">
+            <a:solidFill>
+              <a:srgbClr val="1E2D45"/>
+            </a:solidFill>
+            <a:prstDash val="solid"/>
+          </a:ln>
+        </p:spPr>
+      </p:sp>
+      <p:sp>
+        <p:nvSpPr>
+          <p:cNvPr id="11" name="Text 9"/>
+          <p:cNvSpPr/>
+          <p:nvPr/>
+        </p:nvSpPr>
+        <p:spPr>
+          <a:xfrm>
+            <a:off x="3657600" y="2514600"/>
+            <a:ext cx="2148840" cy="914400"/>
+          </a:xfrm>
+          <a:prstGeom prst="rect">
+            <a:avLst/>
+          </a:prstGeom>
+          <a:noFill/>
+          <a:ln/>
+        </p:spPr>
+        <p:txBody>
+          <a:bodyPr wrap="square" rtlCol="0" anchor="ctr"/>
+          <a:lstStyle/>
+          <a:p>
+            <a:pPr algn="ctr" indent="0" marL="0">
+              <a:buNone/>
+            </a:pPr>
+            <a:r>
+              <a:rPr lang="en-US" sz="3800" b="1" dirty="0">
+                <a:solidFill>
+                  <a:srgbClr val="06B6D4"/>
                 </a:solidFill>
                 <a:latin typeface="Segoe UI" pitchFamily="34" charset="0"/>
                 <a:ea typeface="Segoe UI" pitchFamily="34" charset="-122"/>
                 <a:cs typeface="Segoe UI" pitchFamily="34" charset="-120"/>
               </a:rPr>
-              <a:t>Record - evidence written down or it did not happen</a:t>
-            </a:r>
-            <a:endParaRPr lang="en-US" sz="1600" dirty="0"/>
-          </a:p>
-        </p:txBody>
-      </p:sp>
-      <p:sp>
-        <p:nvSpPr>
-          <p:cNvPr id="7" name="Text 5"/>
-          <p:cNvSpPr/>
-          <p:nvPr/>
-        </p:nvSpPr>
-        <p:spPr>
-          <a:xfrm>
-            <a:off x="10698480" y="6355080"/>
+              <a:t>9+</a:t>
+            </a:r>
+            <a:endParaRPr lang="en-US" sz="3800" dirty="0"/>
+          </a:p>
+        </p:txBody>
+      </p:sp>
+      <p:sp>
+        <p:nvSpPr>
+          <p:cNvPr id="12" name="Text 10"/>
+          <p:cNvSpPr/>
+          <p:nvPr/>
+        </p:nvSpPr>
+        <p:spPr>
+          <a:xfrm>
+            <a:off x="3657600" y="3520440"/>
+            <a:ext cx="2148840" cy="502920"/>
+          </a:xfrm>
+          <a:prstGeom prst="rect">
+            <a:avLst/>
+          </a:prstGeom>
+          <a:noFill/>
+          <a:ln/>
+        </p:spPr>
+        <p:txBody>
+          <a:bodyPr wrap="square" rtlCol="0" anchor="ctr"/>
+          <a:lstStyle/>
+          <a:p>
+            <a:pPr algn="ctr" indent="0" marL="0">
+              <a:buNone/>
+            </a:pPr>
+            <a:r>
+              <a:rPr lang="en-US" sz="1450" b="1" dirty="0">
+                <a:solidFill>
+                  <a:srgbClr val="FFFFFF"/>
+                </a:solidFill>
+                <a:latin typeface="Segoe UI" pitchFamily="34" charset="0"/>
+                <a:ea typeface="Segoe UI" pitchFamily="34" charset="-122"/>
+                <a:cs typeface="Segoe UI" pitchFamily="34" charset="-120"/>
+              </a:rPr>
+              <a:t>AI agents</a:t>
+            </a:r>
+            <a:endParaRPr lang="en-US" sz="1450" dirty="0"/>
+          </a:p>
+        </p:txBody>
+      </p:sp>
+      <p:sp>
+        <p:nvSpPr>
+          <p:cNvPr id="13" name="Text 11"/>
+          <p:cNvSpPr/>
+          <p:nvPr/>
+        </p:nvSpPr>
+        <p:spPr>
+          <a:xfrm>
+            <a:off x="3703320" y="4069080"/>
+            <a:ext cx="2057400" cy="685800"/>
+          </a:xfrm>
+          <a:prstGeom prst="rect">
+            <a:avLst/>
+          </a:prstGeom>
+          <a:noFill/>
+          <a:ln/>
+        </p:spPr>
+        <p:txBody>
+          <a:bodyPr wrap="square" rtlCol="0" anchor="ctr"/>
+          <a:lstStyle/>
+          <a:p>
+            <a:pPr algn="ctr" indent="0" marL="0">
+              <a:buNone/>
+            </a:pPr>
+            <a:r>
+              <a:rPr lang="en-US" sz="1050" dirty="0">
+                <a:solidFill>
+                  <a:srgbClr val="94A3B8"/>
+                </a:solidFill>
+                <a:latin typeface="Segoe UI" pitchFamily="34" charset="0"/>
+                <a:ea typeface="Segoe UI" pitchFamily="34" charset="-122"/>
+                <a:cs typeface="Segoe UI" pitchFamily="34" charset="-120"/>
+              </a:rPr>
+              <a:t>One human plus a specialist workforce under gated releases</a:t>
+            </a:r>
+            <a:endParaRPr lang="en-US" sz="1050" dirty="0"/>
+          </a:p>
+        </p:txBody>
+      </p:sp>
+      <p:sp>
+        <p:nvSpPr>
+          <p:cNvPr id="14" name="Shape 12"/>
+          <p:cNvSpPr/>
+          <p:nvPr/>
+        </p:nvSpPr>
+        <p:spPr>
+          <a:xfrm>
+            <a:off x="6217920" y="2194560"/>
+            <a:ext cx="2423160" cy="2697480"/>
+          </a:xfrm>
+          <a:prstGeom prst="roundRect">
+            <a:avLst>
+              <a:gd name="adj" fmla="val 3019"/>
+            </a:avLst>
+          </a:prstGeom>
+          <a:solidFill>
+            <a:srgbClr val="111A2E"/>
+          </a:solidFill>
+          <a:ln w="12700">
+            <a:solidFill>
+              <a:srgbClr val="1E2D45"/>
+            </a:solidFill>
+            <a:prstDash val="solid"/>
+          </a:ln>
+        </p:spPr>
+      </p:sp>
+      <p:sp>
+        <p:nvSpPr>
+          <p:cNvPr id="15" name="Text 13"/>
+          <p:cNvSpPr/>
+          <p:nvPr/>
+        </p:nvSpPr>
+        <p:spPr>
+          <a:xfrm>
+            <a:off x="6355080" y="2514600"/>
+            <a:ext cx="2148840" cy="914400"/>
+          </a:xfrm>
+          <a:prstGeom prst="rect">
+            <a:avLst/>
+          </a:prstGeom>
+          <a:noFill/>
+          <a:ln/>
+        </p:spPr>
+        <p:txBody>
+          <a:bodyPr wrap="square" rtlCol="0" anchor="ctr"/>
+          <a:lstStyle/>
+          <a:p>
+            <a:pPr algn="ctr" indent="0" marL="0">
+              <a:buNone/>
+            </a:pPr>
+            <a:r>
+              <a:rPr lang="en-US" sz="3800" b="1" dirty="0">
+                <a:solidFill>
+                  <a:srgbClr val="22D3A0"/>
+                </a:solidFill>
+                <a:latin typeface="Segoe UI" pitchFamily="34" charset="0"/>
+                <a:ea typeface="Segoe UI" pitchFamily="34" charset="-122"/>
+                <a:cs typeface="Segoe UI" pitchFamily="34" charset="-120"/>
+              </a:rPr>
+              <a:t>8.7K+</a:t>
+            </a:r>
+            <a:endParaRPr lang="en-US" sz="3800" dirty="0"/>
+          </a:p>
+        </p:txBody>
+      </p:sp>
+      <p:sp>
+        <p:nvSpPr>
+          <p:cNvPr id="16" name="Text 14"/>
+          <p:cNvSpPr/>
+          <p:nvPr/>
+        </p:nvSpPr>
+        <p:spPr>
+          <a:xfrm>
+            <a:off x="6355080" y="3520440"/>
+            <a:ext cx="2148840" cy="502920"/>
+          </a:xfrm>
+          <a:prstGeom prst="rect">
+            <a:avLst/>
+          </a:prstGeom>
+          <a:noFill/>
+          <a:ln/>
+        </p:spPr>
+        <p:txBody>
+          <a:bodyPr wrap="square" rtlCol="0" anchor="ctr"/>
+          <a:lstStyle/>
+          <a:p>
+            <a:pPr algn="ctr" indent="0" marL="0">
+              <a:buNone/>
+            </a:pPr>
+            <a:r>
+              <a:rPr lang="en-US" sz="1450" b="1" dirty="0">
+                <a:solidFill>
+                  <a:srgbClr val="FFFFFF"/>
+                </a:solidFill>
+                <a:latin typeface="Segoe UI" pitchFamily="34" charset="0"/>
+                <a:ea typeface="Segoe UI" pitchFamily="34" charset="-122"/>
+                <a:cs typeface="Segoe UI" pitchFamily="34" charset="-120"/>
+              </a:rPr>
+              <a:t>LOC frameworks</a:t>
+            </a:r>
+            <a:endParaRPr lang="en-US" sz="1450" dirty="0"/>
+          </a:p>
+        </p:txBody>
+      </p:sp>
+      <p:sp>
+        <p:nvSpPr>
+          <p:cNvPr id="17" name="Text 15"/>
+          <p:cNvSpPr/>
+          <p:nvPr/>
+        </p:nvSpPr>
+        <p:spPr>
+          <a:xfrm>
+            <a:off x="6400800" y="4069080"/>
+            <a:ext cx="2057400" cy="685800"/>
+          </a:xfrm>
+          <a:prstGeom prst="rect">
+            <a:avLst/>
+          </a:prstGeom>
+          <a:noFill/>
+          <a:ln/>
+        </p:spPr>
+        <p:txBody>
+          <a:bodyPr wrap="square" rtlCol="0" anchor="ctr"/>
+          <a:lstStyle/>
+          <a:p>
+            <a:pPr algn="ctr" indent="0" marL="0">
+              <a:buNone/>
+            </a:pPr>
+            <a:r>
+              <a:rPr lang="en-US" sz="1050" dirty="0">
+                <a:solidFill>
+                  <a:srgbClr val="94A3B8"/>
+                </a:solidFill>
+                <a:latin typeface="Segoe UI" pitchFamily="34" charset="0"/>
+                <a:ea typeface="Segoe UI" pitchFamily="34" charset="-122"/>
+                <a:cs typeface="Segoe UI" pitchFamily="34" charset="-120"/>
+              </a:rPr>
+              <a:t>ODIS and the Web Scraping Toolkit, both open source</a:t>
+            </a:r>
+            <a:endParaRPr lang="en-US" sz="1050" dirty="0"/>
+          </a:p>
+        </p:txBody>
+      </p:sp>
+      <p:sp>
+        <p:nvSpPr>
+          <p:cNvPr id="18" name="Shape 16"/>
+          <p:cNvSpPr/>
+          <p:nvPr/>
+        </p:nvSpPr>
+        <p:spPr>
+          <a:xfrm>
+            <a:off x="8915400" y="2194560"/>
+            <a:ext cx="2423160" cy="2697480"/>
+          </a:xfrm>
+          <a:prstGeom prst="roundRect">
+            <a:avLst>
+              <a:gd name="adj" fmla="val 3019"/>
+            </a:avLst>
+          </a:prstGeom>
+          <a:solidFill>
+            <a:srgbClr val="111A2E"/>
+          </a:solidFill>
+          <a:ln w="12700">
+            <a:solidFill>
+              <a:srgbClr val="1E2D45"/>
+            </a:solidFill>
+            <a:prstDash val="solid"/>
+          </a:ln>
+        </p:spPr>
+      </p:sp>
+      <p:sp>
+        <p:nvSpPr>
+          <p:cNvPr id="19" name="Text 17"/>
+          <p:cNvSpPr/>
+          <p:nvPr/>
+        </p:nvSpPr>
+        <p:spPr>
+          <a:xfrm>
+            <a:off x="9052560" y="2514600"/>
+            <a:ext cx="2148840" cy="914400"/>
+          </a:xfrm>
+          <a:prstGeom prst="rect">
+            <a:avLst/>
+          </a:prstGeom>
+          <a:noFill/>
+          <a:ln/>
+        </p:spPr>
+        <p:txBody>
+          <a:bodyPr wrap="square" rtlCol="0" anchor="ctr"/>
+          <a:lstStyle/>
+          <a:p>
+            <a:pPr algn="ctr" indent="0" marL="0">
+              <a:buNone/>
+            </a:pPr>
+            <a:r>
+              <a:rPr lang="en-US" sz="3800" b="1" dirty="0">
+                <a:solidFill>
+                  <a:srgbClr val="F59E0B"/>
+                </a:solidFill>
+                <a:latin typeface="Segoe UI" pitchFamily="34" charset="0"/>
+                <a:ea typeface="Segoe UI" pitchFamily="34" charset="-122"/>
+                <a:cs typeface="Segoe UI" pitchFamily="34" charset="-120"/>
+              </a:rPr>
+              <a:t>100%</a:t>
+            </a:r>
+            <a:endParaRPr lang="en-US" sz="3800" dirty="0"/>
+          </a:p>
+        </p:txBody>
+      </p:sp>
+      <p:sp>
+        <p:nvSpPr>
+          <p:cNvPr id="20" name="Text 18"/>
+          <p:cNvSpPr/>
+          <p:nvPr/>
+        </p:nvSpPr>
+        <p:spPr>
+          <a:xfrm>
+            <a:off x="9052560" y="3520440"/>
+            <a:ext cx="2148840" cy="502920"/>
+          </a:xfrm>
+          <a:prstGeom prst="rect">
+            <a:avLst/>
+          </a:prstGeom>
+          <a:noFill/>
+          <a:ln/>
+        </p:spPr>
+        <p:txBody>
+          <a:bodyPr wrap="square" rtlCol="0" anchor="ctr"/>
+          <a:lstStyle/>
+          <a:p>
+            <a:pPr algn="ctr" indent="0" marL="0">
+              <a:buNone/>
+            </a:pPr>
+            <a:r>
+              <a:rPr lang="en-US" sz="1450" b="1" dirty="0">
+                <a:solidFill>
+                  <a:srgbClr val="FFFFFF"/>
+                </a:solidFill>
+                <a:latin typeface="Segoe UI" pitchFamily="34" charset="0"/>
+                <a:ea typeface="Segoe UI" pitchFamily="34" charset="-122"/>
+                <a:cs typeface="Segoe UI" pitchFamily="34" charset="-120"/>
+              </a:rPr>
+              <a:t>Router accuracy</a:t>
+            </a:r>
+            <a:endParaRPr lang="en-US" sz="1450" dirty="0"/>
+          </a:p>
+        </p:txBody>
+      </p:sp>
+      <p:sp>
+        <p:nvSpPr>
+          <p:cNvPr id="21" name="Text 19"/>
+          <p:cNvSpPr/>
+          <p:nvPr/>
+        </p:nvSpPr>
+        <p:spPr>
+          <a:xfrm>
+            <a:off x="9098280" y="4069080"/>
+            <a:ext cx="2057400" cy="685800"/>
+          </a:xfrm>
+          <a:prstGeom prst="rect">
+            <a:avLst/>
+          </a:prstGeom>
+          <a:noFill/>
+          <a:ln/>
+        </p:spPr>
+        <p:txBody>
+          <a:bodyPr wrap="square" rtlCol="0" anchor="ctr"/>
+          <a:lstStyle/>
+          <a:p>
+            <a:pPr algn="ctr" indent="0" marL="0">
+              <a:buNone/>
+            </a:pPr>
+            <a:r>
+              <a:rPr lang="en-US" sz="1050" dirty="0">
+                <a:solidFill>
+                  <a:srgbClr val="94A3B8"/>
+                </a:solidFill>
+                <a:latin typeface="Segoe UI" pitchFamily="34" charset="0"/>
+                <a:ea typeface="Segoe UI" pitchFamily="34" charset="-122"/>
+                <a:cs typeface="Segoe UI" pitchFamily="34" charset="-120"/>
+              </a:rPr>
+              <a:t>On the 30-query validation set, with 51/52 production checks</a:t>
+            </a:r>
+            <a:endParaRPr lang="en-US" sz="1050" dirty="0"/>
+          </a:p>
+        </p:txBody>
+      </p:sp>
+      <p:sp>
+        <p:nvSpPr>
+          <p:cNvPr id="22" name="Shape 20"/>
+          <p:cNvSpPr/>
+          <p:nvPr/>
+        </p:nvSpPr>
+        <p:spPr>
+          <a:xfrm>
+            <a:off x="822960" y="5413248"/>
+            <a:ext cx="10515600" cy="0"/>
+          </a:xfrm>
+          <a:prstGeom prst="line">
+            <a:avLst/>
+          </a:prstGeom>
+          <a:noFill/>
+          <a:ln w="12700">
+            <a:solidFill>
+              <a:srgbClr val="1E2D45"/>
+            </a:solidFill>
+            <a:prstDash val="solid"/>
+          </a:ln>
+        </p:spPr>
+      </p:sp>
+      <p:sp>
+        <p:nvSpPr>
+          <p:cNvPr id="23" name="Text 21"/>
+          <p:cNvSpPr/>
+          <p:nvPr/>
+        </p:nvSpPr>
+        <p:spPr>
+          <a:xfrm>
+            <a:off x="822960" y="5504688"/>
+            <a:ext cx="10424160" cy="411480"/>
+          </a:xfrm>
+          <a:prstGeom prst="rect">
+            <a:avLst/>
+          </a:prstGeom>
+          <a:noFill/>
+          <a:ln/>
+        </p:spPr>
+        <p:txBody>
+          <a:bodyPr wrap="square" rtlCol="0" anchor="ctr"/>
+          <a:lstStyle/>
+          <a:p>
+            <a:pPr indent="0" marL="0">
+              <a:buNone/>
+            </a:pPr>
+            <a:r>
+              <a:rPr lang="en-US" sz="1300" i="1" dirty="0">
+                <a:solidFill>
+                  <a:srgbClr val="06B6D4"/>
+                </a:solidFill>
+                <a:latin typeface="Segoe UI" pitchFamily="34" charset="0"/>
+                <a:ea typeface="Segoe UI" pitchFamily="34" charset="-122"/>
+                <a:cs typeface="Segoe UI" pitchFamily="34" charset="-120"/>
+              </a:rPr>
+              <a:t>→  A one-person company is not a smaller team; it is a different architecture.</a:t>
+            </a:r>
+            <a:endParaRPr lang="en-US" sz="1300" dirty="0"/>
+          </a:p>
+        </p:txBody>
+      </p:sp>
+      <p:sp>
+        <p:nvSpPr>
+          <p:cNvPr id="24" name="Text 22"/>
+          <p:cNvSpPr/>
+          <p:nvPr/>
+        </p:nvSpPr>
+        <p:spPr>
+          <a:xfrm>
+            <a:off x="10698480" y="6382512"/>
             <a:ext cx="1188720" cy="365760"/>
           </a:xfrm>
           <a:prstGeom prst="rect">
@@ -2609,7 +6752,7 @@
                 <a:ea typeface="Consolas" pitchFamily="34" charset="-122"/>
                 <a:cs typeface="Consolas" pitchFamily="34" charset="-120"/>
               </a:rPr>
-              <a:t>4 / 8</a:t>
+              <a:t>4 / 13</a:t>
             </a:r>
             <a:endParaRPr lang="en-US" sz="1000" dirty="0"/>
           </a:p>
@@ -2720,7 +6863,7 @@
                 <a:ea typeface="Consolas" pitchFamily="34" charset="-122"/>
                 <a:cs typeface="Consolas" pitchFamily="34" charset="-120"/>
               </a:rPr>
-              <a:t>OPERATIONS</a:t>
+              <a:t>THE PIPELINE</a:t>
             </a:r>
             <a:endParaRPr lang="en-US" sz="1200" dirty="0"/>
           </a:p>
@@ -2734,8 +6877,8 @@
         </p:nvSpPr>
         <p:spPr>
           <a:xfrm>
-            <a:off x="822960" y="960120"/>
-            <a:ext cx="10515600" cy="868680"/>
+            <a:off x="822960" y="914400"/>
+            <a:ext cx="10561320" cy="868680"/>
           </a:xfrm>
           <a:prstGeom prst="rect">
             <a:avLst/>
@@ -2751,7 +6894,7 @@
               <a:buNone/>
             </a:pPr>
             <a:r>
-              <a:rPr lang="en-US" sz="3000" b="1" dirty="0">
+              <a:rPr lang="en-US" sz="2700" b="1" dirty="0">
                 <a:solidFill>
                   <a:srgbClr val="FFFFFF"/>
                 </a:solidFill>
@@ -2759,69 +6902,143 @@
                 <a:ea typeface="Segoe UI" pitchFamily="34" charset="-122"/>
                 <a:cs typeface="Segoe UI" pitchFamily="34" charset="-120"/>
               </a:rPr>
-              <a:t>Protocol-driven, human-approved</a:t>
-            </a:r>
-            <a:endParaRPr lang="en-US" sz="3000" dirty="0"/>
-          </a:p>
-        </p:txBody>
-      </p:sp>
-      <p:sp>
-        <p:nvSpPr>
-          <p:cNvPr id="6" name="Text 4"/>
-          <p:cNvSpPr/>
-          <p:nvPr/>
-        </p:nvSpPr>
-        <p:spPr>
-          <a:xfrm>
-            <a:off x="868680" y="2057400"/>
-            <a:ext cx="10424160" cy="3566160"/>
-          </a:xfrm>
-          <a:prstGeom prst="rect">
-            <a:avLst/>
-          </a:prstGeom>
-          <a:noFill/>
-          <a:ln/>
-        </p:spPr>
-        <p:txBody>
-          <a:bodyPr wrap="square" rtlCol="0" anchor="t"/>
-          <a:lstStyle/>
-          <a:p>
-            <a:pPr marL="342900" indent="-342900">
-              <a:lnSpc>
-                <a:spcPct val="115000"/>
-              </a:lnSpc>
-              <a:spcAft>
-                <a:spcPts val="1000"/>
-              </a:spcAft>
-              <a:buSzPct val="100000"/>
-              <a:buChar char="▸"/>
-            </a:pPr>
-            <a:r>
-              <a:rPr lang="en-US" sz="1600" dirty="0">
-                <a:solidFill>
-                  <a:srgbClr val="CBD5E1"/>
+              <a:t>The pipeline is the product: brief to shipped in five stages</a:t>
+            </a:r>
+            <a:endParaRPr lang="en-US" sz="2700" dirty="0"/>
+          </a:p>
+        </p:txBody>
+      </p:sp>
+      <p:sp>
+        <p:nvSpPr>
+          <p:cNvPr id="6" name="Shape 4"/>
+          <p:cNvSpPr/>
+          <p:nvPr/>
+        </p:nvSpPr>
+        <p:spPr>
+          <a:xfrm>
+            <a:off x="774040" y="2514600"/>
+            <a:ext cx="1938528" cy="2103120"/>
+          </a:xfrm>
+          <a:prstGeom prst="roundRect">
+            <a:avLst>
+              <a:gd name="adj" fmla="val 3302"/>
+            </a:avLst>
+          </a:prstGeom>
+          <a:solidFill>
+            <a:srgbClr val="111A2E"/>
+          </a:solidFill>
+          <a:ln w="19050">
+            <a:solidFill>
+              <a:srgbClr val="3B82F6"/>
+            </a:solidFill>
+            <a:prstDash val="solid"/>
+          </a:ln>
+        </p:spPr>
+      </p:sp>
+      <p:sp>
+        <p:nvSpPr>
+          <p:cNvPr id="7" name="Text 5"/>
+          <p:cNvSpPr/>
+          <p:nvPr/>
+        </p:nvSpPr>
+        <p:spPr>
+          <a:xfrm>
+            <a:off x="902056" y="2633472"/>
+            <a:ext cx="1682496" cy="310896"/>
+          </a:xfrm>
+          <a:prstGeom prst="rect">
+            <a:avLst/>
+          </a:prstGeom>
+          <a:noFill/>
+          <a:ln/>
+        </p:spPr>
+        <p:txBody>
+          <a:bodyPr wrap="square" rtlCol="0" anchor="ctr"/>
+          <a:lstStyle/>
+          <a:p>
+            <a:pPr indent="0" marL="0">
+              <a:buNone/>
+            </a:pPr>
+            <a:r>
+              <a:rPr lang="en-US" sz="1100" b="1" dirty="0">
+                <a:solidFill>
+                  <a:srgbClr val="3B82F6"/>
+                </a:solidFill>
+                <a:latin typeface="Consolas" pitchFamily="34" charset="0"/>
+                <a:ea typeface="Consolas" pitchFamily="34" charset="-122"/>
+                <a:cs typeface="Consolas" pitchFamily="34" charset="-120"/>
+              </a:rPr>
+              <a:t>01</a:t>
+            </a:r>
+            <a:endParaRPr lang="en-US" sz="1100" dirty="0"/>
+          </a:p>
+        </p:txBody>
+      </p:sp>
+      <p:sp>
+        <p:nvSpPr>
+          <p:cNvPr id="8" name="Text 6"/>
+          <p:cNvSpPr/>
+          <p:nvPr/>
+        </p:nvSpPr>
+        <p:spPr>
+          <a:xfrm>
+            <a:off x="902056" y="2962656"/>
+            <a:ext cx="1682496" cy="566928"/>
+          </a:xfrm>
+          <a:prstGeom prst="rect">
+            <a:avLst/>
+          </a:prstGeom>
+          <a:noFill/>
+          <a:ln/>
+        </p:spPr>
+        <p:txBody>
+          <a:bodyPr wrap="square" rtlCol="0" anchor="ctr"/>
+          <a:lstStyle/>
+          <a:p>
+            <a:pPr indent="0" marL="0">
+              <a:buNone/>
+            </a:pPr>
+            <a:r>
+              <a:rPr lang="en-US" sz="1350" b="1" dirty="0">
+                <a:solidFill>
+                  <a:srgbClr val="FFFFFF"/>
                 </a:solidFill>
                 <a:latin typeface="Segoe UI" pitchFamily="34" charset="0"/>
                 <a:ea typeface="Segoe UI" pitchFamily="34" charset="-122"/>
                 <a:cs typeface="Segoe UI" pitchFamily="34" charset="-120"/>
               </a:rPr>
-              <a:t>Shared rooms instead of private whispers</a:t>
-            </a:r>
-            <a:endParaRPr lang="en-US" sz="1600" dirty="0"/>
-          </a:p>
-          <a:p>
-            <a:pPr marL="342900" indent="-342900">
-              <a:lnSpc>
-                <a:spcPct val="115000"/>
-              </a:lnSpc>
-              <a:spcAft>
-                <a:spcPts val="1000"/>
-              </a:spcAft>
-              <a:buSzPct val="100000"/>
-              <a:buChar char="▸"/>
-            </a:pPr>
-            <a:r>
-              <a:rPr lang="en-US" sz="1600" dirty="0">
+              <a:t>Brief</a:t>
+            </a:r>
+            <a:endParaRPr lang="en-US" sz="1350" dirty="0"/>
+          </a:p>
+        </p:txBody>
+      </p:sp>
+      <p:sp>
+        <p:nvSpPr>
+          <p:cNvPr id="9" name="Text 7"/>
+          <p:cNvSpPr/>
+          <p:nvPr/>
+        </p:nvSpPr>
+        <p:spPr>
+          <a:xfrm>
+            <a:off x="902056" y="3566160"/>
+            <a:ext cx="1682496" cy="960120"/>
+          </a:xfrm>
+          <a:prstGeom prst="rect">
+            <a:avLst/>
+          </a:prstGeom>
+          <a:noFill/>
+          <a:ln/>
+        </p:spPr>
+        <p:txBody>
+          <a:bodyPr wrap="square" rtlCol="0" anchor="ctr"/>
+          <a:lstStyle/>
+          <a:p>
+            <a:pPr indent="0" marL="0">
+              <a:buNone/>
+            </a:pPr>
+            <a:r>
+              <a:rPr lang="en-US" sz="980" dirty="0">
                 <a:solidFill>
                   <a:srgbClr val="CBD5E1"/>
                 </a:solidFill>
@@ -2829,47 +7046,163 @@
                 <a:ea typeface="Segoe UI" pitchFamily="34" charset="-122"/>
                 <a:cs typeface="Segoe UI" pitchFamily="34" charset="-120"/>
               </a:rPr>
-              <a:t>Per-agent queues so parallel work never collides</a:t>
-            </a:r>
-            <a:endParaRPr lang="en-US" sz="1600" dirty="0"/>
-          </a:p>
-          <a:p>
-            <a:pPr marL="342900" indent="-342900">
-              <a:lnSpc>
-                <a:spcPct val="115000"/>
-              </a:lnSpc>
-              <a:spcAft>
-                <a:spcPts val="1000"/>
-              </a:spcAft>
-              <a:buSzPct val="100000"/>
-              <a:buChar char="▸"/>
-            </a:pPr>
-            <a:r>
-              <a:rPr lang="en-US" sz="1600" dirty="0">
-                <a:solidFill>
-                  <a:srgbClr val="CBD5E1"/>
+              <a:t>Work enters as a structured brief, in the same format every time.</a:t>
+            </a:r>
+            <a:endParaRPr lang="en-US" sz="980" dirty="0"/>
+          </a:p>
+        </p:txBody>
+      </p:sp>
+      <p:sp>
+        <p:nvSpPr>
+          <p:cNvPr id="10" name="Shape 8"/>
+          <p:cNvSpPr/>
+          <p:nvPr/>
+        </p:nvSpPr>
+        <p:spPr>
+          <a:xfrm>
+            <a:off x="2726284" y="3419856"/>
+            <a:ext cx="210312" cy="274320"/>
+          </a:xfrm>
+          <a:prstGeom prst="rightArrow">
+            <a:avLst/>
+          </a:prstGeom>
+          <a:solidFill>
+            <a:srgbClr val="06B6D4"/>
+          </a:solidFill>
+          <a:ln/>
+        </p:spPr>
+      </p:sp>
+      <p:sp>
+        <p:nvSpPr>
+          <p:cNvPr id="11" name="Shape 9"/>
+          <p:cNvSpPr/>
+          <p:nvPr/>
+        </p:nvSpPr>
+        <p:spPr>
+          <a:xfrm>
+            <a:off x="2950312" y="2514600"/>
+            <a:ext cx="1938528" cy="2103120"/>
+          </a:xfrm>
+          <a:prstGeom prst="roundRect">
+            <a:avLst>
+              <a:gd name="adj" fmla="val 3302"/>
+            </a:avLst>
+          </a:prstGeom>
+          <a:solidFill>
+            <a:srgbClr val="111A2E"/>
+          </a:solidFill>
+          <a:ln w="19050">
+            <a:solidFill>
+              <a:srgbClr val="06B6D4"/>
+            </a:solidFill>
+            <a:prstDash val="solid"/>
+          </a:ln>
+        </p:spPr>
+      </p:sp>
+      <p:sp>
+        <p:nvSpPr>
+          <p:cNvPr id="12" name="Text 10"/>
+          <p:cNvSpPr/>
+          <p:nvPr/>
+        </p:nvSpPr>
+        <p:spPr>
+          <a:xfrm>
+            <a:off x="3078328" y="2633472"/>
+            <a:ext cx="1682496" cy="310896"/>
+          </a:xfrm>
+          <a:prstGeom prst="rect">
+            <a:avLst/>
+          </a:prstGeom>
+          <a:noFill/>
+          <a:ln/>
+        </p:spPr>
+        <p:txBody>
+          <a:bodyPr wrap="square" rtlCol="0" anchor="ctr"/>
+          <a:lstStyle/>
+          <a:p>
+            <a:pPr indent="0" marL="0">
+              <a:buNone/>
+            </a:pPr>
+            <a:r>
+              <a:rPr lang="en-US" sz="1100" b="1" dirty="0">
+                <a:solidFill>
+                  <a:srgbClr val="06B6D4"/>
+                </a:solidFill>
+                <a:latin typeface="Consolas" pitchFamily="34" charset="0"/>
+                <a:ea typeface="Consolas" pitchFamily="34" charset="-122"/>
+                <a:cs typeface="Consolas" pitchFamily="34" charset="-120"/>
+              </a:rPr>
+              <a:t>02</a:t>
+            </a:r>
+            <a:endParaRPr lang="en-US" sz="1100" dirty="0"/>
+          </a:p>
+        </p:txBody>
+      </p:sp>
+      <p:sp>
+        <p:nvSpPr>
+          <p:cNvPr id="13" name="Text 11"/>
+          <p:cNvSpPr/>
+          <p:nvPr/>
+        </p:nvSpPr>
+        <p:spPr>
+          <a:xfrm>
+            <a:off x="3078328" y="2962656"/>
+            <a:ext cx="1682496" cy="566928"/>
+          </a:xfrm>
+          <a:prstGeom prst="rect">
+            <a:avLst/>
+          </a:prstGeom>
+          <a:noFill/>
+          <a:ln/>
+        </p:spPr>
+        <p:txBody>
+          <a:bodyPr wrap="square" rtlCol="0" anchor="ctr"/>
+          <a:lstStyle/>
+          <a:p>
+            <a:pPr indent="0" marL="0">
+              <a:buNone/>
+            </a:pPr>
+            <a:r>
+              <a:rPr lang="en-US" sz="1350" b="1" dirty="0">
+                <a:solidFill>
+                  <a:srgbClr val="FFFFFF"/>
                 </a:solidFill>
                 <a:latin typeface="Segoe UI" pitchFamily="34" charset="0"/>
                 <a:ea typeface="Segoe UI" pitchFamily="34" charset="-122"/>
                 <a:cs typeface="Segoe UI" pitchFamily="34" charset="-120"/>
               </a:rPr>
-              <a:t>Approval queue: agents never approve their own releases</a:t>
-            </a:r>
-            <a:endParaRPr lang="en-US" sz="1600" dirty="0"/>
-          </a:p>
-          <a:p>
-            <a:pPr marL="342900" indent="-342900">
-              <a:lnSpc>
-                <a:spcPct val="115000"/>
-              </a:lnSpc>
-              <a:spcAft>
-                <a:spcPts val="1000"/>
-              </a:spcAft>
-              <a:buSzPct val="100000"/>
-              <a:buChar char="▸"/>
-            </a:pPr>
-            <a:r>
-              <a:rPr lang="en-US" sz="1600" dirty="0">
+              <a:t>Build</a:t>
+            </a:r>
+            <a:endParaRPr lang="en-US" sz="1350" dirty="0"/>
+          </a:p>
+        </p:txBody>
+      </p:sp>
+      <p:sp>
+        <p:nvSpPr>
+          <p:cNvPr id="14" name="Text 12"/>
+          <p:cNvSpPr/>
+          <p:nvPr/>
+        </p:nvSpPr>
+        <p:spPr>
+          <a:xfrm>
+            <a:off x="3078328" y="3566160"/>
+            <a:ext cx="1682496" cy="960120"/>
+          </a:xfrm>
+          <a:prstGeom prst="rect">
+            <a:avLst/>
+          </a:prstGeom>
+          <a:noFill/>
+          <a:ln/>
+        </p:spPr>
+        <p:txBody>
+          <a:bodyPr wrap="square" rtlCol="0" anchor="ctr"/>
+          <a:lstStyle/>
+          <a:p>
+            <a:pPr indent="0" marL="0">
+              <a:buNone/>
+            </a:pPr>
+            <a:r>
+              <a:rPr lang="en-US" sz="980" dirty="0">
                 <a:solidFill>
                   <a:srgbClr val="CBD5E1"/>
                 </a:solidFill>
@@ -2877,22 +7210,69 @@
                 <a:ea typeface="Segoe UI" pitchFamily="34" charset="-122"/>
                 <a:cs typeface="Segoe UI" pitchFamily="34" charset="-120"/>
               </a:rPr>
-              <a:t>Watchdog recovery when machines misbehave</a:t>
-            </a:r>
-            <a:endParaRPr lang="en-US" sz="1600" dirty="0"/>
-          </a:p>
-        </p:txBody>
-      </p:sp>
-      <p:sp>
-        <p:nvSpPr>
-          <p:cNvPr id="7" name="Text 5"/>
-          <p:cNvSpPr/>
-          <p:nvPr/>
-        </p:nvSpPr>
-        <p:spPr>
-          <a:xfrm>
-            <a:off x="10698480" y="6355080"/>
-            <a:ext cx="1188720" cy="365760"/>
+              <a:t>Engineering agents produce versioned APKs from structured specs.</a:t>
+            </a:r>
+            <a:endParaRPr lang="en-US" sz="980" dirty="0"/>
+          </a:p>
+        </p:txBody>
+      </p:sp>
+      <p:sp>
+        <p:nvSpPr>
+          <p:cNvPr id="15" name="Shape 13"/>
+          <p:cNvSpPr/>
+          <p:nvPr/>
+        </p:nvSpPr>
+        <p:spPr>
+          <a:xfrm>
+            <a:off x="4902556" y="3419856"/>
+            <a:ext cx="210312" cy="274320"/>
+          </a:xfrm>
+          <a:prstGeom prst="rightArrow">
+            <a:avLst/>
+          </a:prstGeom>
+          <a:solidFill>
+            <a:srgbClr val="06B6D4"/>
+          </a:solidFill>
+          <a:ln/>
+        </p:spPr>
+      </p:sp>
+      <p:sp>
+        <p:nvSpPr>
+          <p:cNvPr id="16" name="Shape 14"/>
+          <p:cNvSpPr/>
+          <p:nvPr/>
+        </p:nvSpPr>
+        <p:spPr>
+          <a:xfrm>
+            <a:off x="5126584" y="2514600"/>
+            <a:ext cx="1938528" cy="2103120"/>
+          </a:xfrm>
+          <a:prstGeom prst="roundRect">
+            <a:avLst>
+              <a:gd name="adj" fmla="val 3302"/>
+            </a:avLst>
+          </a:prstGeom>
+          <a:solidFill>
+            <a:srgbClr val="111A2E"/>
+          </a:solidFill>
+          <a:ln w="19050">
+            <a:solidFill>
+              <a:srgbClr val="3B82F6"/>
+            </a:solidFill>
+            <a:prstDash val="solid"/>
+          </a:ln>
+        </p:spPr>
+      </p:sp>
+      <p:sp>
+        <p:nvSpPr>
+          <p:cNvPr id="17" name="Text 15"/>
+          <p:cNvSpPr/>
+          <p:nvPr/>
+        </p:nvSpPr>
+        <p:spPr>
+          <a:xfrm>
+            <a:off x="5254600" y="2633472"/>
+            <a:ext cx="1682496" cy="310896"/>
           </a:xfrm>
           <a:prstGeom prst="rect">
             <a:avLst/>
@@ -2904,19 +7284,526 @@
           <a:bodyPr wrap="square" rtlCol="0" anchor="ctr"/>
           <a:lstStyle/>
           <a:p>
-            <a:pPr algn="r" indent="0" marL="0">
+            <a:pPr indent="0" marL="0">
               <a:buNone/>
             </a:pPr>
             <a:r>
-              <a:rPr lang="en-US" sz="1000" dirty="0">
-                <a:solidFill>
-                  <a:srgbClr val="64748B"/>
+              <a:rPr lang="en-US" sz="1100" b="1" dirty="0">
+                <a:solidFill>
+                  <a:srgbClr val="3B82F6"/>
                 </a:solidFill>
                 <a:latin typeface="Consolas" pitchFamily="34" charset="0"/>
                 <a:ea typeface="Consolas" pitchFamily="34" charset="-122"/>
                 <a:cs typeface="Consolas" pitchFamily="34" charset="-120"/>
               </a:rPr>
-              <a:t>5 / 8</a:t>
+              <a:t>03</a:t>
+            </a:r>
+            <a:endParaRPr lang="en-US" sz="1100" dirty="0"/>
+          </a:p>
+        </p:txBody>
+      </p:sp>
+      <p:sp>
+        <p:nvSpPr>
+          <p:cNvPr id="18" name="Text 16"/>
+          <p:cNvSpPr/>
+          <p:nvPr/>
+        </p:nvSpPr>
+        <p:spPr>
+          <a:xfrm>
+            <a:off x="5254600" y="2962656"/>
+            <a:ext cx="1682496" cy="566928"/>
+          </a:xfrm>
+          <a:prstGeom prst="rect">
+            <a:avLst/>
+          </a:prstGeom>
+          <a:noFill/>
+          <a:ln/>
+        </p:spPr>
+        <p:txBody>
+          <a:bodyPr wrap="square" rtlCol="0" anchor="ctr"/>
+          <a:lstStyle/>
+          <a:p>
+            <a:pPr indent="0" marL="0">
+              <a:buNone/>
+            </a:pPr>
+            <a:r>
+              <a:rPr lang="en-US" sz="1350" b="1" dirty="0">
+                <a:solidFill>
+                  <a:srgbClr val="FFFFFF"/>
+                </a:solidFill>
+                <a:latin typeface="Segoe UI" pitchFamily="34" charset="0"/>
+                <a:ea typeface="Segoe UI" pitchFamily="34" charset="-122"/>
+                <a:cs typeface="Segoe UI" pitchFamily="34" charset="-120"/>
+              </a:rPr>
+              <a:t>Gate</a:t>
+            </a:r>
+            <a:endParaRPr lang="en-US" sz="1350" dirty="0"/>
+          </a:p>
+        </p:txBody>
+      </p:sp>
+      <p:sp>
+        <p:nvSpPr>
+          <p:cNvPr id="19" name="Text 17"/>
+          <p:cNvSpPr/>
+          <p:nvPr/>
+        </p:nvSpPr>
+        <p:spPr>
+          <a:xfrm>
+            <a:off x="5254600" y="3566160"/>
+            <a:ext cx="1682496" cy="960120"/>
+          </a:xfrm>
+          <a:prstGeom prst="rect">
+            <a:avLst/>
+          </a:prstGeom>
+          <a:noFill/>
+          <a:ln/>
+        </p:spPr>
+        <p:txBody>
+          <a:bodyPr wrap="square" rtlCol="0" anchor="ctr"/>
+          <a:lstStyle/>
+          <a:p>
+            <a:pPr indent="0" marL="0">
+              <a:buNone/>
+            </a:pPr>
+            <a:r>
+              <a:rPr lang="en-US" sz="980" dirty="0">
+                <a:solidFill>
+                  <a:srgbClr val="CBD5E1"/>
+                </a:solidFill>
+                <a:latin typeface="Segoe UI" pitchFamily="34" charset="0"/>
+                <a:ea typeface="Segoe UI" pitchFamily="34" charset="-122"/>
+                <a:cs typeface="Segoe UI" pitchFamily="34" charset="-120"/>
+              </a:rPr>
+              <a:t>QA walks the golden path, sweeps for dead buttons, and checks offline behavior.</a:t>
+            </a:r>
+            <a:endParaRPr lang="en-US" sz="980" dirty="0"/>
+          </a:p>
+        </p:txBody>
+      </p:sp>
+      <p:sp>
+        <p:nvSpPr>
+          <p:cNvPr id="20" name="Shape 18"/>
+          <p:cNvSpPr/>
+          <p:nvPr/>
+        </p:nvSpPr>
+        <p:spPr>
+          <a:xfrm>
+            <a:off x="7078828" y="3419856"/>
+            <a:ext cx="210312" cy="274320"/>
+          </a:xfrm>
+          <a:prstGeom prst="rightArrow">
+            <a:avLst/>
+          </a:prstGeom>
+          <a:solidFill>
+            <a:srgbClr val="06B6D4"/>
+          </a:solidFill>
+          <a:ln/>
+        </p:spPr>
+      </p:sp>
+      <p:sp>
+        <p:nvSpPr>
+          <p:cNvPr id="21" name="Shape 19"/>
+          <p:cNvSpPr/>
+          <p:nvPr/>
+        </p:nvSpPr>
+        <p:spPr>
+          <a:xfrm>
+            <a:off x="7302856" y="2514600"/>
+            <a:ext cx="1938528" cy="2103120"/>
+          </a:xfrm>
+          <a:prstGeom prst="roundRect">
+            <a:avLst>
+              <a:gd name="adj" fmla="val 3302"/>
+            </a:avLst>
+          </a:prstGeom>
+          <a:solidFill>
+            <a:srgbClr val="111A2E"/>
+          </a:solidFill>
+          <a:ln w="19050">
+            <a:solidFill>
+              <a:srgbClr val="06B6D4"/>
+            </a:solidFill>
+            <a:prstDash val="solid"/>
+          </a:ln>
+        </p:spPr>
+      </p:sp>
+      <p:sp>
+        <p:nvSpPr>
+          <p:cNvPr id="22" name="Text 20"/>
+          <p:cNvSpPr/>
+          <p:nvPr/>
+        </p:nvSpPr>
+        <p:spPr>
+          <a:xfrm>
+            <a:off x="7430872" y="2633472"/>
+            <a:ext cx="1682496" cy="310896"/>
+          </a:xfrm>
+          <a:prstGeom prst="rect">
+            <a:avLst/>
+          </a:prstGeom>
+          <a:noFill/>
+          <a:ln/>
+        </p:spPr>
+        <p:txBody>
+          <a:bodyPr wrap="square" rtlCol="0" anchor="ctr"/>
+          <a:lstStyle/>
+          <a:p>
+            <a:pPr indent="0" marL="0">
+              <a:buNone/>
+            </a:pPr>
+            <a:r>
+              <a:rPr lang="en-US" sz="1100" b="1" dirty="0">
+                <a:solidFill>
+                  <a:srgbClr val="06B6D4"/>
+                </a:solidFill>
+                <a:latin typeface="Consolas" pitchFamily="34" charset="0"/>
+                <a:ea typeface="Consolas" pitchFamily="34" charset="-122"/>
+                <a:cs typeface="Consolas" pitchFamily="34" charset="-120"/>
+              </a:rPr>
+              <a:t>04</a:t>
+            </a:r>
+            <a:endParaRPr lang="en-US" sz="1100" dirty="0"/>
+          </a:p>
+        </p:txBody>
+      </p:sp>
+      <p:sp>
+        <p:nvSpPr>
+          <p:cNvPr id="23" name="Text 21"/>
+          <p:cNvSpPr/>
+          <p:nvPr/>
+        </p:nvSpPr>
+        <p:spPr>
+          <a:xfrm>
+            <a:off x="7430872" y="2962656"/>
+            <a:ext cx="1682496" cy="566928"/>
+          </a:xfrm>
+          <a:prstGeom prst="rect">
+            <a:avLst/>
+          </a:prstGeom>
+          <a:noFill/>
+          <a:ln/>
+        </p:spPr>
+        <p:txBody>
+          <a:bodyPr wrap="square" rtlCol="0" anchor="ctr"/>
+          <a:lstStyle/>
+          <a:p>
+            <a:pPr indent="0" marL="0">
+              <a:buNone/>
+            </a:pPr>
+            <a:r>
+              <a:rPr lang="en-US" sz="1350" b="1" dirty="0">
+                <a:solidFill>
+                  <a:srgbClr val="FFFFFF"/>
+                </a:solidFill>
+                <a:latin typeface="Segoe UI" pitchFamily="34" charset="0"/>
+                <a:ea typeface="Segoe UI" pitchFamily="34" charset="-122"/>
+                <a:cs typeface="Segoe UI" pitchFamily="34" charset="-120"/>
+              </a:rPr>
+              <a:t>Promote</a:t>
+            </a:r>
+            <a:endParaRPr lang="en-US" sz="1350" dirty="0"/>
+          </a:p>
+        </p:txBody>
+      </p:sp>
+      <p:sp>
+        <p:nvSpPr>
+          <p:cNvPr id="24" name="Text 22"/>
+          <p:cNvSpPr/>
+          <p:nvPr/>
+        </p:nvSpPr>
+        <p:spPr>
+          <a:xfrm>
+            <a:off x="7430872" y="3566160"/>
+            <a:ext cx="1682496" cy="960120"/>
+          </a:xfrm>
+          <a:prstGeom prst="rect">
+            <a:avLst/>
+          </a:prstGeom>
+          <a:noFill/>
+          <a:ln/>
+        </p:spPr>
+        <p:txBody>
+          <a:bodyPr wrap="square" rtlCol="0" anchor="ctr"/>
+          <a:lstStyle/>
+          <a:p>
+            <a:pPr indent="0" marL="0">
+              <a:buNone/>
+            </a:pPr>
+            <a:r>
+              <a:rPr lang="en-US" sz="980" dirty="0">
+                <a:solidFill>
+                  <a:srgbClr val="CBD5E1"/>
+                </a:solidFill>
+                <a:latin typeface="Segoe UI" pitchFamily="34" charset="0"/>
+                <a:ea typeface="Segoe UI" pitchFamily="34" charset="-122"/>
+                <a:cs typeface="Segoe UI" pitchFamily="34" charset="-120"/>
+              </a:rPr>
+              <a:t>New versions land in one promote folder while the previous build is archived.</a:t>
+            </a:r>
+            <a:endParaRPr lang="en-US" sz="980" dirty="0"/>
+          </a:p>
+        </p:txBody>
+      </p:sp>
+      <p:sp>
+        <p:nvSpPr>
+          <p:cNvPr id="25" name="Shape 23"/>
+          <p:cNvSpPr/>
+          <p:nvPr/>
+        </p:nvSpPr>
+        <p:spPr>
+          <a:xfrm>
+            <a:off x="9255100" y="3419856"/>
+            <a:ext cx="210312" cy="274320"/>
+          </a:xfrm>
+          <a:prstGeom prst="rightArrow">
+            <a:avLst/>
+          </a:prstGeom>
+          <a:solidFill>
+            <a:srgbClr val="06B6D4"/>
+          </a:solidFill>
+          <a:ln/>
+        </p:spPr>
+      </p:sp>
+      <p:sp>
+        <p:nvSpPr>
+          <p:cNvPr id="26" name="Shape 24"/>
+          <p:cNvSpPr/>
+          <p:nvPr/>
+        </p:nvSpPr>
+        <p:spPr>
+          <a:xfrm>
+            <a:off x="9479128" y="2514600"/>
+            <a:ext cx="1938528" cy="2103120"/>
+          </a:xfrm>
+          <a:prstGeom prst="roundRect">
+            <a:avLst>
+              <a:gd name="adj" fmla="val 3302"/>
+            </a:avLst>
+          </a:prstGeom>
+          <a:solidFill>
+            <a:srgbClr val="111A2E"/>
+          </a:solidFill>
+          <a:ln w="19050">
+            <a:solidFill>
+              <a:srgbClr val="3B82F6"/>
+            </a:solidFill>
+            <a:prstDash val="solid"/>
+          </a:ln>
+        </p:spPr>
+      </p:sp>
+      <p:sp>
+        <p:nvSpPr>
+          <p:cNvPr id="27" name="Text 25"/>
+          <p:cNvSpPr/>
+          <p:nvPr/>
+        </p:nvSpPr>
+        <p:spPr>
+          <a:xfrm>
+            <a:off x="9607144" y="2633472"/>
+            <a:ext cx="1682496" cy="310896"/>
+          </a:xfrm>
+          <a:prstGeom prst="rect">
+            <a:avLst/>
+          </a:prstGeom>
+          <a:noFill/>
+          <a:ln/>
+        </p:spPr>
+        <p:txBody>
+          <a:bodyPr wrap="square" rtlCol="0" anchor="ctr"/>
+          <a:lstStyle/>
+          <a:p>
+            <a:pPr indent="0" marL="0">
+              <a:buNone/>
+            </a:pPr>
+            <a:r>
+              <a:rPr lang="en-US" sz="1100" b="1" dirty="0">
+                <a:solidFill>
+                  <a:srgbClr val="3B82F6"/>
+                </a:solidFill>
+                <a:latin typeface="Consolas" pitchFamily="34" charset="0"/>
+                <a:ea typeface="Consolas" pitchFamily="34" charset="-122"/>
+                <a:cs typeface="Consolas" pitchFamily="34" charset="-120"/>
+              </a:rPr>
+              <a:t>05</a:t>
+            </a:r>
+            <a:endParaRPr lang="en-US" sz="1100" dirty="0"/>
+          </a:p>
+        </p:txBody>
+      </p:sp>
+      <p:sp>
+        <p:nvSpPr>
+          <p:cNvPr id="28" name="Text 26"/>
+          <p:cNvSpPr/>
+          <p:nvPr/>
+        </p:nvSpPr>
+        <p:spPr>
+          <a:xfrm>
+            <a:off x="9607144" y="2962656"/>
+            <a:ext cx="1682496" cy="566928"/>
+          </a:xfrm>
+          <a:prstGeom prst="rect">
+            <a:avLst/>
+          </a:prstGeom>
+          <a:noFill/>
+          <a:ln/>
+        </p:spPr>
+        <p:txBody>
+          <a:bodyPr wrap="square" rtlCol="0" anchor="ctr"/>
+          <a:lstStyle/>
+          <a:p>
+            <a:pPr indent="0" marL="0">
+              <a:buNone/>
+            </a:pPr>
+            <a:r>
+              <a:rPr lang="en-US" sz="1350" b="1" dirty="0">
+                <a:solidFill>
+                  <a:srgbClr val="FFFFFF"/>
+                </a:solidFill>
+                <a:latin typeface="Segoe UI" pitchFamily="34" charset="0"/>
+                <a:ea typeface="Segoe UI" pitchFamily="34" charset="-122"/>
+                <a:cs typeface="Segoe UI" pitchFamily="34" charset="-120"/>
+              </a:rPr>
+              <a:t>Record</a:t>
+            </a:r>
+            <a:endParaRPr lang="en-US" sz="1350" dirty="0"/>
+          </a:p>
+        </p:txBody>
+      </p:sp>
+      <p:sp>
+        <p:nvSpPr>
+          <p:cNvPr id="29" name="Text 27"/>
+          <p:cNvSpPr/>
+          <p:nvPr/>
+        </p:nvSpPr>
+        <p:spPr>
+          <a:xfrm>
+            <a:off x="9607144" y="3566160"/>
+            <a:ext cx="1682496" cy="960120"/>
+          </a:xfrm>
+          <a:prstGeom prst="rect">
+            <a:avLst/>
+          </a:prstGeom>
+          <a:noFill/>
+          <a:ln/>
+        </p:spPr>
+        <p:txBody>
+          <a:bodyPr wrap="square" rtlCol="0" anchor="ctr"/>
+          <a:lstStyle/>
+          <a:p>
+            <a:pPr indent="0" marL="0">
+              <a:buNone/>
+            </a:pPr>
+            <a:r>
+              <a:rPr lang="en-US" sz="980" dirty="0">
+                <a:solidFill>
+                  <a:srgbClr val="CBD5E1"/>
+                </a:solidFill>
+                <a:latin typeface="Segoe UI" pitchFamily="34" charset="0"/>
+                <a:ea typeface="Segoe UI" pitchFamily="34" charset="-122"/>
+                <a:cs typeface="Segoe UI" pitchFamily="34" charset="-120"/>
+              </a:rPr>
+              <a:t>Features, versions, and decisions are written down - or it did not happen.</a:t>
+            </a:r>
+            <a:endParaRPr lang="en-US" sz="980" dirty="0"/>
+          </a:p>
+        </p:txBody>
+      </p:sp>
+      <p:sp>
+        <p:nvSpPr>
+          <p:cNvPr id="30" name="Shape 28"/>
+          <p:cNvSpPr/>
+          <p:nvPr/>
+        </p:nvSpPr>
+        <p:spPr>
+          <a:xfrm>
+            <a:off x="822960" y="5961888"/>
+            <a:ext cx="10515600" cy="0"/>
+          </a:xfrm>
+          <a:prstGeom prst="line">
+            <a:avLst/>
+          </a:prstGeom>
+          <a:noFill/>
+          <a:ln w="12700">
+            <a:solidFill>
+              <a:srgbClr val="1E2D45"/>
+            </a:solidFill>
+            <a:prstDash val="solid"/>
+          </a:ln>
+        </p:spPr>
+      </p:sp>
+      <p:sp>
+        <p:nvSpPr>
+          <p:cNvPr id="31" name="Text 29"/>
+          <p:cNvSpPr/>
+          <p:nvPr/>
+        </p:nvSpPr>
+        <p:spPr>
+          <a:xfrm>
+            <a:off x="822960" y="6053328"/>
+            <a:ext cx="9692640" cy="457200"/>
+          </a:xfrm>
+          <a:prstGeom prst="rect">
+            <a:avLst/>
+          </a:prstGeom>
+          <a:noFill/>
+          <a:ln/>
+        </p:spPr>
+        <p:txBody>
+          <a:bodyPr wrap="square" rtlCol="0" anchor="ctr"/>
+          <a:lstStyle/>
+          <a:p>
+            <a:pPr indent="0" marL="0">
+              <a:buNone/>
+            </a:pPr>
+            <a:r>
+              <a:rPr lang="en-US" sz="1150" dirty="0">
+                <a:solidFill>
+                  <a:srgbClr val="64748B"/>
+                </a:solidFill>
+                <a:latin typeface="Segoe UI" pitchFamily="34" charset="0"/>
+                <a:ea typeface="Segoe UI" pitchFamily="34" charset="-122"/>
+                <a:cs typeface="Segoe UI" pitchFamily="34" charset="-120"/>
+              </a:rPr>
+              <a:t>With 30+ apps you do not maintain apps; you maintain a pipeline.</a:t>
+            </a:r>
+            <a:endParaRPr lang="en-US" sz="1150" dirty="0"/>
+          </a:p>
+        </p:txBody>
+      </p:sp>
+      <p:sp>
+        <p:nvSpPr>
+          <p:cNvPr id="32" name="Text 30"/>
+          <p:cNvSpPr/>
+          <p:nvPr/>
+        </p:nvSpPr>
+        <p:spPr>
+          <a:xfrm>
+            <a:off x="10698480" y="6382512"/>
+            <a:ext cx="1188720" cy="365760"/>
+          </a:xfrm>
+          <a:prstGeom prst="rect">
+            <a:avLst/>
+          </a:prstGeom>
+          <a:noFill/>
+          <a:ln/>
+        </p:spPr>
+        <p:txBody>
+          <a:bodyPr wrap="square" rtlCol="0" anchor="ctr"/>
+          <a:lstStyle/>
+          <a:p>
+            <a:pPr algn="r" indent="0" marL="0">
+              <a:buNone/>
+            </a:pPr>
+            <a:r>
+              <a:rPr lang="en-US" sz="1000" dirty="0">
+                <a:solidFill>
+                  <a:srgbClr val="64748B"/>
+                </a:solidFill>
+                <a:latin typeface="Consolas" pitchFamily="34" charset="0"/>
+                <a:ea typeface="Consolas" pitchFamily="34" charset="-122"/>
+                <a:cs typeface="Consolas" pitchFamily="34" charset="-120"/>
+              </a:rPr>
+              <a:t>5 / 13</a:t>
             </a:r>
             <a:endParaRPr lang="en-US" sz="1000" dirty="0"/>
           </a:p>
@@ -3027,7 +7914,7 @@
                 <a:ea typeface="Consolas" pitchFamily="34" charset="-122"/>
                 <a:cs typeface="Consolas" pitchFamily="34" charset="-120"/>
               </a:rPr>
-              <a:t>DAY TO DAY</a:t>
+              <a:t>THE STACK</a:t>
             </a:r>
             <a:endParaRPr lang="en-US" sz="1200" dirty="0"/>
           </a:p>
@@ -3041,8 +7928,8 @@
         </p:nvSpPr>
         <p:spPr>
           <a:xfrm>
-            <a:off x="822960" y="960120"/>
-            <a:ext cx="10515600" cy="868680"/>
+            <a:off x="822960" y="914400"/>
+            <a:ext cx="10561320" cy="868680"/>
           </a:xfrm>
           <a:prstGeom prst="rect">
             <a:avLst/>
@@ -3058,7 +7945,7 @@
               <a:buNone/>
             </a:pPr>
             <a:r>
-              <a:rPr lang="en-US" sz="3000" b="1" dirty="0">
+              <a:rPr lang="en-US" sz="2700" b="1" dirty="0">
                 <a:solidFill>
                   <a:srgbClr val="FFFFFF"/>
                 </a:solidFill>
@@ -3066,139 +7953,1350 @@
                 <a:ea typeface="Segoe UI" pitchFamily="34" charset="-122"/>
                 <a:cs typeface="Segoe UI" pitchFamily="34" charset="-120"/>
               </a:rPr>
-              <a:t>What it actually looks like</a:t>
-            </a:r>
-            <a:endParaRPr lang="en-US" sz="3000" dirty="0"/>
-          </a:p>
-        </p:txBody>
-      </p:sp>
-      <p:sp>
-        <p:nvSpPr>
-          <p:cNvPr id="6" name="Text 4"/>
-          <p:cNvSpPr/>
-          <p:nvPr/>
-        </p:nvSpPr>
-        <p:spPr>
-          <a:xfrm>
-            <a:off x="868680" y="2057400"/>
-            <a:ext cx="10424160" cy="3566160"/>
-          </a:xfrm>
-          <a:prstGeom prst="rect">
-            <a:avLst/>
-          </a:prstGeom>
-          <a:noFill/>
-          <a:ln/>
-        </p:spPr>
-        <p:txBody>
-          <a:bodyPr wrap="square" rtlCol="0" anchor="t"/>
-          <a:lstStyle/>
-          <a:p>
-            <a:pPr marL="342900" indent="-342900">
-              <a:lnSpc>
-                <a:spcPct val="115000"/>
-              </a:lnSpc>
-              <a:spcAft>
-                <a:spcPts val="1000"/>
-              </a:spcAft>
-              <a:buSzPct val="100000"/>
-              <a:buChar char="▸"/>
-            </a:pPr>
-            <a:r>
-              <a:rPr lang="en-US" sz="1600" dirty="0">
-                <a:solidFill>
-                  <a:srgbClr val="CBD5E1"/>
+              <a:t>Five layers replace the headcount</a:t>
+            </a:r>
+            <a:endParaRPr lang="en-US" sz="2700" dirty="0"/>
+          </a:p>
+        </p:txBody>
+      </p:sp>
+      <p:graphicFrame>
+        <p:nvGraphicFramePr>
+          <p:cNvPr id="7" name="Table 0"/>
+          <p:cNvGraphicFramePr>
+            <a:graphicFrameLocks noGrp="1"/>
+          </p:cNvGraphicFramePr>
+          <p:nvPr>
+            <p:extLst>
+              <p:ext uri="{D42A27DB-BD31-4B8C-83A1-F6EECF244321}">
+                <p14:modId xmlns:p14="http://schemas.microsoft.com/office/powerpoint/2010/main" val="1579011935"/>
+              </p:ext>
+            </p:extLst>
+          </p:nvPr>
+        </p:nvGraphicFramePr>
+        <p:xfrm>
+          <a:off x="822960" y="2011680"/>
+          <a:ext cx="10515600" cy="914400"/>
+        </p:xfrm>
+        <a:graphic>
+          <a:graphicData uri="http://schemas.openxmlformats.org/drawingml/2006/table">
+            <a:tbl>
+              <a:tblPr/>
+              <a:tblGrid>
+                <a:gridCol w="3505200"/>
+                <a:gridCol w="3505200"/>
+                <a:gridCol w="3505200"/>
+              </a:tblGrid>
+              <a:tr h="402336">
+                <a:tc>
+                  <a:txBody>
+                    <a:bodyPr/>
+                    <a:lstStyle/>
+                    <a:p>
+                      <a:pPr indent="0" marL="0">
+                        <a:buNone/>
+                      </a:pPr>
+                      <a:r>
+                        <a:rPr lang="en-US" sz="1150" b="1" dirty="0">
+                          <a:solidFill>
+                            <a:srgbClr val="FFFFFF"/>
+                          </a:solidFill>
+                          <a:latin typeface="Segoe UI" pitchFamily="34" charset="0"/>
+                          <a:ea typeface="Segoe UI" pitchFamily="34" charset="-122"/>
+                          <a:cs typeface="Segoe UI" pitchFamily="34" charset="-120"/>
+                        </a:rPr>
+                        <a:t>Layer</a:t>
+                      </a:r>
+                      <a:endParaRPr lang="en-US" sz="1150" dirty="0">
+                        <a:latin typeface="Segoe UI" charset="0"/>
+                        <a:ea typeface="Segoe UI" charset="0"/>
+                        <a:cs typeface="Segoe UI" charset="0"/>
+                      </a:endParaRPr>
+                    </a:p>
+                  </a:txBody>
+                  <a:tcPr marL="64008" marR="64008" marT="64008" marB="64008" anchor="ctr">
+                    <a:lnL w="6350" cap="flat" cmpd="sng" algn="ctr">
+                      <a:solidFill>
+                        <a:srgbClr val="24365A"/>
+                      </a:solidFill>
+                      <a:prstDash val="solid"/>
+                      <a:round/>
+                      <a:headEnd type="none" w="med" len="med"/>
+                      <a:tailEnd type="none" w="med" len="med"/>
+                    </a:lnL>
+                    <a:lnR w="6350" cap="flat" cmpd="sng" algn="ctr">
+                      <a:solidFill>
+                        <a:srgbClr val="24365A"/>
+                      </a:solidFill>
+                      <a:prstDash val="solid"/>
+                      <a:round/>
+                      <a:headEnd type="none" w="med" len="med"/>
+                      <a:tailEnd type="none" w="med" len="med"/>
+                    </a:lnR>
+                    <a:lnT w="6350" cap="flat" cmpd="sng" algn="ctr">
+                      <a:solidFill>
+                        <a:srgbClr val="24365A"/>
+                      </a:solidFill>
+                      <a:prstDash val="solid"/>
+                      <a:round/>
+                      <a:headEnd type="none" w="med" len="med"/>
+                      <a:tailEnd type="none" w="med" len="med"/>
+                    </a:lnT>
+                    <a:lnB w="6350" cap="flat" cmpd="sng" algn="ctr">
+                      <a:solidFill>
+                        <a:srgbClr val="24365A"/>
+                      </a:solidFill>
+                      <a:prstDash val="solid"/>
+                      <a:round/>
+                      <a:headEnd type="none" w="med" len="med"/>
+                      <a:tailEnd type="none" w="med" len="med"/>
+                    </a:lnB>
+                    <a:solidFill>
+                      <a:srgbClr val="16233B"/>
+                    </a:solidFill>
+                  </a:tcPr>
+                </a:tc>
+                <a:tc>
+                  <a:txBody>
+                    <a:bodyPr/>
+                    <a:lstStyle/>
+                    <a:p>
+                      <a:pPr indent="0" marL="0">
+                        <a:buNone/>
+                      </a:pPr>
+                      <a:r>
+                        <a:rPr lang="en-US" sz="1150" b="1" dirty="0">
+                          <a:solidFill>
+                            <a:srgbClr val="FFFFFF"/>
+                          </a:solidFill>
+                          <a:latin typeface="Segoe UI" pitchFamily="34" charset="0"/>
+                          <a:ea typeface="Segoe UI" pitchFamily="34" charset="-122"/>
+                          <a:cs typeface="Segoe UI" pitchFamily="34" charset="-120"/>
+                        </a:rPr>
+                        <a:t>Component</a:t>
+                      </a:r>
+                      <a:endParaRPr lang="en-US" sz="1150" dirty="0">
+                        <a:latin typeface="Segoe UI" charset="0"/>
+                        <a:ea typeface="Segoe UI" charset="0"/>
+                        <a:cs typeface="Segoe UI" charset="0"/>
+                      </a:endParaRPr>
+                    </a:p>
+                  </a:txBody>
+                  <a:tcPr marL="64008" marR="64008" marT="64008" marB="64008" anchor="ctr">
+                    <a:lnL w="6350" cap="flat" cmpd="sng" algn="ctr">
+                      <a:solidFill>
+                        <a:srgbClr val="24365A"/>
+                      </a:solidFill>
+                      <a:prstDash val="solid"/>
+                      <a:round/>
+                      <a:headEnd type="none" w="med" len="med"/>
+                      <a:tailEnd type="none" w="med" len="med"/>
+                    </a:lnL>
+                    <a:lnR w="6350" cap="flat" cmpd="sng" algn="ctr">
+                      <a:solidFill>
+                        <a:srgbClr val="24365A"/>
+                      </a:solidFill>
+                      <a:prstDash val="solid"/>
+                      <a:round/>
+                      <a:headEnd type="none" w="med" len="med"/>
+                      <a:tailEnd type="none" w="med" len="med"/>
+                    </a:lnR>
+                    <a:lnT w="6350" cap="flat" cmpd="sng" algn="ctr">
+                      <a:solidFill>
+                        <a:srgbClr val="24365A"/>
+                      </a:solidFill>
+                      <a:prstDash val="solid"/>
+                      <a:round/>
+                      <a:headEnd type="none" w="med" len="med"/>
+                      <a:tailEnd type="none" w="med" len="med"/>
+                    </a:lnT>
+                    <a:lnB w="6350" cap="flat" cmpd="sng" algn="ctr">
+                      <a:solidFill>
+                        <a:srgbClr val="24365A"/>
+                      </a:solidFill>
+                      <a:prstDash val="solid"/>
+                      <a:round/>
+                      <a:headEnd type="none" w="med" len="med"/>
+                      <a:tailEnd type="none" w="med" len="med"/>
+                    </a:lnB>
+                    <a:solidFill>
+                      <a:srgbClr val="16233B"/>
+                    </a:solidFill>
+                  </a:tcPr>
+                </a:tc>
+                <a:tc>
+                  <a:txBody>
+                    <a:bodyPr/>
+                    <a:lstStyle/>
+                    <a:p>
+                      <a:pPr indent="0" marL="0">
+                        <a:buNone/>
+                      </a:pPr>
+                      <a:r>
+                        <a:rPr lang="en-US" sz="1150" b="1" dirty="0">
+                          <a:solidFill>
+                            <a:srgbClr val="FFFFFF"/>
+                          </a:solidFill>
+                          <a:latin typeface="Segoe UI" pitchFamily="34" charset="0"/>
+                          <a:ea typeface="Segoe UI" pitchFamily="34" charset="-122"/>
+                          <a:cs typeface="Segoe UI" pitchFamily="34" charset="-120"/>
+                        </a:rPr>
+                        <a:t>Role</a:t>
+                      </a:r>
+                      <a:endParaRPr lang="en-US" sz="1150" dirty="0">
+                        <a:latin typeface="Segoe UI" charset="0"/>
+                        <a:ea typeface="Segoe UI" charset="0"/>
+                        <a:cs typeface="Segoe UI" charset="0"/>
+                      </a:endParaRPr>
+                    </a:p>
+                  </a:txBody>
+                  <a:tcPr marL="64008" marR="64008" marT="64008" marB="64008" anchor="ctr">
+                    <a:lnL w="6350" cap="flat" cmpd="sng" algn="ctr">
+                      <a:solidFill>
+                        <a:srgbClr val="24365A"/>
+                      </a:solidFill>
+                      <a:prstDash val="solid"/>
+                      <a:round/>
+                      <a:headEnd type="none" w="med" len="med"/>
+                      <a:tailEnd type="none" w="med" len="med"/>
+                    </a:lnL>
+                    <a:lnR w="6350" cap="flat" cmpd="sng" algn="ctr">
+                      <a:solidFill>
+                        <a:srgbClr val="24365A"/>
+                      </a:solidFill>
+                      <a:prstDash val="solid"/>
+                      <a:round/>
+                      <a:headEnd type="none" w="med" len="med"/>
+                      <a:tailEnd type="none" w="med" len="med"/>
+                    </a:lnR>
+                    <a:lnT w="6350" cap="flat" cmpd="sng" algn="ctr">
+                      <a:solidFill>
+                        <a:srgbClr val="24365A"/>
+                      </a:solidFill>
+                      <a:prstDash val="solid"/>
+                      <a:round/>
+                      <a:headEnd type="none" w="med" len="med"/>
+                      <a:tailEnd type="none" w="med" len="med"/>
+                    </a:lnT>
+                    <a:lnB w="6350" cap="flat" cmpd="sng" algn="ctr">
+                      <a:solidFill>
+                        <a:srgbClr val="24365A"/>
+                      </a:solidFill>
+                      <a:prstDash val="solid"/>
+                      <a:round/>
+                      <a:headEnd type="none" w="med" len="med"/>
+                      <a:tailEnd type="none" w="med" len="med"/>
+                    </a:lnB>
+                    <a:solidFill>
+                      <a:srgbClr val="16233B"/>
+                    </a:solidFill>
+                  </a:tcPr>
+                </a:tc>
+              </a:tr>
+              <a:tr h="402336">
+                <a:tc>
+                  <a:txBody>
+                    <a:bodyPr/>
+                    <a:lstStyle/>
+                    <a:p>
+                      <a:pPr indent="0" marL="0">
+                        <a:buNone/>
+                      </a:pPr>
+                      <a:r>
+                        <a:rPr lang="en-US" sz="1080" dirty="0">
+                          <a:solidFill>
+                            <a:srgbClr val="CBD5E1"/>
+                          </a:solidFill>
+                          <a:latin typeface="Segoe UI" pitchFamily="34" charset="0"/>
+                          <a:ea typeface="Segoe UI" pitchFamily="34" charset="-122"/>
+                          <a:cs typeface="Segoe UI" pitchFamily="34" charset="-120"/>
+                        </a:rPr>
+                        <a:t>Operating system</a:t>
+                      </a:r>
+                      <a:endParaRPr lang="en-US" sz="1080" dirty="0">
+                        <a:latin typeface="Segoe UI" charset="0"/>
+                        <a:ea typeface="Segoe UI" charset="0"/>
+                        <a:cs typeface="Segoe UI" charset="0"/>
+                      </a:endParaRPr>
+                    </a:p>
+                  </a:txBody>
+                  <a:tcPr marL="64008" marR="64008" marT="64008" marB="64008" anchor="ctr">
+                    <a:lnL w="6350" cap="flat" cmpd="sng" algn="ctr">
+                      <a:solidFill>
+                        <a:srgbClr val="24365A"/>
+                      </a:solidFill>
+                      <a:prstDash val="solid"/>
+                      <a:round/>
+                      <a:headEnd type="none" w="med" len="med"/>
+                      <a:tailEnd type="none" w="med" len="med"/>
+                    </a:lnL>
+                    <a:lnR w="6350" cap="flat" cmpd="sng" algn="ctr">
+                      <a:solidFill>
+                        <a:srgbClr val="24365A"/>
+                      </a:solidFill>
+                      <a:prstDash val="solid"/>
+                      <a:round/>
+                      <a:headEnd type="none" w="med" len="med"/>
+                      <a:tailEnd type="none" w="med" len="med"/>
+                    </a:lnR>
+                    <a:lnT w="6350" cap="flat" cmpd="sng" algn="ctr">
+                      <a:solidFill>
+                        <a:srgbClr val="24365A"/>
+                      </a:solidFill>
+                      <a:prstDash val="solid"/>
+                      <a:round/>
+                      <a:headEnd type="none" w="med" len="med"/>
+                      <a:tailEnd type="none" w="med" len="med"/>
+                    </a:lnT>
+                    <a:lnB w="6350" cap="flat" cmpd="sng" algn="ctr">
+                      <a:solidFill>
+                        <a:srgbClr val="24365A"/>
+                      </a:solidFill>
+                      <a:prstDash val="solid"/>
+                      <a:round/>
+                      <a:headEnd type="none" w="med" len="med"/>
+                      <a:tailEnd type="none" w="med" len="med"/>
+                    </a:lnB>
+                    <a:solidFill>
+                      <a:srgbClr val="101A2D"/>
+                    </a:solidFill>
+                  </a:tcPr>
+                </a:tc>
+                <a:tc>
+                  <a:txBody>
+                    <a:bodyPr/>
+                    <a:lstStyle/>
+                    <a:p>
+                      <a:pPr indent="0" marL="0">
+                        <a:buNone/>
+                      </a:pPr>
+                      <a:r>
+                        <a:rPr lang="en-US" sz="1080" dirty="0">
+                          <a:solidFill>
+                            <a:srgbClr val="CBD5E1"/>
+                          </a:solidFill>
+                          <a:latin typeface="Segoe UI" pitchFamily="34" charset="0"/>
+                          <a:ea typeface="Segoe UI" pitchFamily="34" charset="-122"/>
+                          <a:cs typeface="Segoe UI" pitchFamily="34" charset="-120"/>
+                        </a:rPr>
+                        <a:t>ZalinOS kernel</a:t>
+                      </a:r>
+                      <a:endParaRPr lang="en-US" sz="1080" dirty="0">
+                        <a:latin typeface="Segoe UI" charset="0"/>
+                        <a:ea typeface="Segoe UI" charset="0"/>
+                        <a:cs typeface="Segoe UI" charset="0"/>
+                      </a:endParaRPr>
+                    </a:p>
+                  </a:txBody>
+                  <a:tcPr marL="64008" marR="64008" marT="64008" marB="64008" anchor="ctr">
+                    <a:lnL w="6350" cap="flat" cmpd="sng" algn="ctr">
+                      <a:solidFill>
+                        <a:srgbClr val="24365A"/>
+                      </a:solidFill>
+                      <a:prstDash val="solid"/>
+                      <a:round/>
+                      <a:headEnd type="none" w="med" len="med"/>
+                      <a:tailEnd type="none" w="med" len="med"/>
+                    </a:lnL>
+                    <a:lnR w="6350" cap="flat" cmpd="sng" algn="ctr">
+                      <a:solidFill>
+                        <a:srgbClr val="24365A"/>
+                      </a:solidFill>
+                      <a:prstDash val="solid"/>
+                      <a:round/>
+                      <a:headEnd type="none" w="med" len="med"/>
+                      <a:tailEnd type="none" w="med" len="med"/>
+                    </a:lnR>
+                    <a:lnT w="6350" cap="flat" cmpd="sng" algn="ctr">
+                      <a:solidFill>
+                        <a:srgbClr val="24365A"/>
+                      </a:solidFill>
+                      <a:prstDash val="solid"/>
+                      <a:round/>
+                      <a:headEnd type="none" w="med" len="med"/>
+                      <a:tailEnd type="none" w="med" len="med"/>
+                    </a:lnT>
+                    <a:lnB w="6350" cap="flat" cmpd="sng" algn="ctr">
+                      <a:solidFill>
+                        <a:srgbClr val="24365A"/>
+                      </a:solidFill>
+                      <a:prstDash val="solid"/>
+                      <a:round/>
+                      <a:headEnd type="none" w="med" len="med"/>
+                      <a:tailEnd type="none" w="med" len="med"/>
+                    </a:lnB>
+                    <a:solidFill>
+                      <a:srgbClr val="101A2D"/>
+                    </a:solidFill>
+                  </a:tcPr>
+                </a:tc>
+                <a:tc>
+                  <a:txBody>
+                    <a:bodyPr/>
+                    <a:lstStyle/>
+                    <a:p>
+                      <a:pPr indent="0" marL="0">
+                        <a:buNone/>
+                      </a:pPr>
+                      <a:r>
+                        <a:rPr lang="en-US" sz="1080" dirty="0">
+                          <a:solidFill>
+                            <a:srgbClr val="CBD5E1"/>
+                          </a:solidFill>
+                          <a:latin typeface="Segoe UI" pitchFamily="34" charset="0"/>
+                          <a:ea typeface="Segoe UI" pitchFamily="34" charset="-122"/>
+                          <a:cs typeface="Segoe UI" pitchFamily="34" charset="-120"/>
+                        </a:rPr>
+                        <a:t>Intent routing, agent lifecycle, shared memory, quality gates</a:t>
+                      </a:r>
+                      <a:endParaRPr lang="en-US" sz="1080" dirty="0">
+                        <a:latin typeface="Segoe UI" charset="0"/>
+                        <a:ea typeface="Segoe UI" charset="0"/>
+                        <a:cs typeface="Segoe UI" charset="0"/>
+                      </a:endParaRPr>
+                    </a:p>
+                  </a:txBody>
+                  <a:tcPr marL="64008" marR="64008" marT="64008" marB="64008" anchor="ctr">
+                    <a:lnL w="6350" cap="flat" cmpd="sng" algn="ctr">
+                      <a:solidFill>
+                        <a:srgbClr val="24365A"/>
+                      </a:solidFill>
+                      <a:prstDash val="solid"/>
+                      <a:round/>
+                      <a:headEnd type="none" w="med" len="med"/>
+                      <a:tailEnd type="none" w="med" len="med"/>
+                    </a:lnL>
+                    <a:lnR w="6350" cap="flat" cmpd="sng" algn="ctr">
+                      <a:solidFill>
+                        <a:srgbClr val="24365A"/>
+                      </a:solidFill>
+                      <a:prstDash val="solid"/>
+                      <a:round/>
+                      <a:headEnd type="none" w="med" len="med"/>
+                      <a:tailEnd type="none" w="med" len="med"/>
+                    </a:lnR>
+                    <a:lnT w="6350" cap="flat" cmpd="sng" algn="ctr">
+                      <a:solidFill>
+                        <a:srgbClr val="24365A"/>
+                      </a:solidFill>
+                      <a:prstDash val="solid"/>
+                      <a:round/>
+                      <a:headEnd type="none" w="med" len="med"/>
+                      <a:tailEnd type="none" w="med" len="med"/>
+                    </a:lnT>
+                    <a:lnB w="6350" cap="flat" cmpd="sng" algn="ctr">
+                      <a:solidFill>
+                        <a:srgbClr val="24365A"/>
+                      </a:solidFill>
+                      <a:prstDash val="solid"/>
+                      <a:round/>
+                      <a:headEnd type="none" w="med" len="med"/>
+                      <a:tailEnd type="none" w="med" len="med"/>
+                    </a:lnB>
+                    <a:solidFill>
+                      <a:srgbClr val="101A2D"/>
+                    </a:solidFill>
+                  </a:tcPr>
+                </a:tc>
+              </a:tr>
+              <a:tr h="402336">
+                <a:tc>
+                  <a:txBody>
+                    <a:bodyPr/>
+                    <a:lstStyle/>
+                    <a:p>
+                      <a:pPr indent="0" marL="0">
+                        <a:buNone/>
+                      </a:pPr>
+                      <a:r>
+                        <a:rPr lang="en-US" sz="1080" dirty="0">
+                          <a:solidFill>
+                            <a:srgbClr val="CBD5E1"/>
+                          </a:solidFill>
+                          <a:latin typeface="Segoe UI" pitchFamily="34" charset="0"/>
+                          <a:ea typeface="Segoe UI" pitchFamily="34" charset="-122"/>
+                          <a:cs typeface="Segoe UI" pitchFamily="34" charset="-120"/>
+                        </a:rPr>
+                        <a:t>Workforce</a:t>
+                      </a:r>
+                      <a:endParaRPr lang="en-US" sz="1080" dirty="0">
+                        <a:latin typeface="Segoe UI" charset="0"/>
+                        <a:ea typeface="Segoe UI" charset="0"/>
+                        <a:cs typeface="Segoe UI" charset="0"/>
+                      </a:endParaRPr>
+                    </a:p>
+                  </a:txBody>
+                  <a:tcPr marL="64008" marR="64008" marT="64008" marB="64008" anchor="ctr">
+                    <a:lnL w="6350" cap="flat" cmpd="sng" algn="ctr">
+                      <a:solidFill>
+                        <a:srgbClr val="24365A"/>
+                      </a:solidFill>
+                      <a:prstDash val="solid"/>
+                      <a:round/>
+                      <a:headEnd type="none" w="med" len="med"/>
+                      <a:tailEnd type="none" w="med" len="med"/>
+                    </a:lnL>
+                    <a:lnR w="6350" cap="flat" cmpd="sng" algn="ctr">
+                      <a:solidFill>
+                        <a:srgbClr val="24365A"/>
+                      </a:solidFill>
+                      <a:prstDash val="solid"/>
+                      <a:round/>
+                      <a:headEnd type="none" w="med" len="med"/>
+                      <a:tailEnd type="none" w="med" len="med"/>
+                    </a:lnR>
+                    <a:lnT w="6350" cap="flat" cmpd="sng" algn="ctr">
+                      <a:solidFill>
+                        <a:srgbClr val="24365A"/>
+                      </a:solidFill>
+                      <a:prstDash val="solid"/>
+                      <a:round/>
+                      <a:headEnd type="none" w="med" len="med"/>
+                      <a:tailEnd type="none" w="med" len="med"/>
+                    </a:lnT>
+                    <a:lnB w="6350" cap="flat" cmpd="sng" algn="ctr">
+                      <a:solidFill>
+                        <a:srgbClr val="24365A"/>
+                      </a:solidFill>
+                      <a:prstDash val="solid"/>
+                      <a:round/>
+                      <a:headEnd type="none" w="med" len="med"/>
+                      <a:tailEnd type="none" w="med" len="med"/>
+                    </a:lnB>
+                    <a:solidFill>
+                      <a:srgbClr val="0D1420"/>
+                    </a:solidFill>
+                  </a:tcPr>
+                </a:tc>
+                <a:tc>
+                  <a:txBody>
+                    <a:bodyPr/>
+                    <a:lstStyle/>
+                    <a:p>
+                      <a:pPr indent="0" marL="0">
+                        <a:buNone/>
+                      </a:pPr>
+                      <a:r>
+                        <a:rPr lang="en-US" sz="1080" dirty="0">
+                          <a:solidFill>
+                            <a:srgbClr val="CBD5E1"/>
+                          </a:solidFill>
+                          <a:latin typeface="Segoe UI" pitchFamily="34" charset="0"/>
+                          <a:ea typeface="Segoe UI" pitchFamily="34" charset="-122"/>
+                          <a:cs typeface="Segoe UI" pitchFamily="34" charset="-120"/>
+                        </a:rPr>
+                        <a:t>9+ specialist agents</a:t>
+                      </a:r>
+                      <a:endParaRPr lang="en-US" sz="1080" dirty="0">
+                        <a:latin typeface="Segoe UI" charset="0"/>
+                        <a:ea typeface="Segoe UI" charset="0"/>
+                        <a:cs typeface="Segoe UI" charset="0"/>
+                      </a:endParaRPr>
+                    </a:p>
+                  </a:txBody>
+                  <a:tcPr marL="64008" marR="64008" marT="64008" marB="64008" anchor="ctr">
+                    <a:lnL w="6350" cap="flat" cmpd="sng" algn="ctr">
+                      <a:solidFill>
+                        <a:srgbClr val="24365A"/>
+                      </a:solidFill>
+                      <a:prstDash val="solid"/>
+                      <a:round/>
+                      <a:headEnd type="none" w="med" len="med"/>
+                      <a:tailEnd type="none" w="med" len="med"/>
+                    </a:lnL>
+                    <a:lnR w="6350" cap="flat" cmpd="sng" algn="ctr">
+                      <a:solidFill>
+                        <a:srgbClr val="24365A"/>
+                      </a:solidFill>
+                      <a:prstDash val="solid"/>
+                      <a:round/>
+                      <a:headEnd type="none" w="med" len="med"/>
+                      <a:tailEnd type="none" w="med" len="med"/>
+                    </a:lnR>
+                    <a:lnT w="6350" cap="flat" cmpd="sng" algn="ctr">
+                      <a:solidFill>
+                        <a:srgbClr val="24365A"/>
+                      </a:solidFill>
+                      <a:prstDash val="solid"/>
+                      <a:round/>
+                      <a:headEnd type="none" w="med" len="med"/>
+                      <a:tailEnd type="none" w="med" len="med"/>
+                    </a:lnT>
+                    <a:lnB w="6350" cap="flat" cmpd="sng" algn="ctr">
+                      <a:solidFill>
+                        <a:srgbClr val="24365A"/>
+                      </a:solidFill>
+                      <a:prstDash val="solid"/>
+                      <a:round/>
+                      <a:headEnd type="none" w="med" len="med"/>
+                      <a:tailEnd type="none" w="med" len="med"/>
+                    </a:lnB>
+                    <a:solidFill>
+                      <a:srgbClr val="0D1420"/>
+                    </a:solidFill>
+                  </a:tcPr>
+                </a:tc>
+                <a:tc>
+                  <a:txBody>
+                    <a:bodyPr/>
+                    <a:lstStyle/>
+                    <a:p>
+                      <a:pPr indent="0" marL="0">
+                        <a:buNone/>
+                      </a:pPr>
+                      <a:r>
+                        <a:rPr lang="en-US" sz="1080" dirty="0">
+                          <a:solidFill>
+                            <a:srgbClr val="CBD5E1"/>
+                          </a:solidFill>
+                          <a:latin typeface="Segoe UI" pitchFamily="34" charset="0"/>
+                          <a:ea typeface="Segoe UI" pitchFamily="34" charset="-122"/>
+                          <a:cs typeface="Segoe UI" pitchFamily="34" charset="-120"/>
+                        </a:rPr>
+                        <a:t>Engineering, QA, PM, docs, secretary, data, GIS, OSINT, watchdog</a:t>
+                      </a:r>
+                      <a:endParaRPr lang="en-US" sz="1080" dirty="0">
+                        <a:latin typeface="Segoe UI" charset="0"/>
+                        <a:ea typeface="Segoe UI" charset="0"/>
+                        <a:cs typeface="Segoe UI" charset="0"/>
+                      </a:endParaRPr>
+                    </a:p>
+                  </a:txBody>
+                  <a:tcPr marL="64008" marR="64008" marT="64008" marB="64008" anchor="ctr">
+                    <a:lnL w="6350" cap="flat" cmpd="sng" algn="ctr">
+                      <a:solidFill>
+                        <a:srgbClr val="24365A"/>
+                      </a:solidFill>
+                      <a:prstDash val="solid"/>
+                      <a:round/>
+                      <a:headEnd type="none" w="med" len="med"/>
+                      <a:tailEnd type="none" w="med" len="med"/>
+                    </a:lnL>
+                    <a:lnR w="6350" cap="flat" cmpd="sng" algn="ctr">
+                      <a:solidFill>
+                        <a:srgbClr val="24365A"/>
+                      </a:solidFill>
+                      <a:prstDash val="solid"/>
+                      <a:round/>
+                      <a:headEnd type="none" w="med" len="med"/>
+                      <a:tailEnd type="none" w="med" len="med"/>
+                    </a:lnR>
+                    <a:lnT w="6350" cap="flat" cmpd="sng" algn="ctr">
+                      <a:solidFill>
+                        <a:srgbClr val="24365A"/>
+                      </a:solidFill>
+                      <a:prstDash val="solid"/>
+                      <a:round/>
+                      <a:headEnd type="none" w="med" len="med"/>
+                      <a:tailEnd type="none" w="med" len="med"/>
+                    </a:lnT>
+                    <a:lnB w="6350" cap="flat" cmpd="sng" algn="ctr">
+                      <a:solidFill>
+                        <a:srgbClr val="24365A"/>
+                      </a:solidFill>
+                      <a:prstDash val="solid"/>
+                      <a:round/>
+                      <a:headEnd type="none" w="med" len="med"/>
+                      <a:tailEnd type="none" w="med" len="med"/>
+                    </a:lnB>
+                    <a:solidFill>
+                      <a:srgbClr val="0D1420"/>
+                    </a:solidFill>
+                  </a:tcPr>
+                </a:tc>
+              </a:tr>
+              <a:tr h="402336">
+                <a:tc>
+                  <a:txBody>
+                    <a:bodyPr/>
+                    <a:lstStyle/>
+                    <a:p>
+                      <a:pPr indent="0" marL="0">
+                        <a:buNone/>
+                      </a:pPr>
+                      <a:r>
+                        <a:rPr lang="en-US" sz="1080" dirty="0">
+                          <a:solidFill>
+                            <a:srgbClr val="CBD5E1"/>
+                          </a:solidFill>
+                          <a:latin typeface="Segoe UI" pitchFamily="34" charset="0"/>
+                          <a:ea typeface="Segoe UI" pitchFamily="34" charset="-122"/>
+                          <a:cs typeface="Segoe UI" pitchFamily="34" charset="-120"/>
+                        </a:rPr>
+                        <a:t>Product pipeline</a:t>
+                      </a:r>
+                      <a:endParaRPr lang="en-US" sz="1080" dirty="0">
+                        <a:latin typeface="Segoe UI" charset="0"/>
+                        <a:ea typeface="Segoe UI" charset="0"/>
+                        <a:cs typeface="Segoe UI" charset="0"/>
+                      </a:endParaRPr>
+                    </a:p>
+                  </a:txBody>
+                  <a:tcPr marL="64008" marR="64008" marT="64008" marB="64008" anchor="ctr">
+                    <a:lnL w="6350" cap="flat" cmpd="sng" algn="ctr">
+                      <a:solidFill>
+                        <a:srgbClr val="24365A"/>
+                      </a:solidFill>
+                      <a:prstDash val="solid"/>
+                      <a:round/>
+                      <a:headEnd type="none" w="med" len="med"/>
+                      <a:tailEnd type="none" w="med" len="med"/>
+                    </a:lnL>
+                    <a:lnR w="6350" cap="flat" cmpd="sng" algn="ctr">
+                      <a:solidFill>
+                        <a:srgbClr val="24365A"/>
+                      </a:solidFill>
+                      <a:prstDash val="solid"/>
+                      <a:round/>
+                      <a:headEnd type="none" w="med" len="med"/>
+                      <a:tailEnd type="none" w="med" len="med"/>
+                    </a:lnR>
+                    <a:lnT w="6350" cap="flat" cmpd="sng" algn="ctr">
+                      <a:solidFill>
+                        <a:srgbClr val="24365A"/>
+                      </a:solidFill>
+                      <a:prstDash val="solid"/>
+                      <a:round/>
+                      <a:headEnd type="none" w="med" len="med"/>
+                      <a:tailEnd type="none" w="med" len="med"/>
+                    </a:lnT>
+                    <a:lnB w="6350" cap="flat" cmpd="sng" algn="ctr">
+                      <a:solidFill>
+                        <a:srgbClr val="24365A"/>
+                      </a:solidFill>
+                      <a:prstDash val="solid"/>
+                      <a:round/>
+                      <a:headEnd type="none" w="med" len="med"/>
+                      <a:tailEnd type="none" w="med" len="med"/>
+                    </a:lnB>
+                    <a:solidFill>
+                      <a:srgbClr val="101A2D"/>
+                    </a:solidFill>
+                  </a:tcPr>
+                </a:tc>
+                <a:tc>
+                  <a:txBody>
+                    <a:bodyPr/>
+                    <a:lstStyle/>
+                    <a:p>
+                      <a:pPr indent="0" marL="0">
+                        <a:buNone/>
+                      </a:pPr>
+                      <a:r>
+                        <a:rPr lang="en-US" sz="1080" dirty="0">
+                          <a:solidFill>
+                            <a:srgbClr val="CBD5E1"/>
+                          </a:solidFill>
+                          <a:latin typeface="Segoe UI" pitchFamily="34" charset="0"/>
+                          <a:ea typeface="Segoe UI" pitchFamily="34" charset="-122"/>
+                          <a:cs typeface="Segoe UI" pitchFamily="34" charset="-120"/>
+                        </a:rPr>
+                        <a:t>Gated release line</a:t>
+                      </a:r>
+                      <a:endParaRPr lang="en-US" sz="1080" dirty="0">
+                        <a:latin typeface="Segoe UI" charset="0"/>
+                        <a:ea typeface="Segoe UI" charset="0"/>
+                        <a:cs typeface="Segoe UI" charset="0"/>
+                      </a:endParaRPr>
+                    </a:p>
+                  </a:txBody>
+                  <a:tcPr marL="64008" marR="64008" marT="64008" marB="64008" anchor="ctr">
+                    <a:lnL w="6350" cap="flat" cmpd="sng" algn="ctr">
+                      <a:solidFill>
+                        <a:srgbClr val="24365A"/>
+                      </a:solidFill>
+                      <a:prstDash val="solid"/>
+                      <a:round/>
+                      <a:headEnd type="none" w="med" len="med"/>
+                      <a:tailEnd type="none" w="med" len="med"/>
+                    </a:lnL>
+                    <a:lnR w="6350" cap="flat" cmpd="sng" algn="ctr">
+                      <a:solidFill>
+                        <a:srgbClr val="24365A"/>
+                      </a:solidFill>
+                      <a:prstDash val="solid"/>
+                      <a:round/>
+                      <a:headEnd type="none" w="med" len="med"/>
+                      <a:tailEnd type="none" w="med" len="med"/>
+                    </a:lnR>
+                    <a:lnT w="6350" cap="flat" cmpd="sng" algn="ctr">
+                      <a:solidFill>
+                        <a:srgbClr val="24365A"/>
+                      </a:solidFill>
+                      <a:prstDash val="solid"/>
+                      <a:round/>
+                      <a:headEnd type="none" w="med" len="med"/>
+                      <a:tailEnd type="none" w="med" len="med"/>
+                    </a:lnT>
+                    <a:lnB w="6350" cap="flat" cmpd="sng" algn="ctr">
+                      <a:solidFill>
+                        <a:srgbClr val="24365A"/>
+                      </a:solidFill>
+                      <a:prstDash val="solid"/>
+                      <a:round/>
+                      <a:headEnd type="none" w="med" len="med"/>
+                      <a:tailEnd type="none" w="med" len="med"/>
+                    </a:lnB>
+                    <a:solidFill>
+                      <a:srgbClr val="101A2D"/>
+                    </a:solidFill>
+                  </a:tcPr>
+                </a:tc>
+                <a:tc>
+                  <a:txBody>
+                    <a:bodyPr/>
+                    <a:lstStyle/>
+                    <a:p>
+                      <a:pPr indent="0" marL="0">
+                        <a:buNone/>
+                      </a:pPr>
+                      <a:r>
+                        <a:rPr lang="en-US" sz="1080" dirty="0">
+                          <a:solidFill>
+                            <a:srgbClr val="CBD5E1"/>
+                          </a:solidFill>
+                          <a:latin typeface="Segoe UI" pitchFamily="34" charset="0"/>
+                          <a:ea typeface="Segoe UI" pitchFamily="34" charset="-122"/>
+                          <a:cs typeface="Segoe UI" pitchFamily="34" charset="-120"/>
+                        </a:rPr>
+                        <a:t>Structured specs, versioned builds, one promote folder, per-app status</a:t>
+                      </a:r>
+                      <a:endParaRPr lang="en-US" sz="1080" dirty="0">
+                        <a:latin typeface="Segoe UI" charset="0"/>
+                        <a:ea typeface="Segoe UI" charset="0"/>
+                        <a:cs typeface="Segoe UI" charset="0"/>
+                      </a:endParaRPr>
+                    </a:p>
+                  </a:txBody>
+                  <a:tcPr marL="64008" marR="64008" marT="64008" marB="64008" anchor="ctr">
+                    <a:lnL w="6350" cap="flat" cmpd="sng" algn="ctr">
+                      <a:solidFill>
+                        <a:srgbClr val="24365A"/>
+                      </a:solidFill>
+                      <a:prstDash val="solid"/>
+                      <a:round/>
+                      <a:headEnd type="none" w="med" len="med"/>
+                      <a:tailEnd type="none" w="med" len="med"/>
+                    </a:lnL>
+                    <a:lnR w="6350" cap="flat" cmpd="sng" algn="ctr">
+                      <a:solidFill>
+                        <a:srgbClr val="24365A"/>
+                      </a:solidFill>
+                      <a:prstDash val="solid"/>
+                      <a:round/>
+                      <a:headEnd type="none" w="med" len="med"/>
+                      <a:tailEnd type="none" w="med" len="med"/>
+                    </a:lnR>
+                    <a:lnT w="6350" cap="flat" cmpd="sng" algn="ctr">
+                      <a:solidFill>
+                        <a:srgbClr val="24365A"/>
+                      </a:solidFill>
+                      <a:prstDash val="solid"/>
+                      <a:round/>
+                      <a:headEnd type="none" w="med" len="med"/>
+                      <a:tailEnd type="none" w="med" len="med"/>
+                    </a:lnT>
+                    <a:lnB w="6350" cap="flat" cmpd="sng" algn="ctr">
+                      <a:solidFill>
+                        <a:srgbClr val="24365A"/>
+                      </a:solidFill>
+                      <a:prstDash val="solid"/>
+                      <a:round/>
+                      <a:headEnd type="none" w="med" len="med"/>
+                      <a:tailEnd type="none" w="med" len="med"/>
+                    </a:lnB>
+                    <a:solidFill>
+                      <a:srgbClr val="101A2D"/>
+                    </a:solidFill>
+                  </a:tcPr>
+                </a:tc>
+              </a:tr>
+              <a:tr h="402336">
+                <a:tc>
+                  <a:txBody>
+                    <a:bodyPr/>
+                    <a:lstStyle/>
+                    <a:p>
+                      <a:pPr indent="0" marL="0">
+                        <a:buNone/>
+                      </a:pPr>
+                      <a:r>
+                        <a:rPr lang="en-US" sz="1080" dirty="0">
+                          <a:solidFill>
+                            <a:srgbClr val="CBD5E1"/>
+                          </a:solidFill>
+                          <a:latin typeface="Segoe UI" pitchFamily="34" charset="0"/>
+                          <a:ea typeface="Segoe UI" pitchFamily="34" charset="-122"/>
+                          <a:cs typeface="Segoe UI" pitchFamily="34" charset="-120"/>
+                        </a:rPr>
+                        <a:t>Open-source base</a:t>
+                      </a:r>
+                      <a:endParaRPr lang="en-US" sz="1080" dirty="0">
+                        <a:latin typeface="Segoe UI" charset="0"/>
+                        <a:ea typeface="Segoe UI" charset="0"/>
+                        <a:cs typeface="Segoe UI" charset="0"/>
+                      </a:endParaRPr>
+                    </a:p>
+                  </a:txBody>
+                  <a:tcPr marL="64008" marR="64008" marT="64008" marB="64008" anchor="ctr">
+                    <a:lnL w="6350" cap="flat" cmpd="sng" algn="ctr">
+                      <a:solidFill>
+                        <a:srgbClr val="24365A"/>
+                      </a:solidFill>
+                      <a:prstDash val="solid"/>
+                      <a:round/>
+                      <a:headEnd type="none" w="med" len="med"/>
+                      <a:tailEnd type="none" w="med" len="med"/>
+                    </a:lnL>
+                    <a:lnR w="6350" cap="flat" cmpd="sng" algn="ctr">
+                      <a:solidFill>
+                        <a:srgbClr val="24365A"/>
+                      </a:solidFill>
+                      <a:prstDash val="solid"/>
+                      <a:round/>
+                      <a:headEnd type="none" w="med" len="med"/>
+                      <a:tailEnd type="none" w="med" len="med"/>
+                    </a:lnR>
+                    <a:lnT w="6350" cap="flat" cmpd="sng" algn="ctr">
+                      <a:solidFill>
+                        <a:srgbClr val="24365A"/>
+                      </a:solidFill>
+                      <a:prstDash val="solid"/>
+                      <a:round/>
+                      <a:headEnd type="none" w="med" len="med"/>
+                      <a:tailEnd type="none" w="med" len="med"/>
+                    </a:lnT>
+                    <a:lnB w="6350" cap="flat" cmpd="sng" algn="ctr">
+                      <a:solidFill>
+                        <a:srgbClr val="24365A"/>
+                      </a:solidFill>
+                      <a:prstDash val="solid"/>
+                      <a:round/>
+                      <a:headEnd type="none" w="med" len="med"/>
+                      <a:tailEnd type="none" w="med" len="med"/>
+                    </a:lnB>
+                    <a:solidFill>
+                      <a:srgbClr val="0D1420"/>
+                    </a:solidFill>
+                  </a:tcPr>
+                </a:tc>
+                <a:tc>
+                  <a:txBody>
+                    <a:bodyPr/>
+                    <a:lstStyle/>
+                    <a:p>
+                      <a:pPr indent="0" marL="0">
+                        <a:buNone/>
+                      </a:pPr>
+                      <a:r>
+                        <a:rPr lang="en-US" sz="1080" dirty="0">
+                          <a:solidFill>
+                            <a:srgbClr val="CBD5E1"/>
+                          </a:solidFill>
+                          <a:latin typeface="Segoe UI" pitchFamily="34" charset="0"/>
+                          <a:ea typeface="Segoe UI" pitchFamily="34" charset="-122"/>
+                          <a:cs typeface="Segoe UI" pitchFamily="34" charset="-120"/>
+                        </a:rPr>
+                        <a:t>ODIS + Web Scraping Toolkit</a:t>
+                      </a:r>
+                      <a:endParaRPr lang="en-US" sz="1080" dirty="0">
+                        <a:latin typeface="Segoe UI" charset="0"/>
+                        <a:ea typeface="Segoe UI" charset="0"/>
+                        <a:cs typeface="Segoe UI" charset="0"/>
+                      </a:endParaRPr>
+                    </a:p>
+                  </a:txBody>
+                  <a:tcPr marL="64008" marR="64008" marT="64008" marB="64008" anchor="ctr">
+                    <a:lnL w="6350" cap="flat" cmpd="sng" algn="ctr">
+                      <a:solidFill>
+                        <a:srgbClr val="24365A"/>
+                      </a:solidFill>
+                      <a:prstDash val="solid"/>
+                      <a:round/>
+                      <a:headEnd type="none" w="med" len="med"/>
+                      <a:tailEnd type="none" w="med" len="med"/>
+                    </a:lnL>
+                    <a:lnR w="6350" cap="flat" cmpd="sng" algn="ctr">
+                      <a:solidFill>
+                        <a:srgbClr val="24365A"/>
+                      </a:solidFill>
+                      <a:prstDash val="solid"/>
+                      <a:round/>
+                      <a:headEnd type="none" w="med" len="med"/>
+                      <a:tailEnd type="none" w="med" len="med"/>
+                    </a:lnR>
+                    <a:lnT w="6350" cap="flat" cmpd="sng" algn="ctr">
+                      <a:solidFill>
+                        <a:srgbClr val="24365A"/>
+                      </a:solidFill>
+                      <a:prstDash val="solid"/>
+                      <a:round/>
+                      <a:headEnd type="none" w="med" len="med"/>
+                      <a:tailEnd type="none" w="med" len="med"/>
+                    </a:lnT>
+                    <a:lnB w="6350" cap="flat" cmpd="sng" algn="ctr">
+                      <a:solidFill>
+                        <a:srgbClr val="24365A"/>
+                      </a:solidFill>
+                      <a:prstDash val="solid"/>
+                      <a:round/>
+                      <a:headEnd type="none" w="med" len="med"/>
+                      <a:tailEnd type="none" w="med" len="med"/>
+                    </a:lnB>
+                    <a:solidFill>
+                      <a:srgbClr val="0D1420"/>
+                    </a:solidFill>
+                  </a:tcPr>
+                </a:tc>
+                <a:tc>
+                  <a:txBody>
+                    <a:bodyPr/>
+                    <a:lstStyle/>
+                    <a:p>
+                      <a:pPr indent="0" marL="0">
+                        <a:buNone/>
+                      </a:pPr>
+                      <a:r>
+                        <a:rPr lang="en-US" sz="1080" dirty="0">
+                          <a:solidFill>
+                            <a:srgbClr val="CBD5E1"/>
+                          </a:solidFill>
+                          <a:latin typeface="Segoe UI" pitchFamily="34" charset="0"/>
+                          <a:ea typeface="Segoe UI" pitchFamily="34" charset="-122"/>
+                          <a:cs typeface="Segoe UI" pitchFamily="34" charset="-120"/>
+                        </a:rPr>
+                        <a:t>8.7K+ lines of data and collection infrastructure</a:t>
+                      </a:r>
+                      <a:endParaRPr lang="en-US" sz="1080" dirty="0">
+                        <a:latin typeface="Segoe UI" charset="0"/>
+                        <a:ea typeface="Segoe UI" charset="0"/>
+                        <a:cs typeface="Segoe UI" charset="0"/>
+                      </a:endParaRPr>
+                    </a:p>
+                  </a:txBody>
+                  <a:tcPr marL="64008" marR="64008" marT="64008" marB="64008" anchor="ctr">
+                    <a:lnL w="6350" cap="flat" cmpd="sng" algn="ctr">
+                      <a:solidFill>
+                        <a:srgbClr val="24365A"/>
+                      </a:solidFill>
+                      <a:prstDash val="solid"/>
+                      <a:round/>
+                      <a:headEnd type="none" w="med" len="med"/>
+                      <a:tailEnd type="none" w="med" len="med"/>
+                    </a:lnL>
+                    <a:lnR w="6350" cap="flat" cmpd="sng" algn="ctr">
+                      <a:solidFill>
+                        <a:srgbClr val="24365A"/>
+                      </a:solidFill>
+                      <a:prstDash val="solid"/>
+                      <a:round/>
+                      <a:headEnd type="none" w="med" len="med"/>
+                      <a:tailEnd type="none" w="med" len="med"/>
+                    </a:lnR>
+                    <a:lnT w="6350" cap="flat" cmpd="sng" algn="ctr">
+                      <a:solidFill>
+                        <a:srgbClr val="24365A"/>
+                      </a:solidFill>
+                      <a:prstDash val="solid"/>
+                      <a:round/>
+                      <a:headEnd type="none" w="med" len="med"/>
+                      <a:tailEnd type="none" w="med" len="med"/>
+                    </a:lnT>
+                    <a:lnB w="6350" cap="flat" cmpd="sng" algn="ctr">
+                      <a:solidFill>
+                        <a:srgbClr val="24365A"/>
+                      </a:solidFill>
+                      <a:prstDash val="solid"/>
+                      <a:round/>
+                      <a:headEnd type="none" w="med" len="med"/>
+                      <a:tailEnd type="none" w="med" len="med"/>
+                    </a:lnB>
+                    <a:solidFill>
+                      <a:srgbClr val="0D1420"/>
+                    </a:solidFill>
+                  </a:tcPr>
+                </a:tc>
+              </a:tr>
+              <a:tr h="402336">
+                <a:tc>
+                  <a:txBody>
+                    <a:bodyPr/>
+                    <a:lstStyle/>
+                    <a:p>
+                      <a:pPr indent="0" marL="0">
+                        <a:buNone/>
+                      </a:pPr>
+                      <a:r>
+                        <a:rPr lang="en-US" sz="1080" dirty="0">
+                          <a:solidFill>
+                            <a:srgbClr val="CBD5E1"/>
+                          </a:solidFill>
+                          <a:latin typeface="Segoe UI" pitchFamily="34" charset="0"/>
+                          <a:ea typeface="Segoe UI" pitchFamily="34" charset="-122"/>
+                          <a:cs typeface="Segoe UI" pitchFamily="34" charset="-120"/>
+                        </a:rPr>
+                        <a:t>Operating rules</a:t>
+                      </a:r>
+                      <a:endParaRPr lang="en-US" sz="1080" dirty="0">
+                        <a:latin typeface="Segoe UI" charset="0"/>
+                        <a:ea typeface="Segoe UI" charset="0"/>
+                        <a:cs typeface="Segoe UI" charset="0"/>
+                      </a:endParaRPr>
+                    </a:p>
+                  </a:txBody>
+                  <a:tcPr marL="64008" marR="64008" marT="64008" marB="64008" anchor="ctr">
+                    <a:lnL w="6350" cap="flat" cmpd="sng" algn="ctr">
+                      <a:solidFill>
+                        <a:srgbClr val="24365A"/>
+                      </a:solidFill>
+                      <a:prstDash val="solid"/>
+                      <a:round/>
+                      <a:headEnd type="none" w="med" len="med"/>
+                      <a:tailEnd type="none" w="med" len="med"/>
+                    </a:lnL>
+                    <a:lnR w="6350" cap="flat" cmpd="sng" algn="ctr">
+                      <a:solidFill>
+                        <a:srgbClr val="24365A"/>
+                      </a:solidFill>
+                      <a:prstDash val="solid"/>
+                      <a:round/>
+                      <a:headEnd type="none" w="med" len="med"/>
+                      <a:tailEnd type="none" w="med" len="med"/>
+                    </a:lnR>
+                    <a:lnT w="6350" cap="flat" cmpd="sng" algn="ctr">
+                      <a:solidFill>
+                        <a:srgbClr val="24365A"/>
+                      </a:solidFill>
+                      <a:prstDash val="solid"/>
+                      <a:round/>
+                      <a:headEnd type="none" w="med" len="med"/>
+                      <a:tailEnd type="none" w="med" len="med"/>
+                    </a:lnT>
+                    <a:lnB w="6350" cap="flat" cmpd="sng" algn="ctr">
+                      <a:solidFill>
+                        <a:srgbClr val="24365A"/>
+                      </a:solidFill>
+                      <a:prstDash val="solid"/>
+                      <a:round/>
+                      <a:headEnd type="none" w="med" len="med"/>
+                      <a:tailEnd type="none" w="med" len="med"/>
+                    </a:lnB>
+                    <a:solidFill>
+                      <a:srgbClr val="101A2D"/>
+                    </a:solidFill>
+                  </a:tcPr>
+                </a:tc>
+                <a:tc>
+                  <a:txBody>
+                    <a:bodyPr/>
+                    <a:lstStyle/>
+                    <a:p>
+                      <a:pPr indent="0" marL="0">
+                        <a:buNone/>
+                      </a:pPr>
+                      <a:r>
+                        <a:rPr lang="en-US" sz="1080" dirty="0">
+                          <a:solidFill>
+                            <a:srgbClr val="CBD5E1"/>
+                          </a:solidFill>
+                          <a:latin typeface="Segoe UI" pitchFamily="34" charset="0"/>
+                          <a:ea typeface="Segoe UI" pitchFamily="34" charset="-122"/>
+                          <a:cs typeface="Segoe UI" pitchFamily="34" charset="-120"/>
+                        </a:rPr>
+                        <a:t>Boring non-negotiables</a:t>
+                      </a:r>
+                      <a:endParaRPr lang="en-US" sz="1080" dirty="0">
+                        <a:latin typeface="Segoe UI" charset="0"/>
+                        <a:ea typeface="Segoe UI" charset="0"/>
+                        <a:cs typeface="Segoe UI" charset="0"/>
+                      </a:endParaRPr>
+                    </a:p>
+                  </a:txBody>
+                  <a:tcPr marL="64008" marR="64008" marT="64008" marB="64008" anchor="ctr">
+                    <a:lnL w="6350" cap="flat" cmpd="sng" algn="ctr">
+                      <a:solidFill>
+                        <a:srgbClr val="24365A"/>
+                      </a:solidFill>
+                      <a:prstDash val="solid"/>
+                      <a:round/>
+                      <a:headEnd type="none" w="med" len="med"/>
+                      <a:tailEnd type="none" w="med" len="med"/>
+                    </a:lnL>
+                    <a:lnR w="6350" cap="flat" cmpd="sng" algn="ctr">
+                      <a:solidFill>
+                        <a:srgbClr val="24365A"/>
+                      </a:solidFill>
+                      <a:prstDash val="solid"/>
+                      <a:round/>
+                      <a:headEnd type="none" w="med" len="med"/>
+                      <a:tailEnd type="none" w="med" len="med"/>
+                    </a:lnR>
+                    <a:lnT w="6350" cap="flat" cmpd="sng" algn="ctr">
+                      <a:solidFill>
+                        <a:srgbClr val="24365A"/>
+                      </a:solidFill>
+                      <a:prstDash val="solid"/>
+                      <a:round/>
+                      <a:headEnd type="none" w="med" len="med"/>
+                      <a:tailEnd type="none" w="med" len="med"/>
+                    </a:lnT>
+                    <a:lnB w="6350" cap="flat" cmpd="sng" algn="ctr">
+                      <a:solidFill>
+                        <a:srgbClr val="24365A"/>
+                      </a:solidFill>
+                      <a:prstDash val="solid"/>
+                      <a:round/>
+                      <a:headEnd type="none" w="med" len="med"/>
+                      <a:tailEnd type="none" w="med" len="med"/>
+                    </a:lnB>
+                    <a:solidFill>
+                      <a:srgbClr val="101A2D"/>
+                    </a:solidFill>
+                  </a:tcPr>
+                </a:tc>
+                <a:tc>
+                  <a:txBody>
+                    <a:bodyPr/>
+                    <a:lstStyle/>
+                    <a:p>
+                      <a:pPr indent="0" marL="0">
+                        <a:buNone/>
+                      </a:pPr>
+                      <a:r>
+                        <a:rPr lang="en-US" sz="1080" dirty="0">
+                          <a:solidFill>
+                            <a:srgbClr val="CBD5E1"/>
+                          </a:solidFill>
+                          <a:latin typeface="Segoe UI" pitchFamily="34" charset="0"/>
+                          <a:ea typeface="Segoe UI" pitchFamily="34" charset="-122"/>
+                          <a:cs typeface="Segoe UI" pitchFamily="34" charset="-120"/>
+                        </a:rPr>
+                        <a:t>Evidence over claims, backups before updates, one place for everything</a:t>
+                      </a:r>
+                      <a:endParaRPr lang="en-US" sz="1080" dirty="0">
+                        <a:latin typeface="Segoe UI" charset="0"/>
+                        <a:ea typeface="Segoe UI" charset="0"/>
+                        <a:cs typeface="Segoe UI" charset="0"/>
+                      </a:endParaRPr>
+                    </a:p>
+                  </a:txBody>
+                  <a:tcPr marL="64008" marR="64008" marT="64008" marB="64008" anchor="ctr">
+                    <a:lnL w="6350" cap="flat" cmpd="sng" algn="ctr">
+                      <a:solidFill>
+                        <a:srgbClr val="24365A"/>
+                      </a:solidFill>
+                      <a:prstDash val="solid"/>
+                      <a:round/>
+                      <a:headEnd type="none" w="med" len="med"/>
+                      <a:tailEnd type="none" w="med" len="med"/>
+                    </a:lnL>
+                    <a:lnR w="6350" cap="flat" cmpd="sng" algn="ctr">
+                      <a:solidFill>
+                        <a:srgbClr val="24365A"/>
+                      </a:solidFill>
+                      <a:prstDash val="solid"/>
+                      <a:round/>
+                      <a:headEnd type="none" w="med" len="med"/>
+                      <a:tailEnd type="none" w="med" len="med"/>
+                    </a:lnR>
+                    <a:lnT w="6350" cap="flat" cmpd="sng" algn="ctr">
+                      <a:solidFill>
+                        <a:srgbClr val="24365A"/>
+                      </a:solidFill>
+                      <a:prstDash val="solid"/>
+                      <a:round/>
+                      <a:headEnd type="none" w="med" len="med"/>
+                      <a:tailEnd type="none" w="med" len="med"/>
+                    </a:lnT>
+                    <a:lnB w="6350" cap="flat" cmpd="sng" algn="ctr">
+                      <a:solidFill>
+                        <a:srgbClr val="24365A"/>
+                      </a:solidFill>
+                      <a:prstDash val="solid"/>
+                      <a:round/>
+                      <a:headEnd type="none" w="med" len="med"/>
+                      <a:tailEnd type="none" w="med" len="med"/>
+                    </a:lnB>
+                    <a:solidFill>
+                      <a:srgbClr val="101A2D"/>
+                    </a:solidFill>
+                  </a:tcPr>
+                </a:tc>
+              </a:tr>
+            </a:tbl>
+          </a:graphicData>
+        </a:graphic>
+      </p:graphicFrame>
+      <p:sp>
+        <p:nvSpPr>
+          <p:cNvPr id="7" name="Shape 4"/>
+          <p:cNvSpPr/>
+          <p:nvPr/>
+        </p:nvSpPr>
+        <p:spPr>
+          <a:xfrm>
+            <a:off x="822960" y="5961888"/>
+            <a:ext cx="10515600" cy="0"/>
+          </a:xfrm>
+          <a:prstGeom prst="line">
+            <a:avLst/>
+          </a:prstGeom>
+          <a:noFill/>
+          <a:ln w="12700">
+            <a:solidFill>
+              <a:srgbClr val="1E2D45"/>
+            </a:solidFill>
+            <a:prstDash val="solid"/>
+          </a:ln>
+        </p:spPr>
+      </p:sp>
+      <p:sp>
+        <p:nvSpPr>
+          <p:cNvPr id="8" name="Text 5"/>
+          <p:cNvSpPr/>
+          <p:nvPr/>
+        </p:nvSpPr>
+        <p:spPr>
+          <a:xfrm>
+            <a:off x="822960" y="6053328"/>
+            <a:ext cx="9692640" cy="457200"/>
+          </a:xfrm>
+          <a:prstGeom prst="rect">
+            <a:avLst/>
+          </a:prstGeom>
+          <a:noFill/>
+          <a:ln/>
+        </p:spPr>
+        <p:txBody>
+          <a:bodyPr wrap="square" rtlCol="0" anchor="ctr"/>
+          <a:lstStyle/>
+          <a:p>
+            <a:pPr indent="0" marL="0">
+              <a:buNone/>
+            </a:pPr>
+            <a:r>
+              <a:rPr lang="en-US" sz="1150" dirty="0">
+                <a:solidFill>
+                  <a:srgbClr val="64748B"/>
                 </a:solidFill>
                 <a:latin typeface="Segoe UI" pitchFamily="34" charset="0"/>
                 <a:ea typeface="Segoe UI" pitchFamily="34" charset="-122"/>
                 <a:cs typeface="Segoe UI" pitchFamily="34" charset="-120"/>
               </a:rPr>
-              <a:t>Briefs go in, status comes out - in the same format, every time</a:t>
-            </a:r>
-            <a:endParaRPr lang="en-US" sz="1600" dirty="0"/>
-          </a:p>
-          <a:p>
-            <a:pPr marL="342900" indent="-342900">
-              <a:lnSpc>
-                <a:spcPct val="115000"/>
-              </a:lnSpc>
-              <a:spcAft>
-                <a:spcPts val="1000"/>
-              </a:spcAft>
-              <a:buSzPct val="100000"/>
-              <a:buChar char="▸"/>
-            </a:pPr>
-            <a:r>
-              <a:rPr lang="en-US" sz="1600" dirty="0">
-                <a:solidFill>
-                  <a:srgbClr val="CBD5E1"/>
-                </a:solidFill>
-                <a:latin typeface="Segoe UI" pitchFamily="34" charset="0"/>
-                <a:ea typeface="Segoe UI" pitchFamily="34" charset="-122"/>
-                <a:cs typeface="Segoe UI" pitchFamily="34" charset="-120"/>
-              </a:rPr>
-              <a:t>Multiple agents work in parallel across apps</a:t>
-            </a:r>
-            <a:endParaRPr lang="en-US" sz="1600" dirty="0"/>
-          </a:p>
-          <a:p>
-            <a:pPr marL="342900" indent="-342900">
-              <a:lnSpc>
-                <a:spcPct val="115000"/>
-              </a:lnSpc>
-              <a:spcAft>
-                <a:spcPts val="1000"/>
-              </a:spcAft>
-              <a:buSzPct val="100000"/>
-              <a:buChar char="▸"/>
-            </a:pPr>
-            <a:r>
-              <a:rPr lang="en-US" sz="1600" dirty="0">
-                <a:solidFill>
-                  <a:srgbClr val="CBD5E1"/>
-                </a:solidFill>
-                <a:latin typeface="Segoe UI" pitchFamily="34" charset="0"/>
-                <a:ea typeface="Segoe UI" pitchFamily="34" charset="-122"/>
-                <a:cs typeface="Segoe UI" pitchFamily="34" charset="-120"/>
-              </a:rPr>
-              <a:t>Every surprise becomes a written lesson before the day ends</a:t>
-            </a:r>
-            <a:endParaRPr lang="en-US" sz="1600" dirty="0"/>
-          </a:p>
-          <a:p>
-            <a:pPr marL="342900" indent="-342900">
-              <a:lnSpc>
-                <a:spcPct val="115000"/>
-              </a:lnSpc>
-              <a:spcAft>
-                <a:spcPts val="1000"/>
-              </a:spcAft>
-              <a:buSzPct val="100000"/>
-              <a:buChar char="▸"/>
-            </a:pPr>
-            <a:r>
-              <a:rPr lang="en-US" sz="1600" dirty="0">
-                <a:solidFill>
-                  <a:srgbClr val="CBD5E1"/>
-                </a:solidFill>
-                <a:latin typeface="Segoe UI" pitchFamily="34" charset="0"/>
-                <a:ea typeface="Segoe UI" pitchFamily="34" charset="-122"/>
-                <a:cs typeface="Segoe UI" pitchFamily="34" charset="-120"/>
-              </a:rPr>
-              <a:t>The founder is the bottleneck for judgment, not execution</a:t>
-            </a:r>
-            <a:endParaRPr lang="en-US" sz="1600" dirty="0"/>
-          </a:p>
-        </p:txBody>
-      </p:sp>
-      <p:sp>
-        <p:nvSpPr>
-          <p:cNvPr id="7" name="Text 5"/>
-          <p:cNvSpPr/>
-          <p:nvPr/>
-        </p:nvSpPr>
-        <p:spPr>
-          <a:xfrm>
-            <a:off x="10698480" y="6355080"/>
+              <a:t>None of this is glamorous; all of it is why the layers above stay standing.</a:t>
+            </a:r>
+            <a:endParaRPr lang="en-US" sz="1150" dirty="0"/>
+          </a:p>
+        </p:txBody>
+      </p:sp>
+      <p:sp>
+        <p:nvSpPr>
+          <p:cNvPr id="9" name="Text 6"/>
+          <p:cNvSpPr/>
+          <p:nvPr/>
+        </p:nvSpPr>
+        <p:spPr>
+          <a:xfrm>
+            <a:off x="10698480" y="6382512"/>
             <a:ext cx="1188720" cy="365760"/>
           </a:xfrm>
           <a:prstGeom prst="rect">
@@ -3223,7 +9321,7 @@
                 <a:ea typeface="Consolas" pitchFamily="34" charset="-122"/>
                 <a:cs typeface="Consolas" pitchFamily="34" charset="-120"/>
               </a:rPr>
-              <a:t>6 / 8</a:t>
+              <a:t>6 / 13</a:t>
             </a:r>
             <a:endParaRPr lang="en-US" sz="1000" dirty="0"/>
           </a:p>
@@ -3334,7 +9432,7 @@
                 <a:ea typeface="Consolas" pitchFamily="34" charset="-122"/>
                 <a:cs typeface="Consolas" pitchFamily="34" charset="-120"/>
               </a:rPr>
-              <a:t>NUMBERS</a:t>
+              <a:t>THE SUITE</a:t>
             </a:r>
             <a:endParaRPr lang="en-US" sz="1200" dirty="0"/>
           </a:p>
@@ -3348,8 +9446,8 @@
         </p:nvSpPr>
         <p:spPr>
           <a:xfrm>
-            <a:off x="822960" y="960120"/>
-            <a:ext cx="10515600" cy="868680"/>
+            <a:off x="822960" y="914400"/>
+            <a:ext cx="10561320" cy="868680"/>
           </a:xfrm>
           <a:prstGeom prst="rect">
             <a:avLst/>
@@ -3365,7 +9463,7 @@
               <a:buNone/>
             </a:pPr>
             <a:r>
-              <a:rPr lang="en-US" sz="3000" b="1" dirty="0">
+              <a:rPr lang="en-US" sz="2700" b="1" dirty="0">
                 <a:solidFill>
                   <a:srgbClr val="FFFFFF"/>
                 </a:solidFill>
@@ -3373,139 +9471,161 @@
                 <a:ea typeface="Segoe UI" pitchFamily="34" charset="-122"/>
                 <a:cs typeface="Segoe UI" pitchFamily="34" charset="-120"/>
               </a:rPr>
-              <a:t>The scoreboard</a:t>
-            </a:r>
-            <a:endParaRPr lang="en-US" sz="3000" dirty="0"/>
-          </a:p>
-        </p:txBody>
-      </p:sp>
-      <p:sp>
-        <p:nvSpPr>
-          <p:cNvPr id="6" name="Text 4"/>
-          <p:cNvSpPr/>
-          <p:nvPr/>
-        </p:nvSpPr>
-        <p:spPr>
-          <a:xfrm>
-            <a:off x="868680" y="2057400"/>
-            <a:ext cx="10424160" cy="3566160"/>
-          </a:xfrm>
-          <a:prstGeom prst="rect">
-            <a:avLst/>
-          </a:prstGeom>
-          <a:noFill/>
-          <a:ln/>
-        </p:spPr>
-        <p:txBody>
-          <a:bodyPr wrap="square" rtlCol="0" anchor="t"/>
-          <a:lstStyle/>
-          <a:p>
-            <a:pPr marL="342900" indent="-342900">
-              <a:lnSpc>
-                <a:spcPct val="115000"/>
-              </a:lnSpc>
-              <a:spcAft>
-                <a:spcPts val="1000"/>
-              </a:spcAft>
-              <a:buSzPct val="100000"/>
-              <a:buChar char="▸"/>
-            </a:pPr>
-            <a:r>
-              <a:rPr lang="en-US" sz="1600" dirty="0">
-                <a:solidFill>
-                  <a:srgbClr val="CBD5E1"/>
+              <a:t>30+ production apps across everyday categories</a:t>
+            </a:r>
+            <a:endParaRPr lang="en-US" sz="2700" dirty="0"/>
+          </a:p>
+        </p:txBody>
+      </p:sp>
+      <p:graphicFrame>
+        <p:nvGraphicFramePr>
+          <p:cNvPr id="6" name="Chart 0" descr=""/>
+          <p:cNvGraphicFramePr/>
+          <p:nvPr/>
+        </p:nvGraphicFramePr>
+        <p:xfrm>
+          <a:off x="822960" y="1874520"/>
+          <a:ext cx="10515600" cy="3337560"/>
+        </p:xfrm>
+        <a:graphic xmlns:a="http://schemas.openxmlformats.org/drawingml/2006/main">
+          <a:graphicData uri="http://schemas.openxmlformats.org/drawingml/2006/chart">
+            <c:chart xmlns:c="http://schemas.openxmlformats.org/drawingml/2006/chart" r:id="rId1"/>
+          </a:graphicData>
+        </a:graphic>
+      </p:graphicFrame>
+      <p:sp>
+        <p:nvSpPr>
+          <p:cNvPr id="7" name="Shape 4"/>
+          <p:cNvSpPr/>
+          <p:nvPr/>
+        </p:nvSpPr>
+        <p:spPr>
+          <a:xfrm>
+            <a:off x="822960" y="5413248"/>
+            <a:ext cx="10515600" cy="0"/>
+          </a:xfrm>
+          <a:prstGeom prst="line">
+            <a:avLst/>
+          </a:prstGeom>
+          <a:noFill/>
+          <a:ln w="12700">
+            <a:solidFill>
+              <a:srgbClr val="1E2D45"/>
+            </a:solidFill>
+            <a:prstDash val="solid"/>
+          </a:ln>
+        </p:spPr>
+      </p:sp>
+      <p:sp>
+        <p:nvSpPr>
+          <p:cNvPr id="8" name="Text 5"/>
+          <p:cNvSpPr/>
+          <p:nvPr/>
+        </p:nvSpPr>
+        <p:spPr>
+          <a:xfrm>
+            <a:off x="822960" y="5504688"/>
+            <a:ext cx="10424160" cy="411480"/>
+          </a:xfrm>
+          <a:prstGeom prst="rect">
+            <a:avLst/>
+          </a:prstGeom>
+          <a:noFill/>
+          <a:ln/>
+        </p:spPr>
+        <p:txBody>
+          <a:bodyPr wrap="square" rtlCol="0" anchor="ctr"/>
+          <a:lstStyle/>
+          <a:p>
+            <a:pPr indent="0" marL="0">
+              <a:buNone/>
+            </a:pPr>
+            <a:r>
+              <a:rPr lang="en-US" sz="1300" i="1" dirty="0">
+                <a:solidFill>
+                  <a:srgbClr val="06B6D4"/>
                 </a:solidFill>
                 <a:latin typeface="Segoe UI" pitchFamily="34" charset="0"/>
                 <a:ea typeface="Segoe UI" pitchFamily="34" charset="-122"/>
                 <a:cs typeface="Segoe UI" pitchFamily="34" charset="-120"/>
               </a:rPr>
-              <a:t>30+ production Android apps</a:t>
-            </a:r>
-            <a:endParaRPr lang="en-US" sz="1600" dirty="0"/>
-          </a:p>
-          <a:p>
-            <a:pPr marL="342900" indent="-342900">
-              <a:lnSpc>
-                <a:spcPct val="115000"/>
-              </a:lnSpc>
-              <a:spcAft>
-                <a:spcPts val="1000"/>
-              </a:spcAft>
-              <a:buSzPct val="100000"/>
-              <a:buChar char="▸"/>
-            </a:pPr>
-            <a:r>
-              <a:rPr lang="en-US" sz="1600" dirty="0">
-                <a:solidFill>
-                  <a:srgbClr val="CBD5E1"/>
+              <a:t>→  A portfolio this size survives only because maintenance is a pipeline, not a heroic effort.</a:t>
+            </a:r>
+            <a:endParaRPr lang="en-US" sz="1300" dirty="0"/>
+          </a:p>
+        </p:txBody>
+      </p:sp>
+      <p:sp>
+        <p:nvSpPr>
+          <p:cNvPr id="9" name="Shape 6"/>
+          <p:cNvSpPr/>
+          <p:nvPr/>
+        </p:nvSpPr>
+        <p:spPr>
+          <a:xfrm>
+            <a:off x="822960" y="5961888"/>
+            <a:ext cx="10515600" cy="0"/>
+          </a:xfrm>
+          <a:prstGeom prst="line">
+            <a:avLst/>
+          </a:prstGeom>
+          <a:noFill/>
+          <a:ln w="12700">
+            <a:solidFill>
+              <a:srgbClr val="1E2D45"/>
+            </a:solidFill>
+            <a:prstDash val="solid"/>
+          </a:ln>
+        </p:spPr>
+      </p:sp>
+      <p:sp>
+        <p:nvSpPr>
+          <p:cNvPr id="10" name="Text 7"/>
+          <p:cNvSpPr/>
+          <p:nvPr/>
+        </p:nvSpPr>
+        <p:spPr>
+          <a:xfrm>
+            <a:off x="822960" y="6053328"/>
+            <a:ext cx="9692640" cy="457200"/>
+          </a:xfrm>
+          <a:prstGeom prst="rect">
+            <a:avLst/>
+          </a:prstGeom>
+          <a:noFill/>
+          <a:ln/>
+        </p:spPr>
+        <p:txBody>
+          <a:bodyPr wrap="square" rtlCol="0" anchor="ctr"/>
+          <a:lstStyle/>
+          <a:p>
+            <a:pPr indent="0" marL="0">
+              <a:buNone/>
+            </a:pPr>
+            <a:r>
+              <a:rPr lang="en-US" sz="1150" dirty="0">
+                <a:solidFill>
+                  <a:srgbClr val="64748B"/>
                 </a:solidFill>
                 <a:latin typeface="Segoe UI" pitchFamily="34" charset="0"/>
                 <a:ea typeface="Segoe UI" pitchFamily="34" charset="-122"/>
                 <a:cs typeface="Segoe UI" pitchFamily="34" charset="-120"/>
               </a:rPr>
-              <a:t>9 AI agents under quality-gated releases</a:t>
-            </a:r>
-            <a:endParaRPr lang="en-US" sz="1600" dirty="0"/>
-          </a:p>
-          <a:p>
-            <a:pPr marL="342900" indent="-342900">
-              <a:lnSpc>
-                <a:spcPct val="115000"/>
-              </a:lnSpc>
-              <a:spcAft>
-                <a:spcPts val="1000"/>
-              </a:spcAft>
-              <a:buSzPct val="100000"/>
-              <a:buChar char="▸"/>
-            </a:pPr>
-            <a:r>
-              <a:rPr lang="en-US" sz="1600" dirty="0">
-                <a:solidFill>
-                  <a:srgbClr val="CBD5E1"/>
-                </a:solidFill>
-                <a:latin typeface="Segoe UI" pitchFamily="34" charset="0"/>
-                <a:ea typeface="Segoe UI" pitchFamily="34" charset="-122"/>
-                <a:cs typeface="Segoe UI" pitchFamily="34" charset="-120"/>
-              </a:rPr>
-              <a:t>2 open-source frameworks, 8.7K+ LOC combined</a:t>
-            </a:r>
-            <a:endParaRPr lang="en-US" sz="1600" dirty="0"/>
-          </a:p>
-          <a:p>
-            <a:pPr marL="342900" indent="-342900">
-              <a:lnSpc>
-                <a:spcPct val="115000"/>
-              </a:lnSpc>
-              <a:spcAft>
-                <a:spcPts val="1000"/>
-              </a:spcAft>
-              <a:buSzPct val="100000"/>
-              <a:buChar char="▸"/>
-            </a:pPr>
-            <a:r>
-              <a:rPr lang="en-US" sz="1600" dirty="0">
-                <a:solidFill>
-                  <a:srgbClr val="CBD5E1"/>
-                </a:solidFill>
-                <a:latin typeface="Segoe UI" pitchFamily="34" charset="0"/>
-                <a:ea typeface="Segoe UI" pitchFamily="34" charset="-122"/>
-                <a:cs typeface="Segoe UI" pitchFamily="34" charset="-120"/>
-              </a:rPr>
-              <a:t>100% intent router accuracy on validation</a:t>
-            </a:r>
-            <a:endParaRPr lang="en-US" sz="1600" dirty="0"/>
-          </a:p>
-        </p:txBody>
-      </p:sp>
-      <p:sp>
-        <p:nvSpPr>
-          <p:cNvPr id="7" name="Text 5"/>
-          <p:cNvSpPr/>
-          <p:nvPr/>
-        </p:nvSpPr>
-        <p:spPr>
-          <a:xfrm>
-            <a:off x="10698480" y="6355080"/>
+              <a:t>Category counts, illustrative - every app live, versioned, and supported.</a:t>
+            </a:r>
+            <a:endParaRPr lang="en-US" sz="1150" dirty="0"/>
+          </a:p>
+        </p:txBody>
+      </p:sp>
+      <p:sp>
+        <p:nvSpPr>
+          <p:cNvPr id="11" name="Text 8"/>
+          <p:cNvSpPr/>
+          <p:nvPr/>
+        </p:nvSpPr>
+        <p:spPr>
+          <a:xfrm>
+            <a:off x="10698480" y="6382512"/>
             <a:ext cx="1188720" cy="365760"/>
           </a:xfrm>
           <a:prstGeom prst="rect">
@@ -3530,7 +9650,7 @@
                 <a:ea typeface="Consolas" pitchFamily="34" charset="-122"/>
                 <a:cs typeface="Consolas" pitchFamily="34" charset="-120"/>
               </a:rPr>
-              <a:t>7 / 8</a:t>
+              <a:t>7 / 13</a:t>
             </a:r>
             <a:endParaRPr lang="en-US" sz="1000" dirty="0"/>
           </a:p>
@@ -3616,8 +9736,8 @@
         </p:nvSpPr>
         <p:spPr>
           <a:xfrm>
-            <a:off x="822960" y="1554480"/>
-            <a:ext cx="10515600" cy="457200"/>
+            <a:off x="822960" y="502920"/>
+            <a:ext cx="10515600" cy="365760"/>
           </a:xfrm>
           <a:prstGeom prst="rect">
             <a:avLst/>
@@ -3633,7 +9753,7 @@
               <a:buNone/>
             </a:pPr>
             <a:r>
-              <a:rPr lang="en-US" sz="1400" spc="400" kern="0" dirty="0">
+              <a:rPr lang="en-US" sz="1200" spc="300" kern="0" dirty="0">
                 <a:solidFill>
                   <a:srgbClr val="06B6D4"/>
                 </a:solidFill>
@@ -3641,9 +9761,9 @@
                 <a:ea typeface="Consolas" pitchFamily="34" charset="-122"/>
                 <a:cs typeface="Consolas" pitchFamily="34" charset="-120"/>
               </a:rPr>
-              <a:t>TAKEAWAY</a:t>
-            </a:r>
-            <a:endParaRPr lang="en-US" sz="1400" dirty="0"/>
+              <a:t>TRAJECTORY</a:t>
+            </a:r>
+            <a:endParaRPr lang="en-US" sz="1200" dirty="0"/>
           </a:p>
         </p:txBody>
       </p:sp>
@@ -3655,8 +9775,8 @@
         </p:nvSpPr>
         <p:spPr>
           <a:xfrm>
-            <a:off x="822960" y="2286000"/>
-            <a:ext cx="10515600" cy="1737360"/>
+            <a:off x="822960" y="914400"/>
+            <a:ext cx="10561320" cy="868680"/>
           </a:xfrm>
           <a:prstGeom prst="rect">
             <a:avLst/>
@@ -3672,7 +9792,7 @@
               <a:buNone/>
             </a:pPr>
             <a:r>
-              <a:rPr lang="en-US" sz="4400" b="1" dirty="0">
+              <a:rPr lang="en-US" sz="2700" b="1" dirty="0">
                 <a:solidFill>
                   <a:srgbClr val="FFFFFF"/>
                 </a:solidFill>
@@ -3680,22 +9800,61 @@
                 <a:ea typeface="Segoe UI" pitchFamily="34" charset="-122"/>
                 <a:cs typeface="Segoe UI" pitchFamily="34" charset="-120"/>
               </a:rPr>
-              <a:t>Build the company around the protocol, not the hero</a:t>
-            </a:r>
-            <a:endParaRPr lang="en-US" sz="4400" dirty="0"/>
-          </a:p>
-        </p:txBody>
-      </p:sp>
-      <p:sp>
-        <p:nvSpPr>
-          <p:cNvPr id="6" name="Text 4"/>
-          <p:cNvSpPr/>
-          <p:nvPr/>
-        </p:nvSpPr>
-        <p:spPr>
-          <a:xfrm>
-            <a:off x="822960" y="4206240"/>
-            <a:ext cx="10515600" cy="914400"/>
+              <a:t>Shipping cadence compounds once the pipeline holds</a:t>
+            </a:r>
+            <a:endParaRPr lang="en-US" sz="2700" dirty="0"/>
+          </a:p>
+        </p:txBody>
+      </p:sp>
+      <p:graphicFrame>
+        <p:nvGraphicFramePr>
+          <p:cNvPr id="6" name="Chart 0" descr=""/>
+          <p:cNvGraphicFramePr/>
+          <p:nvPr/>
+        </p:nvGraphicFramePr>
+        <p:xfrm>
+          <a:off x="822960" y="1874520"/>
+          <a:ext cx="10515600" cy="3337560"/>
+        </p:xfrm>
+        <a:graphic xmlns:a="http://schemas.openxmlformats.org/drawingml/2006/main">
+          <a:graphicData uri="http://schemas.openxmlformats.org/drawingml/2006/chart">
+            <c:chart xmlns:c="http://schemas.openxmlformats.org/drawingml/2006/chart" r:id="rId1"/>
+          </a:graphicData>
+        </a:graphic>
+      </p:graphicFrame>
+      <p:sp>
+        <p:nvSpPr>
+          <p:cNvPr id="7" name="Shape 4"/>
+          <p:cNvSpPr/>
+          <p:nvPr/>
+        </p:nvSpPr>
+        <p:spPr>
+          <a:xfrm>
+            <a:off x="822960" y="5413248"/>
+            <a:ext cx="10515600" cy="0"/>
+          </a:xfrm>
+          <a:prstGeom prst="line">
+            <a:avLst/>
+          </a:prstGeom>
+          <a:noFill/>
+          <a:ln w="12700">
+            <a:solidFill>
+              <a:srgbClr val="1E2D45"/>
+            </a:solidFill>
+            <a:prstDash val="solid"/>
+          </a:ln>
+        </p:spPr>
+      </p:sp>
+      <p:sp>
+        <p:nvSpPr>
+          <p:cNvPr id="8" name="Text 5"/>
+          <p:cNvSpPr/>
+          <p:nvPr/>
+        </p:nvSpPr>
+        <p:spPr>
+          <a:xfrm>
+            <a:off x="822960" y="5504688"/>
+            <a:ext cx="10424160" cy="411480"/>
           </a:xfrm>
           <a:prstGeom prst="rect">
             <a:avLst/>
@@ -3711,29 +9870,91 @@
               <a:buNone/>
             </a:pPr>
             <a:r>
-              <a:rPr lang="en-US" sz="1600" dirty="0">
-                <a:solidFill>
-                  <a:srgbClr val="94A3B8"/>
+              <a:rPr lang="en-US" sz="1300" i="1" dirty="0">
+                <a:solidFill>
+                  <a:srgbClr val="06B6D4"/>
                 </a:solidFill>
                 <a:latin typeface="Segoe UI" pitchFamily="34" charset="0"/>
                 <a:ea typeface="Segoe UI" pitchFamily="34" charset="-122"/>
                 <a:cs typeface="Segoe UI" pitchFamily="34" charset="-120"/>
               </a:rPr>
-              <a:t>The agents are the workforce. The protocols are the company. · rezalianvatiady.github.io</a:t>
-            </a:r>
-            <a:endParaRPr lang="en-US" sz="1600" dirty="0"/>
-          </a:p>
-        </p:txBody>
-      </p:sp>
-      <p:sp>
-        <p:nvSpPr>
-          <p:cNvPr id="7" name="Text 5"/>
-          <p:cNvSpPr/>
-          <p:nvPr/>
-        </p:nvSpPr>
-        <p:spPr>
-          <a:xfrm>
-            <a:off x="10698480" y="6355080"/>
+              <a:t>→  Growth came from parallel agent work under gates, not from longer hours.</a:t>
+            </a:r>
+            <a:endParaRPr lang="en-US" sz="1300" dirty="0"/>
+          </a:p>
+        </p:txBody>
+      </p:sp>
+      <p:sp>
+        <p:nvSpPr>
+          <p:cNvPr id="9" name="Shape 6"/>
+          <p:cNvSpPr/>
+          <p:nvPr/>
+        </p:nvSpPr>
+        <p:spPr>
+          <a:xfrm>
+            <a:off x="822960" y="5961888"/>
+            <a:ext cx="10515600" cy="0"/>
+          </a:xfrm>
+          <a:prstGeom prst="line">
+            <a:avLst/>
+          </a:prstGeom>
+          <a:noFill/>
+          <a:ln w="12700">
+            <a:solidFill>
+              <a:srgbClr val="1E2D45"/>
+            </a:solidFill>
+            <a:prstDash val="solid"/>
+          </a:ln>
+        </p:spPr>
+      </p:sp>
+      <p:sp>
+        <p:nvSpPr>
+          <p:cNvPr id="10" name="Text 7"/>
+          <p:cNvSpPr/>
+          <p:nvPr/>
+        </p:nvSpPr>
+        <p:spPr>
+          <a:xfrm>
+            <a:off x="822960" y="6053328"/>
+            <a:ext cx="9692640" cy="457200"/>
+          </a:xfrm>
+          <a:prstGeom prst="rect">
+            <a:avLst/>
+          </a:prstGeom>
+          <a:noFill/>
+          <a:ln/>
+        </p:spPr>
+        <p:txBody>
+          <a:bodyPr wrap="square" rtlCol="0" anchor="ctr"/>
+          <a:lstStyle/>
+          <a:p>
+            <a:pPr indent="0" marL="0">
+              <a:buNone/>
+            </a:pPr>
+            <a:r>
+              <a:rPr lang="en-US" sz="1150" dirty="0">
+                <a:solidFill>
+                  <a:srgbClr val="64748B"/>
+                </a:solidFill>
+                <a:latin typeface="Segoe UI" pitchFamily="34" charset="0"/>
+                <a:ea typeface="Segoe UI" pitchFamily="34" charset="-122"/>
+                <a:cs typeface="Segoe UI" pitchFamily="34" charset="-120"/>
+              </a:rPr>
+              <a:t>Cumulative count since founding, April 2024 to September 2026.</a:t>
+            </a:r>
+            <a:endParaRPr lang="en-US" sz="1150" dirty="0"/>
+          </a:p>
+        </p:txBody>
+      </p:sp>
+      <p:sp>
+        <p:nvSpPr>
+          <p:cNvPr id="11" name="Text 8"/>
+          <p:cNvSpPr/>
+          <p:nvPr/>
+        </p:nvSpPr>
+        <p:spPr>
+          <a:xfrm>
+            <a:off x="10698480" y="6382512"/>
             <a:ext cx="1188720" cy="365760"/>
           </a:xfrm>
           <a:prstGeom prst="rect">
@@ -3758,7 +9979,336 @@
                 <a:ea typeface="Consolas" pitchFamily="34" charset="-122"/>
                 <a:cs typeface="Consolas" pitchFamily="34" charset="-120"/>
               </a:rPr>
-              <a:t>8 / 8</a:t>
+              <a:t>8 / 13</a:t>
+            </a:r>
+            <a:endParaRPr lang="en-US" sz="1000" dirty="0"/>
+          </a:p>
+        </p:txBody>
+      </p:sp>
+    </p:spTree>
+  </p:cSld>
+  <p:clrMapOvr>
+    <a:masterClrMapping/>
+  </p:clrMapOvr>
+</p:sld>
+</file>
+
+<file path=ppt/slides/slide9.xml><?xml version="1.0" encoding="utf-8"?>
+<p:sld xmlns:a="http://schemas.openxmlformats.org/drawingml/2006/main" xmlns:r="http://schemas.openxmlformats.org/officeDocument/2006/relationships" xmlns:p="http://schemas.openxmlformats.org/presentationml/2006/main">
+  <p:cSld name="Slide 9">
+    <p:bg>
+      <p:bgPr>
+        <a:solidFill>
+          <a:srgbClr val="0A0C12"/>
+        </a:solidFill>
+      </p:bgPr>
+    </p:bg>
+    <p:spTree>
+      <p:nvGrpSpPr>
+        <p:cNvPr id="1" name=""/>
+        <p:cNvGrpSpPr/>
+        <p:nvPr/>
+      </p:nvGrpSpPr>
+      <p:grpSpPr>
+        <a:xfrm>
+          <a:off x="0" y="0"/>
+          <a:ext cx="0" cy="0"/>
+          <a:chOff x="0" y="0"/>
+          <a:chExt cx="0" cy="0"/>
+        </a:xfrm>
+      </p:grpSpPr>
+      <p:sp>
+        <p:nvSpPr>
+          <p:cNvPr id="2" name="Shape 0"/>
+          <p:cNvSpPr/>
+          <p:nvPr/>
+        </p:nvSpPr>
+        <p:spPr>
+          <a:xfrm>
+            <a:off x="0" y="0"/>
+            <a:ext cx="7680960" cy="64008"/>
+          </a:xfrm>
+          <a:prstGeom prst="rect">
+            <a:avLst/>
+          </a:prstGeom>
+          <a:solidFill>
+            <a:srgbClr val="3B82F6"/>
+          </a:solidFill>
+          <a:ln/>
+        </p:spPr>
+      </p:sp>
+      <p:sp>
+        <p:nvSpPr>
+          <p:cNvPr id="3" name="Shape 1"/>
+          <p:cNvSpPr/>
+          <p:nvPr/>
+        </p:nvSpPr>
+        <p:spPr>
+          <a:xfrm>
+            <a:off x="7680960" y="0"/>
+            <a:ext cx="4510735" cy="64008"/>
+          </a:xfrm>
+          <a:prstGeom prst="rect">
+            <a:avLst/>
+          </a:prstGeom>
+          <a:solidFill>
+            <a:srgbClr val="06B6D4"/>
+          </a:solidFill>
+          <a:ln/>
+        </p:spPr>
+      </p:sp>
+      <p:sp>
+        <p:nvSpPr>
+          <p:cNvPr id="4" name="Text 2"/>
+          <p:cNvSpPr/>
+          <p:nvPr/>
+        </p:nvSpPr>
+        <p:spPr>
+          <a:xfrm>
+            <a:off x="822960" y="502920"/>
+            <a:ext cx="10515600" cy="365760"/>
+          </a:xfrm>
+          <a:prstGeom prst="rect">
+            <a:avLst/>
+          </a:prstGeom>
+          <a:noFill/>
+          <a:ln/>
+        </p:spPr>
+        <p:txBody>
+          <a:bodyPr wrap="square" rtlCol="0" anchor="ctr"/>
+          <a:lstStyle/>
+          <a:p>
+            <a:pPr indent="0" marL="0">
+              <a:buNone/>
+            </a:pPr>
+            <a:r>
+              <a:rPr lang="en-US" sz="1200" spc="300" kern="0" dirty="0">
+                <a:solidFill>
+                  <a:srgbClr val="06B6D4"/>
+                </a:solidFill>
+                <a:latin typeface="Consolas" pitchFamily="34" charset="0"/>
+                <a:ea typeface="Consolas" pitchFamily="34" charset="-122"/>
+                <a:cs typeface="Consolas" pitchFamily="34" charset="-120"/>
+              </a:rPr>
+              <a:t>WHERE EFFORT GOES</a:t>
+            </a:r>
+            <a:endParaRPr lang="en-US" sz="1200" dirty="0"/>
+          </a:p>
+        </p:txBody>
+      </p:sp>
+      <p:sp>
+        <p:nvSpPr>
+          <p:cNvPr id="5" name="Text 3"/>
+          <p:cNvSpPr/>
+          <p:nvPr/>
+        </p:nvSpPr>
+        <p:spPr>
+          <a:xfrm>
+            <a:off x="822960" y="914400"/>
+            <a:ext cx="10561320" cy="868680"/>
+          </a:xfrm>
+          <a:prstGeom prst="rect">
+            <a:avLst/>
+          </a:prstGeom>
+          <a:noFill/>
+          <a:ln/>
+        </p:spPr>
+        <p:txBody>
+          <a:bodyPr wrap="square" rtlCol="0" anchor="ctr"/>
+          <a:lstStyle/>
+          <a:p>
+            <a:pPr indent="0" marL="0">
+              <a:buNone/>
+            </a:pPr>
+            <a:r>
+              <a:rPr lang="en-US" sz="2700" b="1" dirty="0">
+                <a:solidFill>
+                  <a:srgbClr val="FFFFFF"/>
+                </a:solidFill>
+                <a:latin typeface="Segoe UI" pitchFamily="34" charset="0"/>
+                <a:ea typeface="Segoe UI" pitchFamily="34" charset="-122"/>
+                <a:cs typeface="Segoe UI" pitchFamily="34" charset="-120"/>
+              </a:rPr>
+              <a:t>A quarter of every release cycle is QA and evidence</a:t>
+            </a:r>
+            <a:endParaRPr lang="en-US" sz="2700" dirty="0"/>
+          </a:p>
+        </p:txBody>
+      </p:sp>
+      <p:graphicFrame>
+        <p:nvGraphicFramePr>
+          <p:cNvPr id="6" name="Chart 0" descr=""/>
+          <p:cNvGraphicFramePr/>
+          <p:nvPr/>
+        </p:nvGraphicFramePr>
+        <p:xfrm>
+          <a:off x="822960" y="1874520"/>
+          <a:ext cx="10515600" cy="3337560"/>
+        </p:xfrm>
+        <a:graphic xmlns:a="http://schemas.openxmlformats.org/drawingml/2006/main">
+          <a:graphicData uri="http://schemas.openxmlformats.org/drawingml/2006/chart">
+            <c:chart xmlns:c="http://schemas.openxmlformats.org/drawingml/2006/chart" r:id="rId1"/>
+          </a:graphicData>
+        </a:graphic>
+      </p:graphicFrame>
+      <p:sp>
+        <p:nvSpPr>
+          <p:cNvPr id="7" name="Shape 4"/>
+          <p:cNvSpPr/>
+          <p:nvPr/>
+        </p:nvSpPr>
+        <p:spPr>
+          <a:xfrm>
+            <a:off x="822960" y="5413248"/>
+            <a:ext cx="10515600" cy="0"/>
+          </a:xfrm>
+          <a:prstGeom prst="line">
+            <a:avLst/>
+          </a:prstGeom>
+          <a:noFill/>
+          <a:ln w="12700">
+            <a:solidFill>
+              <a:srgbClr val="1E2D45"/>
+            </a:solidFill>
+            <a:prstDash val="solid"/>
+          </a:ln>
+        </p:spPr>
+      </p:sp>
+      <p:sp>
+        <p:nvSpPr>
+          <p:cNvPr id="8" name="Text 5"/>
+          <p:cNvSpPr/>
+          <p:nvPr/>
+        </p:nvSpPr>
+        <p:spPr>
+          <a:xfrm>
+            <a:off x="822960" y="5504688"/>
+            <a:ext cx="10424160" cy="411480"/>
+          </a:xfrm>
+          <a:prstGeom prst="rect">
+            <a:avLst/>
+          </a:prstGeom>
+          <a:noFill/>
+          <a:ln/>
+        </p:spPr>
+        <p:txBody>
+          <a:bodyPr wrap="square" rtlCol="0" anchor="ctr"/>
+          <a:lstStyle/>
+          <a:p>
+            <a:pPr indent="0" marL="0">
+              <a:buNone/>
+            </a:pPr>
+            <a:r>
+              <a:rPr lang="en-US" sz="1300" i="1" dirty="0">
+                <a:solidFill>
+                  <a:srgbClr val="06B6D4"/>
+                </a:solidFill>
+                <a:latin typeface="Segoe UI" pitchFamily="34" charset="0"/>
+                <a:ea typeface="Segoe UI" pitchFamily="34" charset="-122"/>
+                <a:cs typeface="Segoe UI" pitchFamily="34" charset="-120"/>
+              </a:rPr>
+              <a:t>→  Speed without gates is debt at machine pace, so the gates get real time.</a:t>
+            </a:r>
+            <a:endParaRPr lang="en-US" sz="1300" dirty="0"/>
+          </a:p>
+        </p:txBody>
+      </p:sp>
+      <p:sp>
+        <p:nvSpPr>
+          <p:cNvPr id="9" name="Shape 6"/>
+          <p:cNvSpPr/>
+          <p:nvPr/>
+        </p:nvSpPr>
+        <p:spPr>
+          <a:xfrm>
+            <a:off x="822960" y="5961888"/>
+            <a:ext cx="10515600" cy="0"/>
+          </a:xfrm>
+          <a:prstGeom prst="line">
+            <a:avLst/>
+          </a:prstGeom>
+          <a:noFill/>
+          <a:ln w="12700">
+            <a:solidFill>
+              <a:srgbClr val="1E2D45"/>
+            </a:solidFill>
+            <a:prstDash val="solid"/>
+          </a:ln>
+        </p:spPr>
+      </p:sp>
+      <p:sp>
+        <p:nvSpPr>
+          <p:cNvPr id="10" name="Text 7"/>
+          <p:cNvSpPr/>
+          <p:nvPr/>
+        </p:nvSpPr>
+        <p:spPr>
+          <a:xfrm>
+            <a:off x="822960" y="6053328"/>
+            <a:ext cx="9692640" cy="457200"/>
+          </a:xfrm>
+          <a:prstGeom prst="rect">
+            <a:avLst/>
+          </a:prstGeom>
+          <a:noFill/>
+          <a:ln/>
+        </p:spPr>
+        <p:txBody>
+          <a:bodyPr wrap="square" rtlCol="0" anchor="ctr"/>
+          <a:lstStyle/>
+          <a:p>
+            <a:pPr indent="0" marL="0">
+              <a:buNone/>
+            </a:pPr>
+            <a:r>
+              <a:rPr lang="en-US" sz="1150" dirty="0">
+                <a:solidFill>
+                  <a:srgbClr val="64748B"/>
+                </a:solidFill>
+                <a:latin typeface="Segoe UI" pitchFamily="34" charset="0"/>
+                <a:ea typeface="Segoe UI" pitchFamily="34" charset="-122"/>
+                <a:cs typeface="Segoe UI" pitchFamily="34" charset="-120"/>
+              </a:rPr>
+              <a:t>Illustrative effort split per release cycle across the suite.</a:t>
+            </a:r>
+            <a:endParaRPr lang="en-US" sz="1150" dirty="0"/>
+          </a:p>
+        </p:txBody>
+      </p:sp>
+      <p:sp>
+        <p:nvSpPr>
+          <p:cNvPr id="11" name="Text 8"/>
+          <p:cNvSpPr/>
+          <p:nvPr/>
+        </p:nvSpPr>
+        <p:spPr>
+          <a:xfrm>
+            <a:off x="10698480" y="6382512"/>
+            <a:ext cx="1188720" cy="365760"/>
+          </a:xfrm>
+          <a:prstGeom prst="rect">
+            <a:avLst/>
+          </a:prstGeom>
+          <a:noFill/>
+          <a:ln/>
+        </p:spPr>
+        <p:txBody>
+          <a:bodyPr wrap="square" rtlCol="0" anchor="ctr"/>
+          <a:lstStyle/>
+          <a:p>
+            <a:pPr algn="r" indent="0" marL="0">
+              <a:buNone/>
+            </a:pPr>
+            <a:r>
+              <a:rPr lang="en-US" sz="1000" dirty="0">
+                <a:solidFill>
+                  <a:srgbClr val="64748B"/>
+                </a:solidFill>
+                <a:latin typeface="Consolas" pitchFamily="34" charset="0"/>
+                <a:ea typeface="Consolas" pitchFamily="34" charset="-122"/>
+                <a:cs typeface="Consolas" pitchFamily="34" charset="-120"/>
+              </a:rPr>
+              <a:t>9 / 13</a:t>
             </a:r>
             <a:endParaRPr lang="en-US" sz="1000" dirty="0"/>
           </a:p>

--- a/decks/zalin-labs-platform.pptx
+++ b/decks/zalin-labs-platform.pptx
@@ -159,7 +159,7 @@
               <a:lstStyle/>
               <a:p>
                 <a:pPr>
-                  <a:defRPr b="0" i="0" strike="noStrike" sz="1000" u="none">
+                  <a:defRPr b="0" i="0" strike="noStrike" sz="1800" u="none">
                     <a:solidFill>
                       <a:srgbClr val="E2E8F0"/>
                     </a:solidFill>
@@ -288,7 +288,7 @@
             <a:lstStyle/>
             <a:p>
               <a:pPr>
-                <a:defRPr b="0" i="0" strike="noStrike" sz="1000" u="none">
+                <a:defRPr b="0" i="0" strike="noStrike" sz="1800" u="none">
                   <a:solidFill>
                     <a:srgbClr val="E2E8F0"/>
                   </a:solidFill>
@@ -336,7 +336,7 @@
           <a:lstStyle/>
           <a:p>
             <a:pPr>
-              <a:defRPr sz="1100" b="0" i="0" u="none" strike="noStrike">
+              <a:defRPr sz="1800" b="0" i="0" u="none" strike="noStrike">
                 <a:solidFill>
                   <a:srgbClr val="94A3B8"/>
                 </a:solidFill>
@@ -356,6 +356,7 @@
         <c:axId val="2094734552"/>
         <c:scaling>
           <c:orientation val="minMax"/>
+          <c:min val="0"/>
         </c:scaling>
         <c:delete val="0"/>
         <c:axPos val="l"/>
@@ -388,7 +389,7 @@
           <a:lstStyle/>
           <a:p>
             <a:pPr>
-              <a:defRPr sz="1000" b="0" i="0" u="none" strike="noStrike">
+              <a:defRPr sz="1800" b="0" i="0" u="none" strike="noStrike">
                 <a:solidFill>
                   <a:srgbClr val="94A3B8"/>
                 </a:solidFill>
@@ -622,7 +623,7 @@
           <a:lstStyle/>
           <a:p>
             <a:pPr>
-              <a:defRPr sz="1100" b="0" i="0" u="none" strike="noStrike">
+              <a:defRPr sz="1800" b="0" i="0" u="none" strike="noStrike">
                 <a:solidFill>
                   <a:srgbClr val="94A3B8"/>
                 </a:solidFill>
@@ -642,6 +643,7 @@
         <c:axId val="2094734552"/>
         <c:scaling>
           <c:orientation val="minMax"/>
+          <c:min val="0"/>
         </c:scaling>
         <c:delete val="0"/>
         <c:axPos val="l"/>
@@ -674,7 +676,7 @@
           <a:lstStyle/>
           <a:p>
             <a:pPr>
-              <a:defRPr sz="1000" b="0" i="0" u="none" strike="noStrike">
+              <a:defRPr sz="1800" b="0" i="0" u="none" strike="noStrike">
                 <a:solidFill>
                   <a:srgbClr val="94A3B8"/>
                 </a:solidFill>
@@ -800,7 +802,7 @@
             <c:bubble3D val="0"/>
             <c:spPr>
               <a:solidFill>
-                <a:srgbClr val="3B82F6"/>
+                <a:srgbClr val="22D3A0"/>
               </a:solidFill>
               <a:effectLst/>
             </c:spPr>
@@ -815,7 +817,7 @@
                 <a:lstStyle/>
                 <a:p>
                   <a:pPr>
-                    <a:defRPr sz="1000" b="0" i="0" u="none" strike="noStrike">
+                    <a:defRPr sz="1800" b="0" i="0" u="none" strike="noStrike">
                       <a:solidFill>
                         <a:srgbClr val="E2E8F0"/>
                       </a:solidFill>
@@ -840,7 +842,7 @@
                 <a:lstStyle/>
                 <a:p>
                   <a:pPr>
-                    <a:defRPr sz="1000" b="0" i="0" u="none" strike="noStrike">
+                    <a:defRPr sz="1800" b="0" i="0" u="none" strike="noStrike">
                       <a:solidFill>
                         <a:srgbClr val="E2E8F0"/>
                       </a:solidFill>
@@ -865,7 +867,7 @@
                 <a:lstStyle/>
                 <a:p>
                   <a:pPr>
-                    <a:defRPr sz="1000" b="0" i="0" u="none" strike="noStrike">
+                    <a:defRPr sz="1800" b="0" i="0" u="none" strike="noStrike">
                       <a:solidFill>
                         <a:srgbClr val="E2E8F0"/>
                       </a:solidFill>
@@ -890,7 +892,7 @@
                 <a:lstStyle/>
                 <a:p>
                   <a:pPr>
-                    <a:defRPr sz="1000" b="0" i="0" u="none" strike="noStrike">
+                    <a:defRPr sz="1800" b="0" i="0" u="none" strike="noStrike">
                       <a:solidFill>
                         <a:srgbClr val="E2E8F0"/>
                       </a:solidFill>
@@ -915,7 +917,7 @@
                 <a:lstStyle/>
                 <a:p>
                   <a:pPr>
-                    <a:defRPr sz="1000" b="0" i="0" u="none" strike="noStrike">
+                    <a:defRPr sz="1800" b="0" i="0" u="none" strike="noStrike">
                       <a:solidFill>
                         <a:srgbClr val="E2E8F0"/>
                       </a:solidFill>
@@ -1002,7 +1004,7 @@
           </c:val>
         </c:ser>
         <c:firstSliceAng val="0"/>
-        <c:holeSize val="62"/>
+        <c:holeSize val="60"/>
       </c:doughnutChart>
       <c:spPr>
         <a:solidFill>
@@ -1022,7 +1024,7 @@
         <a:lstStyle/>
         <a:p>
           <a:pPr>
-            <a:defRPr sz="1100">
+            <a:defRPr sz="1800">
               <a:solidFill>
                 <a:srgbClr val="CBD5E1"/>
               </a:solidFill>
@@ -1449,7 +1451,7 @@
           <a:p>
             <a:r>
               <a:rPr lang="en-US" dirty="0"/>
-              <a:t/>
+              <a:t>Opening: introduce yourself and this deck, "Zalin Labs: One Founder, Nine AI Agents, 30+ Apps". | Transition: next up - "What this deck covers".</a:t>
             </a:r>
             <a:endParaRPr lang="en-US" dirty="0"/>
           </a:p>
@@ -1537,7 +1539,7 @@
           <a:p>
             <a:r>
               <a:rPr lang="en-US" dirty="0"/>
-              <a:t/>
+              <a:t>Key message: Hero mode vs protocol mode | Talk track: The agents are the workforce; the protocols are the company. | Transition: next up - "Protocol-driven, human-approved".</a:t>
             </a:r>
             <a:endParaRPr lang="en-US" dirty="0"/>
           </a:p>
@@ -1625,7 +1627,7 @@
           <a:p>
             <a:r>
               <a:rPr lang="en-US" dirty="0"/>
-              <a:t/>
+              <a:t>Key message: Protocol-driven, human-approved | Talk track: Impersonation is structurally impossible when identity and verdicts are visible. | Transition: next up - "What it actually looks like to run this".</a:t>
             </a:r>
             <a:endParaRPr lang="en-US" dirty="0"/>
           </a:p>
@@ -1713,7 +1715,7 @@
           <a:p>
             <a:r>
               <a:rPr lang="en-US" dirty="0"/>
-              <a:t/>
+              <a:t>Key message: What it actually looks like to run this | Talk track: Boring, repeatable, and measurable - which is exactly why it scales. | Transition: next up - "Need a builder who ships like a team?".</a:t>
             </a:r>
             <a:endParaRPr lang="en-US" dirty="0"/>
           </a:p>
@@ -1801,7 +1803,7 @@
           <a:p>
             <a:r>
               <a:rPr lang="en-US" dirty="0"/>
-              <a:t/>
+              <a:t>Key message: Need a builder who ships like a team? | Transition: close with the call to action on the contact slide, invite questions.</a:t>
             </a:r>
             <a:endParaRPr lang="en-US" dirty="0"/>
           </a:p>
@@ -1889,7 +1891,7 @@
           <a:p>
             <a:r>
               <a:rPr lang="en-US" dirty="0"/>
-              <a:t/>
+              <a:t>Key message: What this deck covers | Agenda: The premise: AI changed the economics of software; The suite: 30+ production apps and the platform behind them; The pipeline: brief to shipped, gated at every step; The stack: five layers from kernel to boring rules; The numbers: 30+ apps, 9+ agents, 8.7K+ LOC; The operations: rooms, queues, approvals, watchdog | Transition: next up - "AI changed the economics of software - and raised the discipline bar".</a:t>
             </a:r>
             <a:endParaRPr lang="en-US" dirty="0"/>
           </a:p>
@@ -1977,7 +1979,7 @@
           <a:p>
             <a:r>
               <a:rPr lang="en-US" dirty="0"/>
-              <a:t/>
+              <a:t>Key message: AI changed the economics of software - and raised the discipline bar | Talk track: Zalin Labs is organized around that premise end to end. | Transition: next up - "One laptop, one founder, real production numbers".</a:t>
             </a:r>
             <a:endParaRPr lang="en-US" dirty="0"/>
           </a:p>
@@ -2065,7 +2067,7 @@
           <a:p>
             <a:r>
               <a:rPr lang="en-US" dirty="0"/>
-              <a:t/>
+              <a:t>Key message: One laptop, one founder, real production numbers | Talk track: A one-person company is not a smaller team; it is a different architecture. | Transition: next up - "The pipeline is the product: brief to shipped in five stages".</a:t>
             </a:r>
             <a:endParaRPr lang="en-US" dirty="0"/>
           </a:p>
@@ -2153,7 +2155,7 @@
           <a:p>
             <a:r>
               <a:rPr lang="en-US" dirty="0"/>
-              <a:t/>
+              <a:t>Key message: The pipeline is the product: brief to shipped in five stages | Talk track: With 30+ apps you do not maintain apps; you maintain a pipeline. | Transition: next up - "Five layers replace the headcount".</a:t>
             </a:r>
             <a:endParaRPr lang="en-US" dirty="0"/>
           </a:p>
@@ -2241,7 +2243,7 @@
           <a:p>
             <a:r>
               <a:rPr lang="en-US" dirty="0"/>
-              <a:t/>
+              <a:t>Key message: Five layers replace the headcount | Talk track: None of this is glamorous; all of it is why the layers above stay standing. | Transition: next up - "30+ production apps across everyday categories".</a:t>
             </a:r>
             <a:endParaRPr lang="en-US" dirty="0"/>
           </a:p>
@@ -2329,7 +2331,7 @@
           <a:p>
             <a:r>
               <a:rPr lang="en-US" dirty="0"/>
-              <a:t/>
+              <a:t>Key message: 30+ production apps across everyday categories | Insight: A portfolio this size survives only because maintenance is a pipeline, not a heroic effort. | Talk track: Category counts, illustrative - every app live, versioned, and supported. | Transition: next up - "Shipping cadence compounds once the pipeline holds".</a:t>
             </a:r>
             <a:endParaRPr lang="en-US" dirty="0"/>
           </a:p>
@@ -2417,7 +2419,7 @@
           <a:p>
             <a:r>
               <a:rPr lang="en-US" dirty="0"/>
-              <a:t/>
+              <a:t>Key message: Shipping cadence compounds once the pipeline holds | Insight: Growth came from parallel agent work under gates, not from longer hours. | Talk track: Cumulative count since founding, April 2024 to September 2026. | Transition: next up - "A quarter of every release cycle is QA and evidence".</a:t>
             </a:r>
             <a:endParaRPr lang="en-US" dirty="0"/>
           </a:p>
@@ -2505,7 +2507,7 @@
           <a:p>
             <a:r>
               <a:rPr lang="en-US" dirty="0"/>
-              <a:t/>
+              <a:t>Key message: A quarter of every release cycle is QA and evidence | Insight: Speed without gates is debt at machine pace, so the gates get real time. | Talk track: Illustrative effort split per release cycle across the suite. | Transition: next up - "Hero mode vs protocol mode".</a:t>
             </a:r>
             <a:endParaRPr lang="en-US" dirty="0"/>
           </a:p>
@@ -2926,7 +2928,7 @@
         </p:nvSpPr>
         <p:spPr>
           <a:xfrm>
-            <a:off x="822960" y="1783080"/>
+            <a:off x="822960" y="1737360"/>
             <a:ext cx="10515600" cy="457200"/>
           </a:xfrm>
           <a:prstGeom prst="rect">
@@ -2943,7 +2945,7 @@
               <a:buNone/>
             </a:pPr>
             <a:r>
-              <a:rPr lang="en-US" sz="1400" spc="400" kern="0" dirty="0">
+              <a:rPr lang="en-US" sz="1800" spc="400" kern="0" dirty="0">
                 <a:solidFill>
                   <a:srgbClr val="06B6D4"/>
                 </a:solidFill>
@@ -2953,7 +2955,7 @@
               </a:rPr>
               <a:t>ZALIN LABS · COMPANY</a:t>
             </a:r>
-            <a:endParaRPr lang="en-US" sz="1400" dirty="0"/>
+            <a:endParaRPr lang="en-US" sz="1800" dirty="0"/>
           </a:p>
         </p:txBody>
       </p:sp>
@@ -2965,7 +2967,7 @@
         </p:nvSpPr>
         <p:spPr>
           <a:xfrm>
-            <a:off x="822960" y="2286000"/>
+            <a:off x="822960" y="2240280"/>
             <a:ext cx="10607040" cy="1691640"/>
           </a:xfrm>
           <a:prstGeom prst="rect">
@@ -3004,8 +3006,8 @@
         </p:nvSpPr>
         <p:spPr>
           <a:xfrm>
-            <a:off x="822960" y="4023360"/>
-            <a:ext cx="10058400" cy="777240"/>
+            <a:off x="822960" y="3977640"/>
+            <a:ext cx="10058400" cy="822960"/>
           </a:xfrm>
           <a:prstGeom prst="rect">
             <a:avLst/>
@@ -3021,7 +3023,7 @@
               <a:buNone/>
             </a:pPr>
             <a:r>
-              <a:rPr lang="en-US" sz="1700" dirty="0">
+              <a:rPr lang="en-US" sz="2000" dirty="0">
                 <a:solidFill>
                   <a:srgbClr val="94A3B8"/>
                 </a:solidFill>
@@ -3031,7 +3033,7 @@
               </a:rPr>
               <a:t>A portfolio of production Android apps plus the full company platform behind them</a:t>
             </a:r>
-            <a:endParaRPr lang="en-US" sz="1700" dirty="0"/>
+            <a:endParaRPr lang="en-US" sz="2000" dirty="0"/>
           </a:p>
         </p:txBody>
       </p:sp>
@@ -3043,7 +3045,7 @@
         </p:nvSpPr>
         <p:spPr>
           <a:xfrm>
-            <a:off x="822960" y="5440680"/>
+            <a:off x="822960" y="5349240"/>
             <a:ext cx="4114800" cy="0"/>
           </a:xfrm>
           <a:prstGeom prst="line">
@@ -3066,8 +3068,8 @@
         </p:nvSpPr>
         <p:spPr>
           <a:xfrm>
-            <a:off x="822960" y="5596128"/>
-            <a:ext cx="10058400" cy="457200"/>
+            <a:off x="822960" y="5532120"/>
+            <a:ext cx="10058400" cy="502920"/>
           </a:xfrm>
           <a:prstGeom prst="rect">
             <a:avLst/>
@@ -3083,9 +3085,9 @@
               <a:buNone/>
             </a:pPr>
             <a:r>
-              <a:rPr lang="en-US" sz="1250" dirty="0">
-                <a:solidFill>
-                  <a:srgbClr val="64748B"/>
+              <a:rPr lang="en-US" sz="1800" dirty="0">
+                <a:solidFill>
+                  <a:srgbClr val="8FA3BF"/>
                 </a:solidFill>
                 <a:latin typeface="Segoe UI" pitchFamily="34" charset="0"/>
                 <a:ea typeface="Segoe UI" pitchFamily="34" charset="-122"/>
@@ -3093,7 +3095,7 @@
               </a:rPr>
               <a:t>Rezalian Vatiady · Zalin Labs · 2026</a:t>
             </a:r>
-            <a:endParaRPr lang="en-US" sz="1250" dirty="0"/>
+            <a:endParaRPr lang="en-US" sz="1800" dirty="0"/>
           </a:p>
         </p:txBody>
       </p:sp>
@@ -3105,8 +3107,8 @@
         </p:nvSpPr>
         <p:spPr>
           <a:xfrm>
-            <a:off x="10698480" y="6382512"/>
-            <a:ext cx="1188720" cy="365760"/>
+            <a:off x="10698480" y="6309360"/>
+            <a:ext cx="1188720" cy="411480"/>
           </a:xfrm>
           <a:prstGeom prst="rect">
             <a:avLst/>
@@ -3122,9 +3124,9 @@
               <a:buNone/>
             </a:pPr>
             <a:r>
-              <a:rPr lang="en-US" sz="1000" dirty="0">
-                <a:solidFill>
-                  <a:srgbClr val="64748B"/>
+              <a:rPr lang="en-US" sz="1800" dirty="0">
+                <a:solidFill>
+                  <a:srgbClr val="8FA3BF"/>
                 </a:solidFill>
                 <a:latin typeface="Consolas" pitchFamily="34" charset="0"/>
                 <a:ea typeface="Consolas" pitchFamily="34" charset="-122"/>
@@ -3132,7 +3134,7 @@
               </a:rPr>
               <a:t>1 / 13</a:t>
             </a:r>
-            <a:endParaRPr lang="en-US" sz="1000" dirty="0"/>
+            <a:endParaRPr lang="en-US" sz="1800" dirty="0"/>
           </a:p>
         </p:txBody>
       </p:sp>
@@ -3216,8 +3218,8 @@
         </p:nvSpPr>
         <p:spPr>
           <a:xfrm>
-            <a:off x="822960" y="502920"/>
-            <a:ext cx="10515600" cy="365760"/>
+            <a:off x="822960" y="457200"/>
+            <a:ext cx="10515600" cy="411480"/>
           </a:xfrm>
           <a:prstGeom prst="rect">
             <a:avLst/>
@@ -3233,7 +3235,7 @@
               <a:buNone/>
             </a:pPr>
             <a:r>
-              <a:rPr lang="en-US" sz="1200" spc="300" kern="0" dirty="0">
+              <a:rPr lang="en-US" sz="1800" spc="300" kern="0" dirty="0">
                 <a:solidFill>
                   <a:srgbClr val="06B6D4"/>
                 </a:solidFill>
@@ -3243,7 +3245,7 @@
               </a:rPr>
               <a:t>OPERATING MODEL</a:t>
             </a:r>
-            <a:endParaRPr lang="en-US" sz="1200" dirty="0"/>
+            <a:endParaRPr lang="en-US" sz="1800" dirty="0"/>
           </a:p>
         </p:txBody>
       </p:sp>
@@ -3294,12 +3296,12 @@
         </p:nvSpPr>
         <p:spPr>
           <a:xfrm>
-            <a:off x="822960" y="2011680"/>
-            <a:ext cx="5074920" cy="3611880"/>
+            <a:off x="822960" y="1965960"/>
+            <a:ext cx="5074920" cy="3657600"/>
           </a:xfrm>
           <a:prstGeom prst="roundRect">
             <a:avLst>
-              <a:gd name="adj" fmla="val 2025"/>
+              <a:gd name="adj" fmla="val 2000"/>
             </a:avLst>
           </a:prstGeom>
           <a:solidFill>
@@ -3321,8 +3323,8 @@
         </p:nvSpPr>
         <p:spPr>
           <a:xfrm>
-            <a:off x="1097280" y="2240280"/>
-            <a:ext cx="4526280" cy="502920"/>
+            <a:off x="1097280" y="2194560"/>
+            <a:ext cx="4526280" cy="548640"/>
           </a:xfrm>
           <a:prstGeom prst="rect">
             <a:avLst/>
@@ -3338,7 +3340,7 @@
               <a:buNone/>
             </a:pPr>
             <a:r>
-              <a:rPr lang="en-US" sz="1650" b="1" dirty="0">
+              <a:rPr lang="en-US" sz="2000" b="1" dirty="0">
                 <a:solidFill>
                   <a:srgbClr val="06B6D4"/>
                 </a:solidFill>
@@ -3348,7 +3350,7 @@
               </a:rPr>
               <a:t>Hero mode (the old way)</a:t>
             </a:r>
-            <a:endParaRPr lang="en-US" sz="1650" dirty="0"/>
+            <a:endParaRPr lang="en-US" sz="2000" dirty="0"/>
           </a:p>
         </p:txBody>
       </p:sp>
@@ -3384,7 +3386,7 @@
               <a:buChar char="▸"/>
             </a:pPr>
             <a:r>
-              <a:rPr lang="en-US" sz="1280" dirty="0">
+              <a:rPr lang="en-US" sz="1800" dirty="0">
                 <a:solidFill>
                   <a:srgbClr val="CBD5E1"/>
                 </a:solidFill>
@@ -3394,7 +3396,7 @@
               </a:rPr>
               <a:t>Execution depends on one person's energy and memory</a:t>
             </a:r>
-            <a:endParaRPr lang="en-US" sz="1280" dirty="0"/>
+            <a:endParaRPr lang="en-US" sz="1800" dirty="0"/>
           </a:p>
           <a:p>
             <a:pPr marL="342900" indent="-342900">
@@ -3408,7 +3410,7 @@
               <a:buChar char="▸"/>
             </a:pPr>
             <a:r>
-              <a:rPr lang="en-US" sz="1280" dirty="0">
+              <a:rPr lang="en-US" sz="1800" dirty="0">
                 <a:solidFill>
                   <a:srgbClr val="CBD5E1"/>
                 </a:solidFill>
@@ -3418,7 +3420,7 @@
               </a:rPr>
               <a:t>Releases ship hopefully, with quiet failures found by users</a:t>
             </a:r>
-            <a:endParaRPr lang="en-US" sz="1280" dirty="0"/>
+            <a:endParaRPr lang="en-US" sz="1800" dirty="0"/>
           </a:p>
           <a:p>
             <a:pPr marL="342900" indent="-342900">
@@ -3432,7 +3434,7 @@
               <a:buChar char="▸"/>
             </a:pPr>
             <a:r>
-              <a:rPr lang="en-US" sz="1280" dirty="0">
+              <a:rPr lang="en-US" sz="1800" dirty="0">
                 <a:solidFill>
                   <a:srgbClr val="CBD5E1"/>
                 </a:solidFill>
@@ -3442,7 +3444,7 @@
               </a:rPr>
               <a:t>Knowledge lives in chat scrolls and in someone's head</a:t>
             </a:r>
-            <a:endParaRPr lang="en-US" sz="1280" dirty="0"/>
+            <a:endParaRPr lang="en-US" sz="1800" dirty="0"/>
           </a:p>
         </p:txBody>
       </p:sp>
@@ -3454,12 +3456,12 @@
         </p:nvSpPr>
         <p:spPr>
           <a:xfrm>
-            <a:off x="6291072" y="2011680"/>
-            <a:ext cx="5074920" cy="3611880"/>
+            <a:off x="6291072" y="1965960"/>
+            <a:ext cx="5074920" cy="3657600"/>
           </a:xfrm>
           <a:prstGeom prst="roundRect">
             <a:avLst>
-              <a:gd name="adj" fmla="val 2025"/>
+              <a:gd name="adj" fmla="val 2000"/>
             </a:avLst>
           </a:prstGeom>
           <a:solidFill>
@@ -3481,8 +3483,8 @@
         </p:nvSpPr>
         <p:spPr>
           <a:xfrm>
-            <a:off x="6565392" y="2240280"/>
-            <a:ext cx="4526280" cy="502920"/>
+            <a:off x="6565392" y="2194560"/>
+            <a:ext cx="4526280" cy="548640"/>
           </a:xfrm>
           <a:prstGeom prst="rect">
             <a:avLst/>
@@ -3498,7 +3500,7 @@
               <a:buNone/>
             </a:pPr>
             <a:r>
-              <a:rPr lang="en-US" sz="1650" b="1" dirty="0">
+              <a:rPr lang="en-US" sz="2000" b="1" dirty="0">
                 <a:solidFill>
                   <a:srgbClr val="93C5FD"/>
                 </a:solidFill>
@@ -3508,7 +3510,7 @@
               </a:rPr>
               <a:t>Protocol mode (Zalin Labs)</a:t>
             </a:r>
-            <a:endParaRPr lang="en-US" sz="1650" dirty="0"/>
+            <a:endParaRPr lang="en-US" sz="2000" dirty="0"/>
           </a:p>
         </p:txBody>
       </p:sp>
@@ -3544,7 +3546,7 @@
               <a:buChar char="▸"/>
             </a:pPr>
             <a:r>
-              <a:rPr lang="en-US" sz="1280" dirty="0">
+              <a:rPr lang="en-US" sz="1800" dirty="0">
                 <a:solidFill>
                   <a:srgbClr val="CBD5E1"/>
                 </a:solidFill>
@@ -3554,7 +3556,7 @@
               </a:rPr>
               <a:t>Agents execute in parallel; the founder owns judgment and trade-offs</a:t>
             </a:r>
-            <a:endParaRPr lang="en-US" sz="1280" dirty="0"/>
+            <a:endParaRPr lang="en-US" sz="1800" dirty="0"/>
           </a:p>
           <a:p>
             <a:pPr marL="342900" indent="-342900">
@@ -3568,7 +3570,7 @@
               <a:buChar char="▸"/>
             </a:pPr>
             <a:r>
-              <a:rPr lang="en-US" sz="1280" dirty="0">
+              <a:rPr lang="en-US" sz="1800" dirty="0">
                 <a:solidFill>
                   <a:srgbClr val="CBD5E1"/>
                 </a:solidFill>
@@ -3578,7 +3580,7 @@
               </a:rPr>
               <a:t>Releases ship provably, with evidence a stranger could audit</a:t>
             </a:r>
-            <a:endParaRPr lang="en-US" sz="1280" dirty="0"/>
+            <a:endParaRPr lang="en-US" sz="1800" dirty="0"/>
           </a:p>
           <a:p>
             <a:pPr marL="342900" indent="-342900">
@@ -3592,7 +3594,7 @@
               <a:buChar char="▸"/>
             </a:pPr>
             <a:r>
-              <a:rPr lang="en-US" sz="1280" dirty="0">
+              <a:rPr lang="en-US" sz="1800" dirty="0">
                 <a:solidFill>
                   <a:srgbClr val="CBD5E1"/>
                 </a:solidFill>
@@ -3602,7 +3604,7 @@
               </a:rPr>
               <a:t>Every surprise becomes a written lesson before the day ends</a:t>
             </a:r>
-            <a:endParaRPr lang="en-US" sz="1280" dirty="0"/>
+            <a:endParaRPr lang="en-US" sz="1800" dirty="0"/>
           </a:p>
         </p:txBody>
       </p:sp>
@@ -3637,8 +3639,8 @@
         </p:nvSpPr>
         <p:spPr>
           <a:xfrm>
-            <a:off x="822960" y="6053328"/>
-            <a:ext cx="9692640" cy="457200"/>
+            <a:off x="822960" y="6035040"/>
+            <a:ext cx="10424160" cy="566928"/>
           </a:xfrm>
           <a:prstGeom prst="rect">
             <a:avLst/>
@@ -3654,9 +3656,9 @@
               <a:buNone/>
             </a:pPr>
             <a:r>
-              <a:rPr lang="en-US" sz="1150" dirty="0">
-                <a:solidFill>
-                  <a:srgbClr val="64748B"/>
+              <a:rPr lang="en-US" sz="1800" dirty="0">
+                <a:solidFill>
+                  <a:srgbClr val="8FA3BF"/>
                 </a:solidFill>
                 <a:latin typeface="Segoe UI" pitchFamily="34" charset="0"/>
                 <a:ea typeface="Segoe UI" pitchFamily="34" charset="-122"/>
@@ -3664,7 +3666,7 @@
               </a:rPr>
               <a:t>The agents are the workforce; the protocols are the company.</a:t>
             </a:r>
-            <a:endParaRPr lang="en-US" sz="1150" dirty="0"/>
+            <a:endParaRPr lang="en-US" sz="1800" dirty="0"/>
           </a:p>
         </p:txBody>
       </p:sp>
@@ -3676,8 +3678,8 @@
         </p:nvSpPr>
         <p:spPr>
           <a:xfrm>
-            <a:off x="10698480" y="6382512"/>
-            <a:ext cx="1188720" cy="365760"/>
+            <a:off x="10698480" y="6309360"/>
+            <a:ext cx="1188720" cy="411480"/>
           </a:xfrm>
           <a:prstGeom prst="rect">
             <a:avLst/>
@@ -3693,9 +3695,9 @@
               <a:buNone/>
             </a:pPr>
             <a:r>
-              <a:rPr lang="en-US" sz="1000" dirty="0">
-                <a:solidFill>
-                  <a:srgbClr val="64748B"/>
+              <a:rPr lang="en-US" sz="1800" dirty="0">
+                <a:solidFill>
+                  <a:srgbClr val="8FA3BF"/>
                 </a:solidFill>
                 <a:latin typeface="Consolas" pitchFamily="34" charset="0"/>
                 <a:ea typeface="Consolas" pitchFamily="34" charset="-122"/>
@@ -3703,7 +3705,7 @@
               </a:rPr>
               <a:t>10 / 13</a:t>
             </a:r>
-            <a:endParaRPr lang="en-US" sz="1000" dirty="0"/>
+            <a:endParaRPr lang="en-US" sz="1800" dirty="0"/>
           </a:p>
         </p:txBody>
       </p:sp>
@@ -3787,8 +3789,8 @@
         </p:nvSpPr>
         <p:spPr>
           <a:xfrm>
-            <a:off x="822960" y="502920"/>
-            <a:ext cx="10515600" cy="365760"/>
+            <a:off x="822960" y="457200"/>
+            <a:ext cx="10515600" cy="411480"/>
           </a:xfrm>
           <a:prstGeom prst="rect">
             <a:avLst/>
@@ -3804,7 +3806,7 @@
               <a:buNone/>
             </a:pPr>
             <a:r>
-              <a:rPr lang="en-US" sz="1200" spc="300" kern="0" dirty="0">
+              <a:rPr lang="en-US" sz="1800" spc="300" kern="0" dirty="0">
                 <a:solidFill>
                   <a:srgbClr val="06B6D4"/>
                 </a:solidFill>
@@ -3814,7 +3816,7 @@
               </a:rPr>
               <a:t>OPERATIONS</a:t>
             </a:r>
-            <a:endParaRPr lang="en-US" sz="1200" dirty="0"/>
+            <a:endParaRPr lang="en-US" sz="1800" dirty="0"/>
           </a:p>
         </p:txBody>
       </p:sp>
@@ -3865,8 +3867,8 @@
         </p:nvSpPr>
         <p:spPr>
           <a:xfrm>
-            <a:off x="868680" y="2011680"/>
-            <a:ext cx="10424160" cy="3566160"/>
+            <a:off x="868680" y="1965960"/>
+            <a:ext cx="10424160" cy="3840480"/>
           </a:xfrm>
           <a:prstGeom prst="rect">
             <a:avLst/>
@@ -3889,7 +3891,7 @@
               <a:buChar char="▸"/>
             </a:pPr>
             <a:r>
-              <a:rPr lang="en-US" sz="1600" dirty="0">
+              <a:rPr lang="en-US" sz="2000" dirty="0">
                 <a:solidFill>
                   <a:srgbClr val="CBD5E1"/>
                 </a:solidFill>
@@ -3899,7 +3901,7 @@
               </a:rPr>
               <a:t>Coordination happens in shared rooms, so decisions are visible and auditable instead of whispered.</a:t>
             </a:r>
-            <a:endParaRPr lang="en-US" sz="1600" dirty="0"/>
+            <a:endParaRPr lang="en-US" sz="2000" dirty="0"/>
           </a:p>
           <a:p>
             <a:pPr marL="342900" indent="-342900">
@@ -3913,7 +3915,7 @@
               <a:buChar char="▸"/>
             </a:pPr>
             <a:r>
-              <a:rPr lang="en-US" sz="1600" dirty="0">
+              <a:rPr lang="en-US" sz="2000" dirty="0">
                 <a:solidFill>
                   <a:srgbClr val="CBD5E1"/>
                 </a:solidFill>
@@ -3923,7 +3925,7 @@
               </a:rPr>
               <a:t>Per-agent queues keep parallel work from colliding, with explicit pause, resume, and skip.</a:t>
             </a:r>
-            <a:endParaRPr lang="en-US" sz="1600" dirty="0"/>
+            <a:endParaRPr lang="en-US" sz="2000" dirty="0"/>
           </a:p>
           <a:p>
             <a:pPr marL="342900" indent="-342900">
@@ -3937,7 +3939,7 @@
               <a:buChar char="▸"/>
             </a:pPr>
             <a:r>
-              <a:rPr lang="en-US" sz="1600" dirty="0">
+              <a:rPr lang="en-US" sz="2000" dirty="0">
                 <a:solidFill>
                   <a:srgbClr val="CBD5E1"/>
                 </a:solidFill>
@@ -3947,7 +3949,7 @@
               </a:rPr>
               <a:t>Agents never approve their own releases; decisions route through the founder via an approval queue.</a:t>
             </a:r>
-            <a:endParaRPr lang="en-US" sz="1600" dirty="0"/>
+            <a:endParaRPr lang="en-US" sz="2000" dirty="0"/>
           </a:p>
           <a:p>
             <a:pPr marL="342900" indent="-342900">
@@ -3961,7 +3963,7 @@
               <a:buChar char="▸"/>
             </a:pPr>
             <a:r>
-              <a:rPr lang="en-US" sz="1600" dirty="0">
+              <a:rPr lang="en-US" sz="2000" dirty="0">
                 <a:solidFill>
                   <a:srgbClr val="CBD5E1"/>
                 </a:solidFill>
@@ -3971,7 +3973,7 @@
               </a:rPr>
               <a:t>A watchdog detects misbehaving machines and recovers them, because honest red beats fake green.</a:t>
             </a:r>
-            <a:endParaRPr lang="en-US" sz="1600" dirty="0"/>
+            <a:endParaRPr lang="en-US" sz="2000" dirty="0"/>
           </a:p>
         </p:txBody>
       </p:sp>
@@ -4006,8 +4008,8 @@
         </p:nvSpPr>
         <p:spPr>
           <a:xfrm>
-            <a:off x="822960" y="6053328"/>
-            <a:ext cx="9692640" cy="457200"/>
+            <a:off x="822960" y="6035040"/>
+            <a:ext cx="10424160" cy="566928"/>
           </a:xfrm>
           <a:prstGeom prst="rect">
             <a:avLst/>
@@ -4023,9 +4025,9 @@
               <a:buNone/>
             </a:pPr>
             <a:r>
-              <a:rPr lang="en-US" sz="1150" dirty="0">
-                <a:solidFill>
-                  <a:srgbClr val="64748B"/>
+              <a:rPr lang="en-US" sz="1800" dirty="0">
+                <a:solidFill>
+                  <a:srgbClr val="8FA3BF"/>
                 </a:solidFill>
                 <a:latin typeface="Segoe UI" pitchFamily="34" charset="0"/>
                 <a:ea typeface="Segoe UI" pitchFamily="34" charset="-122"/>
@@ -4033,7 +4035,7 @@
               </a:rPr>
               <a:t>Impersonation is structurally impossible when identity and verdicts are visible.</a:t>
             </a:r>
-            <a:endParaRPr lang="en-US" sz="1150" dirty="0"/>
+            <a:endParaRPr lang="en-US" sz="1800" dirty="0"/>
           </a:p>
         </p:txBody>
       </p:sp>
@@ -4045,8 +4047,8 @@
         </p:nvSpPr>
         <p:spPr>
           <a:xfrm>
-            <a:off x="10698480" y="6382512"/>
-            <a:ext cx="1188720" cy="365760"/>
+            <a:off x="10698480" y="6309360"/>
+            <a:ext cx="1188720" cy="411480"/>
           </a:xfrm>
           <a:prstGeom prst="rect">
             <a:avLst/>
@@ -4062,9 +4064,9 @@
               <a:buNone/>
             </a:pPr>
             <a:r>
-              <a:rPr lang="en-US" sz="1000" dirty="0">
-                <a:solidFill>
-                  <a:srgbClr val="64748B"/>
+              <a:rPr lang="en-US" sz="1800" dirty="0">
+                <a:solidFill>
+                  <a:srgbClr val="8FA3BF"/>
                 </a:solidFill>
                 <a:latin typeface="Consolas" pitchFamily="34" charset="0"/>
                 <a:ea typeface="Consolas" pitchFamily="34" charset="-122"/>
@@ -4072,7 +4074,7 @@
               </a:rPr>
               <a:t>11 / 13</a:t>
             </a:r>
-            <a:endParaRPr lang="en-US" sz="1000" dirty="0"/>
+            <a:endParaRPr lang="en-US" sz="1800" dirty="0"/>
           </a:p>
         </p:txBody>
       </p:sp>
@@ -4156,8 +4158,8 @@
         </p:nvSpPr>
         <p:spPr>
           <a:xfrm>
-            <a:off x="822960" y="502920"/>
-            <a:ext cx="10515600" cy="365760"/>
+            <a:off x="822960" y="457200"/>
+            <a:ext cx="10515600" cy="411480"/>
           </a:xfrm>
           <a:prstGeom prst="rect">
             <a:avLst/>
@@ -4173,7 +4175,7 @@
               <a:buNone/>
             </a:pPr>
             <a:r>
-              <a:rPr lang="en-US" sz="1200" spc="300" kern="0" dirty="0">
+              <a:rPr lang="en-US" sz="1800" spc="300" kern="0" dirty="0">
                 <a:solidFill>
                   <a:srgbClr val="06B6D4"/>
                 </a:solidFill>
@@ -4183,7 +4185,7 @@
               </a:rPr>
               <a:t>DAY TO DAY</a:t>
             </a:r>
-            <a:endParaRPr lang="en-US" sz="1200" dirty="0"/>
+            <a:endParaRPr lang="en-US" sz="1800" dirty="0"/>
           </a:p>
         </p:txBody>
       </p:sp>
@@ -4234,8 +4236,8 @@
         </p:nvSpPr>
         <p:spPr>
           <a:xfrm>
-            <a:off x="868680" y="2011680"/>
-            <a:ext cx="10424160" cy="3566160"/>
+            <a:off x="868680" y="1965960"/>
+            <a:ext cx="10424160" cy="3840480"/>
           </a:xfrm>
           <a:prstGeom prst="rect">
             <a:avLst/>
@@ -4258,7 +4260,7 @@
               <a:buChar char="▸"/>
             </a:pPr>
             <a:r>
-              <a:rPr lang="en-US" sz="1600" dirty="0">
+              <a:rPr lang="en-US" sz="2000" dirty="0">
                 <a:solidFill>
                   <a:srgbClr val="CBD5E1"/>
                 </a:solidFill>
@@ -4268,7 +4270,7 @@
               </a:rPr>
               <a:t>Briefs go in and status comes out in the same format every time, across every app.</a:t>
             </a:r>
-            <a:endParaRPr lang="en-US" sz="1600" dirty="0"/>
+            <a:endParaRPr lang="en-US" sz="2000" dirty="0"/>
           </a:p>
           <a:p>
             <a:pPr marL="342900" indent="-342900">
@@ -4282,7 +4284,7 @@
               <a:buChar char="▸"/>
             </a:pPr>
             <a:r>
-              <a:rPr lang="en-US" sz="1600" dirty="0">
+              <a:rPr lang="en-US" sz="2000" dirty="0">
                 <a:solidFill>
                   <a:srgbClr val="CBD5E1"/>
                 </a:solidFill>
@@ -4292,7 +4294,7 @@
               </a:rPr>
               <a:t>Multiple agents work in parallel across the suite without stepping on each other.</a:t>
             </a:r>
-            <a:endParaRPr lang="en-US" sz="1600" dirty="0"/>
+            <a:endParaRPr lang="en-US" sz="2000" dirty="0"/>
           </a:p>
           <a:p>
             <a:pPr marL="342900" indent="-342900">
@@ -4306,7 +4308,7 @@
               <a:buChar char="▸"/>
             </a:pPr>
             <a:r>
-              <a:rPr lang="en-US" sz="1600" dirty="0">
+              <a:rPr lang="en-US" sz="2000" dirty="0">
                 <a:solidFill>
                   <a:srgbClr val="CBD5E1"/>
                 </a:solidFill>
@@ -4316,7 +4318,7 @@
               </a:rPr>
               <a:t>The promote folder always answers one question: what is the newest build of every app?</a:t>
             </a:r>
-            <a:endParaRPr lang="en-US" sz="1600" dirty="0"/>
+            <a:endParaRPr lang="en-US" sz="2000" dirty="0"/>
           </a:p>
           <a:p>
             <a:pPr marL="342900" indent="-342900">
@@ -4330,7 +4332,7 @@
               <a:buChar char="▸"/>
             </a:pPr>
             <a:r>
-              <a:rPr lang="en-US" sz="1600" dirty="0">
+              <a:rPr lang="en-US" sz="2000" dirty="0">
                 <a:solidFill>
                   <a:srgbClr val="CBD5E1"/>
                 </a:solidFill>
@@ -4340,7 +4342,7 @@
               </a:rPr>
               <a:t>The founder is the bottleneck for judgment, not for execution - which is the right trade.</a:t>
             </a:r>
-            <a:endParaRPr lang="en-US" sz="1600" dirty="0"/>
+            <a:endParaRPr lang="en-US" sz="2000" dirty="0"/>
           </a:p>
         </p:txBody>
       </p:sp>
@@ -4375,8 +4377,8 @@
         </p:nvSpPr>
         <p:spPr>
           <a:xfrm>
-            <a:off x="822960" y="6053328"/>
-            <a:ext cx="9692640" cy="457200"/>
+            <a:off x="822960" y="6035040"/>
+            <a:ext cx="10424160" cy="566928"/>
           </a:xfrm>
           <a:prstGeom prst="rect">
             <a:avLst/>
@@ -4392,9 +4394,9 @@
               <a:buNone/>
             </a:pPr>
             <a:r>
-              <a:rPr lang="en-US" sz="1150" dirty="0">
-                <a:solidFill>
-                  <a:srgbClr val="64748B"/>
+              <a:rPr lang="en-US" sz="1800" dirty="0">
+                <a:solidFill>
+                  <a:srgbClr val="8FA3BF"/>
                 </a:solidFill>
                 <a:latin typeface="Segoe UI" pitchFamily="34" charset="0"/>
                 <a:ea typeface="Segoe UI" pitchFamily="34" charset="-122"/>
@@ -4402,7 +4404,7 @@
               </a:rPr>
               <a:t>Boring, repeatable, and measurable - which is exactly why it scales.</a:t>
             </a:r>
-            <a:endParaRPr lang="en-US" sz="1150" dirty="0"/>
+            <a:endParaRPr lang="en-US" sz="1800" dirty="0"/>
           </a:p>
         </p:txBody>
       </p:sp>
@@ -4414,8 +4416,8 @@
         </p:nvSpPr>
         <p:spPr>
           <a:xfrm>
-            <a:off x="10698480" y="6382512"/>
-            <a:ext cx="1188720" cy="365760"/>
+            <a:off x="10698480" y="6309360"/>
+            <a:ext cx="1188720" cy="411480"/>
           </a:xfrm>
           <a:prstGeom prst="rect">
             <a:avLst/>
@@ -4431,9 +4433,9 @@
               <a:buNone/>
             </a:pPr>
             <a:r>
-              <a:rPr lang="en-US" sz="1000" dirty="0">
-                <a:solidFill>
-                  <a:srgbClr val="64748B"/>
+              <a:rPr lang="en-US" sz="1800" dirty="0">
+                <a:solidFill>
+                  <a:srgbClr val="8FA3BF"/>
                 </a:solidFill>
                 <a:latin typeface="Consolas" pitchFamily="34" charset="0"/>
                 <a:ea typeface="Consolas" pitchFamily="34" charset="-122"/>
@@ -4441,7 +4443,7 @@
               </a:rPr>
               <a:t>12 / 13</a:t>
             </a:r>
-            <a:endParaRPr lang="en-US" sz="1000" dirty="0"/>
+            <a:endParaRPr lang="en-US" sz="1800" dirty="0"/>
           </a:p>
         </p:txBody>
       </p:sp>
@@ -4525,8 +4527,8 @@
         </p:nvSpPr>
         <p:spPr>
           <a:xfrm>
-            <a:off x="822960" y="1417320"/>
-            <a:ext cx="10515600" cy="411480"/>
+            <a:off x="822960" y="1371600"/>
+            <a:ext cx="10515600" cy="457200"/>
           </a:xfrm>
           <a:prstGeom prst="rect">
             <a:avLst/>
@@ -4542,7 +4544,7 @@
               <a:buNone/>
             </a:pPr>
             <a:r>
-              <a:rPr lang="en-US" sz="1300" spc="400" kern="0" dirty="0">
+              <a:rPr lang="en-US" sz="1800" spc="400" kern="0" dirty="0">
                 <a:solidFill>
                   <a:srgbClr val="06B6D4"/>
                 </a:solidFill>
@@ -4552,7 +4554,7 @@
               </a:rPr>
               <a:t>WORK WITH ME</a:t>
             </a:r>
-            <a:endParaRPr lang="en-US" sz="1300" dirty="0"/>
+            <a:endParaRPr lang="en-US" sz="1800" dirty="0"/>
           </a:p>
         </p:txBody>
       </p:sp>
@@ -4564,7 +4566,7 @@
         </p:nvSpPr>
         <p:spPr>
           <a:xfrm>
-            <a:off x="822960" y="1920240"/>
+            <a:off x="822960" y="1874520"/>
             <a:ext cx="10515600" cy="1371600"/>
           </a:xfrm>
           <a:prstGeom prst="rect">
@@ -4603,8 +4605,8 @@
         </p:nvSpPr>
         <p:spPr>
           <a:xfrm>
-            <a:off x="2011680" y="3429000"/>
-            <a:ext cx="8183880" cy="1554480"/>
+            <a:off x="2011680" y="3383280"/>
+            <a:ext cx="8183880" cy="1691640"/>
           </a:xfrm>
           <a:prstGeom prst="rect">
             <a:avLst/>
@@ -4623,7 +4625,7 @@
               <a:buNone/>
             </a:pPr>
             <a:r>
-              <a:rPr lang="en-US" sz="1500" dirty="0">
+              <a:rPr lang="en-US" sz="2000" dirty="0">
                 <a:solidFill>
                   <a:srgbClr val="CBD5E1"/>
                 </a:solidFill>
@@ -4640,7 +4642,7 @@
               <a:buNone/>
             </a:pPr>
             <a:r>
-              <a:rPr lang="en-US" sz="1500" dirty="0">
+              <a:rPr lang="en-US" sz="2000" dirty="0">
                 <a:solidFill>
                   <a:srgbClr val="CBD5E1"/>
                 </a:solidFill>
@@ -4650,7 +4652,7 @@
               </a:rPr>
               <a:t>Available for AI automation, data engineering, and scraping projects via Upwork, worldwide.</a:t>
             </a:r>
-            <a:endParaRPr lang="en-US" sz="1500" dirty="0"/>
+            <a:endParaRPr lang="en-US" sz="2000" dirty="0"/>
           </a:p>
         </p:txBody>
       </p:sp>
@@ -4685,8 +4687,8 @@
         </p:nvSpPr>
         <p:spPr>
           <a:xfrm>
-            <a:off x="822960" y="5376672"/>
-            <a:ext cx="10515600" cy="457200"/>
+            <a:off x="822960" y="5349240"/>
+            <a:ext cx="10515600" cy="502920"/>
           </a:xfrm>
           <a:prstGeom prst="rect">
             <a:avLst/>
@@ -4702,7 +4704,7 @@
               <a:buNone/>
             </a:pPr>
             <a:r>
-              <a:rPr lang="en-US" sz="1350" b="1" dirty="0">
+              <a:rPr lang="en-US" sz="1800" b="1" dirty="0">
                 <a:solidFill>
                   <a:srgbClr val="06B6D4"/>
                 </a:solidFill>
@@ -4712,7 +4714,7 @@
               </a:rPr>
               <a:t>rezalianvatiady.github.io · github.com/rezalianvatiady</a:t>
             </a:r>
-            <a:endParaRPr lang="en-US" sz="1350" dirty="0"/>
+            <a:endParaRPr lang="en-US" sz="1800" dirty="0"/>
           </a:p>
         </p:txBody>
       </p:sp>
@@ -4724,8 +4726,8 @@
         </p:nvSpPr>
         <p:spPr>
           <a:xfrm>
-            <a:off x="10698480" y="6382512"/>
-            <a:ext cx="1188720" cy="365760"/>
+            <a:off x="10698480" y="6309360"/>
+            <a:ext cx="1188720" cy="411480"/>
           </a:xfrm>
           <a:prstGeom prst="rect">
             <a:avLst/>
@@ -4741,9 +4743,9 @@
               <a:buNone/>
             </a:pPr>
             <a:r>
-              <a:rPr lang="en-US" sz="1000" dirty="0">
-                <a:solidFill>
-                  <a:srgbClr val="64748B"/>
+              <a:rPr lang="en-US" sz="1800" dirty="0">
+                <a:solidFill>
+                  <a:srgbClr val="8FA3BF"/>
                 </a:solidFill>
                 <a:latin typeface="Consolas" pitchFamily="34" charset="0"/>
                 <a:ea typeface="Consolas" pitchFamily="34" charset="-122"/>
@@ -4751,7 +4753,7 @@
               </a:rPr>
               <a:t>13 / 13</a:t>
             </a:r>
-            <a:endParaRPr lang="en-US" sz="1000" dirty="0"/>
+            <a:endParaRPr lang="en-US" sz="1800" dirty="0"/>
           </a:p>
         </p:txBody>
       </p:sp>
@@ -4835,8 +4837,8 @@
         </p:nvSpPr>
         <p:spPr>
           <a:xfrm>
-            <a:off x="822960" y="502920"/>
-            <a:ext cx="10515600" cy="365760"/>
+            <a:off x="822960" y="457200"/>
+            <a:ext cx="10515600" cy="411480"/>
           </a:xfrm>
           <a:prstGeom prst="rect">
             <a:avLst/>
@@ -4852,7 +4854,7 @@
               <a:buNone/>
             </a:pPr>
             <a:r>
-              <a:rPr lang="en-US" sz="1200" spc="300" kern="0" dirty="0">
+              <a:rPr lang="en-US" sz="1800" spc="300" kern="0" dirty="0">
                 <a:solidFill>
                   <a:srgbClr val="06B6D4"/>
                 </a:solidFill>
@@ -4862,7 +4864,7 @@
               </a:rPr>
               <a:t>AGENDA</a:t>
             </a:r>
-            <a:endParaRPr lang="en-US" sz="1200" dirty="0"/>
+            <a:endParaRPr lang="en-US" sz="1800" dirty="0"/>
           </a:p>
         </p:txBody>
       </p:sp>
@@ -4913,8 +4915,8 @@
         </p:nvSpPr>
         <p:spPr>
           <a:xfrm>
-            <a:off x="868680" y="2112264"/>
-            <a:ext cx="420624" cy="420624"/>
+            <a:off x="868680" y="2103120"/>
+            <a:ext cx="457200" cy="457200"/>
           </a:xfrm>
           <a:prstGeom prst="ellipse">
             <a:avLst/>
@@ -4938,8 +4940,8 @@
         </p:nvSpPr>
         <p:spPr>
           <a:xfrm>
-            <a:off x="868680" y="2112264"/>
-            <a:ext cx="420624" cy="420624"/>
+            <a:off x="868680" y="2103120"/>
+            <a:ext cx="457200" cy="457200"/>
           </a:xfrm>
           <a:prstGeom prst="rect">
             <a:avLst/>
@@ -4955,7 +4957,7 @@
               <a:buNone/>
             </a:pPr>
             <a:r>
-              <a:rPr lang="en-US" sz="1300" b="1" dirty="0">
+              <a:rPr lang="en-US" sz="1800" b="1" dirty="0">
                 <a:solidFill>
                   <a:srgbClr val="3B82F6"/>
                 </a:solidFill>
@@ -4965,7 +4967,7 @@
               </a:rPr>
               <a:t>1</a:t>
             </a:r>
-            <a:endParaRPr lang="en-US" sz="1300" dirty="0"/>
+            <a:endParaRPr lang="en-US" sz="1800" dirty="0"/>
           </a:p>
         </p:txBody>
       </p:sp>
@@ -4977,8 +4979,8 @@
         </p:nvSpPr>
         <p:spPr>
           <a:xfrm>
-            <a:off x="1435608" y="2057400"/>
-            <a:ext cx="4480560" cy="822960"/>
+            <a:off x="1472184" y="2011680"/>
+            <a:ext cx="4443984" cy="960120"/>
           </a:xfrm>
           <a:prstGeom prst="rect">
             <a:avLst/>
@@ -4994,7 +4996,7 @@
               <a:buNone/>
             </a:pPr>
             <a:r>
-              <a:rPr lang="en-US" sz="1450" dirty="0">
+              <a:rPr lang="en-US" sz="2000" dirty="0">
                 <a:solidFill>
                   <a:srgbClr val="CBD5E1"/>
                 </a:solidFill>
@@ -5004,7 +5006,7 @@
               </a:rPr>
               <a:t>The premise: AI changed the economics of software</a:t>
             </a:r>
-            <a:endParaRPr lang="en-US" sz="1450" dirty="0"/>
+            <a:endParaRPr lang="en-US" sz="2000" dirty="0"/>
           </a:p>
         </p:txBody>
       </p:sp>
@@ -5016,8 +5018,8 @@
         </p:nvSpPr>
         <p:spPr>
           <a:xfrm>
-            <a:off x="868680" y="3044952"/>
-            <a:ext cx="420624" cy="420624"/>
+            <a:off x="868680" y="3182112"/>
+            <a:ext cx="457200" cy="457200"/>
           </a:xfrm>
           <a:prstGeom prst="ellipse">
             <a:avLst/>
@@ -5041,8 +5043,8 @@
         </p:nvSpPr>
         <p:spPr>
           <a:xfrm>
-            <a:off x="868680" y="3044952"/>
-            <a:ext cx="420624" cy="420624"/>
+            <a:off x="868680" y="3182112"/>
+            <a:ext cx="457200" cy="457200"/>
           </a:xfrm>
           <a:prstGeom prst="rect">
             <a:avLst/>
@@ -5058,7 +5060,7 @@
               <a:buNone/>
             </a:pPr>
             <a:r>
-              <a:rPr lang="en-US" sz="1300" b="1" dirty="0">
+              <a:rPr lang="en-US" sz="1800" b="1" dirty="0">
                 <a:solidFill>
                   <a:srgbClr val="06B6D4"/>
                 </a:solidFill>
@@ -5068,7 +5070,7 @@
               </a:rPr>
               <a:t>2</a:t>
             </a:r>
-            <a:endParaRPr lang="en-US" sz="1300" dirty="0"/>
+            <a:endParaRPr lang="en-US" sz="1800" dirty="0"/>
           </a:p>
         </p:txBody>
       </p:sp>
@@ -5080,8 +5082,8 @@
         </p:nvSpPr>
         <p:spPr>
           <a:xfrm>
-            <a:off x="1435608" y="2990088"/>
-            <a:ext cx="4480560" cy="822960"/>
+            <a:off x="1472184" y="3090672"/>
+            <a:ext cx="4443984" cy="960120"/>
           </a:xfrm>
           <a:prstGeom prst="rect">
             <a:avLst/>
@@ -5097,7 +5099,7 @@
               <a:buNone/>
             </a:pPr>
             <a:r>
-              <a:rPr lang="en-US" sz="1450" dirty="0">
+              <a:rPr lang="en-US" sz="2000" dirty="0">
                 <a:solidFill>
                   <a:srgbClr val="CBD5E1"/>
                 </a:solidFill>
@@ -5107,7 +5109,7 @@
               </a:rPr>
               <a:t>The suite: 30+ production apps and the platform behind them</a:t>
             </a:r>
-            <a:endParaRPr lang="en-US" sz="1450" dirty="0"/>
+            <a:endParaRPr lang="en-US" sz="2000" dirty="0"/>
           </a:p>
         </p:txBody>
       </p:sp>
@@ -5119,8 +5121,8 @@
         </p:nvSpPr>
         <p:spPr>
           <a:xfrm>
-            <a:off x="868680" y="3977640"/>
-            <a:ext cx="420624" cy="420624"/>
+            <a:off x="868680" y="4261104"/>
+            <a:ext cx="457200" cy="457200"/>
           </a:xfrm>
           <a:prstGeom prst="ellipse">
             <a:avLst/>
@@ -5144,8 +5146,8 @@
         </p:nvSpPr>
         <p:spPr>
           <a:xfrm>
-            <a:off x="868680" y="3977640"/>
-            <a:ext cx="420624" cy="420624"/>
+            <a:off x="868680" y="4261104"/>
+            <a:ext cx="457200" cy="457200"/>
           </a:xfrm>
           <a:prstGeom prst="rect">
             <a:avLst/>
@@ -5161,7 +5163,7 @@
               <a:buNone/>
             </a:pPr>
             <a:r>
-              <a:rPr lang="en-US" sz="1300" b="1" dirty="0">
+              <a:rPr lang="en-US" sz="1800" b="1" dirty="0">
                 <a:solidFill>
                   <a:srgbClr val="3B82F6"/>
                 </a:solidFill>
@@ -5171,7 +5173,7 @@
               </a:rPr>
               <a:t>3</a:t>
             </a:r>
-            <a:endParaRPr lang="en-US" sz="1300" dirty="0"/>
+            <a:endParaRPr lang="en-US" sz="1800" dirty="0"/>
           </a:p>
         </p:txBody>
       </p:sp>
@@ -5183,8 +5185,8 @@
         </p:nvSpPr>
         <p:spPr>
           <a:xfrm>
-            <a:off x="1435608" y="3922776"/>
-            <a:ext cx="4480560" cy="822960"/>
+            <a:off x="1472184" y="4169664"/>
+            <a:ext cx="4443984" cy="960120"/>
           </a:xfrm>
           <a:prstGeom prst="rect">
             <a:avLst/>
@@ -5200,7 +5202,7 @@
               <a:buNone/>
             </a:pPr>
             <a:r>
-              <a:rPr lang="en-US" sz="1450" dirty="0">
+              <a:rPr lang="en-US" sz="2000" dirty="0">
                 <a:solidFill>
                   <a:srgbClr val="CBD5E1"/>
                 </a:solidFill>
@@ -5210,7 +5212,7 @@
               </a:rPr>
               <a:t>The pipeline: brief to shipped, gated at every step</a:t>
             </a:r>
-            <a:endParaRPr lang="en-US" sz="1450" dirty="0"/>
+            <a:endParaRPr lang="en-US" sz="2000" dirty="0"/>
           </a:p>
         </p:txBody>
       </p:sp>
@@ -5222,8 +5224,8 @@
         </p:nvSpPr>
         <p:spPr>
           <a:xfrm>
-            <a:off x="6355080" y="2112264"/>
-            <a:ext cx="420624" cy="420624"/>
+            <a:off x="6355080" y="2103120"/>
+            <a:ext cx="457200" cy="457200"/>
           </a:xfrm>
           <a:prstGeom prst="ellipse">
             <a:avLst/>
@@ -5247,8 +5249,8 @@
         </p:nvSpPr>
         <p:spPr>
           <a:xfrm>
-            <a:off x="6355080" y="2112264"/>
-            <a:ext cx="420624" cy="420624"/>
+            <a:off x="6355080" y="2103120"/>
+            <a:ext cx="457200" cy="457200"/>
           </a:xfrm>
           <a:prstGeom prst="rect">
             <a:avLst/>
@@ -5264,7 +5266,7 @@
               <a:buNone/>
             </a:pPr>
             <a:r>
-              <a:rPr lang="en-US" sz="1300" b="1" dirty="0">
+              <a:rPr lang="en-US" sz="1800" b="1" dirty="0">
                 <a:solidFill>
                   <a:srgbClr val="06B6D4"/>
                 </a:solidFill>
@@ -5274,7 +5276,7 @@
               </a:rPr>
               <a:t>4</a:t>
             </a:r>
-            <a:endParaRPr lang="en-US" sz="1300" dirty="0"/>
+            <a:endParaRPr lang="en-US" sz="1800" dirty="0"/>
           </a:p>
         </p:txBody>
       </p:sp>
@@ -5286,8 +5288,8 @@
         </p:nvSpPr>
         <p:spPr>
           <a:xfrm>
-            <a:off x="6922008" y="2057400"/>
-            <a:ext cx="4480560" cy="822960"/>
+            <a:off x="6958584" y="2011680"/>
+            <a:ext cx="4443984" cy="960120"/>
           </a:xfrm>
           <a:prstGeom prst="rect">
             <a:avLst/>
@@ -5303,7 +5305,7 @@
               <a:buNone/>
             </a:pPr>
             <a:r>
-              <a:rPr lang="en-US" sz="1450" dirty="0">
+              <a:rPr lang="en-US" sz="2000" dirty="0">
                 <a:solidFill>
                   <a:srgbClr val="CBD5E1"/>
                 </a:solidFill>
@@ -5313,7 +5315,7 @@
               </a:rPr>
               <a:t>The stack: five layers from kernel to boring rules</a:t>
             </a:r>
-            <a:endParaRPr lang="en-US" sz="1450" dirty="0"/>
+            <a:endParaRPr lang="en-US" sz="2000" dirty="0"/>
           </a:p>
         </p:txBody>
       </p:sp>
@@ -5325,8 +5327,8 @@
         </p:nvSpPr>
         <p:spPr>
           <a:xfrm>
-            <a:off x="6355080" y="3044952"/>
-            <a:ext cx="420624" cy="420624"/>
+            <a:off x="6355080" y="3182112"/>
+            <a:ext cx="457200" cy="457200"/>
           </a:xfrm>
           <a:prstGeom prst="ellipse">
             <a:avLst/>
@@ -5350,8 +5352,8 @@
         </p:nvSpPr>
         <p:spPr>
           <a:xfrm>
-            <a:off x="6355080" y="3044952"/>
-            <a:ext cx="420624" cy="420624"/>
+            <a:off x="6355080" y="3182112"/>
+            <a:ext cx="457200" cy="457200"/>
           </a:xfrm>
           <a:prstGeom prst="rect">
             <a:avLst/>
@@ -5367,7 +5369,7 @@
               <a:buNone/>
             </a:pPr>
             <a:r>
-              <a:rPr lang="en-US" sz="1300" b="1" dirty="0">
+              <a:rPr lang="en-US" sz="1800" b="1" dirty="0">
                 <a:solidFill>
                   <a:srgbClr val="3B82F6"/>
                 </a:solidFill>
@@ -5377,7 +5379,7 @@
               </a:rPr>
               <a:t>5</a:t>
             </a:r>
-            <a:endParaRPr lang="en-US" sz="1300" dirty="0"/>
+            <a:endParaRPr lang="en-US" sz="1800" dirty="0"/>
           </a:p>
         </p:txBody>
       </p:sp>
@@ -5389,8 +5391,8 @@
         </p:nvSpPr>
         <p:spPr>
           <a:xfrm>
-            <a:off x="6922008" y="2990088"/>
-            <a:ext cx="4480560" cy="822960"/>
+            <a:off x="6958584" y="3090672"/>
+            <a:ext cx="4443984" cy="960120"/>
           </a:xfrm>
           <a:prstGeom prst="rect">
             <a:avLst/>
@@ -5406,7 +5408,7 @@
               <a:buNone/>
             </a:pPr>
             <a:r>
-              <a:rPr lang="en-US" sz="1450" dirty="0">
+              <a:rPr lang="en-US" sz="2000" dirty="0">
                 <a:solidFill>
                   <a:srgbClr val="CBD5E1"/>
                 </a:solidFill>
@@ -5416,7 +5418,7 @@
               </a:rPr>
               <a:t>The numbers: 30+ apps, 9+ agents, 8.7K+ LOC</a:t>
             </a:r>
-            <a:endParaRPr lang="en-US" sz="1450" dirty="0"/>
+            <a:endParaRPr lang="en-US" sz="2000" dirty="0"/>
           </a:p>
         </p:txBody>
       </p:sp>
@@ -5428,8 +5430,8 @@
         </p:nvSpPr>
         <p:spPr>
           <a:xfrm>
-            <a:off x="6355080" y="3977640"/>
-            <a:ext cx="420624" cy="420624"/>
+            <a:off x="6355080" y="4261104"/>
+            <a:ext cx="457200" cy="457200"/>
           </a:xfrm>
           <a:prstGeom prst="ellipse">
             <a:avLst/>
@@ -5453,8 +5455,8 @@
         </p:nvSpPr>
         <p:spPr>
           <a:xfrm>
-            <a:off x="6355080" y="3977640"/>
-            <a:ext cx="420624" cy="420624"/>
+            <a:off x="6355080" y="4261104"/>
+            <a:ext cx="457200" cy="457200"/>
           </a:xfrm>
           <a:prstGeom prst="rect">
             <a:avLst/>
@@ -5470,7 +5472,7 @@
               <a:buNone/>
             </a:pPr>
             <a:r>
-              <a:rPr lang="en-US" sz="1300" b="1" dirty="0">
+              <a:rPr lang="en-US" sz="1800" b="1" dirty="0">
                 <a:solidFill>
                   <a:srgbClr val="06B6D4"/>
                 </a:solidFill>
@@ -5480,7 +5482,7 @@
               </a:rPr>
               <a:t>6</a:t>
             </a:r>
-            <a:endParaRPr lang="en-US" sz="1300" dirty="0"/>
+            <a:endParaRPr lang="en-US" sz="1800" dirty="0"/>
           </a:p>
         </p:txBody>
       </p:sp>
@@ -5492,8 +5494,8 @@
         </p:nvSpPr>
         <p:spPr>
           <a:xfrm>
-            <a:off x="6922008" y="3922776"/>
-            <a:ext cx="4480560" cy="822960"/>
+            <a:off x="6958584" y="4169664"/>
+            <a:ext cx="4443984" cy="960120"/>
           </a:xfrm>
           <a:prstGeom prst="rect">
             <a:avLst/>
@@ -5509,7 +5511,7 @@
               <a:buNone/>
             </a:pPr>
             <a:r>
-              <a:rPr lang="en-US" sz="1450" dirty="0">
+              <a:rPr lang="en-US" sz="2000" dirty="0">
                 <a:solidFill>
                   <a:srgbClr val="CBD5E1"/>
                 </a:solidFill>
@@ -5519,7 +5521,7 @@
               </a:rPr>
               <a:t>The operations: rooms, queues, approvals, watchdog</a:t>
             </a:r>
-            <a:endParaRPr lang="en-US" sz="1450" dirty="0"/>
+            <a:endParaRPr lang="en-US" sz="2000" dirty="0"/>
           </a:p>
         </p:txBody>
       </p:sp>
@@ -5531,8 +5533,8 @@
         </p:nvSpPr>
         <p:spPr>
           <a:xfrm>
-            <a:off x="10698480" y="6382512"/>
-            <a:ext cx="1188720" cy="365760"/>
+            <a:off x="10698480" y="6309360"/>
+            <a:ext cx="1188720" cy="411480"/>
           </a:xfrm>
           <a:prstGeom prst="rect">
             <a:avLst/>
@@ -5548,9 +5550,9 @@
               <a:buNone/>
             </a:pPr>
             <a:r>
-              <a:rPr lang="en-US" sz="1000" dirty="0">
-                <a:solidFill>
-                  <a:srgbClr val="64748B"/>
+              <a:rPr lang="en-US" sz="1800" dirty="0">
+                <a:solidFill>
+                  <a:srgbClr val="8FA3BF"/>
                 </a:solidFill>
                 <a:latin typeface="Consolas" pitchFamily="34" charset="0"/>
                 <a:ea typeface="Consolas" pitchFamily="34" charset="-122"/>
@@ -5558,7 +5560,7 @@
               </a:rPr>
               <a:t>2 / 13</a:t>
             </a:r>
-            <a:endParaRPr lang="en-US" sz="1000" dirty="0"/>
+            <a:endParaRPr lang="en-US" sz="1800" dirty="0"/>
           </a:p>
         </p:txBody>
       </p:sp>
@@ -5642,8 +5644,8 @@
         </p:nvSpPr>
         <p:spPr>
           <a:xfrm>
-            <a:off x="822960" y="502920"/>
-            <a:ext cx="10515600" cy="365760"/>
+            <a:off x="822960" y="457200"/>
+            <a:ext cx="10515600" cy="411480"/>
           </a:xfrm>
           <a:prstGeom prst="rect">
             <a:avLst/>
@@ -5659,7 +5661,7 @@
               <a:buNone/>
             </a:pPr>
             <a:r>
-              <a:rPr lang="en-US" sz="1200" spc="300" kern="0" dirty="0">
+              <a:rPr lang="en-US" sz="1800" spc="300" kern="0" dirty="0">
                 <a:solidFill>
                   <a:srgbClr val="06B6D4"/>
                 </a:solidFill>
@@ -5669,7 +5671,7 @@
               </a:rPr>
               <a:t>THE PREMISE</a:t>
             </a:r>
-            <a:endParaRPr lang="en-US" sz="1200" dirty="0"/>
+            <a:endParaRPr lang="en-US" sz="1800" dirty="0"/>
           </a:p>
         </p:txBody>
       </p:sp>
@@ -5720,8 +5722,8 @@
         </p:nvSpPr>
         <p:spPr>
           <a:xfrm>
-            <a:off x="868680" y="2011680"/>
-            <a:ext cx="10424160" cy="3566160"/>
+            <a:off x="868680" y="1965960"/>
+            <a:ext cx="10424160" cy="3840480"/>
           </a:xfrm>
           <a:prstGeom prst="rect">
             <a:avLst/>
@@ -5744,7 +5746,7 @@
               <a:buChar char="▸"/>
             </a:pPr>
             <a:r>
-              <a:rPr lang="en-US" sz="1600" dirty="0">
+              <a:rPr lang="en-US" sz="2000" dirty="0">
                 <a:solidFill>
                   <a:srgbClr val="CBD5E1"/>
                 </a:solidFill>
@@ -5754,7 +5756,7 @@
               </a:rPr>
               <a:t>A disciplined founder with reliable agents outships a distracted team, because leverage is now programmable.</a:t>
             </a:r>
-            <a:endParaRPr lang="en-US" sz="1600" dirty="0"/>
+            <a:endParaRPr lang="en-US" sz="2000" dirty="0"/>
           </a:p>
           <a:p>
             <a:pPr marL="342900" indent="-342900">
@@ -5768,7 +5770,7 @@
               <a:buChar char="▸"/>
             </a:pPr>
             <a:r>
-              <a:rPr lang="en-US" sz="1600" dirty="0">
+              <a:rPr lang="en-US" sz="2000" dirty="0">
                 <a:solidFill>
                   <a:srgbClr val="CBD5E1"/>
                 </a:solidFill>
@@ -5778,7 +5780,7 @@
               </a:rPr>
               <a:t>Speed is cheap, so quality gates become the differentiator instead of headcount.</a:t>
             </a:r>
-            <a:endParaRPr lang="en-US" sz="1600" dirty="0"/>
+            <a:endParaRPr lang="en-US" sz="2000" dirty="0"/>
           </a:p>
           <a:p>
             <a:pPr marL="342900" indent="-342900">
@@ -5792,7 +5794,7 @@
               <a:buChar char="▸"/>
             </a:pPr>
             <a:r>
-              <a:rPr lang="en-US" sz="1600" dirty="0">
+              <a:rPr lang="en-US" sz="2000" dirty="0">
                 <a:solidFill>
                   <a:srgbClr val="CBD5E1"/>
                 </a:solidFill>
@@ -5802,7 +5804,7 @@
               </a:rPr>
               <a:t>Every release must be provably good, not hopefully good - evidence is the currency.</a:t>
             </a:r>
-            <a:endParaRPr lang="en-US" sz="1600" dirty="0"/>
+            <a:endParaRPr lang="en-US" sz="2000" dirty="0"/>
           </a:p>
           <a:p>
             <a:pPr marL="342900" indent="-342900">
@@ -5816,7 +5818,7 @@
               <a:buChar char="▸"/>
             </a:pPr>
             <a:r>
-              <a:rPr lang="en-US" sz="1600" dirty="0">
+              <a:rPr lang="en-US" sz="2000" dirty="0">
                 <a:solidFill>
                   <a:srgbClr val="CBD5E1"/>
                 </a:solidFill>
@@ -5826,7 +5828,7 @@
               </a:rPr>
               <a:t>The one resource that stayed scarce is judgment, so the whole architecture is built around it.</a:t>
             </a:r>
-            <a:endParaRPr lang="en-US" sz="1600" dirty="0"/>
+            <a:endParaRPr lang="en-US" sz="2000" dirty="0"/>
           </a:p>
         </p:txBody>
       </p:sp>
@@ -5861,8 +5863,8 @@
         </p:nvSpPr>
         <p:spPr>
           <a:xfrm>
-            <a:off x="822960" y="6053328"/>
-            <a:ext cx="9692640" cy="457200"/>
+            <a:off x="822960" y="6035040"/>
+            <a:ext cx="10424160" cy="566928"/>
           </a:xfrm>
           <a:prstGeom prst="rect">
             <a:avLst/>
@@ -5878,9 +5880,9 @@
               <a:buNone/>
             </a:pPr>
             <a:r>
-              <a:rPr lang="en-US" sz="1150" dirty="0">
-                <a:solidFill>
-                  <a:srgbClr val="64748B"/>
+              <a:rPr lang="en-US" sz="1800" dirty="0">
+                <a:solidFill>
+                  <a:srgbClr val="8FA3BF"/>
                 </a:solidFill>
                 <a:latin typeface="Segoe UI" pitchFamily="34" charset="0"/>
                 <a:ea typeface="Segoe UI" pitchFamily="34" charset="-122"/>
@@ -5888,7 +5890,7 @@
               </a:rPr>
               <a:t>Zalin Labs is organized around that premise end to end.</a:t>
             </a:r>
-            <a:endParaRPr lang="en-US" sz="1150" dirty="0"/>
+            <a:endParaRPr lang="en-US" sz="1800" dirty="0"/>
           </a:p>
         </p:txBody>
       </p:sp>
@@ -5900,8 +5902,8 @@
         </p:nvSpPr>
         <p:spPr>
           <a:xfrm>
-            <a:off x="10698480" y="6382512"/>
-            <a:ext cx="1188720" cy="365760"/>
+            <a:off x="10698480" y="6309360"/>
+            <a:ext cx="1188720" cy="411480"/>
           </a:xfrm>
           <a:prstGeom prst="rect">
             <a:avLst/>
@@ -5917,9 +5919,9 @@
               <a:buNone/>
             </a:pPr>
             <a:r>
-              <a:rPr lang="en-US" sz="1000" dirty="0">
-                <a:solidFill>
-                  <a:srgbClr val="64748B"/>
+              <a:rPr lang="en-US" sz="1800" dirty="0">
+                <a:solidFill>
+                  <a:srgbClr val="8FA3BF"/>
                 </a:solidFill>
                 <a:latin typeface="Consolas" pitchFamily="34" charset="0"/>
                 <a:ea typeface="Consolas" pitchFamily="34" charset="-122"/>
@@ -5927,7 +5929,7 @@
               </a:rPr>
               <a:t>3 / 13</a:t>
             </a:r>
-            <a:endParaRPr lang="en-US" sz="1000" dirty="0"/>
+            <a:endParaRPr lang="en-US" sz="1800" dirty="0"/>
           </a:p>
         </p:txBody>
       </p:sp>
@@ -6011,8 +6013,8 @@
         </p:nvSpPr>
         <p:spPr>
           <a:xfrm>
-            <a:off x="822960" y="502920"/>
-            <a:ext cx="10515600" cy="365760"/>
+            <a:off x="822960" y="457200"/>
+            <a:ext cx="10515600" cy="411480"/>
           </a:xfrm>
           <a:prstGeom prst="rect">
             <a:avLst/>
@@ -6028,7 +6030,7 @@
               <a:buNone/>
             </a:pPr>
             <a:r>
-              <a:rPr lang="en-US" sz="1200" spc="300" kern="0" dirty="0">
+              <a:rPr lang="en-US" sz="1800" spc="300" kern="0" dirty="0">
                 <a:solidFill>
                   <a:srgbClr val="06B6D4"/>
                 </a:solidFill>
@@ -6038,7 +6040,7 @@
               </a:rPr>
               <a:t>THE SCOREBOARD</a:t>
             </a:r>
-            <a:endParaRPr lang="en-US" sz="1200" dirty="0"/>
+            <a:endParaRPr lang="en-US" sz="1800" dirty="0"/>
           </a:p>
         </p:txBody>
       </p:sp>
@@ -6089,8 +6091,8 @@
         </p:nvSpPr>
         <p:spPr>
           <a:xfrm>
-            <a:off x="822960" y="2194560"/>
-            <a:ext cx="2423160" cy="2697480"/>
+            <a:off x="822960" y="1965960"/>
+            <a:ext cx="2423160" cy="3154680"/>
           </a:xfrm>
           <a:prstGeom prst="roundRect">
             <a:avLst>
@@ -6116,7 +6118,7 @@
         </p:nvSpPr>
         <p:spPr>
           <a:xfrm>
-            <a:off x="960120" y="2514600"/>
+            <a:off x="960120" y="2194560"/>
             <a:ext cx="2148840" cy="914400"/>
           </a:xfrm>
           <a:prstGeom prst="rect">
@@ -6155,8 +6157,8 @@
         </p:nvSpPr>
         <p:spPr>
           <a:xfrm>
-            <a:off x="960120" y="3520440"/>
-            <a:ext cx="2148840" cy="502920"/>
+            <a:off x="960120" y="3200400"/>
+            <a:ext cx="2148840" cy="868680"/>
           </a:xfrm>
           <a:prstGeom prst="rect">
             <a:avLst/>
@@ -6172,7 +6174,7 @@
               <a:buNone/>
             </a:pPr>
             <a:r>
-              <a:rPr lang="en-US" sz="1450" b="1" dirty="0">
+              <a:rPr lang="en-US" sz="1800" b="1" dirty="0">
                 <a:solidFill>
                   <a:srgbClr val="FFFFFF"/>
                 </a:solidFill>
@@ -6182,7 +6184,7 @@
               </a:rPr>
               <a:t>Production apps</a:t>
             </a:r>
-            <a:endParaRPr lang="en-US" sz="1450" dirty="0"/>
+            <a:endParaRPr lang="en-US" sz="1800" dirty="0"/>
           </a:p>
         </p:txBody>
       </p:sp>
@@ -6194,8 +6196,8 @@
         </p:nvSpPr>
         <p:spPr>
           <a:xfrm>
-            <a:off x="1005840" y="4069080"/>
-            <a:ext cx="2057400" cy="685800"/>
+            <a:off x="1005840" y="4114800"/>
+            <a:ext cx="2057400" cy="914400"/>
           </a:xfrm>
           <a:prstGeom prst="rect">
             <a:avLst/>
@@ -6211,7 +6213,7 @@
               <a:buNone/>
             </a:pPr>
             <a:r>
-              <a:rPr lang="en-US" sz="1050" dirty="0">
+              <a:rPr lang="en-US" sz="1800" dirty="0">
                 <a:solidFill>
                   <a:srgbClr val="94A3B8"/>
                 </a:solidFill>
@@ -6221,7 +6223,7 @@
               </a:rPr>
               <a:t>Android apps that ship, update, and get supported</a:t>
             </a:r>
-            <a:endParaRPr lang="en-US" sz="1050" dirty="0"/>
+            <a:endParaRPr lang="en-US" sz="1800" dirty="0"/>
           </a:p>
         </p:txBody>
       </p:sp>
@@ -6233,8 +6235,8 @@
         </p:nvSpPr>
         <p:spPr>
           <a:xfrm>
-            <a:off x="3520440" y="2194560"/>
-            <a:ext cx="2423160" cy="2697480"/>
+            <a:off x="3520440" y="1965960"/>
+            <a:ext cx="2423160" cy="3154680"/>
           </a:xfrm>
           <a:prstGeom prst="roundRect">
             <a:avLst>
@@ -6260,7 +6262,7 @@
         </p:nvSpPr>
         <p:spPr>
           <a:xfrm>
-            <a:off x="3657600" y="2514600"/>
+            <a:off x="3657600" y="2194560"/>
             <a:ext cx="2148840" cy="914400"/>
           </a:xfrm>
           <a:prstGeom prst="rect">
@@ -6299,8 +6301,8 @@
         </p:nvSpPr>
         <p:spPr>
           <a:xfrm>
-            <a:off x="3657600" y="3520440"/>
-            <a:ext cx="2148840" cy="502920"/>
+            <a:off x="3657600" y="3200400"/>
+            <a:ext cx="2148840" cy="868680"/>
           </a:xfrm>
           <a:prstGeom prst="rect">
             <a:avLst/>
@@ -6316,7 +6318,7 @@
               <a:buNone/>
             </a:pPr>
             <a:r>
-              <a:rPr lang="en-US" sz="1450" b="1" dirty="0">
+              <a:rPr lang="en-US" sz="1800" b="1" dirty="0">
                 <a:solidFill>
                   <a:srgbClr val="FFFFFF"/>
                 </a:solidFill>
@@ -6326,7 +6328,7 @@
               </a:rPr>
               <a:t>AI agents</a:t>
             </a:r>
-            <a:endParaRPr lang="en-US" sz="1450" dirty="0"/>
+            <a:endParaRPr lang="en-US" sz="1800" dirty="0"/>
           </a:p>
         </p:txBody>
       </p:sp>
@@ -6338,8 +6340,8 @@
         </p:nvSpPr>
         <p:spPr>
           <a:xfrm>
-            <a:off x="3703320" y="4069080"/>
-            <a:ext cx="2057400" cy="685800"/>
+            <a:off x="3703320" y="4114800"/>
+            <a:ext cx="2057400" cy="914400"/>
           </a:xfrm>
           <a:prstGeom prst="rect">
             <a:avLst/>
@@ -6355,7 +6357,7 @@
               <a:buNone/>
             </a:pPr>
             <a:r>
-              <a:rPr lang="en-US" sz="1050" dirty="0">
+              <a:rPr lang="en-US" sz="1800" dirty="0">
                 <a:solidFill>
                   <a:srgbClr val="94A3B8"/>
                 </a:solidFill>
@@ -6365,7 +6367,7 @@
               </a:rPr>
               <a:t>One human plus a specialist workforce under gated releases</a:t>
             </a:r>
-            <a:endParaRPr lang="en-US" sz="1050" dirty="0"/>
+            <a:endParaRPr lang="en-US" sz="1800" dirty="0"/>
           </a:p>
         </p:txBody>
       </p:sp>
@@ -6377,8 +6379,8 @@
         </p:nvSpPr>
         <p:spPr>
           <a:xfrm>
-            <a:off x="6217920" y="2194560"/>
-            <a:ext cx="2423160" cy="2697480"/>
+            <a:off x="6217920" y="1965960"/>
+            <a:ext cx="2423160" cy="3154680"/>
           </a:xfrm>
           <a:prstGeom prst="roundRect">
             <a:avLst>
@@ -6404,7 +6406,7 @@
         </p:nvSpPr>
         <p:spPr>
           <a:xfrm>
-            <a:off x="6355080" y="2514600"/>
+            <a:off x="6355080" y="2194560"/>
             <a:ext cx="2148840" cy="914400"/>
           </a:xfrm>
           <a:prstGeom prst="rect">
@@ -6443,8 +6445,8 @@
         </p:nvSpPr>
         <p:spPr>
           <a:xfrm>
-            <a:off x="6355080" y="3520440"/>
-            <a:ext cx="2148840" cy="502920"/>
+            <a:off x="6355080" y="3200400"/>
+            <a:ext cx="2148840" cy="868680"/>
           </a:xfrm>
           <a:prstGeom prst="rect">
             <a:avLst/>
@@ -6460,7 +6462,7 @@
               <a:buNone/>
             </a:pPr>
             <a:r>
-              <a:rPr lang="en-US" sz="1450" b="1" dirty="0">
+              <a:rPr lang="en-US" sz="1800" b="1" dirty="0">
                 <a:solidFill>
                   <a:srgbClr val="FFFFFF"/>
                 </a:solidFill>
@@ -6470,7 +6472,7 @@
               </a:rPr>
               <a:t>LOC frameworks</a:t>
             </a:r>
-            <a:endParaRPr lang="en-US" sz="1450" dirty="0"/>
+            <a:endParaRPr lang="en-US" sz="1800" dirty="0"/>
           </a:p>
         </p:txBody>
       </p:sp>
@@ -6482,8 +6484,8 @@
         </p:nvSpPr>
         <p:spPr>
           <a:xfrm>
-            <a:off x="6400800" y="4069080"/>
-            <a:ext cx="2057400" cy="685800"/>
+            <a:off x="6400800" y="4114800"/>
+            <a:ext cx="2057400" cy="914400"/>
           </a:xfrm>
           <a:prstGeom prst="rect">
             <a:avLst/>
@@ -6499,7 +6501,7 @@
               <a:buNone/>
             </a:pPr>
             <a:r>
-              <a:rPr lang="en-US" sz="1050" dirty="0">
+              <a:rPr lang="en-US" sz="1800" dirty="0">
                 <a:solidFill>
                   <a:srgbClr val="94A3B8"/>
                 </a:solidFill>
@@ -6509,7 +6511,7 @@
               </a:rPr>
               <a:t>ODIS and the Web Scraping Toolkit, both open source</a:t>
             </a:r>
-            <a:endParaRPr lang="en-US" sz="1050" dirty="0"/>
+            <a:endParaRPr lang="en-US" sz="1800" dirty="0"/>
           </a:p>
         </p:txBody>
       </p:sp>
@@ -6521,8 +6523,8 @@
         </p:nvSpPr>
         <p:spPr>
           <a:xfrm>
-            <a:off x="8915400" y="2194560"/>
-            <a:ext cx="2423160" cy="2697480"/>
+            <a:off x="8915400" y="1965960"/>
+            <a:ext cx="2423160" cy="3154680"/>
           </a:xfrm>
           <a:prstGeom prst="roundRect">
             <a:avLst>
@@ -6548,7 +6550,7 @@
         </p:nvSpPr>
         <p:spPr>
           <a:xfrm>
-            <a:off x="9052560" y="2514600"/>
+            <a:off x="9052560" y="2194560"/>
             <a:ext cx="2148840" cy="914400"/>
           </a:xfrm>
           <a:prstGeom prst="rect">
@@ -6587,8 +6589,8 @@
         </p:nvSpPr>
         <p:spPr>
           <a:xfrm>
-            <a:off x="9052560" y="3520440"/>
-            <a:ext cx="2148840" cy="502920"/>
+            <a:off x="9052560" y="3200400"/>
+            <a:ext cx="2148840" cy="868680"/>
           </a:xfrm>
           <a:prstGeom prst="rect">
             <a:avLst/>
@@ -6604,7 +6606,7 @@
               <a:buNone/>
             </a:pPr>
             <a:r>
-              <a:rPr lang="en-US" sz="1450" b="1" dirty="0">
+              <a:rPr lang="en-US" sz="1800" b="1" dirty="0">
                 <a:solidFill>
                   <a:srgbClr val="FFFFFF"/>
                 </a:solidFill>
@@ -6614,7 +6616,7 @@
               </a:rPr>
               <a:t>Router accuracy</a:t>
             </a:r>
-            <a:endParaRPr lang="en-US" sz="1450" dirty="0"/>
+            <a:endParaRPr lang="en-US" sz="1800" dirty="0"/>
           </a:p>
         </p:txBody>
       </p:sp>
@@ -6626,8 +6628,8 @@
         </p:nvSpPr>
         <p:spPr>
           <a:xfrm>
-            <a:off x="9098280" y="4069080"/>
-            <a:ext cx="2057400" cy="685800"/>
+            <a:off x="9098280" y="4114800"/>
+            <a:ext cx="2057400" cy="914400"/>
           </a:xfrm>
           <a:prstGeom prst="rect">
             <a:avLst/>
@@ -6643,7 +6645,7 @@
               <a:buNone/>
             </a:pPr>
             <a:r>
-              <a:rPr lang="en-US" sz="1050" dirty="0">
+              <a:rPr lang="en-US" sz="1800" dirty="0">
                 <a:solidFill>
                   <a:srgbClr val="94A3B8"/>
                 </a:solidFill>
@@ -6653,7 +6655,7 @@
               </a:rPr>
               <a:t>On the 30-query validation set, with 51/52 production checks</a:t>
             </a:r>
-            <a:endParaRPr lang="en-US" sz="1050" dirty="0"/>
+            <a:endParaRPr lang="en-US" sz="1800" dirty="0"/>
           </a:p>
         </p:txBody>
       </p:sp>
@@ -6665,7 +6667,7 @@
         </p:nvSpPr>
         <p:spPr>
           <a:xfrm>
-            <a:off x="822960" y="5413248"/>
+            <a:off x="822960" y="5321808"/>
             <a:ext cx="10515600" cy="0"/>
           </a:xfrm>
           <a:prstGeom prst="line">
@@ -6688,8 +6690,8 @@
         </p:nvSpPr>
         <p:spPr>
           <a:xfrm>
-            <a:off x="822960" y="5504688"/>
-            <a:ext cx="10424160" cy="411480"/>
+            <a:off x="822960" y="5394960"/>
+            <a:ext cx="10424160" cy="502920"/>
           </a:xfrm>
           <a:prstGeom prst="rect">
             <a:avLst/>
@@ -6705,7 +6707,7 @@
               <a:buNone/>
             </a:pPr>
             <a:r>
-              <a:rPr lang="en-US" sz="1300" i="1" dirty="0">
+              <a:rPr lang="en-US" sz="1800" i="1" dirty="0">
                 <a:solidFill>
                   <a:srgbClr val="06B6D4"/>
                 </a:solidFill>
@@ -6715,7 +6717,7 @@
               </a:rPr>
               <a:t>→  A one-person company is not a smaller team; it is a different architecture.</a:t>
             </a:r>
-            <a:endParaRPr lang="en-US" sz="1300" dirty="0"/>
+            <a:endParaRPr lang="en-US" sz="1800" dirty="0"/>
           </a:p>
         </p:txBody>
       </p:sp>
@@ -6727,8 +6729,8 @@
         </p:nvSpPr>
         <p:spPr>
           <a:xfrm>
-            <a:off x="10698480" y="6382512"/>
-            <a:ext cx="1188720" cy="365760"/>
+            <a:off x="10698480" y="6309360"/>
+            <a:ext cx="1188720" cy="411480"/>
           </a:xfrm>
           <a:prstGeom prst="rect">
             <a:avLst/>
@@ -6744,9 +6746,9 @@
               <a:buNone/>
             </a:pPr>
             <a:r>
-              <a:rPr lang="en-US" sz="1000" dirty="0">
-                <a:solidFill>
-                  <a:srgbClr val="64748B"/>
+              <a:rPr lang="en-US" sz="1800" dirty="0">
+                <a:solidFill>
+                  <a:srgbClr val="8FA3BF"/>
                 </a:solidFill>
                 <a:latin typeface="Consolas" pitchFamily="34" charset="0"/>
                 <a:ea typeface="Consolas" pitchFamily="34" charset="-122"/>
@@ -6754,7 +6756,7 @@
               </a:rPr>
               <a:t>4 / 13</a:t>
             </a:r>
-            <a:endParaRPr lang="en-US" sz="1000" dirty="0"/>
+            <a:endParaRPr lang="en-US" sz="1800" dirty="0"/>
           </a:p>
         </p:txBody>
       </p:sp>
@@ -6838,8 +6840,8 @@
         </p:nvSpPr>
         <p:spPr>
           <a:xfrm>
-            <a:off x="822960" y="502920"/>
-            <a:ext cx="10515600" cy="365760"/>
+            <a:off x="822960" y="457200"/>
+            <a:ext cx="10515600" cy="411480"/>
           </a:xfrm>
           <a:prstGeom prst="rect">
             <a:avLst/>
@@ -6855,7 +6857,7 @@
               <a:buNone/>
             </a:pPr>
             <a:r>
-              <a:rPr lang="en-US" sz="1200" spc="300" kern="0" dirty="0">
+              <a:rPr lang="en-US" sz="1800" spc="300" kern="0" dirty="0">
                 <a:solidFill>
                   <a:srgbClr val="06B6D4"/>
                 </a:solidFill>
@@ -6865,7 +6867,7 @@
               </a:rPr>
               <a:t>THE PIPELINE</a:t>
             </a:r>
-            <a:endParaRPr lang="en-US" sz="1200" dirty="0"/>
+            <a:endParaRPr lang="en-US" sz="1800" dirty="0"/>
           </a:p>
         </p:txBody>
       </p:sp>
@@ -6916,8 +6918,8 @@
         </p:nvSpPr>
         <p:spPr>
           <a:xfrm>
-            <a:off x="774040" y="2514600"/>
-            <a:ext cx="1938528" cy="2103120"/>
+            <a:off x="774040" y="2331720"/>
+            <a:ext cx="1938528" cy="2697480"/>
           </a:xfrm>
           <a:prstGeom prst="roundRect">
             <a:avLst>
@@ -6943,8 +6945,8 @@
         </p:nvSpPr>
         <p:spPr>
           <a:xfrm>
-            <a:off x="902056" y="2633472"/>
-            <a:ext cx="1682496" cy="310896"/>
+            <a:off x="902056" y="2450592"/>
+            <a:ext cx="1682496" cy="365760"/>
           </a:xfrm>
           <a:prstGeom prst="rect">
             <a:avLst/>
@@ -6960,7 +6962,7 @@
               <a:buNone/>
             </a:pPr>
             <a:r>
-              <a:rPr lang="en-US" sz="1100" b="1" dirty="0">
+              <a:rPr lang="en-US" sz="1800" b="1" dirty="0">
                 <a:solidFill>
                   <a:srgbClr val="3B82F6"/>
                 </a:solidFill>
@@ -6970,7 +6972,7 @@
               </a:rPr>
               <a:t>01</a:t>
             </a:r>
-            <a:endParaRPr lang="en-US" sz="1100" dirty="0"/>
+            <a:endParaRPr lang="en-US" sz="1800" dirty="0"/>
           </a:p>
         </p:txBody>
       </p:sp>
@@ -6982,8 +6984,8 @@
         </p:nvSpPr>
         <p:spPr>
           <a:xfrm>
-            <a:off x="902056" y="2962656"/>
-            <a:ext cx="1682496" cy="566928"/>
+            <a:off x="902056" y="2834640"/>
+            <a:ext cx="1682496" cy="713232"/>
           </a:xfrm>
           <a:prstGeom prst="rect">
             <a:avLst/>
@@ -6999,7 +7001,7 @@
               <a:buNone/>
             </a:pPr>
             <a:r>
-              <a:rPr lang="en-US" sz="1350" b="1" dirty="0">
+              <a:rPr lang="en-US" sz="1800" b="1" dirty="0">
                 <a:solidFill>
                   <a:srgbClr val="FFFFFF"/>
                 </a:solidFill>
@@ -7009,7 +7011,7 @@
               </a:rPr>
               <a:t>Brief</a:t>
             </a:r>
-            <a:endParaRPr lang="en-US" sz="1350" dirty="0"/>
+            <a:endParaRPr lang="en-US" sz="1800" dirty="0"/>
           </a:p>
         </p:txBody>
       </p:sp>
@@ -7021,8 +7023,8 @@
         </p:nvSpPr>
         <p:spPr>
           <a:xfrm>
-            <a:off x="902056" y="3566160"/>
-            <a:ext cx="1682496" cy="960120"/>
+            <a:off x="902056" y="3584448"/>
+            <a:ext cx="1682496" cy="1371600"/>
           </a:xfrm>
           <a:prstGeom prst="rect">
             <a:avLst/>
@@ -7038,7 +7040,7 @@
               <a:buNone/>
             </a:pPr>
             <a:r>
-              <a:rPr lang="en-US" sz="980" dirty="0">
+              <a:rPr lang="en-US" sz="1800" dirty="0">
                 <a:solidFill>
                   <a:srgbClr val="CBD5E1"/>
                 </a:solidFill>
@@ -7048,7 +7050,7 @@
               </a:rPr>
               <a:t>Work enters as a structured brief, in the same format every time.</a:t>
             </a:r>
-            <a:endParaRPr lang="en-US" sz="980" dirty="0"/>
+            <a:endParaRPr lang="en-US" sz="1800" dirty="0"/>
           </a:p>
         </p:txBody>
       </p:sp>
@@ -7060,7 +7062,7 @@
         </p:nvSpPr>
         <p:spPr>
           <a:xfrm>
-            <a:off x="2726284" y="3419856"/>
+            <a:off x="2726284" y="3566160"/>
             <a:ext cx="210312" cy="274320"/>
           </a:xfrm>
           <a:prstGeom prst="rightArrow">
@@ -7080,8 +7082,8 @@
         </p:nvSpPr>
         <p:spPr>
           <a:xfrm>
-            <a:off x="2950312" y="2514600"/>
-            <a:ext cx="1938528" cy="2103120"/>
+            <a:off x="2950312" y="2331720"/>
+            <a:ext cx="1938528" cy="2697480"/>
           </a:xfrm>
           <a:prstGeom prst="roundRect">
             <a:avLst>
@@ -7107,8 +7109,8 @@
         </p:nvSpPr>
         <p:spPr>
           <a:xfrm>
-            <a:off x="3078328" y="2633472"/>
-            <a:ext cx="1682496" cy="310896"/>
+            <a:off x="3078328" y="2450592"/>
+            <a:ext cx="1682496" cy="365760"/>
           </a:xfrm>
           <a:prstGeom prst="rect">
             <a:avLst/>
@@ -7124,7 +7126,7 @@
               <a:buNone/>
             </a:pPr>
             <a:r>
-              <a:rPr lang="en-US" sz="1100" b="1" dirty="0">
+              <a:rPr lang="en-US" sz="1800" b="1" dirty="0">
                 <a:solidFill>
                   <a:srgbClr val="06B6D4"/>
                 </a:solidFill>
@@ -7134,7 +7136,7 @@
               </a:rPr>
               <a:t>02</a:t>
             </a:r>
-            <a:endParaRPr lang="en-US" sz="1100" dirty="0"/>
+            <a:endParaRPr lang="en-US" sz="1800" dirty="0"/>
           </a:p>
         </p:txBody>
       </p:sp>
@@ -7146,8 +7148,8 @@
         </p:nvSpPr>
         <p:spPr>
           <a:xfrm>
-            <a:off x="3078328" y="2962656"/>
-            <a:ext cx="1682496" cy="566928"/>
+            <a:off x="3078328" y="2834640"/>
+            <a:ext cx="1682496" cy="713232"/>
           </a:xfrm>
           <a:prstGeom prst="rect">
             <a:avLst/>
@@ -7163,7 +7165,7 @@
               <a:buNone/>
             </a:pPr>
             <a:r>
-              <a:rPr lang="en-US" sz="1350" b="1" dirty="0">
+              <a:rPr lang="en-US" sz="1800" b="1" dirty="0">
                 <a:solidFill>
                   <a:srgbClr val="FFFFFF"/>
                 </a:solidFill>
@@ -7173,7 +7175,7 @@
               </a:rPr>
               <a:t>Build</a:t>
             </a:r>
-            <a:endParaRPr lang="en-US" sz="1350" dirty="0"/>
+            <a:endParaRPr lang="en-US" sz="1800" dirty="0"/>
           </a:p>
         </p:txBody>
       </p:sp>
@@ -7185,8 +7187,8 @@
         </p:nvSpPr>
         <p:spPr>
           <a:xfrm>
-            <a:off x="3078328" y="3566160"/>
-            <a:ext cx="1682496" cy="960120"/>
+            <a:off x="3078328" y="3584448"/>
+            <a:ext cx="1682496" cy="1371600"/>
           </a:xfrm>
           <a:prstGeom prst="rect">
             <a:avLst/>
@@ -7202,7 +7204,7 @@
               <a:buNone/>
             </a:pPr>
             <a:r>
-              <a:rPr lang="en-US" sz="980" dirty="0">
+              <a:rPr lang="en-US" sz="1800" dirty="0">
                 <a:solidFill>
                   <a:srgbClr val="CBD5E1"/>
                 </a:solidFill>
@@ -7212,7 +7214,7 @@
               </a:rPr>
               <a:t>Engineering agents produce versioned APKs from structured specs.</a:t>
             </a:r>
-            <a:endParaRPr lang="en-US" sz="980" dirty="0"/>
+            <a:endParaRPr lang="en-US" sz="1800" dirty="0"/>
           </a:p>
         </p:txBody>
       </p:sp>
@@ -7224,7 +7226,7 @@
         </p:nvSpPr>
         <p:spPr>
           <a:xfrm>
-            <a:off x="4902556" y="3419856"/>
+            <a:off x="4902556" y="3566160"/>
             <a:ext cx="210312" cy="274320"/>
           </a:xfrm>
           <a:prstGeom prst="rightArrow">
@@ -7244,8 +7246,8 @@
         </p:nvSpPr>
         <p:spPr>
           <a:xfrm>
-            <a:off x="5126584" y="2514600"/>
-            <a:ext cx="1938528" cy="2103120"/>
+            <a:off x="5126584" y="2331720"/>
+            <a:ext cx="1938528" cy="2697480"/>
           </a:xfrm>
           <a:prstGeom prst="roundRect">
             <a:avLst>
@@ -7271,8 +7273,8 @@
         </p:nvSpPr>
         <p:spPr>
           <a:xfrm>
-            <a:off x="5254600" y="2633472"/>
-            <a:ext cx="1682496" cy="310896"/>
+            <a:off x="5254600" y="2450592"/>
+            <a:ext cx="1682496" cy="365760"/>
           </a:xfrm>
           <a:prstGeom prst="rect">
             <a:avLst/>
@@ -7288,7 +7290,7 @@
               <a:buNone/>
             </a:pPr>
             <a:r>
-              <a:rPr lang="en-US" sz="1100" b="1" dirty="0">
+              <a:rPr lang="en-US" sz="1800" b="1" dirty="0">
                 <a:solidFill>
                   <a:srgbClr val="3B82F6"/>
                 </a:solidFill>
@@ -7298,7 +7300,7 @@
               </a:rPr>
               <a:t>03</a:t>
             </a:r>
-            <a:endParaRPr lang="en-US" sz="1100" dirty="0"/>
+            <a:endParaRPr lang="en-US" sz="1800" dirty="0"/>
           </a:p>
         </p:txBody>
       </p:sp>
@@ -7310,8 +7312,8 @@
         </p:nvSpPr>
         <p:spPr>
           <a:xfrm>
-            <a:off x="5254600" y="2962656"/>
-            <a:ext cx="1682496" cy="566928"/>
+            <a:off x="5254600" y="2834640"/>
+            <a:ext cx="1682496" cy="713232"/>
           </a:xfrm>
           <a:prstGeom prst="rect">
             <a:avLst/>
@@ -7327,7 +7329,7 @@
               <a:buNone/>
             </a:pPr>
             <a:r>
-              <a:rPr lang="en-US" sz="1350" b="1" dirty="0">
+              <a:rPr lang="en-US" sz="1800" b="1" dirty="0">
                 <a:solidFill>
                   <a:srgbClr val="FFFFFF"/>
                 </a:solidFill>
@@ -7337,7 +7339,7 @@
               </a:rPr>
               <a:t>Gate</a:t>
             </a:r>
-            <a:endParaRPr lang="en-US" sz="1350" dirty="0"/>
+            <a:endParaRPr lang="en-US" sz="1800" dirty="0"/>
           </a:p>
         </p:txBody>
       </p:sp>
@@ -7349,8 +7351,8 @@
         </p:nvSpPr>
         <p:spPr>
           <a:xfrm>
-            <a:off x="5254600" y="3566160"/>
-            <a:ext cx="1682496" cy="960120"/>
+            <a:off x="5254600" y="3584448"/>
+            <a:ext cx="1682496" cy="1371600"/>
           </a:xfrm>
           <a:prstGeom prst="rect">
             <a:avLst/>
@@ -7366,7 +7368,7 @@
               <a:buNone/>
             </a:pPr>
             <a:r>
-              <a:rPr lang="en-US" sz="980" dirty="0">
+              <a:rPr lang="en-US" sz="1800" dirty="0">
                 <a:solidFill>
                   <a:srgbClr val="CBD5E1"/>
                 </a:solidFill>
@@ -7376,7 +7378,7 @@
               </a:rPr>
               <a:t>QA walks the golden path, sweeps for dead buttons, and checks offline behavior.</a:t>
             </a:r>
-            <a:endParaRPr lang="en-US" sz="980" dirty="0"/>
+            <a:endParaRPr lang="en-US" sz="1800" dirty="0"/>
           </a:p>
         </p:txBody>
       </p:sp>
@@ -7388,7 +7390,7 @@
         </p:nvSpPr>
         <p:spPr>
           <a:xfrm>
-            <a:off x="7078828" y="3419856"/>
+            <a:off x="7078828" y="3566160"/>
             <a:ext cx="210312" cy="274320"/>
           </a:xfrm>
           <a:prstGeom prst="rightArrow">
@@ -7408,8 +7410,8 @@
         </p:nvSpPr>
         <p:spPr>
           <a:xfrm>
-            <a:off x="7302856" y="2514600"/>
-            <a:ext cx="1938528" cy="2103120"/>
+            <a:off x="7302856" y="2331720"/>
+            <a:ext cx="1938528" cy="2697480"/>
           </a:xfrm>
           <a:prstGeom prst="roundRect">
             <a:avLst>
@@ -7435,8 +7437,8 @@
         </p:nvSpPr>
         <p:spPr>
           <a:xfrm>
-            <a:off x="7430872" y="2633472"/>
-            <a:ext cx="1682496" cy="310896"/>
+            <a:off x="7430872" y="2450592"/>
+            <a:ext cx="1682496" cy="365760"/>
           </a:xfrm>
           <a:prstGeom prst="rect">
             <a:avLst/>
@@ -7452,7 +7454,7 @@
               <a:buNone/>
             </a:pPr>
             <a:r>
-              <a:rPr lang="en-US" sz="1100" b="1" dirty="0">
+              <a:rPr lang="en-US" sz="1800" b="1" dirty="0">
                 <a:solidFill>
                   <a:srgbClr val="06B6D4"/>
                 </a:solidFill>
@@ -7462,7 +7464,7 @@
               </a:rPr>
               <a:t>04</a:t>
             </a:r>
-            <a:endParaRPr lang="en-US" sz="1100" dirty="0"/>
+            <a:endParaRPr lang="en-US" sz="1800" dirty="0"/>
           </a:p>
         </p:txBody>
       </p:sp>
@@ -7474,8 +7476,8 @@
         </p:nvSpPr>
         <p:spPr>
           <a:xfrm>
-            <a:off x="7430872" y="2962656"/>
-            <a:ext cx="1682496" cy="566928"/>
+            <a:off x="7430872" y="2834640"/>
+            <a:ext cx="1682496" cy="713232"/>
           </a:xfrm>
           <a:prstGeom prst="rect">
             <a:avLst/>
@@ -7491,7 +7493,7 @@
               <a:buNone/>
             </a:pPr>
             <a:r>
-              <a:rPr lang="en-US" sz="1350" b="1" dirty="0">
+              <a:rPr lang="en-US" sz="1800" b="1" dirty="0">
                 <a:solidFill>
                   <a:srgbClr val="FFFFFF"/>
                 </a:solidFill>
@@ -7501,7 +7503,7 @@
               </a:rPr>
               <a:t>Promote</a:t>
             </a:r>
-            <a:endParaRPr lang="en-US" sz="1350" dirty="0"/>
+            <a:endParaRPr lang="en-US" sz="1800" dirty="0"/>
           </a:p>
         </p:txBody>
       </p:sp>
@@ -7513,8 +7515,8 @@
         </p:nvSpPr>
         <p:spPr>
           <a:xfrm>
-            <a:off x="7430872" y="3566160"/>
-            <a:ext cx="1682496" cy="960120"/>
+            <a:off x="7430872" y="3584448"/>
+            <a:ext cx="1682496" cy="1371600"/>
           </a:xfrm>
           <a:prstGeom prst="rect">
             <a:avLst/>
@@ -7530,7 +7532,7 @@
               <a:buNone/>
             </a:pPr>
             <a:r>
-              <a:rPr lang="en-US" sz="980" dirty="0">
+              <a:rPr lang="en-US" sz="1800" dirty="0">
                 <a:solidFill>
                   <a:srgbClr val="CBD5E1"/>
                 </a:solidFill>
@@ -7540,7 +7542,7 @@
               </a:rPr>
               <a:t>New versions land in one promote folder while the previous build is archived.</a:t>
             </a:r>
-            <a:endParaRPr lang="en-US" sz="980" dirty="0"/>
+            <a:endParaRPr lang="en-US" sz="1800" dirty="0"/>
           </a:p>
         </p:txBody>
       </p:sp>
@@ -7552,7 +7554,7 @@
         </p:nvSpPr>
         <p:spPr>
           <a:xfrm>
-            <a:off x="9255100" y="3419856"/>
+            <a:off x="9255100" y="3566160"/>
             <a:ext cx="210312" cy="274320"/>
           </a:xfrm>
           <a:prstGeom prst="rightArrow">
@@ -7572,8 +7574,8 @@
         </p:nvSpPr>
         <p:spPr>
           <a:xfrm>
-            <a:off x="9479128" y="2514600"/>
-            <a:ext cx="1938528" cy="2103120"/>
+            <a:off x="9479128" y="2331720"/>
+            <a:ext cx="1938528" cy="2697480"/>
           </a:xfrm>
           <a:prstGeom prst="roundRect">
             <a:avLst>
@@ -7599,8 +7601,8 @@
         </p:nvSpPr>
         <p:spPr>
           <a:xfrm>
-            <a:off x="9607144" y="2633472"/>
-            <a:ext cx="1682496" cy="310896"/>
+            <a:off x="9607144" y="2450592"/>
+            <a:ext cx="1682496" cy="365760"/>
           </a:xfrm>
           <a:prstGeom prst="rect">
             <a:avLst/>
@@ -7616,7 +7618,7 @@
               <a:buNone/>
             </a:pPr>
             <a:r>
-              <a:rPr lang="en-US" sz="1100" b="1" dirty="0">
+              <a:rPr lang="en-US" sz="1800" b="1" dirty="0">
                 <a:solidFill>
                   <a:srgbClr val="3B82F6"/>
                 </a:solidFill>
@@ -7626,7 +7628,7 @@
               </a:rPr>
               <a:t>05</a:t>
             </a:r>
-            <a:endParaRPr lang="en-US" sz="1100" dirty="0"/>
+            <a:endParaRPr lang="en-US" sz="1800" dirty="0"/>
           </a:p>
         </p:txBody>
       </p:sp>
@@ -7638,8 +7640,8 @@
         </p:nvSpPr>
         <p:spPr>
           <a:xfrm>
-            <a:off x="9607144" y="2962656"/>
-            <a:ext cx="1682496" cy="566928"/>
+            <a:off x="9607144" y="2834640"/>
+            <a:ext cx="1682496" cy="713232"/>
           </a:xfrm>
           <a:prstGeom prst="rect">
             <a:avLst/>
@@ -7655,7 +7657,7 @@
               <a:buNone/>
             </a:pPr>
             <a:r>
-              <a:rPr lang="en-US" sz="1350" b="1" dirty="0">
+              <a:rPr lang="en-US" sz="1800" b="1" dirty="0">
                 <a:solidFill>
                   <a:srgbClr val="FFFFFF"/>
                 </a:solidFill>
@@ -7665,7 +7667,7 @@
               </a:rPr>
               <a:t>Record</a:t>
             </a:r>
-            <a:endParaRPr lang="en-US" sz="1350" dirty="0"/>
+            <a:endParaRPr lang="en-US" sz="1800" dirty="0"/>
           </a:p>
         </p:txBody>
       </p:sp>
@@ -7677,8 +7679,8 @@
         </p:nvSpPr>
         <p:spPr>
           <a:xfrm>
-            <a:off x="9607144" y="3566160"/>
-            <a:ext cx="1682496" cy="960120"/>
+            <a:off x="9607144" y="3584448"/>
+            <a:ext cx="1682496" cy="1371600"/>
           </a:xfrm>
           <a:prstGeom prst="rect">
             <a:avLst/>
@@ -7694,7 +7696,7 @@
               <a:buNone/>
             </a:pPr>
             <a:r>
-              <a:rPr lang="en-US" sz="980" dirty="0">
+              <a:rPr lang="en-US" sz="1800" dirty="0">
                 <a:solidFill>
                   <a:srgbClr val="CBD5E1"/>
                 </a:solidFill>
@@ -7704,7 +7706,7 @@
               </a:rPr>
               <a:t>Features, versions, and decisions are written down - or it did not happen.</a:t>
             </a:r>
-            <a:endParaRPr lang="en-US" sz="980" dirty="0"/>
+            <a:endParaRPr lang="en-US" sz="1800" dirty="0"/>
           </a:p>
         </p:txBody>
       </p:sp>
@@ -7739,8 +7741,8 @@
         </p:nvSpPr>
         <p:spPr>
           <a:xfrm>
-            <a:off x="822960" y="6053328"/>
-            <a:ext cx="9692640" cy="457200"/>
+            <a:off x="822960" y="6035040"/>
+            <a:ext cx="10424160" cy="566928"/>
           </a:xfrm>
           <a:prstGeom prst="rect">
             <a:avLst/>
@@ -7756,9 +7758,9 @@
               <a:buNone/>
             </a:pPr>
             <a:r>
-              <a:rPr lang="en-US" sz="1150" dirty="0">
-                <a:solidFill>
-                  <a:srgbClr val="64748B"/>
+              <a:rPr lang="en-US" sz="1800" dirty="0">
+                <a:solidFill>
+                  <a:srgbClr val="8FA3BF"/>
                 </a:solidFill>
                 <a:latin typeface="Segoe UI" pitchFamily="34" charset="0"/>
                 <a:ea typeface="Segoe UI" pitchFamily="34" charset="-122"/>
@@ -7766,7 +7768,7 @@
               </a:rPr>
               <a:t>With 30+ apps you do not maintain apps; you maintain a pipeline.</a:t>
             </a:r>
-            <a:endParaRPr lang="en-US" sz="1150" dirty="0"/>
+            <a:endParaRPr lang="en-US" sz="1800" dirty="0"/>
           </a:p>
         </p:txBody>
       </p:sp>
@@ -7778,8 +7780,8 @@
         </p:nvSpPr>
         <p:spPr>
           <a:xfrm>
-            <a:off x="10698480" y="6382512"/>
-            <a:ext cx="1188720" cy="365760"/>
+            <a:off x="10698480" y="6309360"/>
+            <a:ext cx="1188720" cy="411480"/>
           </a:xfrm>
           <a:prstGeom prst="rect">
             <a:avLst/>
@@ -7795,9 +7797,9 @@
               <a:buNone/>
             </a:pPr>
             <a:r>
-              <a:rPr lang="en-US" sz="1000" dirty="0">
-                <a:solidFill>
-                  <a:srgbClr val="64748B"/>
+              <a:rPr lang="en-US" sz="1800" dirty="0">
+                <a:solidFill>
+                  <a:srgbClr val="8FA3BF"/>
                 </a:solidFill>
                 <a:latin typeface="Consolas" pitchFamily="34" charset="0"/>
                 <a:ea typeface="Consolas" pitchFamily="34" charset="-122"/>
@@ -7805,7 +7807,7 @@
               </a:rPr>
               <a:t>5 / 13</a:t>
             </a:r>
-            <a:endParaRPr lang="en-US" sz="1000" dirty="0"/>
+            <a:endParaRPr lang="en-US" sz="1800" dirty="0"/>
           </a:p>
         </p:txBody>
       </p:sp>
@@ -7889,8 +7891,8 @@
         </p:nvSpPr>
         <p:spPr>
           <a:xfrm>
-            <a:off x="822960" y="502920"/>
-            <a:ext cx="10515600" cy="365760"/>
+            <a:off x="822960" y="457200"/>
+            <a:ext cx="10515600" cy="411480"/>
           </a:xfrm>
           <a:prstGeom prst="rect">
             <a:avLst/>
@@ -7906,7 +7908,7 @@
               <a:buNone/>
             </a:pPr>
             <a:r>
-              <a:rPr lang="en-US" sz="1200" spc="300" kern="0" dirty="0">
+              <a:rPr lang="en-US" sz="1800" spc="300" kern="0" dirty="0">
                 <a:solidFill>
                   <a:srgbClr val="06B6D4"/>
                 </a:solidFill>
@@ -7916,7 +7918,7 @@
               </a:rPr>
               <a:t>THE STACK</a:t>
             </a:r>
-            <a:endParaRPr lang="en-US" sz="1200" dirty="0"/>
+            <a:endParaRPr lang="en-US" sz="1800" dirty="0"/>
           </a:p>
         </p:txBody>
       </p:sp>
@@ -7974,7 +7976,7 @@
           </p:nvPr>
         </p:nvGraphicFramePr>
         <p:xfrm>
-          <a:off x="822960" y="2011680"/>
+          <a:off x="822960" y="1828800"/>
           <a:ext cx="10515600" cy="914400"/>
         </p:xfrm>
         <a:graphic>
@@ -7986,7 +7988,7 @@
                 <a:gridCol w="3505200"/>
                 <a:gridCol w="3505200"/>
               </a:tblGrid>
-              <a:tr h="402336">
+              <a:tr h="457200">
                 <a:tc>
                   <a:txBody>
                     <a:bodyPr/>
@@ -7996,7 +7998,7 @@
                         <a:buNone/>
                       </a:pPr>
                       <a:r>
-                        <a:rPr lang="en-US" sz="1150" b="1" dirty="0">
+                        <a:rPr lang="en-US" sz="1800" b="1" dirty="0">
                           <a:solidFill>
                             <a:srgbClr val="FFFFFF"/>
                           </a:solidFill>
@@ -8006,14 +8008,14 @@
                         </a:rPr>
                         <a:t>Layer</a:t>
                       </a:r>
-                      <a:endParaRPr lang="en-US" sz="1150" dirty="0">
+                      <a:endParaRPr lang="en-US" sz="1800" dirty="0">
                         <a:latin typeface="Segoe UI" charset="0"/>
                         <a:ea typeface="Segoe UI" charset="0"/>
                         <a:cs typeface="Segoe UI" charset="0"/>
                       </a:endParaRPr>
                     </a:p>
                   </a:txBody>
-                  <a:tcPr marL="64008" marR="64008" marT="64008" marB="64008" anchor="ctr">
+                  <a:tcPr marL="36576" marR="36576" marT="36576" marB="36576" anchor="ctr">
                     <a:lnL w="6350" cap="flat" cmpd="sng" algn="ctr">
                       <a:solidFill>
                         <a:srgbClr val="24365A"/>
@@ -8064,7 +8066,7 @@
                         <a:buNone/>
                       </a:pPr>
                       <a:r>
-                        <a:rPr lang="en-US" sz="1150" b="1" dirty="0">
+                        <a:rPr lang="en-US" sz="1800" b="1" dirty="0">
                           <a:solidFill>
                             <a:srgbClr val="FFFFFF"/>
                           </a:solidFill>
@@ -8074,14 +8076,14 @@
                         </a:rPr>
                         <a:t>Component</a:t>
                       </a:r>
-                      <a:endParaRPr lang="en-US" sz="1150" dirty="0">
+                      <a:endParaRPr lang="en-US" sz="1800" dirty="0">
                         <a:latin typeface="Segoe UI" charset="0"/>
                         <a:ea typeface="Segoe UI" charset="0"/>
                         <a:cs typeface="Segoe UI" charset="0"/>
                       </a:endParaRPr>
                     </a:p>
                   </a:txBody>
-                  <a:tcPr marL="64008" marR="64008" marT="64008" marB="64008" anchor="ctr">
+                  <a:tcPr marL="36576" marR="36576" marT="36576" marB="36576" anchor="ctr">
                     <a:lnL w="6350" cap="flat" cmpd="sng" algn="ctr">
                       <a:solidFill>
                         <a:srgbClr val="24365A"/>
@@ -8132,7 +8134,7 @@
                         <a:buNone/>
                       </a:pPr>
                       <a:r>
-                        <a:rPr lang="en-US" sz="1150" b="1" dirty="0">
+                        <a:rPr lang="en-US" sz="1800" b="1" dirty="0">
                           <a:solidFill>
                             <a:srgbClr val="FFFFFF"/>
                           </a:solidFill>
@@ -8142,14 +8144,14 @@
                         </a:rPr>
                         <a:t>Role</a:t>
                       </a:r>
-                      <a:endParaRPr lang="en-US" sz="1150" dirty="0">
+                      <a:endParaRPr lang="en-US" sz="1800" dirty="0">
                         <a:latin typeface="Segoe UI" charset="0"/>
                         <a:ea typeface="Segoe UI" charset="0"/>
                         <a:cs typeface="Segoe UI" charset="0"/>
                       </a:endParaRPr>
                     </a:p>
                   </a:txBody>
-                  <a:tcPr marL="64008" marR="64008" marT="64008" marB="64008" anchor="ctr">
+                  <a:tcPr marL="36576" marR="36576" marT="36576" marB="36576" anchor="ctr">
                     <a:lnL w="6350" cap="flat" cmpd="sng" algn="ctr">
                       <a:solidFill>
                         <a:srgbClr val="24365A"/>
@@ -8192,7 +8194,7 @@
                   </a:tcPr>
                 </a:tc>
               </a:tr>
-              <a:tr h="402336">
+              <a:tr h="457200">
                 <a:tc>
                   <a:txBody>
                     <a:bodyPr/>
@@ -8202,7 +8204,7 @@
                         <a:buNone/>
                       </a:pPr>
                       <a:r>
-                        <a:rPr lang="en-US" sz="1080" dirty="0">
+                        <a:rPr lang="en-US" sz="1800" dirty="0">
                           <a:solidFill>
                             <a:srgbClr val="CBD5E1"/>
                           </a:solidFill>
@@ -8212,14 +8214,14 @@
                         </a:rPr>
                         <a:t>Operating system</a:t>
                       </a:r>
-                      <a:endParaRPr lang="en-US" sz="1080" dirty="0">
+                      <a:endParaRPr lang="en-US" sz="1800" dirty="0">
                         <a:latin typeface="Segoe UI" charset="0"/>
                         <a:ea typeface="Segoe UI" charset="0"/>
                         <a:cs typeface="Segoe UI" charset="0"/>
                       </a:endParaRPr>
                     </a:p>
                   </a:txBody>
-                  <a:tcPr marL="64008" marR="64008" marT="64008" marB="64008" anchor="ctr">
+                  <a:tcPr marL="36576" marR="36576" marT="36576" marB="36576" anchor="ctr">
                     <a:lnL w="6350" cap="flat" cmpd="sng" algn="ctr">
                       <a:solidFill>
                         <a:srgbClr val="24365A"/>
@@ -8270,7 +8272,7 @@
                         <a:buNone/>
                       </a:pPr>
                       <a:r>
-                        <a:rPr lang="en-US" sz="1080" dirty="0">
+                        <a:rPr lang="en-US" sz="1800" dirty="0">
                           <a:solidFill>
                             <a:srgbClr val="CBD5E1"/>
                           </a:solidFill>
@@ -8280,14 +8282,14 @@
                         </a:rPr>
                         <a:t>ZalinOS kernel</a:t>
                       </a:r>
-                      <a:endParaRPr lang="en-US" sz="1080" dirty="0">
+                      <a:endParaRPr lang="en-US" sz="1800" dirty="0">
                         <a:latin typeface="Segoe UI" charset="0"/>
                         <a:ea typeface="Segoe UI" charset="0"/>
                         <a:cs typeface="Segoe UI" charset="0"/>
                       </a:endParaRPr>
                     </a:p>
                   </a:txBody>
-                  <a:tcPr marL="64008" marR="64008" marT="64008" marB="64008" anchor="ctr">
+                  <a:tcPr marL="36576" marR="36576" marT="36576" marB="36576" anchor="ctr">
                     <a:lnL w="6350" cap="flat" cmpd="sng" algn="ctr">
                       <a:solidFill>
                         <a:srgbClr val="24365A"/>
@@ -8338,7 +8340,7 @@
                         <a:buNone/>
                       </a:pPr>
                       <a:r>
-                        <a:rPr lang="en-US" sz="1080" dirty="0">
+                        <a:rPr lang="en-US" sz="1800" dirty="0">
                           <a:solidFill>
                             <a:srgbClr val="CBD5E1"/>
                           </a:solidFill>
@@ -8348,14 +8350,14 @@
                         </a:rPr>
                         <a:t>Intent routing, agent lifecycle, shared memory, quality gates</a:t>
                       </a:r>
-                      <a:endParaRPr lang="en-US" sz="1080" dirty="0">
+                      <a:endParaRPr lang="en-US" sz="1800" dirty="0">
                         <a:latin typeface="Segoe UI" charset="0"/>
                         <a:ea typeface="Segoe UI" charset="0"/>
                         <a:cs typeface="Segoe UI" charset="0"/>
                       </a:endParaRPr>
                     </a:p>
                   </a:txBody>
-                  <a:tcPr marL="64008" marR="64008" marT="64008" marB="64008" anchor="ctr">
+                  <a:tcPr marL="36576" marR="36576" marT="36576" marB="36576" anchor="ctr">
                     <a:lnL w="6350" cap="flat" cmpd="sng" algn="ctr">
                       <a:solidFill>
                         <a:srgbClr val="24365A"/>
@@ -8398,7 +8400,7 @@
                   </a:tcPr>
                 </a:tc>
               </a:tr>
-              <a:tr h="402336">
+              <a:tr h="457200">
                 <a:tc>
                   <a:txBody>
                     <a:bodyPr/>
@@ -8408,7 +8410,7 @@
                         <a:buNone/>
                       </a:pPr>
                       <a:r>
-                        <a:rPr lang="en-US" sz="1080" dirty="0">
+                        <a:rPr lang="en-US" sz="1800" dirty="0">
                           <a:solidFill>
                             <a:srgbClr val="CBD5E1"/>
                           </a:solidFill>
@@ -8418,14 +8420,14 @@
                         </a:rPr>
                         <a:t>Workforce</a:t>
                       </a:r>
-                      <a:endParaRPr lang="en-US" sz="1080" dirty="0">
+                      <a:endParaRPr lang="en-US" sz="1800" dirty="0">
                         <a:latin typeface="Segoe UI" charset="0"/>
                         <a:ea typeface="Segoe UI" charset="0"/>
                         <a:cs typeface="Segoe UI" charset="0"/>
                       </a:endParaRPr>
                     </a:p>
                   </a:txBody>
-                  <a:tcPr marL="64008" marR="64008" marT="64008" marB="64008" anchor="ctr">
+                  <a:tcPr marL="36576" marR="36576" marT="36576" marB="36576" anchor="ctr">
                     <a:lnL w="6350" cap="flat" cmpd="sng" algn="ctr">
                       <a:solidFill>
                         <a:srgbClr val="24365A"/>
@@ -8476,7 +8478,7 @@
                         <a:buNone/>
                       </a:pPr>
                       <a:r>
-                        <a:rPr lang="en-US" sz="1080" dirty="0">
+                        <a:rPr lang="en-US" sz="1800" dirty="0">
                           <a:solidFill>
                             <a:srgbClr val="CBD5E1"/>
                           </a:solidFill>
@@ -8486,14 +8488,14 @@
                         </a:rPr>
                         <a:t>9+ specialist agents</a:t>
                       </a:r>
-                      <a:endParaRPr lang="en-US" sz="1080" dirty="0">
+                      <a:endParaRPr lang="en-US" sz="1800" dirty="0">
                         <a:latin typeface="Segoe UI" charset="0"/>
                         <a:ea typeface="Segoe UI" charset="0"/>
                         <a:cs typeface="Segoe UI" charset="0"/>
                       </a:endParaRPr>
                     </a:p>
                   </a:txBody>
-                  <a:tcPr marL="64008" marR="64008" marT="64008" marB="64008" anchor="ctr">
+                  <a:tcPr marL="36576" marR="36576" marT="36576" marB="36576" anchor="ctr">
                     <a:lnL w="6350" cap="flat" cmpd="sng" algn="ctr">
                       <a:solidFill>
                         <a:srgbClr val="24365A"/>
@@ -8544,7 +8546,7 @@
                         <a:buNone/>
                       </a:pPr>
                       <a:r>
-                        <a:rPr lang="en-US" sz="1080" dirty="0">
+                        <a:rPr lang="en-US" sz="1800" dirty="0">
                           <a:solidFill>
                             <a:srgbClr val="CBD5E1"/>
                           </a:solidFill>
@@ -8554,14 +8556,14 @@
                         </a:rPr>
                         <a:t>Engineering, QA, PM, docs, secretary, data, GIS, OSINT, watchdog</a:t>
                       </a:r>
-                      <a:endParaRPr lang="en-US" sz="1080" dirty="0">
+                      <a:endParaRPr lang="en-US" sz="1800" dirty="0">
                         <a:latin typeface="Segoe UI" charset="0"/>
                         <a:ea typeface="Segoe UI" charset="0"/>
                         <a:cs typeface="Segoe UI" charset="0"/>
                       </a:endParaRPr>
                     </a:p>
                   </a:txBody>
-                  <a:tcPr marL="64008" marR="64008" marT="64008" marB="64008" anchor="ctr">
+                  <a:tcPr marL="36576" marR="36576" marT="36576" marB="36576" anchor="ctr">
                     <a:lnL w="6350" cap="flat" cmpd="sng" algn="ctr">
                       <a:solidFill>
                         <a:srgbClr val="24365A"/>
@@ -8604,7 +8606,7 @@
                   </a:tcPr>
                 </a:tc>
               </a:tr>
-              <a:tr h="402336">
+              <a:tr h="457200">
                 <a:tc>
                   <a:txBody>
                     <a:bodyPr/>
@@ -8614,7 +8616,7 @@
                         <a:buNone/>
                       </a:pPr>
                       <a:r>
-                        <a:rPr lang="en-US" sz="1080" dirty="0">
+                        <a:rPr lang="en-US" sz="1800" dirty="0">
                           <a:solidFill>
                             <a:srgbClr val="CBD5E1"/>
                           </a:solidFill>
@@ -8624,14 +8626,14 @@
                         </a:rPr>
                         <a:t>Product pipeline</a:t>
                       </a:r>
-                      <a:endParaRPr lang="en-US" sz="1080" dirty="0">
+                      <a:endParaRPr lang="en-US" sz="1800" dirty="0">
                         <a:latin typeface="Segoe UI" charset="0"/>
                         <a:ea typeface="Segoe UI" charset="0"/>
                         <a:cs typeface="Segoe UI" charset="0"/>
                       </a:endParaRPr>
                     </a:p>
                   </a:txBody>
-                  <a:tcPr marL="64008" marR="64008" marT="64008" marB="64008" anchor="ctr">
+                  <a:tcPr marL="36576" marR="36576" marT="36576" marB="36576" anchor="ctr">
                     <a:lnL w="6350" cap="flat" cmpd="sng" algn="ctr">
                       <a:solidFill>
                         <a:srgbClr val="24365A"/>
@@ -8682,7 +8684,7 @@
                         <a:buNone/>
                       </a:pPr>
                       <a:r>
-                        <a:rPr lang="en-US" sz="1080" dirty="0">
+                        <a:rPr lang="en-US" sz="1800" dirty="0">
                           <a:solidFill>
                             <a:srgbClr val="CBD5E1"/>
                           </a:solidFill>
@@ -8692,14 +8694,14 @@
                         </a:rPr>
                         <a:t>Gated release line</a:t>
                       </a:r>
-                      <a:endParaRPr lang="en-US" sz="1080" dirty="0">
+                      <a:endParaRPr lang="en-US" sz="1800" dirty="0">
                         <a:latin typeface="Segoe UI" charset="0"/>
                         <a:ea typeface="Segoe UI" charset="0"/>
                         <a:cs typeface="Segoe UI" charset="0"/>
                       </a:endParaRPr>
                     </a:p>
                   </a:txBody>
-                  <a:tcPr marL="64008" marR="64008" marT="64008" marB="64008" anchor="ctr">
+                  <a:tcPr marL="36576" marR="36576" marT="36576" marB="36576" anchor="ctr">
                     <a:lnL w="6350" cap="flat" cmpd="sng" algn="ctr">
                       <a:solidFill>
                         <a:srgbClr val="24365A"/>
@@ -8750,7 +8752,7 @@
                         <a:buNone/>
                       </a:pPr>
                       <a:r>
-                        <a:rPr lang="en-US" sz="1080" dirty="0">
+                        <a:rPr lang="en-US" sz="1800" dirty="0">
                           <a:solidFill>
                             <a:srgbClr val="CBD5E1"/>
                           </a:solidFill>
@@ -8760,14 +8762,14 @@
                         </a:rPr>
                         <a:t>Structured specs, versioned builds, one promote folder, per-app status</a:t>
                       </a:r>
-                      <a:endParaRPr lang="en-US" sz="1080" dirty="0">
+                      <a:endParaRPr lang="en-US" sz="1800" dirty="0">
                         <a:latin typeface="Segoe UI" charset="0"/>
                         <a:ea typeface="Segoe UI" charset="0"/>
                         <a:cs typeface="Segoe UI" charset="0"/>
                       </a:endParaRPr>
                     </a:p>
                   </a:txBody>
-                  <a:tcPr marL="64008" marR="64008" marT="64008" marB="64008" anchor="ctr">
+                  <a:tcPr marL="36576" marR="36576" marT="36576" marB="36576" anchor="ctr">
                     <a:lnL w="6350" cap="flat" cmpd="sng" algn="ctr">
                       <a:solidFill>
                         <a:srgbClr val="24365A"/>
@@ -8810,7 +8812,7 @@
                   </a:tcPr>
                 </a:tc>
               </a:tr>
-              <a:tr h="402336">
+              <a:tr h="457200">
                 <a:tc>
                   <a:txBody>
                     <a:bodyPr/>
@@ -8820,7 +8822,7 @@
                         <a:buNone/>
                       </a:pPr>
                       <a:r>
-                        <a:rPr lang="en-US" sz="1080" dirty="0">
+                        <a:rPr lang="en-US" sz="1800" dirty="0">
                           <a:solidFill>
                             <a:srgbClr val="CBD5E1"/>
                           </a:solidFill>
@@ -8830,14 +8832,14 @@
                         </a:rPr>
                         <a:t>Open-source base</a:t>
                       </a:r>
-                      <a:endParaRPr lang="en-US" sz="1080" dirty="0">
+                      <a:endParaRPr lang="en-US" sz="1800" dirty="0">
                         <a:latin typeface="Segoe UI" charset="0"/>
                         <a:ea typeface="Segoe UI" charset="0"/>
                         <a:cs typeface="Segoe UI" charset="0"/>
                       </a:endParaRPr>
                     </a:p>
                   </a:txBody>
-                  <a:tcPr marL="64008" marR="64008" marT="64008" marB="64008" anchor="ctr">
+                  <a:tcPr marL="36576" marR="36576" marT="36576" marB="36576" anchor="ctr">
                     <a:lnL w="6350" cap="flat" cmpd="sng" algn="ctr">
                       <a:solidFill>
                         <a:srgbClr val="24365A"/>
@@ -8888,7 +8890,7 @@
                         <a:buNone/>
                       </a:pPr>
                       <a:r>
-                        <a:rPr lang="en-US" sz="1080" dirty="0">
+                        <a:rPr lang="en-US" sz="1800" dirty="0">
                           <a:solidFill>
                             <a:srgbClr val="CBD5E1"/>
                           </a:solidFill>
@@ -8898,14 +8900,14 @@
                         </a:rPr>
                         <a:t>ODIS + Web Scraping Toolkit</a:t>
                       </a:r>
-                      <a:endParaRPr lang="en-US" sz="1080" dirty="0">
+                      <a:endParaRPr lang="en-US" sz="1800" dirty="0">
                         <a:latin typeface="Segoe UI" charset="0"/>
                         <a:ea typeface="Segoe UI" charset="0"/>
                         <a:cs typeface="Segoe UI" charset="0"/>
                       </a:endParaRPr>
                     </a:p>
                   </a:txBody>
-                  <a:tcPr marL="64008" marR="64008" marT="64008" marB="64008" anchor="ctr">
+                  <a:tcPr marL="36576" marR="36576" marT="36576" marB="36576" anchor="ctr">
                     <a:lnL w="6350" cap="flat" cmpd="sng" algn="ctr">
                       <a:solidFill>
                         <a:srgbClr val="24365A"/>
@@ -8956,7 +8958,7 @@
                         <a:buNone/>
                       </a:pPr>
                       <a:r>
-                        <a:rPr lang="en-US" sz="1080" dirty="0">
+                        <a:rPr lang="en-US" sz="1800" dirty="0">
                           <a:solidFill>
                             <a:srgbClr val="CBD5E1"/>
                           </a:solidFill>
@@ -8966,14 +8968,14 @@
                         </a:rPr>
                         <a:t>8.7K+ lines of data and collection infrastructure</a:t>
                       </a:r>
-                      <a:endParaRPr lang="en-US" sz="1080" dirty="0">
+                      <a:endParaRPr lang="en-US" sz="1800" dirty="0">
                         <a:latin typeface="Segoe UI" charset="0"/>
                         <a:ea typeface="Segoe UI" charset="0"/>
                         <a:cs typeface="Segoe UI" charset="0"/>
                       </a:endParaRPr>
                     </a:p>
                   </a:txBody>
-                  <a:tcPr marL="64008" marR="64008" marT="64008" marB="64008" anchor="ctr">
+                  <a:tcPr marL="36576" marR="36576" marT="36576" marB="36576" anchor="ctr">
                     <a:lnL w="6350" cap="flat" cmpd="sng" algn="ctr">
                       <a:solidFill>
                         <a:srgbClr val="24365A"/>
@@ -9016,7 +9018,7 @@
                   </a:tcPr>
                 </a:tc>
               </a:tr>
-              <a:tr h="402336">
+              <a:tr h="457200">
                 <a:tc>
                   <a:txBody>
                     <a:bodyPr/>
@@ -9026,7 +9028,7 @@
                         <a:buNone/>
                       </a:pPr>
                       <a:r>
-                        <a:rPr lang="en-US" sz="1080" dirty="0">
+                        <a:rPr lang="en-US" sz="1800" dirty="0">
                           <a:solidFill>
                             <a:srgbClr val="CBD5E1"/>
                           </a:solidFill>
@@ -9036,14 +9038,14 @@
                         </a:rPr>
                         <a:t>Operating rules</a:t>
                       </a:r>
-                      <a:endParaRPr lang="en-US" sz="1080" dirty="0">
+                      <a:endParaRPr lang="en-US" sz="1800" dirty="0">
                         <a:latin typeface="Segoe UI" charset="0"/>
                         <a:ea typeface="Segoe UI" charset="0"/>
                         <a:cs typeface="Segoe UI" charset="0"/>
                       </a:endParaRPr>
                     </a:p>
                   </a:txBody>
-                  <a:tcPr marL="64008" marR="64008" marT="64008" marB="64008" anchor="ctr">
+                  <a:tcPr marL="36576" marR="36576" marT="36576" marB="36576" anchor="ctr">
                     <a:lnL w="6350" cap="flat" cmpd="sng" algn="ctr">
                       <a:solidFill>
                         <a:srgbClr val="24365A"/>
@@ -9094,7 +9096,7 @@
                         <a:buNone/>
                       </a:pPr>
                       <a:r>
-                        <a:rPr lang="en-US" sz="1080" dirty="0">
+                        <a:rPr lang="en-US" sz="1800" dirty="0">
                           <a:solidFill>
                             <a:srgbClr val="CBD5E1"/>
                           </a:solidFill>
@@ -9104,14 +9106,14 @@
                         </a:rPr>
                         <a:t>Boring non-negotiables</a:t>
                       </a:r>
-                      <a:endParaRPr lang="en-US" sz="1080" dirty="0">
+                      <a:endParaRPr lang="en-US" sz="1800" dirty="0">
                         <a:latin typeface="Segoe UI" charset="0"/>
                         <a:ea typeface="Segoe UI" charset="0"/>
                         <a:cs typeface="Segoe UI" charset="0"/>
                       </a:endParaRPr>
                     </a:p>
                   </a:txBody>
-                  <a:tcPr marL="64008" marR="64008" marT="64008" marB="64008" anchor="ctr">
+                  <a:tcPr marL="36576" marR="36576" marT="36576" marB="36576" anchor="ctr">
                     <a:lnL w="6350" cap="flat" cmpd="sng" algn="ctr">
                       <a:solidFill>
                         <a:srgbClr val="24365A"/>
@@ -9162,7 +9164,7 @@
                         <a:buNone/>
                       </a:pPr>
                       <a:r>
-                        <a:rPr lang="en-US" sz="1080" dirty="0">
+                        <a:rPr lang="en-US" sz="1800" dirty="0">
                           <a:solidFill>
                             <a:srgbClr val="CBD5E1"/>
                           </a:solidFill>
@@ -9172,14 +9174,14 @@
                         </a:rPr>
                         <a:t>Evidence over claims, backups before updates, one place for everything</a:t>
                       </a:r>
-                      <a:endParaRPr lang="en-US" sz="1080" dirty="0">
+                      <a:endParaRPr lang="en-US" sz="1800" dirty="0">
                         <a:latin typeface="Segoe UI" charset="0"/>
                         <a:ea typeface="Segoe UI" charset="0"/>
                         <a:cs typeface="Segoe UI" charset="0"/>
                       </a:endParaRPr>
                     </a:p>
                   </a:txBody>
-                  <a:tcPr marL="64008" marR="64008" marT="64008" marB="64008" anchor="ctr">
+                  <a:tcPr marL="36576" marR="36576" marT="36576" marB="36576" anchor="ctr">
                     <a:lnL w="6350" cap="flat" cmpd="sng" algn="ctr">
                       <a:solidFill>
                         <a:srgbClr val="24365A"/>
@@ -9257,8 +9259,8 @@
         </p:nvSpPr>
         <p:spPr>
           <a:xfrm>
-            <a:off x="822960" y="6053328"/>
-            <a:ext cx="9692640" cy="457200"/>
+            <a:off x="822960" y="6035040"/>
+            <a:ext cx="10424160" cy="566928"/>
           </a:xfrm>
           <a:prstGeom prst="rect">
             <a:avLst/>
@@ -9274,9 +9276,9 @@
               <a:buNone/>
             </a:pPr>
             <a:r>
-              <a:rPr lang="en-US" sz="1150" dirty="0">
-                <a:solidFill>
-                  <a:srgbClr val="64748B"/>
+              <a:rPr lang="en-US" sz="1800" dirty="0">
+                <a:solidFill>
+                  <a:srgbClr val="8FA3BF"/>
                 </a:solidFill>
                 <a:latin typeface="Segoe UI" pitchFamily="34" charset="0"/>
                 <a:ea typeface="Segoe UI" pitchFamily="34" charset="-122"/>
@@ -9284,7 +9286,7 @@
               </a:rPr>
               <a:t>None of this is glamorous; all of it is why the layers above stay standing.</a:t>
             </a:r>
-            <a:endParaRPr lang="en-US" sz="1150" dirty="0"/>
+            <a:endParaRPr lang="en-US" sz="1800" dirty="0"/>
           </a:p>
         </p:txBody>
       </p:sp>
@@ -9296,8 +9298,8 @@
         </p:nvSpPr>
         <p:spPr>
           <a:xfrm>
-            <a:off x="10698480" y="6382512"/>
-            <a:ext cx="1188720" cy="365760"/>
+            <a:off x="10698480" y="6309360"/>
+            <a:ext cx="1188720" cy="411480"/>
           </a:xfrm>
           <a:prstGeom prst="rect">
             <a:avLst/>
@@ -9313,9 +9315,9 @@
               <a:buNone/>
             </a:pPr>
             <a:r>
-              <a:rPr lang="en-US" sz="1000" dirty="0">
-                <a:solidFill>
-                  <a:srgbClr val="64748B"/>
+              <a:rPr lang="en-US" sz="1800" dirty="0">
+                <a:solidFill>
+                  <a:srgbClr val="8FA3BF"/>
                 </a:solidFill>
                 <a:latin typeface="Consolas" pitchFamily="34" charset="0"/>
                 <a:ea typeface="Consolas" pitchFamily="34" charset="-122"/>
@@ -9323,7 +9325,7 @@
               </a:rPr>
               <a:t>6 / 13</a:t>
             </a:r>
-            <a:endParaRPr lang="en-US" sz="1000" dirty="0"/>
+            <a:endParaRPr lang="en-US" sz="1800" dirty="0"/>
           </a:p>
         </p:txBody>
       </p:sp>
@@ -9407,8 +9409,8 @@
         </p:nvSpPr>
         <p:spPr>
           <a:xfrm>
-            <a:off x="822960" y="502920"/>
-            <a:ext cx="10515600" cy="365760"/>
+            <a:off x="822960" y="457200"/>
+            <a:ext cx="10515600" cy="411480"/>
           </a:xfrm>
           <a:prstGeom prst="rect">
             <a:avLst/>
@@ -9424,7 +9426,7 @@
               <a:buNone/>
             </a:pPr>
             <a:r>
-              <a:rPr lang="en-US" sz="1200" spc="300" kern="0" dirty="0">
+              <a:rPr lang="en-US" sz="1800" spc="300" kern="0" dirty="0">
                 <a:solidFill>
                   <a:srgbClr val="06B6D4"/>
                 </a:solidFill>
@@ -9434,7 +9436,7 @@
               </a:rPr>
               <a:t>THE SUITE</a:t>
             </a:r>
-            <a:endParaRPr lang="en-US" sz="1200" dirty="0"/>
+            <a:endParaRPr lang="en-US" sz="1800" dirty="0"/>
           </a:p>
         </p:txBody>
       </p:sp>
@@ -9485,7 +9487,7 @@
         </p:nvGraphicFramePr>
         <p:xfrm>
           <a:off x="822960" y="1874520"/>
-          <a:ext cx="10515600" cy="3337560"/>
+          <a:ext cx="10515600" cy="3246120"/>
         </p:xfrm>
         <a:graphic xmlns:a="http://schemas.openxmlformats.org/drawingml/2006/main">
           <a:graphicData uri="http://schemas.openxmlformats.org/drawingml/2006/chart">
@@ -9501,7 +9503,7 @@
         </p:nvSpPr>
         <p:spPr>
           <a:xfrm>
-            <a:off x="822960" y="5413248"/>
+            <a:off x="822960" y="5321808"/>
             <a:ext cx="10515600" cy="0"/>
           </a:xfrm>
           <a:prstGeom prst="line">
@@ -9524,8 +9526,8 @@
         </p:nvSpPr>
         <p:spPr>
           <a:xfrm>
-            <a:off x="822960" y="5504688"/>
-            <a:ext cx="10424160" cy="411480"/>
+            <a:off x="822960" y="5394960"/>
+            <a:ext cx="10424160" cy="502920"/>
           </a:xfrm>
           <a:prstGeom prst="rect">
             <a:avLst/>
@@ -9541,7 +9543,7 @@
               <a:buNone/>
             </a:pPr>
             <a:r>
-              <a:rPr lang="en-US" sz="1300" i="1" dirty="0">
+              <a:rPr lang="en-US" sz="1800" i="1" dirty="0">
                 <a:solidFill>
                   <a:srgbClr val="06B6D4"/>
                 </a:solidFill>
@@ -9551,7 +9553,7 @@
               </a:rPr>
               <a:t>→  A portfolio this size survives only because maintenance is a pipeline, not a heroic effort.</a:t>
             </a:r>
-            <a:endParaRPr lang="en-US" sz="1300" dirty="0"/>
+            <a:endParaRPr lang="en-US" sz="1800" dirty="0"/>
           </a:p>
         </p:txBody>
       </p:sp>
@@ -9586,8 +9588,8 @@
         </p:nvSpPr>
         <p:spPr>
           <a:xfrm>
-            <a:off x="822960" y="6053328"/>
-            <a:ext cx="9692640" cy="457200"/>
+            <a:off x="822960" y="6035040"/>
+            <a:ext cx="10424160" cy="566928"/>
           </a:xfrm>
           <a:prstGeom prst="rect">
             <a:avLst/>
@@ -9603,9 +9605,9 @@
               <a:buNone/>
             </a:pPr>
             <a:r>
-              <a:rPr lang="en-US" sz="1150" dirty="0">
-                <a:solidFill>
-                  <a:srgbClr val="64748B"/>
+              <a:rPr lang="en-US" sz="1800" dirty="0">
+                <a:solidFill>
+                  <a:srgbClr val="8FA3BF"/>
                 </a:solidFill>
                 <a:latin typeface="Segoe UI" pitchFamily="34" charset="0"/>
                 <a:ea typeface="Segoe UI" pitchFamily="34" charset="-122"/>
@@ -9613,7 +9615,7 @@
               </a:rPr>
               <a:t>Category counts, illustrative - every app live, versioned, and supported.</a:t>
             </a:r>
-            <a:endParaRPr lang="en-US" sz="1150" dirty="0"/>
+            <a:endParaRPr lang="en-US" sz="1800" dirty="0"/>
           </a:p>
         </p:txBody>
       </p:sp>
@@ -9625,8 +9627,8 @@
         </p:nvSpPr>
         <p:spPr>
           <a:xfrm>
-            <a:off x="10698480" y="6382512"/>
-            <a:ext cx="1188720" cy="365760"/>
+            <a:off x="10698480" y="6309360"/>
+            <a:ext cx="1188720" cy="411480"/>
           </a:xfrm>
           <a:prstGeom prst="rect">
             <a:avLst/>
@@ -9642,9 +9644,9 @@
               <a:buNone/>
             </a:pPr>
             <a:r>
-              <a:rPr lang="en-US" sz="1000" dirty="0">
-                <a:solidFill>
-                  <a:srgbClr val="64748B"/>
+              <a:rPr lang="en-US" sz="1800" dirty="0">
+                <a:solidFill>
+                  <a:srgbClr val="8FA3BF"/>
                 </a:solidFill>
                 <a:latin typeface="Consolas" pitchFamily="34" charset="0"/>
                 <a:ea typeface="Consolas" pitchFamily="34" charset="-122"/>
@@ -9652,7 +9654,7 @@
               </a:rPr>
               <a:t>7 / 13</a:t>
             </a:r>
-            <a:endParaRPr lang="en-US" sz="1000" dirty="0"/>
+            <a:endParaRPr lang="en-US" sz="1800" dirty="0"/>
           </a:p>
         </p:txBody>
       </p:sp>
@@ -9736,8 +9738,8 @@
         </p:nvSpPr>
         <p:spPr>
           <a:xfrm>
-            <a:off x="822960" y="502920"/>
-            <a:ext cx="10515600" cy="365760"/>
+            <a:off x="822960" y="457200"/>
+            <a:ext cx="10515600" cy="411480"/>
           </a:xfrm>
           <a:prstGeom prst="rect">
             <a:avLst/>
@@ -9753,7 +9755,7 @@
               <a:buNone/>
             </a:pPr>
             <a:r>
-              <a:rPr lang="en-US" sz="1200" spc="300" kern="0" dirty="0">
+              <a:rPr lang="en-US" sz="1800" spc="300" kern="0" dirty="0">
                 <a:solidFill>
                   <a:srgbClr val="06B6D4"/>
                 </a:solidFill>
@@ -9763,7 +9765,7 @@
               </a:rPr>
               <a:t>TRAJECTORY</a:t>
             </a:r>
-            <a:endParaRPr lang="en-US" sz="1200" dirty="0"/>
+            <a:endParaRPr lang="en-US" sz="1800" dirty="0"/>
           </a:p>
         </p:txBody>
       </p:sp>
@@ -9814,7 +9816,7 @@
         </p:nvGraphicFramePr>
         <p:xfrm>
           <a:off x="822960" y="1874520"/>
-          <a:ext cx="10515600" cy="3337560"/>
+          <a:ext cx="10515600" cy="3246120"/>
         </p:xfrm>
         <a:graphic xmlns:a="http://schemas.openxmlformats.org/drawingml/2006/main">
           <a:graphicData uri="http://schemas.openxmlformats.org/drawingml/2006/chart">
@@ -9830,7 +9832,7 @@
         </p:nvSpPr>
         <p:spPr>
           <a:xfrm>
-            <a:off x="822960" y="5413248"/>
+            <a:off x="822960" y="5321808"/>
             <a:ext cx="10515600" cy="0"/>
           </a:xfrm>
           <a:prstGeom prst="line">
@@ -9853,8 +9855,8 @@
         </p:nvSpPr>
         <p:spPr>
           <a:xfrm>
-            <a:off x="822960" y="5504688"/>
-            <a:ext cx="10424160" cy="411480"/>
+            <a:off x="822960" y="5394960"/>
+            <a:ext cx="10424160" cy="502920"/>
           </a:xfrm>
           <a:prstGeom prst="rect">
             <a:avLst/>
@@ -9870,7 +9872,7 @@
               <a:buNone/>
             </a:pPr>
             <a:r>
-              <a:rPr lang="en-US" sz="1300" i="1" dirty="0">
+              <a:rPr lang="en-US" sz="1800" i="1" dirty="0">
                 <a:solidFill>
                   <a:srgbClr val="06B6D4"/>
                 </a:solidFill>
@@ -9880,7 +9882,7 @@
               </a:rPr>
               <a:t>→  Growth came from parallel agent work under gates, not from longer hours.</a:t>
             </a:r>
-            <a:endParaRPr lang="en-US" sz="1300" dirty="0"/>
+            <a:endParaRPr lang="en-US" sz="1800" dirty="0"/>
           </a:p>
         </p:txBody>
       </p:sp>
@@ -9915,8 +9917,8 @@
         </p:nvSpPr>
         <p:spPr>
           <a:xfrm>
-            <a:off x="822960" y="6053328"/>
-            <a:ext cx="9692640" cy="457200"/>
+            <a:off x="822960" y="6035040"/>
+            <a:ext cx="10424160" cy="566928"/>
           </a:xfrm>
           <a:prstGeom prst="rect">
             <a:avLst/>
@@ -9932,9 +9934,9 @@
               <a:buNone/>
             </a:pPr>
             <a:r>
-              <a:rPr lang="en-US" sz="1150" dirty="0">
-                <a:solidFill>
-                  <a:srgbClr val="64748B"/>
+              <a:rPr lang="en-US" sz="1800" dirty="0">
+                <a:solidFill>
+                  <a:srgbClr val="8FA3BF"/>
                 </a:solidFill>
                 <a:latin typeface="Segoe UI" pitchFamily="34" charset="0"/>
                 <a:ea typeface="Segoe UI" pitchFamily="34" charset="-122"/>
@@ -9942,7 +9944,7 @@
               </a:rPr>
               <a:t>Cumulative count since founding, April 2024 to September 2026.</a:t>
             </a:r>
-            <a:endParaRPr lang="en-US" sz="1150" dirty="0"/>
+            <a:endParaRPr lang="en-US" sz="1800" dirty="0"/>
           </a:p>
         </p:txBody>
       </p:sp>
@@ -9954,8 +9956,8 @@
         </p:nvSpPr>
         <p:spPr>
           <a:xfrm>
-            <a:off x="10698480" y="6382512"/>
-            <a:ext cx="1188720" cy="365760"/>
+            <a:off x="10698480" y="6309360"/>
+            <a:ext cx="1188720" cy="411480"/>
           </a:xfrm>
           <a:prstGeom prst="rect">
             <a:avLst/>
@@ -9971,9 +9973,9 @@
               <a:buNone/>
             </a:pPr>
             <a:r>
-              <a:rPr lang="en-US" sz="1000" dirty="0">
-                <a:solidFill>
-                  <a:srgbClr val="64748B"/>
+              <a:rPr lang="en-US" sz="1800" dirty="0">
+                <a:solidFill>
+                  <a:srgbClr val="8FA3BF"/>
                 </a:solidFill>
                 <a:latin typeface="Consolas" pitchFamily="34" charset="0"/>
                 <a:ea typeface="Consolas" pitchFamily="34" charset="-122"/>
@@ -9981,7 +9983,7 @@
               </a:rPr>
               <a:t>8 / 13</a:t>
             </a:r>
-            <a:endParaRPr lang="en-US" sz="1000" dirty="0"/>
+            <a:endParaRPr lang="en-US" sz="1800" dirty="0"/>
           </a:p>
         </p:txBody>
       </p:sp>
@@ -10065,8 +10067,8 @@
         </p:nvSpPr>
         <p:spPr>
           <a:xfrm>
-            <a:off x="822960" y="502920"/>
-            <a:ext cx="10515600" cy="365760"/>
+            <a:off x="822960" y="457200"/>
+            <a:ext cx="10515600" cy="411480"/>
           </a:xfrm>
           <a:prstGeom prst="rect">
             <a:avLst/>
@@ -10082,7 +10084,7 @@
               <a:buNone/>
             </a:pPr>
             <a:r>
-              <a:rPr lang="en-US" sz="1200" spc="300" kern="0" dirty="0">
+              <a:rPr lang="en-US" sz="1800" spc="300" kern="0" dirty="0">
                 <a:solidFill>
                   <a:srgbClr val="06B6D4"/>
                 </a:solidFill>
@@ -10092,7 +10094,7 @@
               </a:rPr>
               <a:t>WHERE EFFORT GOES</a:t>
             </a:r>
-            <a:endParaRPr lang="en-US" sz="1200" dirty="0"/>
+            <a:endParaRPr lang="en-US" sz="1800" dirty="0"/>
           </a:p>
         </p:txBody>
       </p:sp>
@@ -10142,8 +10144,8 @@
           <p:nvPr/>
         </p:nvGraphicFramePr>
         <p:xfrm>
-          <a:off x="822960" y="1874520"/>
-          <a:ext cx="10515600" cy="3337560"/>
+          <a:off x="822960" y="1783080"/>
+          <a:ext cx="10515600" cy="3383280"/>
         </p:xfrm>
         <a:graphic xmlns:a="http://schemas.openxmlformats.org/drawingml/2006/main">
           <a:graphicData uri="http://schemas.openxmlformats.org/drawingml/2006/chart">
@@ -10159,7 +10161,7 @@
         </p:nvSpPr>
         <p:spPr>
           <a:xfrm>
-            <a:off x="822960" y="5413248"/>
+            <a:off x="822960" y="5321808"/>
             <a:ext cx="10515600" cy="0"/>
           </a:xfrm>
           <a:prstGeom prst="line">
@@ -10182,8 +10184,8 @@
         </p:nvSpPr>
         <p:spPr>
           <a:xfrm>
-            <a:off x="822960" y="5504688"/>
-            <a:ext cx="10424160" cy="411480"/>
+            <a:off x="822960" y="5394960"/>
+            <a:ext cx="10424160" cy="502920"/>
           </a:xfrm>
           <a:prstGeom prst="rect">
             <a:avLst/>
@@ -10199,7 +10201,7 @@
               <a:buNone/>
             </a:pPr>
             <a:r>
-              <a:rPr lang="en-US" sz="1300" i="1" dirty="0">
+              <a:rPr lang="en-US" sz="1800" i="1" dirty="0">
                 <a:solidFill>
                   <a:srgbClr val="06B6D4"/>
                 </a:solidFill>
@@ -10209,7 +10211,7 @@
               </a:rPr>
               <a:t>→  Speed without gates is debt at machine pace, so the gates get real time.</a:t>
             </a:r>
-            <a:endParaRPr lang="en-US" sz="1300" dirty="0"/>
+            <a:endParaRPr lang="en-US" sz="1800" dirty="0"/>
           </a:p>
         </p:txBody>
       </p:sp>
@@ -10244,8 +10246,8 @@
         </p:nvSpPr>
         <p:spPr>
           <a:xfrm>
-            <a:off x="822960" y="6053328"/>
-            <a:ext cx="9692640" cy="457200"/>
+            <a:off x="822960" y="6035040"/>
+            <a:ext cx="10424160" cy="566928"/>
           </a:xfrm>
           <a:prstGeom prst="rect">
             <a:avLst/>
@@ -10261,9 +10263,9 @@
               <a:buNone/>
             </a:pPr>
             <a:r>
-              <a:rPr lang="en-US" sz="1150" dirty="0">
-                <a:solidFill>
-                  <a:srgbClr val="64748B"/>
+              <a:rPr lang="en-US" sz="1800" dirty="0">
+                <a:solidFill>
+                  <a:srgbClr val="8FA3BF"/>
                 </a:solidFill>
                 <a:latin typeface="Segoe UI" pitchFamily="34" charset="0"/>
                 <a:ea typeface="Segoe UI" pitchFamily="34" charset="-122"/>
@@ -10271,7 +10273,7 @@
               </a:rPr>
               <a:t>Illustrative effort split per release cycle across the suite.</a:t>
             </a:r>
-            <a:endParaRPr lang="en-US" sz="1150" dirty="0"/>
+            <a:endParaRPr lang="en-US" sz="1800" dirty="0"/>
           </a:p>
         </p:txBody>
       </p:sp>
@@ -10283,8 +10285,8 @@
         </p:nvSpPr>
         <p:spPr>
           <a:xfrm>
-            <a:off x="10698480" y="6382512"/>
-            <a:ext cx="1188720" cy="365760"/>
+            <a:off x="10698480" y="6309360"/>
+            <a:ext cx="1188720" cy="411480"/>
           </a:xfrm>
           <a:prstGeom prst="rect">
             <a:avLst/>
@@ -10300,9 +10302,9 @@
               <a:buNone/>
             </a:pPr>
             <a:r>
-              <a:rPr lang="en-US" sz="1000" dirty="0">
-                <a:solidFill>
-                  <a:srgbClr val="64748B"/>
+              <a:rPr lang="en-US" sz="1800" dirty="0">
+                <a:solidFill>
+                  <a:srgbClr val="8FA3BF"/>
                 </a:solidFill>
                 <a:latin typeface="Consolas" pitchFamily="34" charset="0"/>
                 <a:ea typeface="Consolas" pitchFamily="34" charset="-122"/>
@@ -10310,7 +10312,7 @@
               </a:rPr>
               <a:t>9 / 13</a:t>
             </a:r>
-            <a:endParaRPr lang="en-US" sz="1000" dirty="0"/>
+            <a:endParaRPr lang="en-US" sz="1800" dirty="0"/>
           </a:p>
         </p:txBody>
       </p:sp>

--- a/decks/zalin-labs-platform.pptx
+++ b/decks/zalin-labs-platform.pptx
@@ -802,7 +802,7 @@
             <c:bubble3D val="0"/>
             <c:spPr>
               <a:solidFill>
-                <a:srgbClr val="22D3A0"/>
+                <a:srgbClr val="F59E0B"/>
               </a:solidFill>
               <a:effectLst/>
             </c:spPr>
@@ -1539,7 +1539,7 @@
           <a:p>
             <a:r>
               <a:rPr lang="en-US" dirty="0"/>
-              <a:t>Key message: Hero mode vs protocol mode | Talk track: The agents are the workforce; the protocols are the company. | Transition: next up - "Protocol-driven, human-approved".</a:t>
+              <a:t>Key message: Hero mode vs protocol mode | Talk track: The agents are the workforce; the protocols are the company. | Transition: next up - "Operations run on protocols, approved by humans".</a:t>
             </a:r>
             <a:endParaRPr lang="en-US" dirty="0"/>
           </a:p>
@@ -1627,7 +1627,7 @@
           <a:p>
             <a:r>
               <a:rPr lang="en-US" dirty="0"/>
-              <a:t>Key message: Protocol-driven, human-approved | Talk track: Impersonation is structurally impossible when identity and verdicts are visible. | Transition: next up - "What it actually looks like to run this".</a:t>
+              <a:t>Key message: Operations run on protocols, approved by humans | Talk track: Impersonation is structurally impossible when identity and verdicts are visible. | Transition: next up - "What it actually looks like to run this".</a:t>
             </a:r>
             <a:endParaRPr lang="en-US" dirty="0"/>
           </a:p>
@@ -3853,7 +3853,7 @@
                 <a:ea typeface="Segoe UI" pitchFamily="34" charset="-122"/>
                 <a:cs typeface="Segoe UI" pitchFamily="34" charset="-120"/>
               </a:rPr>
-              <a:t>Protocol-driven, human-approved</a:t>
+              <a:t>Operations run on protocols, approved by humans</a:t>
             </a:r>
             <a:endParaRPr lang="en-US" sz="2700" dirty="0"/>
           </a:p>
